--- a/docs/tcc/apresentacao-inventoryrfid-15min.pptx
+++ b/docs/tcc/apresentacao-inventoryrfid-15min.pptx
@@ -2,30 +2,30 @@
 <file path=ppt/presentation.xml><?xml version="1.0" encoding="utf-8"?>
 <p:presentation xmlns:p="http://schemas.openxmlformats.org/presentationml/2006/main">
   <p:sldMasterIdLst>
-    <p:sldMasterId xmlns:r="http://schemas.openxmlformats.org/officeDocument/2006/relationships" id="2147483648" r:id="R4a6fca85541a4200"/>
+    <p:sldMasterId xmlns:r="http://schemas.openxmlformats.org/officeDocument/2006/relationships" id="2147483648" r:id="R43545dfda9e64c2a"/>
   </p:sldMasterIdLst>
   <p:notesMasterIdLst>
-    <p:notesMasterId xmlns:r="http://schemas.openxmlformats.org/officeDocument/2006/relationships" r:id="Rf39da1d323d74157"/>
+    <p:notesMasterId xmlns:r="http://schemas.openxmlformats.org/officeDocument/2006/relationships" r:id="R39f9d7dd789f44f2"/>
   </p:notesMasterIdLst>
   <p:sldIdLst>
-    <p:sldId xmlns:r="http://schemas.openxmlformats.org/officeDocument/2006/relationships" id="256" r:id="R4eaf35ffd85e4a8b"/>
-    <p:sldId xmlns:r="http://schemas.openxmlformats.org/officeDocument/2006/relationships" id="257" r:id="R4179bdd8797c4df5"/>
-    <p:sldId xmlns:r="http://schemas.openxmlformats.org/officeDocument/2006/relationships" id="258" r:id="Rb809e4d2caa6443e"/>
-    <p:sldId xmlns:r="http://schemas.openxmlformats.org/officeDocument/2006/relationships" id="259" r:id="R66a8b5019ee74685"/>
-    <p:sldId xmlns:r="http://schemas.openxmlformats.org/officeDocument/2006/relationships" id="260" r:id="R19405955715b49e7"/>
-    <p:sldId xmlns:r="http://schemas.openxmlformats.org/officeDocument/2006/relationships" id="261" r:id="R5a5502e129334a82"/>
-    <p:sldId xmlns:r="http://schemas.openxmlformats.org/officeDocument/2006/relationships" id="262" r:id="Rd7b61ff5ee254f04"/>
-    <p:sldId xmlns:r="http://schemas.openxmlformats.org/officeDocument/2006/relationships" id="263" r:id="R44780b7540fc486d"/>
-    <p:sldId xmlns:r="http://schemas.openxmlformats.org/officeDocument/2006/relationships" id="264" r:id="R9a1879e2e2244f00"/>
-    <p:sldId xmlns:r="http://schemas.openxmlformats.org/officeDocument/2006/relationships" id="265" r:id="R43a3154d20694a74"/>
-    <p:sldId xmlns:r="http://schemas.openxmlformats.org/officeDocument/2006/relationships" id="266" r:id="Rc8afa6c0eaf0409e"/>
-    <p:sldId xmlns:r="http://schemas.openxmlformats.org/officeDocument/2006/relationships" id="267" r:id="R82c87f9a71054393"/>
-    <p:sldId xmlns:r="http://schemas.openxmlformats.org/officeDocument/2006/relationships" id="268" r:id="R4cff3c5fde7f4998"/>
-    <p:sldId xmlns:r="http://schemas.openxmlformats.org/officeDocument/2006/relationships" id="269" r:id="Rca48dba49a3e45d2"/>
-    <p:sldId xmlns:r="http://schemas.openxmlformats.org/officeDocument/2006/relationships" id="270" r:id="R3c9d222b3d214f00"/>
-    <p:sldId xmlns:r="http://schemas.openxmlformats.org/officeDocument/2006/relationships" id="271" r:id="R01a64c56ece54e12"/>
-    <p:sldId xmlns:r="http://schemas.openxmlformats.org/officeDocument/2006/relationships" id="272" r:id="Rd01a79c20c0b49af"/>
-    <p:sldId xmlns:r="http://schemas.openxmlformats.org/officeDocument/2006/relationships" id="273" r:id="R13b43d7764fe4ba3"/>
+    <p:sldId xmlns:r="http://schemas.openxmlformats.org/officeDocument/2006/relationships" id="256" r:id="R159669b962ea457b"/>
+    <p:sldId xmlns:r="http://schemas.openxmlformats.org/officeDocument/2006/relationships" id="257" r:id="Rd0095882a1f34030"/>
+    <p:sldId xmlns:r="http://schemas.openxmlformats.org/officeDocument/2006/relationships" id="258" r:id="R7b5a7a8e837d46d0"/>
+    <p:sldId xmlns:r="http://schemas.openxmlformats.org/officeDocument/2006/relationships" id="259" r:id="Rb48b9c078b454070"/>
+    <p:sldId xmlns:r="http://schemas.openxmlformats.org/officeDocument/2006/relationships" id="260" r:id="Ra5c575f2f1b54e6d"/>
+    <p:sldId xmlns:r="http://schemas.openxmlformats.org/officeDocument/2006/relationships" id="261" r:id="R9ebfba287f05484e"/>
+    <p:sldId xmlns:r="http://schemas.openxmlformats.org/officeDocument/2006/relationships" id="262" r:id="R28f305d4169441b8"/>
+    <p:sldId xmlns:r="http://schemas.openxmlformats.org/officeDocument/2006/relationships" id="263" r:id="R3f6d5af997f8466b"/>
+    <p:sldId xmlns:r="http://schemas.openxmlformats.org/officeDocument/2006/relationships" id="264" r:id="Rd62676320c3b4c27"/>
+    <p:sldId xmlns:r="http://schemas.openxmlformats.org/officeDocument/2006/relationships" id="265" r:id="R84054fc4683d40e4"/>
+    <p:sldId xmlns:r="http://schemas.openxmlformats.org/officeDocument/2006/relationships" id="266" r:id="Rcb994dd5c906471b"/>
+    <p:sldId xmlns:r="http://schemas.openxmlformats.org/officeDocument/2006/relationships" id="267" r:id="R0e29a88dd2044b80"/>
+    <p:sldId xmlns:r="http://schemas.openxmlformats.org/officeDocument/2006/relationships" id="268" r:id="R50024e125e004730"/>
+    <p:sldId xmlns:r="http://schemas.openxmlformats.org/officeDocument/2006/relationships" id="269" r:id="Rb0824ccb40824511"/>
+    <p:sldId xmlns:r="http://schemas.openxmlformats.org/officeDocument/2006/relationships" id="270" r:id="Rc44309d88a8c45e3"/>
+    <p:sldId xmlns:r="http://schemas.openxmlformats.org/officeDocument/2006/relationships" id="271" r:id="R6e90138918424774"/>
+    <p:sldId xmlns:r="http://schemas.openxmlformats.org/officeDocument/2006/relationships" id="272" r:id="R5d6fed1d0bdb448b"/>
+    <p:sldId xmlns:r="http://schemas.openxmlformats.org/officeDocument/2006/relationships" id="273" r:id="Rba2079b5334a4ba8"/>
   </p:sldIdLst>
   <p:sldSz cx="12192000" cy="6858000"/>
   <p:notesSz cx="6858000" cy="9144000"/>
@@ -1694,7 +1694,7 @@
   </p:cSld>
   <p:clrMap bg1="lt1" tx1="dk1" bg2="lt2" tx2="dk2" accent1="accent1" accent2="accent2" accent3="accent3" accent4="accent4" accent5="accent5" accent6="accent6" hlink="hlink" folHlink="folHlink"/>
   <p:sldLayoutIdLst>
-    <p:sldLayoutId xmlns:r="http://schemas.openxmlformats.org/officeDocument/2006/relationships" id="2147483649" r:id="Rd3b5d9fe70a24b6c"/>
+    <p:sldLayoutId xmlns:r="http://schemas.openxmlformats.org/officeDocument/2006/relationships" id="2147483649" r:id="Rbe6446b3d2de443a"/>
   </p:sldLayoutIdLst>
   <p:txStyles>
     <p:titleStyle>
@@ -2192,7 +2192,7 @@
           <p:cNvPr id="1" name="">
             <a:extLst xmlns:a="http://schemas.openxmlformats.org/drawingml/2006/main">
               <a:ext uri="{FF2B5EF4-FFF2-40B4-BE49-F238E27FC236}">
-                <a16:creationId xmlns:a16="http://schemas.microsoft.com/office/drawing/2014/main" id="{0461EEF3-BF93-4D62-BF44-9B1B5DBB18CB}"/>
+                <a16:creationId xmlns:a16="http://schemas.microsoft.com/office/drawing/2014/main" id="{6BFDC0D0-3942-4F3E-ABA0-6A823B95318F}"/>
               </a:ext>
             </a:extLst>
           </p:cNvPr>
@@ -2227,7 +2227,7 @@
           <p:cNvPr id="2" name="">
             <a:extLst xmlns:a="http://schemas.openxmlformats.org/drawingml/2006/main">
               <a:ext uri="{FF2B5EF4-FFF2-40B4-BE49-F238E27FC236}">
-                <a16:creationId xmlns:a16="http://schemas.microsoft.com/office/drawing/2014/main" id="{8F7236BC-B777-46D8-86F2-1B1FBB795A37}"/>
+                <a16:creationId xmlns:a16="http://schemas.microsoft.com/office/drawing/2014/main" id="{C45245AA-DABA-4C22-9A46-EA621784DC84}"/>
               </a:ext>
             </a:extLst>
           </p:cNvPr>
@@ -2264,7 +2264,7 @@
           <p:cNvPr id="3" name="">
             <a:extLst xmlns:a="http://schemas.openxmlformats.org/drawingml/2006/main">
               <a:ext uri="{FF2B5EF4-FFF2-40B4-BE49-F238E27FC236}">
-                <a16:creationId xmlns:a16="http://schemas.microsoft.com/office/drawing/2014/main" id="{8AB89BF6-31CD-450A-A036-A4CA1163FD51}"/>
+                <a16:creationId xmlns:a16="http://schemas.microsoft.com/office/drawing/2014/main" id="{AB069D1E-3C5C-410A-A2CD-0FE3BA25254B}"/>
               </a:ext>
             </a:extLst>
           </p:cNvPr>
@@ -2303,7 +2303,7 @@
           <p:nvPr/>
         </p:nvPicPr>
         <p:blipFill>
-          <a:blip xmlns:r="http://schemas.openxmlformats.org/officeDocument/2006/relationships" xmlns:a="http://schemas.openxmlformats.org/drawingml/2006/main" r:embed="R0f922eb0994c4f6c"/>
+          <a:blip xmlns:r="http://schemas.openxmlformats.org/officeDocument/2006/relationships" xmlns:a="http://schemas.openxmlformats.org/drawingml/2006/main" r:embed="R04953fb74f1542f2"/>
           <a:stretch xmlns:a="http://schemas.openxmlformats.org/drawingml/2006/main"/>
         </p:blipFill>
         <p:spPr>
@@ -2321,7 +2321,7 @@
           <p:cNvPr id="5" name="">
             <a:extLst xmlns:a="http://schemas.openxmlformats.org/drawingml/2006/main">
               <a:ext uri="{FF2B5EF4-FFF2-40B4-BE49-F238E27FC236}">
-                <a16:creationId xmlns:a16="http://schemas.microsoft.com/office/drawing/2014/main" id="{E23DA488-E818-4020-8F70-B636C8D22546}"/>
+                <a16:creationId xmlns:a16="http://schemas.microsoft.com/office/drawing/2014/main" id="{9CD367A2-9B3B-4129-9FF3-FCBB6DC901E0}"/>
               </a:ext>
             </a:extLst>
           </p:cNvPr>
@@ -2385,7 +2385,7 @@
           <p:cNvPr id="6" name="">
             <a:extLst xmlns:a="http://schemas.openxmlformats.org/drawingml/2006/main">
               <a:ext uri="{FF2B5EF4-FFF2-40B4-BE49-F238E27FC236}">
-                <a16:creationId xmlns:a16="http://schemas.microsoft.com/office/drawing/2014/main" id="{197C5A72-1EF0-4DCD-A743-B8A26F82C2D9}"/>
+                <a16:creationId xmlns:a16="http://schemas.microsoft.com/office/drawing/2014/main" id="{D216E253-673E-470A-BEF0-065B711D4FC1}"/>
               </a:ext>
             </a:extLst>
           </p:cNvPr>
@@ -2449,7 +2449,7 @@
           <p:cNvPr id="7" name="">
             <a:extLst xmlns:a="http://schemas.openxmlformats.org/drawingml/2006/main">
               <a:ext uri="{FF2B5EF4-FFF2-40B4-BE49-F238E27FC236}">
-                <a16:creationId xmlns:a16="http://schemas.microsoft.com/office/drawing/2014/main" id="{3291BE63-3D3F-445B-8146-C14E49B9ABC5}"/>
+                <a16:creationId xmlns:a16="http://schemas.microsoft.com/office/drawing/2014/main" id="{F27EE8A9-9ECD-4D93-88B5-5B01D1CBFAC9}"/>
               </a:ext>
             </a:extLst>
           </p:cNvPr>
@@ -2513,7 +2513,7 @@
           <p:cNvPr id="8" name="">
             <a:extLst xmlns:a="http://schemas.openxmlformats.org/drawingml/2006/main">
               <a:ext uri="{FF2B5EF4-FFF2-40B4-BE49-F238E27FC236}">
-                <a16:creationId xmlns:a16="http://schemas.microsoft.com/office/drawing/2014/main" id="{1B152180-E394-419B-B6A3-2232C110C5D0}"/>
+                <a16:creationId xmlns:a16="http://schemas.microsoft.com/office/drawing/2014/main" id="{9E08E1C8-F955-4A5A-85D6-3676CB3E6B20}"/>
               </a:ext>
             </a:extLst>
           </p:cNvPr>
@@ -2577,7 +2577,7 @@
           <p:cNvPr id="9" name="">
             <a:extLst xmlns:a="http://schemas.openxmlformats.org/drawingml/2006/main">
               <a:ext uri="{FF2B5EF4-FFF2-40B4-BE49-F238E27FC236}">
-                <a16:creationId xmlns:a16="http://schemas.microsoft.com/office/drawing/2014/main" id="{646B82D8-0339-4132-BC8A-A2AA7740BB6F}"/>
+                <a16:creationId xmlns:a16="http://schemas.microsoft.com/office/drawing/2014/main" id="{CB88DC4D-79A5-4839-8334-1EF48278F5F8}"/>
               </a:ext>
             </a:extLst>
           </p:cNvPr>
@@ -2641,7 +2641,7 @@
           <p:cNvPr id="10" name="">
             <a:extLst xmlns:a="http://schemas.openxmlformats.org/drawingml/2006/main">
               <a:ext uri="{FF2B5EF4-FFF2-40B4-BE49-F238E27FC236}">
-                <a16:creationId xmlns:a16="http://schemas.microsoft.com/office/drawing/2014/main" id="{831907A3-D80F-41F1-9EE4-011729692953}"/>
+                <a16:creationId xmlns:a16="http://schemas.microsoft.com/office/drawing/2014/main" id="{6B9B6CBD-3FD0-4941-8A9A-4C2CEDB71DBC}"/>
               </a:ext>
             </a:extLst>
           </p:cNvPr>
@@ -2703,7 +2703,7 @@
     </p:spTree>
     <p:extLst>
       <p:ext uri="{BB962C8B-B14F-4D97-AF65-F5344CB8AC3E}">
-        <p14:creationId xmlns:p14="http://schemas.microsoft.com/office/powerpoint/2010/main" val="1082675065"/>
+        <p14:creationId xmlns:p14="http://schemas.microsoft.com/office/powerpoint/2010/main" val="1144226744"/>
       </p:ext>
     </p:extLst>
   </p:cSld>
@@ -2727,7 +2727,7 @@
           <p:cNvPr id="1" name="">
             <a:extLst xmlns:a="http://schemas.openxmlformats.org/drawingml/2006/main">
               <a:ext uri="{FF2B5EF4-FFF2-40B4-BE49-F238E27FC236}">
-                <a16:creationId xmlns:a16="http://schemas.microsoft.com/office/drawing/2014/main" id="{C1AE9AE8-03B9-429C-A1B4-73B07FEEC516}"/>
+                <a16:creationId xmlns:a16="http://schemas.microsoft.com/office/drawing/2014/main" id="{AF1225CE-AE12-41EC-8CD8-066375C03482}"/>
               </a:ext>
             </a:extLst>
           </p:cNvPr>
@@ -2762,7 +2762,7 @@
           <p:cNvPr id="2" name="">
             <a:extLst xmlns:a="http://schemas.openxmlformats.org/drawingml/2006/main">
               <a:ext uri="{FF2B5EF4-FFF2-40B4-BE49-F238E27FC236}">
-                <a16:creationId xmlns:a16="http://schemas.microsoft.com/office/drawing/2014/main" id="{B0742B51-C7EA-48E1-A73D-397DC2D4BB63}"/>
+                <a16:creationId xmlns:a16="http://schemas.microsoft.com/office/drawing/2014/main" id="{1E44224B-72A8-4447-8E8B-0DA99F70D3BA}"/>
               </a:ext>
             </a:extLst>
           </p:cNvPr>
@@ -2797,7 +2797,7 @@
           <p:cNvPr id="3" name="">
             <a:extLst xmlns:a="http://schemas.openxmlformats.org/drawingml/2006/main">
               <a:ext uri="{FF2B5EF4-FFF2-40B4-BE49-F238E27FC236}">
-                <a16:creationId xmlns:a16="http://schemas.microsoft.com/office/drawing/2014/main" id="{FB328688-CCCE-4642-8CFA-E75258F1964F}"/>
+                <a16:creationId xmlns:a16="http://schemas.microsoft.com/office/drawing/2014/main" id="{56117049-FBAC-4D18-BA44-6B80F69CB178}"/>
               </a:ext>
             </a:extLst>
           </p:cNvPr>
@@ -2832,7 +2832,7 @@
           <p:cNvPr id="4" name="kicker-10-label">
             <a:extLst xmlns:a="http://schemas.openxmlformats.org/drawingml/2006/main">
               <a:ext uri="{FF2B5EF4-FFF2-40B4-BE49-F238E27FC236}">
-                <a16:creationId xmlns:a16="http://schemas.microsoft.com/office/drawing/2014/main" id="{330C3BA2-D2B1-4AD0-A97C-9AD61F590F68}"/>
+                <a16:creationId xmlns:a16="http://schemas.microsoft.com/office/drawing/2014/main" id="{620E696A-7148-40A0-8E9A-ECF50B1730E4}"/>
               </a:ext>
             </a:extLst>
           </p:cNvPr>
@@ -2896,7 +2896,7 @@
           <p:cNvPr id="5" name="">
             <a:extLst xmlns:a="http://schemas.openxmlformats.org/drawingml/2006/main">
               <a:ext uri="{FF2B5EF4-FFF2-40B4-BE49-F238E27FC236}">
-                <a16:creationId xmlns:a16="http://schemas.microsoft.com/office/drawing/2014/main" id="{4923AA4F-2F3A-4B4B-BC1D-EF9DCDE1DE10}"/>
+                <a16:creationId xmlns:a16="http://schemas.microsoft.com/office/drawing/2014/main" id="{F627EB3C-C035-459F-9FE6-2558B234BC98}"/>
               </a:ext>
             </a:extLst>
           </p:cNvPr>
@@ -2960,7 +2960,7 @@
           <p:cNvPr id="6" name="">
             <a:extLst xmlns:a="http://schemas.openxmlformats.org/drawingml/2006/main">
               <a:ext uri="{FF2B5EF4-FFF2-40B4-BE49-F238E27FC236}">
-                <a16:creationId xmlns:a16="http://schemas.microsoft.com/office/drawing/2014/main" id="{F4B0F857-06DB-4E88-80FC-AF387A523279}"/>
+                <a16:creationId xmlns:a16="http://schemas.microsoft.com/office/drawing/2014/main" id="{3D03F64E-F7CD-4623-AF34-45A7C1661D1B}"/>
               </a:ext>
             </a:extLst>
           </p:cNvPr>
@@ -3024,7 +3024,7 @@
           <p:cNvPr id="7" name="">
             <a:extLst xmlns:a="http://schemas.openxmlformats.org/drawingml/2006/main">
               <a:ext uri="{FF2B5EF4-FFF2-40B4-BE49-F238E27FC236}">
-                <a16:creationId xmlns:a16="http://schemas.microsoft.com/office/drawing/2014/main" id="{32423173-DBC8-4E7C-B54B-C8BC61136996}"/>
+                <a16:creationId xmlns:a16="http://schemas.microsoft.com/office/drawing/2014/main" id="{DA4E1589-329A-45C1-AF77-F7B6267911DA}"/>
               </a:ext>
             </a:extLst>
           </p:cNvPr>
@@ -3061,7 +3061,7 @@
           <p:nvPr/>
         </p:nvPicPr>
         <p:blipFill>
-          <a:blip xmlns:r="http://schemas.openxmlformats.org/officeDocument/2006/relationships" xmlns:a="http://schemas.openxmlformats.org/drawingml/2006/main" r:embed="R716999d0b1e249bf"/>
+          <a:blip xmlns:r="http://schemas.openxmlformats.org/officeDocument/2006/relationships" xmlns:a="http://schemas.openxmlformats.org/drawingml/2006/main" r:embed="R9e716ffe152e4f22"/>
           <a:stretch xmlns:a="http://schemas.openxmlformats.org/drawingml/2006/main"/>
         </p:blipFill>
         <p:spPr>
@@ -3079,7 +3079,7 @@
           <p:cNvPr id="9" name="">
             <a:extLst xmlns:a="http://schemas.openxmlformats.org/drawingml/2006/main">
               <a:ext uri="{FF2B5EF4-FFF2-40B4-BE49-F238E27FC236}">
-                <a16:creationId xmlns:a16="http://schemas.microsoft.com/office/drawing/2014/main" id="{CD92136A-A164-4DE4-B6E2-2074705F9CC0}"/>
+                <a16:creationId xmlns:a16="http://schemas.microsoft.com/office/drawing/2014/main" id="{C5745CF5-2E6B-4D9C-B3C7-3AB9F5189F03}"/>
               </a:ext>
             </a:extLst>
           </p:cNvPr>
@@ -3141,7 +3141,7 @@
     </p:spTree>
     <p:extLst>
       <p:ext uri="{BB962C8B-B14F-4D97-AF65-F5344CB8AC3E}">
-        <p14:creationId xmlns:p14="http://schemas.microsoft.com/office/powerpoint/2010/main" val="1911870863"/>
+        <p14:creationId xmlns:p14="http://schemas.microsoft.com/office/powerpoint/2010/main" val="1029712221"/>
       </p:ext>
     </p:extLst>
   </p:cSld>
@@ -3165,7 +3165,7 @@
           <p:cNvPr id="1" name="">
             <a:extLst xmlns:a="http://schemas.openxmlformats.org/drawingml/2006/main">
               <a:ext uri="{FF2B5EF4-FFF2-40B4-BE49-F238E27FC236}">
-                <a16:creationId xmlns:a16="http://schemas.microsoft.com/office/drawing/2014/main" id="{0DD17672-45DB-4A72-B063-3B0D3A66B8FF}"/>
+                <a16:creationId xmlns:a16="http://schemas.microsoft.com/office/drawing/2014/main" id="{64B99FCE-56EB-4FBA-9D21-66670D512624}"/>
               </a:ext>
             </a:extLst>
           </p:cNvPr>
@@ -3200,7 +3200,7 @@
           <p:cNvPr id="2" name="">
             <a:extLst xmlns:a="http://schemas.openxmlformats.org/drawingml/2006/main">
               <a:ext uri="{FF2B5EF4-FFF2-40B4-BE49-F238E27FC236}">
-                <a16:creationId xmlns:a16="http://schemas.microsoft.com/office/drawing/2014/main" id="{C02D3180-2181-42F6-A292-0307E1CFC4D9}"/>
+                <a16:creationId xmlns:a16="http://schemas.microsoft.com/office/drawing/2014/main" id="{EF865899-0555-4542-9895-B9B7ACF996B3}"/>
               </a:ext>
             </a:extLst>
           </p:cNvPr>
@@ -3235,7 +3235,7 @@
           <p:cNvPr id="3" name="">
             <a:extLst xmlns:a="http://schemas.openxmlformats.org/drawingml/2006/main">
               <a:ext uri="{FF2B5EF4-FFF2-40B4-BE49-F238E27FC236}">
-                <a16:creationId xmlns:a16="http://schemas.microsoft.com/office/drawing/2014/main" id="{1821D2A5-D8F5-4357-A530-371DE1414E4E}"/>
+                <a16:creationId xmlns:a16="http://schemas.microsoft.com/office/drawing/2014/main" id="{6A98387F-1726-4238-8860-B29E53238C8B}"/>
               </a:ext>
             </a:extLst>
           </p:cNvPr>
@@ -3270,7 +3270,7 @@
           <p:cNvPr id="4" name="kicker-11-label">
             <a:extLst xmlns:a="http://schemas.openxmlformats.org/drawingml/2006/main">
               <a:ext uri="{FF2B5EF4-FFF2-40B4-BE49-F238E27FC236}">
-                <a16:creationId xmlns:a16="http://schemas.microsoft.com/office/drawing/2014/main" id="{A1BD1C8F-4DD0-4F92-AA90-4272DCBC277B}"/>
+                <a16:creationId xmlns:a16="http://schemas.microsoft.com/office/drawing/2014/main" id="{646C5D19-B148-4DAF-BE52-0C07757A323E}"/>
               </a:ext>
             </a:extLst>
           </p:cNvPr>
@@ -3334,7 +3334,7 @@
           <p:cNvPr id="5" name="">
             <a:extLst xmlns:a="http://schemas.openxmlformats.org/drawingml/2006/main">
               <a:ext uri="{FF2B5EF4-FFF2-40B4-BE49-F238E27FC236}">
-                <a16:creationId xmlns:a16="http://schemas.microsoft.com/office/drawing/2014/main" id="{F21C8836-B364-4650-A7A0-E577CF6E671B}"/>
+                <a16:creationId xmlns:a16="http://schemas.microsoft.com/office/drawing/2014/main" id="{3E5DC538-E401-4561-9CCE-4AD912532D10}"/>
               </a:ext>
             </a:extLst>
           </p:cNvPr>
@@ -3398,7 +3398,7 @@
           <p:cNvPr id="6" name="">
             <a:extLst xmlns:a="http://schemas.openxmlformats.org/drawingml/2006/main">
               <a:ext uri="{FF2B5EF4-FFF2-40B4-BE49-F238E27FC236}">
-                <a16:creationId xmlns:a16="http://schemas.microsoft.com/office/drawing/2014/main" id="{FA0687A1-A3CE-4355-8852-2B3003E9A060}"/>
+                <a16:creationId xmlns:a16="http://schemas.microsoft.com/office/drawing/2014/main" id="{9AE0BFC1-D082-4D8C-B6B4-506C20596F68}"/>
               </a:ext>
             </a:extLst>
           </p:cNvPr>
@@ -3452,7 +3452,7 @@
                 <a:ea typeface="Arial"/>
                 <a:cs typeface="Arial"/>
               </a:rPr>
-              <a:t>O fluxo distingue validação física real e caminho escalável por sensores/gateways.</a:t>
+              <a:t>O fluxo distingue validação física real e caminho escalável com sensores e gateways.</a:t>
             </a:r>
           </a:p>
         </p:txBody>
@@ -3462,7 +3462,7 @@
           <p:cNvPr id="7" name="">
             <a:extLst xmlns:a="http://schemas.openxmlformats.org/drawingml/2006/main">
               <a:ext uri="{FF2B5EF4-FFF2-40B4-BE49-F238E27FC236}">
-                <a16:creationId xmlns:a16="http://schemas.microsoft.com/office/drawing/2014/main" id="{464EBA6B-359C-4A4D-92B0-5B744ED0AAE1}"/>
+                <a16:creationId xmlns:a16="http://schemas.microsoft.com/office/drawing/2014/main" id="{EE192D1D-3D20-4BDF-B8C2-459DCE5E0279}"/>
               </a:ext>
             </a:extLst>
           </p:cNvPr>
@@ -3495,7 +3495,7 @@
           <p:cNvPr id="8" name="">
             <a:extLst xmlns:a="http://schemas.openxmlformats.org/drawingml/2006/main">
               <a:ext uri="{FF2B5EF4-FFF2-40B4-BE49-F238E27FC236}">
-                <a16:creationId xmlns:a16="http://schemas.microsoft.com/office/drawing/2014/main" id="{3B59E23C-225C-465A-BE87-1F50F23B1C8B}"/>
+                <a16:creationId xmlns:a16="http://schemas.microsoft.com/office/drawing/2014/main" id="{0C62A640-F4F2-4E75-A0F3-A0418F5911E9}"/>
               </a:ext>
             </a:extLst>
           </p:cNvPr>
@@ -3528,7 +3528,7 @@
           <p:cNvPr id="9" name="">
             <a:extLst xmlns:a="http://schemas.openxmlformats.org/drawingml/2006/main">
               <a:ext uri="{FF2B5EF4-FFF2-40B4-BE49-F238E27FC236}">
-                <a16:creationId xmlns:a16="http://schemas.microsoft.com/office/drawing/2014/main" id="{3E4A55EB-6001-4A27-B7D0-D86857FB0630}"/>
+                <a16:creationId xmlns:a16="http://schemas.microsoft.com/office/drawing/2014/main" id="{D4309A75-478A-4262-A709-127FD611ABE9}"/>
               </a:ext>
             </a:extLst>
           </p:cNvPr>
@@ -3592,7 +3592,7 @@
           <p:cNvPr id="10" name="">
             <a:extLst xmlns:a="http://schemas.openxmlformats.org/drawingml/2006/main">
               <a:ext uri="{FF2B5EF4-FFF2-40B4-BE49-F238E27FC236}">
-                <a16:creationId xmlns:a16="http://schemas.microsoft.com/office/drawing/2014/main" id="{C218DF58-B0D3-483E-8179-C19710B89836}"/>
+                <a16:creationId xmlns:a16="http://schemas.microsoft.com/office/drawing/2014/main" id="{38986266-F57B-4209-ACA5-265978A8C082}"/>
               </a:ext>
             </a:extLst>
           </p:cNvPr>
@@ -3625,7 +3625,7 @@
           <p:cNvPr id="11" name="">
             <a:extLst xmlns:a="http://schemas.openxmlformats.org/drawingml/2006/main">
               <a:ext uri="{FF2B5EF4-FFF2-40B4-BE49-F238E27FC236}">
-                <a16:creationId xmlns:a16="http://schemas.microsoft.com/office/drawing/2014/main" id="{3294D65D-8644-4D23-A8DC-4919A39EA901}"/>
+                <a16:creationId xmlns:a16="http://schemas.microsoft.com/office/drawing/2014/main" id="{512FD235-DB2A-4A6A-8C9C-B40D8D00EBCC}"/>
               </a:ext>
             </a:extLst>
           </p:cNvPr>
@@ -3689,7 +3689,7 @@
           <p:cNvPr id="12" name="">
             <a:extLst xmlns:a="http://schemas.openxmlformats.org/drawingml/2006/main">
               <a:ext uri="{FF2B5EF4-FFF2-40B4-BE49-F238E27FC236}">
-                <a16:creationId xmlns:a16="http://schemas.microsoft.com/office/drawing/2014/main" id="{9C72E8EF-7A03-46E4-84F0-92AC093EB3E9}"/>
+                <a16:creationId xmlns:a16="http://schemas.microsoft.com/office/drawing/2014/main" id="{1E170B36-61E5-471D-A25A-7FED3008FA74}"/>
               </a:ext>
             </a:extLst>
           </p:cNvPr>
@@ -3753,7 +3753,7 @@
           <p:cNvPr id="13" name="">
             <a:extLst xmlns:a="http://schemas.openxmlformats.org/drawingml/2006/main">
               <a:ext uri="{FF2B5EF4-FFF2-40B4-BE49-F238E27FC236}">
-                <a16:creationId xmlns:a16="http://schemas.microsoft.com/office/drawing/2014/main" id="{3457AEBA-55C9-456F-A6F0-33ACA5C75D1D}"/>
+                <a16:creationId xmlns:a16="http://schemas.microsoft.com/office/drawing/2014/main" id="{125E5ECB-0BBF-4DCF-B7CC-C67018815F37}"/>
               </a:ext>
             </a:extLst>
           </p:cNvPr>
@@ -3786,7 +3786,7 @@
           <p:cNvPr id="14" name="">
             <a:extLst xmlns:a="http://schemas.openxmlformats.org/drawingml/2006/main">
               <a:ext uri="{FF2B5EF4-FFF2-40B4-BE49-F238E27FC236}">
-                <a16:creationId xmlns:a16="http://schemas.microsoft.com/office/drawing/2014/main" id="{90101C80-6295-438F-AB0E-E31823A56D5A}"/>
+                <a16:creationId xmlns:a16="http://schemas.microsoft.com/office/drawing/2014/main" id="{4288898E-0C6F-4AA4-8999-9D233F20B9E7}"/>
               </a:ext>
             </a:extLst>
           </p:cNvPr>
@@ -3850,7 +3850,7 @@
           <p:cNvPr id="15" name="">
             <a:extLst xmlns:a="http://schemas.openxmlformats.org/drawingml/2006/main">
               <a:ext uri="{FF2B5EF4-FFF2-40B4-BE49-F238E27FC236}">
-                <a16:creationId xmlns:a16="http://schemas.microsoft.com/office/drawing/2014/main" id="{A168F899-6A95-4E0D-A4F6-8F89784CDBCF}"/>
+                <a16:creationId xmlns:a16="http://schemas.microsoft.com/office/drawing/2014/main" id="{96F67145-F3A9-4038-BB21-DCDD5F41EAF5}"/>
               </a:ext>
             </a:extLst>
           </p:cNvPr>
@@ -3914,7 +3914,7 @@
           <p:cNvPr id="16" name="">
             <a:extLst xmlns:a="http://schemas.openxmlformats.org/drawingml/2006/main">
               <a:ext uri="{FF2B5EF4-FFF2-40B4-BE49-F238E27FC236}">
-                <a16:creationId xmlns:a16="http://schemas.microsoft.com/office/drawing/2014/main" id="{3C5E0119-EAC7-408B-A8E7-34D980E0BF38}"/>
+                <a16:creationId xmlns:a16="http://schemas.microsoft.com/office/drawing/2014/main" id="{2D524AD9-E3D0-4F7A-BC9E-21B7162323BF}"/>
               </a:ext>
             </a:extLst>
           </p:cNvPr>
@@ -3947,7 +3947,7 @@
           <p:cNvPr id="17" name="">
             <a:extLst xmlns:a="http://schemas.openxmlformats.org/drawingml/2006/main">
               <a:ext uri="{FF2B5EF4-FFF2-40B4-BE49-F238E27FC236}">
-                <a16:creationId xmlns:a16="http://schemas.microsoft.com/office/drawing/2014/main" id="{87E3118D-BA3C-4027-8355-18C73E47BEEE}"/>
+                <a16:creationId xmlns:a16="http://schemas.microsoft.com/office/drawing/2014/main" id="{E130B39F-A39D-4336-92EF-835D3481F17D}"/>
               </a:ext>
             </a:extLst>
           </p:cNvPr>
@@ -4011,7 +4011,7 @@
           <p:cNvPr id="18" name="">
             <a:extLst xmlns:a="http://schemas.openxmlformats.org/drawingml/2006/main">
               <a:ext uri="{FF2B5EF4-FFF2-40B4-BE49-F238E27FC236}">
-                <a16:creationId xmlns:a16="http://schemas.microsoft.com/office/drawing/2014/main" id="{866A4DB9-DBED-4158-85B9-B56893A98157}"/>
+                <a16:creationId xmlns:a16="http://schemas.microsoft.com/office/drawing/2014/main" id="{EEA5295C-238F-4A04-8F69-B96D75A03803}"/>
               </a:ext>
             </a:extLst>
           </p:cNvPr>
@@ -4075,7 +4075,7 @@
           <p:cNvPr id="19" name="">
             <a:extLst xmlns:a="http://schemas.openxmlformats.org/drawingml/2006/main">
               <a:ext uri="{FF2B5EF4-FFF2-40B4-BE49-F238E27FC236}">
-                <a16:creationId xmlns:a16="http://schemas.microsoft.com/office/drawing/2014/main" id="{3DDF8EFE-8BD2-40F3-BE72-F6747977D9A3}"/>
+                <a16:creationId xmlns:a16="http://schemas.microsoft.com/office/drawing/2014/main" id="{9DB82AD1-E7DB-469C-B0C5-4B382A793AF4}"/>
               </a:ext>
             </a:extLst>
           </p:cNvPr>
@@ -4108,7 +4108,7 @@
           <p:cNvPr id="20" name="">
             <a:extLst xmlns:a="http://schemas.openxmlformats.org/drawingml/2006/main">
               <a:ext uri="{FF2B5EF4-FFF2-40B4-BE49-F238E27FC236}">
-                <a16:creationId xmlns:a16="http://schemas.microsoft.com/office/drawing/2014/main" id="{196E6010-05F7-4807-9CBB-1FB9EC2B4097}"/>
+                <a16:creationId xmlns:a16="http://schemas.microsoft.com/office/drawing/2014/main" id="{FBACFC25-BEDF-44A3-953A-BE3ACA8A5DDB}"/>
               </a:ext>
             </a:extLst>
           </p:cNvPr>
@@ -4172,7 +4172,7 @@
           <p:cNvPr id="21" name="">
             <a:extLst xmlns:a="http://schemas.openxmlformats.org/drawingml/2006/main">
               <a:ext uri="{FF2B5EF4-FFF2-40B4-BE49-F238E27FC236}">
-                <a16:creationId xmlns:a16="http://schemas.microsoft.com/office/drawing/2014/main" id="{9F6A50E3-BF46-4037-B324-48C8BD9F1309}"/>
+                <a16:creationId xmlns:a16="http://schemas.microsoft.com/office/drawing/2014/main" id="{E3B36849-FBCA-4048-BA82-7665FD21C042}"/>
               </a:ext>
             </a:extLst>
           </p:cNvPr>
@@ -4236,7 +4236,7 @@
           <p:cNvPr id="22" name="">
             <a:extLst xmlns:a="http://schemas.openxmlformats.org/drawingml/2006/main">
               <a:ext uri="{FF2B5EF4-FFF2-40B4-BE49-F238E27FC236}">
-                <a16:creationId xmlns:a16="http://schemas.microsoft.com/office/drawing/2014/main" id="{57B9FC0D-EF09-48D1-A572-489E945B8990}"/>
+                <a16:creationId xmlns:a16="http://schemas.microsoft.com/office/drawing/2014/main" id="{0CD1DFB3-ECCF-4F80-9C30-FFA48AA262A2}"/>
               </a:ext>
             </a:extLst>
           </p:cNvPr>
@@ -4271,7 +4271,7 @@
           <p:cNvPr id="23" name="">
             <a:extLst xmlns:a="http://schemas.openxmlformats.org/drawingml/2006/main">
               <a:ext uri="{FF2B5EF4-FFF2-40B4-BE49-F238E27FC236}">
-                <a16:creationId xmlns:a16="http://schemas.microsoft.com/office/drawing/2014/main" id="{DE879521-8375-47CF-880D-176DF922CF09}"/>
+                <a16:creationId xmlns:a16="http://schemas.microsoft.com/office/drawing/2014/main" id="{AA401C1D-EFFF-4F7C-A129-6CAA066B8D2B}"/>
               </a:ext>
             </a:extLst>
           </p:cNvPr>
@@ -4335,7 +4335,7 @@
           <p:cNvPr id="24" name="">
             <a:extLst xmlns:a="http://schemas.openxmlformats.org/drawingml/2006/main">
               <a:ext uri="{FF2B5EF4-FFF2-40B4-BE49-F238E27FC236}">
-                <a16:creationId xmlns:a16="http://schemas.microsoft.com/office/drawing/2014/main" id="{359F98B7-4562-4DE3-AD96-C5A9E9EB4CBE}"/>
+                <a16:creationId xmlns:a16="http://schemas.microsoft.com/office/drawing/2014/main" id="{150B8182-861A-48E4-ADCE-4B09C92717DE}"/>
               </a:ext>
             </a:extLst>
           </p:cNvPr>
@@ -4368,7 +4368,7 @@
           <p:cNvPr id="25" name="">
             <a:extLst xmlns:a="http://schemas.openxmlformats.org/drawingml/2006/main">
               <a:ext uri="{FF2B5EF4-FFF2-40B4-BE49-F238E27FC236}">
-                <a16:creationId xmlns:a16="http://schemas.microsoft.com/office/drawing/2014/main" id="{B53B0D52-59A0-46A1-8DD0-959BB306F98E}"/>
+                <a16:creationId xmlns:a16="http://schemas.microsoft.com/office/drawing/2014/main" id="{89E8B19A-1D59-455F-8029-78AE70327EF3}"/>
               </a:ext>
             </a:extLst>
           </p:cNvPr>
@@ -4401,7 +4401,7 @@
           <p:cNvPr id="26" name="">
             <a:extLst xmlns:a="http://schemas.openxmlformats.org/drawingml/2006/main">
               <a:ext uri="{FF2B5EF4-FFF2-40B4-BE49-F238E27FC236}">
-                <a16:creationId xmlns:a16="http://schemas.microsoft.com/office/drawing/2014/main" id="{99592252-6308-4E17-80F7-531BC64384C5}"/>
+                <a16:creationId xmlns:a16="http://schemas.microsoft.com/office/drawing/2014/main" id="{0A3C2C4C-BA8F-4D0D-9D6D-85FD8C4CEDE7}"/>
               </a:ext>
             </a:extLst>
           </p:cNvPr>
@@ -4465,7 +4465,7 @@
           <p:cNvPr id="27" name="">
             <a:extLst xmlns:a="http://schemas.openxmlformats.org/drawingml/2006/main">
               <a:ext uri="{FF2B5EF4-FFF2-40B4-BE49-F238E27FC236}">
-                <a16:creationId xmlns:a16="http://schemas.microsoft.com/office/drawing/2014/main" id="{64DE7FA6-6DCD-45C4-BBC5-48C0E3D9085C}"/>
+                <a16:creationId xmlns:a16="http://schemas.microsoft.com/office/drawing/2014/main" id="{65E62B8B-8242-43F3-A17A-4C552DD9E99F}"/>
               </a:ext>
             </a:extLst>
           </p:cNvPr>
@@ -4498,7 +4498,7 @@
           <p:cNvPr id="28" name="">
             <a:extLst xmlns:a="http://schemas.openxmlformats.org/drawingml/2006/main">
               <a:ext uri="{FF2B5EF4-FFF2-40B4-BE49-F238E27FC236}">
-                <a16:creationId xmlns:a16="http://schemas.microsoft.com/office/drawing/2014/main" id="{F4F9DF70-4046-431C-9B8F-CF1CB84CA69D}"/>
+                <a16:creationId xmlns:a16="http://schemas.microsoft.com/office/drawing/2014/main" id="{CB524AEE-D6C1-41CF-8BA1-37C93691DD04}"/>
               </a:ext>
             </a:extLst>
           </p:cNvPr>
@@ -4562,7 +4562,7 @@
           <p:cNvPr id="29" name="">
             <a:extLst xmlns:a="http://schemas.openxmlformats.org/drawingml/2006/main">
               <a:ext uri="{FF2B5EF4-FFF2-40B4-BE49-F238E27FC236}">
-                <a16:creationId xmlns:a16="http://schemas.microsoft.com/office/drawing/2014/main" id="{938E93DC-9382-496E-92ED-A6A97DEAFF1D}"/>
+                <a16:creationId xmlns:a16="http://schemas.microsoft.com/office/drawing/2014/main" id="{4724E3E5-8B64-4E4E-8158-E4C5E08FD66B}"/>
               </a:ext>
             </a:extLst>
           </p:cNvPr>
@@ -4616,7 +4616,7 @@
                 <a:ea typeface="Arial"/>
                 <a:cs typeface="Arial"/>
               </a:rPr>
-              <a:t>Sensor/gateway</a:t>
+              <a:t>Sensor ou gateway</a:t>
             </a:r>
           </a:p>
         </p:txBody>
@@ -4626,7 +4626,7 @@
           <p:cNvPr id="30" name="">
             <a:extLst xmlns:a="http://schemas.openxmlformats.org/drawingml/2006/main">
               <a:ext uri="{FF2B5EF4-FFF2-40B4-BE49-F238E27FC236}">
-                <a16:creationId xmlns:a16="http://schemas.microsoft.com/office/drawing/2014/main" id="{4E9B4F9D-ED00-4A92-8C3A-A34FE89E492F}"/>
+                <a16:creationId xmlns:a16="http://schemas.microsoft.com/office/drawing/2014/main" id="{DBCB68A9-43AD-4589-A078-136CE8F038A6}"/>
               </a:ext>
             </a:extLst>
           </p:cNvPr>
@@ -4659,7 +4659,7 @@
           <p:cNvPr id="31" name="">
             <a:extLst xmlns:a="http://schemas.openxmlformats.org/drawingml/2006/main">
               <a:ext uri="{FF2B5EF4-FFF2-40B4-BE49-F238E27FC236}">
-                <a16:creationId xmlns:a16="http://schemas.microsoft.com/office/drawing/2014/main" id="{3E068CDA-A696-4828-9FF7-36EE50708621}"/>
+                <a16:creationId xmlns:a16="http://schemas.microsoft.com/office/drawing/2014/main" id="{9B972962-7378-41BC-BD96-8665E926D2E7}"/>
               </a:ext>
             </a:extLst>
           </p:cNvPr>
@@ -4723,7 +4723,7 @@
           <p:cNvPr id="32" name="">
             <a:extLst xmlns:a="http://schemas.openxmlformats.org/drawingml/2006/main">
               <a:ext uri="{FF2B5EF4-FFF2-40B4-BE49-F238E27FC236}">
-                <a16:creationId xmlns:a16="http://schemas.microsoft.com/office/drawing/2014/main" id="{FC30F6A9-20F0-4528-8A28-6AB6D16E0B9F}"/>
+                <a16:creationId xmlns:a16="http://schemas.microsoft.com/office/drawing/2014/main" id="{8575C622-08EB-48DB-BCAF-240844DB44B5}"/>
               </a:ext>
             </a:extLst>
           </p:cNvPr>
@@ -4787,7 +4787,7 @@
           <p:cNvPr id="33" name="">
             <a:extLst xmlns:a="http://schemas.openxmlformats.org/drawingml/2006/main">
               <a:ext uri="{FF2B5EF4-FFF2-40B4-BE49-F238E27FC236}">
-                <a16:creationId xmlns:a16="http://schemas.microsoft.com/office/drawing/2014/main" id="{F98E9121-3336-45B0-B271-83D53BFB0241}"/>
+                <a16:creationId xmlns:a16="http://schemas.microsoft.com/office/drawing/2014/main" id="{EC12748B-FD33-4AE3-BE6C-09C82642473E}"/>
               </a:ext>
             </a:extLst>
           </p:cNvPr>
@@ -4820,7 +4820,7 @@
           <p:cNvPr id="34" name="">
             <a:extLst xmlns:a="http://schemas.openxmlformats.org/drawingml/2006/main">
               <a:ext uri="{FF2B5EF4-FFF2-40B4-BE49-F238E27FC236}">
-                <a16:creationId xmlns:a16="http://schemas.microsoft.com/office/drawing/2014/main" id="{0FF56449-A461-42F7-9179-D31BDA4A0991}"/>
+                <a16:creationId xmlns:a16="http://schemas.microsoft.com/office/drawing/2014/main" id="{1035CC6E-27DF-4761-9B3B-F82A80322641}"/>
               </a:ext>
             </a:extLst>
           </p:cNvPr>
@@ -4884,7 +4884,7 @@
           <p:cNvPr id="35" name="">
             <a:extLst xmlns:a="http://schemas.openxmlformats.org/drawingml/2006/main">
               <a:ext uri="{FF2B5EF4-FFF2-40B4-BE49-F238E27FC236}">
-                <a16:creationId xmlns:a16="http://schemas.microsoft.com/office/drawing/2014/main" id="{89C6F905-C56E-476F-ACF4-5B48D844CF9A}"/>
+                <a16:creationId xmlns:a16="http://schemas.microsoft.com/office/drawing/2014/main" id="{BBE67BF5-B488-4FBE-8709-A338A880BE8F}"/>
               </a:ext>
             </a:extLst>
           </p:cNvPr>
@@ -4948,7 +4948,7 @@
           <p:cNvPr id="36" name="">
             <a:extLst xmlns:a="http://schemas.openxmlformats.org/drawingml/2006/main">
               <a:ext uri="{FF2B5EF4-FFF2-40B4-BE49-F238E27FC236}">
-                <a16:creationId xmlns:a16="http://schemas.microsoft.com/office/drawing/2014/main" id="{ED372D45-7FFE-4894-BE7D-DAA4E0CDB0B1}"/>
+                <a16:creationId xmlns:a16="http://schemas.microsoft.com/office/drawing/2014/main" id="{61A13AEC-E353-4DE4-847C-4E3DD2C8264E}"/>
               </a:ext>
             </a:extLst>
           </p:cNvPr>
@@ -4981,7 +4981,7 @@
           <p:cNvPr id="37" name="">
             <a:extLst xmlns:a="http://schemas.openxmlformats.org/drawingml/2006/main">
               <a:ext uri="{FF2B5EF4-FFF2-40B4-BE49-F238E27FC236}">
-                <a16:creationId xmlns:a16="http://schemas.microsoft.com/office/drawing/2014/main" id="{C944E605-E757-4A55-8EBF-DBB8BA0EB709}"/>
+                <a16:creationId xmlns:a16="http://schemas.microsoft.com/office/drawing/2014/main" id="{1B804B0C-CCC8-475D-85AB-29FB190BC496}"/>
               </a:ext>
             </a:extLst>
           </p:cNvPr>
@@ -5045,7 +5045,7 @@
           <p:cNvPr id="38" name="">
             <a:extLst xmlns:a="http://schemas.openxmlformats.org/drawingml/2006/main">
               <a:ext uri="{FF2B5EF4-FFF2-40B4-BE49-F238E27FC236}">
-                <a16:creationId xmlns:a16="http://schemas.microsoft.com/office/drawing/2014/main" id="{534CC665-6EC7-4C93-912D-BDC8ED7C2F5D}"/>
+                <a16:creationId xmlns:a16="http://schemas.microsoft.com/office/drawing/2014/main" id="{21091C81-89F4-46AD-8049-C23ADF14DCD5}"/>
               </a:ext>
             </a:extLst>
           </p:cNvPr>
@@ -5109,7 +5109,7 @@
           <p:cNvPr id="39" name="">
             <a:extLst xmlns:a="http://schemas.openxmlformats.org/drawingml/2006/main">
               <a:ext uri="{FF2B5EF4-FFF2-40B4-BE49-F238E27FC236}">
-                <a16:creationId xmlns:a16="http://schemas.microsoft.com/office/drawing/2014/main" id="{0AE0F045-65D4-4506-BEC5-16CF78B6B1D1}"/>
+                <a16:creationId xmlns:a16="http://schemas.microsoft.com/office/drawing/2014/main" id="{F60CDAAB-25DB-4228-B955-E826365FD0E5}"/>
               </a:ext>
             </a:extLst>
           </p:cNvPr>
@@ -5144,7 +5144,7 @@
           <p:cNvPr id="40" name="">
             <a:extLst xmlns:a="http://schemas.openxmlformats.org/drawingml/2006/main">
               <a:ext uri="{FF2B5EF4-FFF2-40B4-BE49-F238E27FC236}">
-                <a16:creationId xmlns:a16="http://schemas.microsoft.com/office/drawing/2014/main" id="{D250497B-6F4F-4D1E-9326-965B961B05BE}"/>
+                <a16:creationId xmlns:a16="http://schemas.microsoft.com/office/drawing/2014/main" id="{E67BD268-A5AF-4156-9169-7AC8D90DDD72}"/>
               </a:ext>
             </a:extLst>
           </p:cNvPr>
@@ -5206,7 +5206,7 @@
     </p:spTree>
     <p:extLst>
       <p:ext uri="{BB962C8B-B14F-4D97-AF65-F5344CB8AC3E}">
-        <p14:creationId xmlns:p14="http://schemas.microsoft.com/office/powerpoint/2010/main" val="1328647305"/>
+        <p14:creationId xmlns:p14="http://schemas.microsoft.com/office/powerpoint/2010/main" val="350447744"/>
       </p:ext>
     </p:extLst>
   </p:cSld>
@@ -5230,7 +5230,7 @@
           <p:cNvPr id="1" name="">
             <a:extLst xmlns:a="http://schemas.openxmlformats.org/drawingml/2006/main">
               <a:ext uri="{FF2B5EF4-FFF2-40B4-BE49-F238E27FC236}">
-                <a16:creationId xmlns:a16="http://schemas.microsoft.com/office/drawing/2014/main" id="{372A7132-EC90-438F-B04B-74FB4B5FCDE9}"/>
+                <a16:creationId xmlns:a16="http://schemas.microsoft.com/office/drawing/2014/main" id="{CFE34866-41AD-4D2F-A35F-F893412AC6D8}"/>
               </a:ext>
             </a:extLst>
           </p:cNvPr>
@@ -5265,7 +5265,7 @@
           <p:cNvPr id="2" name="">
             <a:extLst xmlns:a="http://schemas.openxmlformats.org/drawingml/2006/main">
               <a:ext uri="{FF2B5EF4-FFF2-40B4-BE49-F238E27FC236}">
-                <a16:creationId xmlns:a16="http://schemas.microsoft.com/office/drawing/2014/main" id="{11CCF71A-03F9-4052-A7C5-320DB7E0A77E}"/>
+                <a16:creationId xmlns:a16="http://schemas.microsoft.com/office/drawing/2014/main" id="{0494F262-E42A-4C10-B97C-39A27F6E7D61}"/>
               </a:ext>
             </a:extLst>
           </p:cNvPr>
@@ -5300,7 +5300,7 @@
           <p:cNvPr id="3" name="">
             <a:extLst xmlns:a="http://schemas.openxmlformats.org/drawingml/2006/main">
               <a:ext uri="{FF2B5EF4-FFF2-40B4-BE49-F238E27FC236}">
-                <a16:creationId xmlns:a16="http://schemas.microsoft.com/office/drawing/2014/main" id="{98B50E0C-0927-4D8F-9A0E-F70591A448AB}"/>
+                <a16:creationId xmlns:a16="http://schemas.microsoft.com/office/drawing/2014/main" id="{5776CE33-6847-4BEA-BB5D-878F189546FD}"/>
               </a:ext>
             </a:extLst>
           </p:cNvPr>
@@ -5335,7 +5335,7 @@
           <p:cNvPr id="4" name="kicker-12-label">
             <a:extLst xmlns:a="http://schemas.openxmlformats.org/drawingml/2006/main">
               <a:ext uri="{FF2B5EF4-FFF2-40B4-BE49-F238E27FC236}">
-                <a16:creationId xmlns:a16="http://schemas.microsoft.com/office/drawing/2014/main" id="{D48FCB2A-9205-43A8-BAD6-3384E7D65C01}"/>
+                <a16:creationId xmlns:a16="http://schemas.microsoft.com/office/drawing/2014/main" id="{058904E6-1D78-4809-858D-1158E7C96FD7}"/>
               </a:ext>
             </a:extLst>
           </p:cNvPr>
@@ -5399,7 +5399,7 @@
           <p:cNvPr id="5" name="">
             <a:extLst xmlns:a="http://schemas.openxmlformats.org/drawingml/2006/main">
               <a:ext uri="{FF2B5EF4-FFF2-40B4-BE49-F238E27FC236}">
-                <a16:creationId xmlns:a16="http://schemas.microsoft.com/office/drawing/2014/main" id="{4BDFD292-BCE2-40AA-B225-166F6639E6FB}"/>
+                <a16:creationId xmlns:a16="http://schemas.microsoft.com/office/drawing/2014/main" id="{F873821C-B7F2-4B37-8507-28A18830C7A6}"/>
               </a:ext>
             </a:extLst>
           </p:cNvPr>
@@ -5463,7 +5463,7 @@
           <p:cNvPr id="6" name="">
             <a:extLst xmlns:a="http://schemas.openxmlformats.org/drawingml/2006/main">
               <a:ext uri="{FF2B5EF4-FFF2-40B4-BE49-F238E27FC236}">
-                <a16:creationId xmlns:a16="http://schemas.microsoft.com/office/drawing/2014/main" id="{BCE3AF90-F9DA-49C6-9EAF-ABC6C4BE95C8}"/>
+                <a16:creationId xmlns:a16="http://schemas.microsoft.com/office/drawing/2014/main" id="{D54AC521-822D-4329-A326-F9A6D324E6F5}"/>
               </a:ext>
             </a:extLst>
           </p:cNvPr>
@@ -5527,7 +5527,7 @@
           <p:cNvPr id="7" name="">
             <a:extLst xmlns:a="http://schemas.openxmlformats.org/drawingml/2006/main">
               <a:ext uri="{FF2B5EF4-FFF2-40B4-BE49-F238E27FC236}">
-                <a16:creationId xmlns:a16="http://schemas.microsoft.com/office/drawing/2014/main" id="{F906579C-85C5-4D89-99D2-85E8EFB237BF}"/>
+                <a16:creationId xmlns:a16="http://schemas.microsoft.com/office/drawing/2014/main" id="{3EF72A5C-B1AD-414E-972A-53C046A9250E}"/>
               </a:ext>
             </a:extLst>
           </p:cNvPr>
@@ -5560,7 +5560,7 @@
           <p:cNvPr id="8" name="">
             <a:extLst xmlns:a="http://schemas.openxmlformats.org/drawingml/2006/main">
               <a:ext uri="{FF2B5EF4-FFF2-40B4-BE49-F238E27FC236}">
-                <a16:creationId xmlns:a16="http://schemas.microsoft.com/office/drawing/2014/main" id="{274ED6E2-2949-4C79-BB7C-3D0B6B3F1FCC}"/>
+                <a16:creationId xmlns:a16="http://schemas.microsoft.com/office/drawing/2014/main" id="{A7ECC21B-68C7-4E0A-9AFB-4564D28A035A}"/>
               </a:ext>
             </a:extLst>
           </p:cNvPr>
@@ -5593,7 +5593,7 @@
           <p:cNvPr id="9" name="">
             <a:extLst xmlns:a="http://schemas.openxmlformats.org/drawingml/2006/main">
               <a:ext uri="{FF2B5EF4-FFF2-40B4-BE49-F238E27FC236}">
-                <a16:creationId xmlns:a16="http://schemas.microsoft.com/office/drawing/2014/main" id="{AD093990-9EBB-4EAD-98AB-5465A43C7745}"/>
+                <a16:creationId xmlns:a16="http://schemas.microsoft.com/office/drawing/2014/main" id="{1B2F5246-115F-4EF1-A8BD-1211FAB7A8FA}"/>
               </a:ext>
             </a:extLst>
           </p:cNvPr>
@@ -5657,7 +5657,7 @@
           <p:cNvPr id="10" name="">
             <a:extLst xmlns:a="http://schemas.openxmlformats.org/drawingml/2006/main">
               <a:ext uri="{FF2B5EF4-FFF2-40B4-BE49-F238E27FC236}">
-                <a16:creationId xmlns:a16="http://schemas.microsoft.com/office/drawing/2014/main" id="{7F440B8E-D592-472F-A958-E990C4F48FEC}"/>
+                <a16:creationId xmlns:a16="http://schemas.microsoft.com/office/drawing/2014/main" id="{53FA9947-8BF9-41BC-B1E8-E5C5F60978CE}"/>
               </a:ext>
             </a:extLst>
           </p:cNvPr>
@@ -5721,7 +5721,7 @@
           <p:cNvPr id="11" name="">
             <a:extLst xmlns:a="http://schemas.openxmlformats.org/drawingml/2006/main">
               <a:ext uri="{FF2B5EF4-FFF2-40B4-BE49-F238E27FC236}">
-                <a16:creationId xmlns:a16="http://schemas.microsoft.com/office/drawing/2014/main" id="{B393A5EE-7B3D-49A5-9171-A145C1E865F1}"/>
+                <a16:creationId xmlns:a16="http://schemas.microsoft.com/office/drawing/2014/main" id="{3F385631-2077-4DB2-99A7-95E01C8DF653}"/>
               </a:ext>
             </a:extLst>
           </p:cNvPr>
@@ -5775,7 +5775,7 @@
                 <a:ea typeface="Arial"/>
                 <a:cs typeface="Arial"/>
               </a:rPr>
-              <a:t>tags_read enviado pelo comunicador ou por dispositivo com rede.</a:t>
+              <a:t>tags_read enviado pelo comunicador ou por dispositivo conectado à rede.</a:t>
             </a:r>
           </a:p>
         </p:txBody>
@@ -5785,7 +5785,7 @@
           <p:cNvPr id="12" name="">
             <a:extLst xmlns:a="http://schemas.openxmlformats.org/drawingml/2006/main">
               <a:ext uri="{FF2B5EF4-FFF2-40B4-BE49-F238E27FC236}">
-                <a16:creationId xmlns:a16="http://schemas.microsoft.com/office/drawing/2014/main" id="{CA666687-AE34-4A03-89E4-3C3A4A50AF89}"/>
+                <a16:creationId xmlns:a16="http://schemas.microsoft.com/office/drawing/2014/main" id="{9AE9968D-5B91-4E70-89E4-5AA6723CF1E9}"/>
               </a:ext>
             </a:extLst>
           </p:cNvPr>
@@ -5818,7 +5818,7 @@
           <p:cNvPr id="13" name="">
             <a:extLst xmlns:a="http://schemas.openxmlformats.org/drawingml/2006/main">
               <a:ext uri="{FF2B5EF4-FFF2-40B4-BE49-F238E27FC236}">
-                <a16:creationId xmlns:a16="http://schemas.microsoft.com/office/drawing/2014/main" id="{CA257EE4-B260-416B-838A-01CC8D8102D4}"/>
+                <a16:creationId xmlns:a16="http://schemas.microsoft.com/office/drawing/2014/main" id="{6FA2A035-CC89-496A-B5B4-FB0B018CBDB2}"/>
               </a:ext>
             </a:extLst>
           </p:cNvPr>
@@ -5851,7 +5851,7 @@
           <p:cNvPr id="14" name="">
             <a:extLst xmlns:a="http://schemas.openxmlformats.org/drawingml/2006/main">
               <a:ext uri="{FF2B5EF4-FFF2-40B4-BE49-F238E27FC236}">
-                <a16:creationId xmlns:a16="http://schemas.microsoft.com/office/drawing/2014/main" id="{83E79EEE-06A1-4E94-87F8-81F39B194E51}"/>
+                <a16:creationId xmlns:a16="http://schemas.microsoft.com/office/drawing/2014/main" id="{88174E2A-765F-4207-A824-D4B510BF3BDE}"/>
               </a:ext>
             </a:extLst>
           </p:cNvPr>
@@ -5915,7 +5915,7 @@
           <p:cNvPr id="15" name="">
             <a:extLst xmlns:a="http://schemas.openxmlformats.org/drawingml/2006/main">
               <a:ext uri="{FF2B5EF4-FFF2-40B4-BE49-F238E27FC236}">
-                <a16:creationId xmlns:a16="http://schemas.microsoft.com/office/drawing/2014/main" id="{230476DF-59D1-4665-A483-4F01D5149D79}"/>
+                <a16:creationId xmlns:a16="http://schemas.microsoft.com/office/drawing/2014/main" id="{A75D0BE1-A8E9-41F1-9FA1-C4ADB9CD2461}"/>
               </a:ext>
             </a:extLst>
           </p:cNvPr>
@@ -5979,7 +5979,7 @@
           <p:cNvPr id="16" name="">
             <a:extLst xmlns:a="http://schemas.openxmlformats.org/drawingml/2006/main">
               <a:ext uri="{FF2B5EF4-FFF2-40B4-BE49-F238E27FC236}">
-                <a16:creationId xmlns:a16="http://schemas.microsoft.com/office/drawing/2014/main" id="{7EC51782-0EC7-4580-B92F-015E615A7957}"/>
+                <a16:creationId xmlns:a16="http://schemas.microsoft.com/office/drawing/2014/main" id="{C881D794-F168-4D7B-A0BF-F65E61EBB3DD}"/>
               </a:ext>
             </a:extLst>
           </p:cNvPr>
@@ -6043,7 +6043,7 @@
           <p:cNvPr id="17" name="">
             <a:extLst xmlns:a="http://schemas.openxmlformats.org/drawingml/2006/main">
               <a:ext uri="{FF2B5EF4-FFF2-40B4-BE49-F238E27FC236}">
-                <a16:creationId xmlns:a16="http://schemas.microsoft.com/office/drawing/2014/main" id="{C3C23BFB-6958-45B8-8375-8D89D07DF2BC}"/>
+                <a16:creationId xmlns:a16="http://schemas.microsoft.com/office/drawing/2014/main" id="{4252BCFF-E0ED-484B-B439-0DB9C5238AA8}"/>
               </a:ext>
             </a:extLst>
           </p:cNvPr>
@@ -6076,7 +6076,7 @@
           <p:cNvPr id="18" name="">
             <a:extLst xmlns:a="http://schemas.openxmlformats.org/drawingml/2006/main">
               <a:ext uri="{FF2B5EF4-FFF2-40B4-BE49-F238E27FC236}">
-                <a16:creationId xmlns:a16="http://schemas.microsoft.com/office/drawing/2014/main" id="{965D2C83-691D-468E-AB31-3EA9D4AB06F2}"/>
+                <a16:creationId xmlns:a16="http://schemas.microsoft.com/office/drawing/2014/main" id="{CE432C8E-B1A2-442B-8FF5-C77719373747}"/>
               </a:ext>
             </a:extLst>
           </p:cNvPr>
@@ -6109,7 +6109,7 @@
           <p:cNvPr id="19" name="">
             <a:extLst xmlns:a="http://schemas.openxmlformats.org/drawingml/2006/main">
               <a:ext uri="{FF2B5EF4-FFF2-40B4-BE49-F238E27FC236}">
-                <a16:creationId xmlns:a16="http://schemas.microsoft.com/office/drawing/2014/main" id="{EF351969-DA93-40F9-955E-5D5154A8DF84}"/>
+                <a16:creationId xmlns:a16="http://schemas.microsoft.com/office/drawing/2014/main" id="{89AEEF2E-6143-4577-8A15-DC16F1C4A54E}"/>
               </a:ext>
             </a:extLst>
           </p:cNvPr>
@@ -6173,7 +6173,7 @@
           <p:cNvPr id="20" name="">
             <a:extLst xmlns:a="http://schemas.openxmlformats.org/drawingml/2006/main">
               <a:ext uri="{FF2B5EF4-FFF2-40B4-BE49-F238E27FC236}">
-                <a16:creationId xmlns:a16="http://schemas.microsoft.com/office/drawing/2014/main" id="{97D88408-643E-4EA7-AD21-F17AA3E40E7A}"/>
+                <a16:creationId xmlns:a16="http://schemas.microsoft.com/office/drawing/2014/main" id="{78261F19-7179-45E4-BDFF-737410EFAB74}"/>
               </a:ext>
             </a:extLst>
           </p:cNvPr>
@@ -6237,7 +6237,7 @@
           <p:cNvPr id="21" name="">
             <a:extLst xmlns:a="http://schemas.openxmlformats.org/drawingml/2006/main">
               <a:ext uri="{FF2B5EF4-FFF2-40B4-BE49-F238E27FC236}">
-                <a16:creationId xmlns:a16="http://schemas.microsoft.com/office/drawing/2014/main" id="{306D91F4-94EA-4BEC-9E22-F2245A23AF69}"/>
+                <a16:creationId xmlns:a16="http://schemas.microsoft.com/office/drawing/2014/main" id="{936A5E55-3952-4918-9411-3D024F920C75}"/>
               </a:ext>
             </a:extLst>
           </p:cNvPr>
@@ -6299,7 +6299,7 @@
     </p:spTree>
     <p:extLst>
       <p:ext uri="{BB962C8B-B14F-4D97-AF65-F5344CB8AC3E}">
-        <p14:creationId xmlns:p14="http://schemas.microsoft.com/office/powerpoint/2010/main" val="1487319244"/>
+        <p14:creationId xmlns:p14="http://schemas.microsoft.com/office/powerpoint/2010/main" val="341238139"/>
       </p:ext>
     </p:extLst>
   </p:cSld>
@@ -6323,7 +6323,7 @@
           <p:cNvPr id="1" name="">
             <a:extLst xmlns:a="http://schemas.openxmlformats.org/drawingml/2006/main">
               <a:ext uri="{FF2B5EF4-FFF2-40B4-BE49-F238E27FC236}">
-                <a16:creationId xmlns:a16="http://schemas.microsoft.com/office/drawing/2014/main" id="{F59183EC-0B08-4047-876C-BDE32F4FDB50}"/>
+                <a16:creationId xmlns:a16="http://schemas.microsoft.com/office/drawing/2014/main" id="{3B0DB5BA-648A-4D77-B150-4D5E9E578E44}"/>
               </a:ext>
             </a:extLst>
           </p:cNvPr>
@@ -6358,7 +6358,7 @@
           <p:cNvPr id="2" name="">
             <a:extLst xmlns:a="http://schemas.openxmlformats.org/drawingml/2006/main">
               <a:ext uri="{FF2B5EF4-FFF2-40B4-BE49-F238E27FC236}">
-                <a16:creationId xmlns:a16="http://schemas.microsoft.com/office/drawing/2014/main" id="{33C90837-77BC-4B13-9288-B9DACDC2124D}"/>
+                <a16:creationId xmlns:a16="http://schemas.microsoft.com/office/drawing/2014/main" id="{CDB9693F-77D8-4629-A1D3-354F9BD4BB5E}"/>
               </a:ext>
             </a:extLst>
           </p:cNvPr>
@@ -6393,7 +6393,7 @@
           <p:cNvPr id="3" name="">
             <a:extLst xmlns:a="http://schemas.openxmlformats.org/drawingml/2006/main">
               <a:ext uri="{FF2B5EF4-FFF2-40B4-BE49-F238E27FC236}">
-                <a16:creationId xmlns:a16="http://schemas.microsoft.com/office/drawing/2014/main" id="{05064874-6D1F-4E45-8CAE-940A2B610A3F}"/>
+                <a16:creationId xmlns:a16="http://schemas.microsoft.com/office/drawing/2014/main" id="{016815E9-CD33-4CA2-9394-97B7F8AA5902}"/>
               </a:ext>
             </a:extLst>
           </p:cNvPr>
@@ -6428,7 +6428,7 @@
           <p:cNvPr id="4" name="kicker-13-label">
             <a:extLst xmlns:a="http://schemas.openxmlformats.org/drawingml/2006/main">
               <a:ext uri="{FF2B5EF4-FFF2-40B4-BE49-F238E27FC236}">
-                <a16:creationId xmlns:a16="http://schemas.microsoft.com/office/drawing/2014/main" id="{F8A7A11E-43CF-4D10-BB9D-D51C99963850}"/>
+                <a16:creationId xmlns:a16="http://schemas.microsoft.com/office/drawing/2014/main" id="{6278A94F-1903-4A70-90F4-23E30ED0D32F}"/>
               </a:ext>
             </a:extLst>
           </p:cNvPr>
@@ -6492,7 +6492,7 @@
           <p:cNvPr id="5" name="">
             <a:extLst xmlns:a="http://schemas.openxmlformats.org/drawingml/2006/main">
               <a:ext uri="{FF2B5EF4-FFF2-40B4-BE49-F238E27FC236}">
-                <a16:creationId xmlns:a16="http://schemas.microsoft.com/office/drawing/2014/main" id="{11E9F2E2-734D-4275-90F0-6009F0C89D50}"/>
+                <a16:creationId xmlns:a16="http://schemas.microsoft.com/office/drawing/2014/main" id="{C3C4A1D5-2ED9-4889-96CF-F0E3A8A4BFBC}"/>
               </a:ext>
             </a:extLst>
           </p:cNvPr>
@@ -6556,7 +6556,7 @@
           <p:cNvPr id="6" name="">
             <a:extLst xmlns:a="http://schemas.openxmlformats.org/drawingml/2006/main">
               <a:ext uri="{FF2B5EF4-FFF2-40B4-BE49-F238E27FC236}">
-                <a16:creationId xmlns:a16="http://schemas.microsoft.com/office/drawing/2014/main" id="{C637117E-A594-46AA-AE4A-07E96F3ED656}"/>
+                <a16:creationId xmlns:a16="http://schemas.microsoft.com/office/drawing/2014/main" id="{08449CE0-1B47-4544-8363-7156E9A472BA}"/>
               </a:ext>
             </a:extLst>
           </p:cNvPr>
@@ -6620,7 +6620,7 @@
           <p:cNvPr id="7" name="">
             <a:extLst xmlns:a="http://schemas.openxmlformats.org/drawingml/2006/main">
               <a:ext uri="{FF2B5EF4-FFF2-40B4-BE49-F238E27FC236}">
-                <a16:creationId xmlns:a16="http://schemas.microsoft.com/office/drawing/2014/main" id="{CB58F05A-471C-489B-8A8D-4737A28EC812}"/>
+                <a16:creationId xmlns:a16="http://schemas.microsoft.com/office/drawing/2014/main" id="{81608831-8938-4C2C-B38A-BD140FEAAD80}"/>
               </a:ext>
             </a:extLst>
           </p:cNvPr>
@@ -6657,7 +6657,7 @@
           <p:nvPr/>
         </p:nvPicPr>
         <p:blipFill>
-          <a:blip xmlns:r="http://schemas.openxmlformats.org/officeDocument/2006/relationships" xmlns:a="http://schemas.openxmlformats.org/drawingml/2006/main" r:embed="Rf7cef116931349dd"/>
+          <a:blip xmlns:r="http://schemas.openxmlformats.org/officeDocument/2006/relationships" xmlns:a="http://schemas.openxmlformats.org/drawingml/2006/main" r:embed="R139495e2785e4183"/>
           <a:stretch xmlns:a="http://schemas.openxmlformats.org/drawingml/2006/main"/>
         </p:blipFill>
         <p:spPr>
@@ -6675,7 +6675,7 @@
           <p:cNvPr id="9" name="">
             <a:extLst xmlns:a="http://schemas.openxmlformats.org/drawingml/2006/main">
               <a:ext uri="{FF2B5EF4-FFF2-40B4-BE49-F238E27FC236}">
-                <a16:creationId xmlns:a16="http://schemas.microsoft.com/office/drawing/2014/main" id="{3D5BC9DD-0238-4512-92A5-9A623D01AE87}"/>
+                <a16:creationId xmlns:a16="http://schemas.microsoft.com/office/drawing/2014/main" id="{544553A0-0C40-4C25-98B2-72BE86241324}"/>
               </a:ext>
             </a:extLst>
           </p:cNvPr>
@@ -6737,7 +6737,7 @@
     </p:spTree>
     <p:extLst>
       <p:ext uri="{BB962C8B-B14F-4D97-AF65-F5344CB8AC3E}">
-        <p14:creationId xmlns:p14="http://schemas.microsoft.com/office/powerpoint/2010/main" val="1836739828"/>
+        <p14:creationId xmlns:p14="http://schemas.microsoft.com/office/powerpoint/2010/main" val="1680946120"/>
       </p:ext>
     </p:extLst>
   </p:cSld>
@@ -6761,7 +6761,7 @@
           <p:cNvPr id="1" name="">
             <a:extLst xmlns:a="http://schemas.openxmlformats.org/drawingml/2006/main">
               <a:ext uri="{FF2B5EF4-FFF2-40B4-BE49-F238E27FC236}">
-                <a16:creationId xmlns:a16="http://schemas.microsoft.com/office/drawing/2014/main" id="{D8FBD14E-3DE6-43E0-B19B-3921E4C6AFA6}"/>
+                <a16:creationId xmlns:a16="http://schemas.microsoft.com/office/drawing/2014/main" id="{2EF0BA2D-5688-445A-845E-29129AB583CF}"/>
               </a:ext>
             </a:extLst>
           </p:cNvPr>
@@ -6796,7 +6796,7 @@
           <p:cNvPr id="2" name="">
             <a:extLst xmlns:a="http://schemas.openxmlformats.org/drawingml/2006/main">
               <a:ext uri="{FF2B5EF4-FFF2-40B4-BE49-F238E27FC236}">
-                <a16:creationId xmlns:a16="http://schemas.microsoft.com/office/drawing/2014/main" id="{F8AA70B8-2C49-42EC-A309-B9FF760817C3}"/>
+                <a16:creationId xmlns:a16="http://schemas.microsoft.com/office/drawing/2014/main" id="{5A0F9E65-62AA-4E72-B9C4-71351F5BCF4F}"/>
               </a:ext>
             </a:extLst>
           </p:cNvPr>
@@ -6831,7 +6831,7 @@
           <p:cNvPr id="3" name="">
             <a:extLst xmlns:a="http://schemas.openxmlformats.org/drawingml/2006/main">
               <a:ext uri="{FF2B5EF4-FFF2-40B4-BE49-F238E27FC236}">
-                <a16:creationId xmlns:a16="http://schemas.microsoft.com/office/drawing/2014/main" id="{83ED56D5-2778-44F9-B113-75F70039AA01}"/>
+                <a16:creationId xmlns:a16="http://schemas.microsoft.com/office/drawing/2014/main" id="{CDB4AE69-0DD2-4218-B831-4FD737DD5334}"/>
               </a:ext>
             </a:extLst>
           </p:cNvPr>
@@ -6866,7 +6866,7 @@
           <p:cNvPr id="4" name="kicker-14-label">
             <a:extLst xmlns:a="http://schemas.openxmlformats.org/drawingml/2006/main">
               <a:ext uri="{FF2B5EF4-FFF2-40B4-BE49-F238E27FC236}">
-                <a16:creationId xmlns:a16="http://schemas.microsoft.com/office/drawing/2014/main" id="{385794FC-D7A6-41ED-BEBC-04CA91AAAF4A}"/>
+                <a16:creationId xmlns:a16="http://schemas.microsoft.com/office/drawing/2014/main" id="{6EB50B20-642E-4B24-8391-AD5AE55EF40A}"/>
               </a:ext>
             </a:extLst>
           </p:cNvPr>
@@ -6930,7 +6930,7 @@
           <p:cNvPr id="5" name="">
             <a:extLst xmlns:a="http://schemas.openxmlformats.org/drawingml/2006/main">
               <a:ext uri="{FF2B5EF4-FFF2-40B4-BE49-F238E27FC236}">
-                <a16:creationId xmlns:a16="http://schemas.microsoft.com/office/drawing/2014/main" id="{6FF1EC9A-0AB5-41AB-A2FE-854058F0B90F}"/>
+                <a16:creationId xmlns:a16="http://schemas.microsoft.com/office/drawing/2014/main" id="{011E8726-C7B7-4384-8AE7-AF56CA2F6DA8}"/>
               </a:ext>
             </a:extLst>
           </p:cNvPr>
@@ -6994,7 +6994,7 @@
           <p:cNvPr id="6" name="">
             <a:extLst xmlns:a="http://schemas.openxmlformats.org/drawingml/2006/main">
               <a:ext uri="{FF2B5EF4-FFF2-40B4-BE49-F238E27FC236}">
-                <a16:creationId xmlns:a16="http://schemas.microsoft.com/office/drawing/2014/main" id="{B2FCF761-63F9-495B-A9CC-EB1B12D6CF51}"/>
+                <a16:creationId xmlns:a16="http://schemas.microsoft.com/office/drawing/2014/main" id="{5FFEACC4-5D5D-400D-8FBB-5CB1F69EE52F}"/>
               </a:ext>
             </a:extLst>
           </p:cNvPr>
@@ -7058,7 +7058,7 @@
           <p:cNvPr id="7" name="">
             <a:extLst xmlns:a="http://schemas.openxmlformats.org/drawingml/2006/main">
               <a:ext uri="{FF2B5EF4-FFF2-40B4-BE49-F238E27FC236}">
-                <a16:creationId xmlns:a16="http://schemas.microsoft.com/office/drawing/2014/main" id="{72687236-C59E-4E23-BE9F-D127F1F7751B}"/>
+                <a16:creationId xmlns:a16="http://schemas.microsoft.com/office/drawing/2014/main" id="{E10AFEB0-526C-49B7-8069-E469727A6483}"/>
               </a:ext>
             </a:extLst>
           </p:cNvPr>
@@ -7095,7 +7095,7 @@
           <p:nvPr/>
         </p:nvPicPr>
         <p:blipFill>
-          <a:blip xmlns:r="http://schemas.openxmlformats.org/officeDocument/2006/relationships" xmlns:a="http://schemas.openxmlformats.org/drawingml/2006/main" r:embed="Rd4c3abe552da4233"/>
+          <a:blip xmlns:r="http://schemas.openxmlformats.org/officeDocument/2006/relationships" xmlns:a="http://schemas.openxmlformats.org/drawingml/2006/main" r:embed="R49dd17c8574144f8"/>
           <a:stretch xmlns:a="http://schemas.openxmlformats.org/drawingml/2006/main"/>
         </p:blipFill>
         <p:spPr>
@@ -7113,7 +7113,7 @@
           <p:cNvPr id="9" name="">
             <a:extLst xmlns:a="http://schemas.openxmlformats.org/drawingml/2006/main">
               <a:ext uri="{FF2B5EF4-FFF2-40B4-BE49-F238E27FC236}">
-                <a16:creationId xmlns:a16="http://schemas.microsoft.com/office/drawing/2014/main" id="{4190A777-0566-4F80-B3C3-DC9B1DC4EEF7}"/>
+                <a16:creationId xmlns:a16="http://schemas.microsoft.com/office/drawing/2014/main" id="{E2AA5352-41FF-4622-A6C3-BA1736F92197}"/>
               </a:ext>
             </a:extLst>
           </p:cNvPr>
@@ -7175,7 +7175,7 @@
     </p:spTree>
     <p:extLst>
       <p:ext uri="{BB962C8B-B14F-4D97-AF65-F5344CB8AC3E}">
-        <p14:creationId xmlns:p14="http://schemas.microsoft.com/office/powerpoint/2010/main" val="1945408907"/>
+        <p14:creationId xmlns:p14="http://schemas.microsoft.com/office/powerpoint/2010/main" val="228050171"/>
       </p:ext>
     </p:extLst>
   </p:cSld>
@@ -7199,7 +7199,7 @@
           <p:cNvPr id="1" name="">
             <a:extLst xmlns:a="http://schemas.openxmlformats.org/drawingml/2006/main">
               <a:ext uri="{FF2B5EF4-FFF2-40B4-BE49-F238E27FC236}">
-                <a16:creationId xmlns:a16="http://schemas.microsoft.com/office/drawing/2014/main" id="{6D612ADE-3EE6-456B-AC7F-29ADB38C7B37}"/>
+                <a16:creationId xmlns:a16="http://schemas.microsoft.com/office/drawing/2014/main" id="{3F9C647F-763A-4DA7-82A5-704D39BCCCA3}"/>
               </a:ext>
             </a:extLst>
           </p:cNvPr>
@@ -7234,7 +7234,7 @@
           <p:cNvPr id="2" name="">
             <a:extLst xmlns:a="http://schemas.openxmlformats.org/drawingml/2006/main">
               <a:ext uri="{FF2B5EF4-FFF2-40B4-BE49-F238E27FC236}">
-                <a16:creationId xmlns:a16="http://schemas.microsoft.com/office/drawing/2014/main" id="{2B13894D-634B-4D76-AEDE-F7A7C0727330}"/>
+                <a16:creationId xmlns:a16="http://schemas.microsoft.com/office/drawing/2014/main" id="{910D881D-763B-4C15-8058-17C7B9DACE2B}"/>
               </a:ext>
             </a:extLst>
           </p:cNvPr>
@@ -7269,7 +7269,7 @@
           <p:cNvPr id="3" name="">
             <a:extLst xmlns:a="http://schemas.openxmlformats.org/drawingml/2006/main">
               <a:ext uri="{FF2B5EF4-FFF2-40B4-BE49-F238E27FC236}">
-                <a16:creationId xmlns:a16="http://schemas.microsoft.com/office/drawing/2014/main" id="{DA6C5524-E9ED-4E94-BA1D-1B1659615979}"/>
+                <a16:creationId xmlns:a16="http://schemas.microsoft.com/office/drawing/2014/main" id="{E1887B9C-CEDB-46A9-94F4-B9169474B394}"/>
               </a:ext>
             </a:extLst>
           </p:cNvPr>
@@ -7304,7 +7304,7 @@
           <p:cNvPr id="4" name="kicker-15-label">
             <a:extLst xmlns:a="http://schemas.openxmlformats.org/drawingml/2006/main">
               <a:ext uri="{FF2B5EF4-FFF2-40B4-BE49-F238E27FC236}">
-                <a16:creationId xmlns:a16="http://schemas.microsoft.com/office/drawing/2014/main" id="{F49D7BA0-A7D8-499A-BD46-B41E8AA87F91}"/>
+                <a16:creationId xmlns:a16="http://schemas.microsoft.com/office/drawing/2014/main" id="{C664B2FA-832C-4D98-92FC-3DE8666A71B2}"/>
               </a:ext>
             </a:extLst>
           </p:cNvPr>
@@ -7368,7 +7368,7 @@
           <p:cNvPr id="5" name="">
             <a:extLst xmlns:a="http://schemas.openxmlformats.org/drawingml/2006/main">
               <a:ext uri="{FF2B5EF4-FFF2-40B4-BE49-F238E27FC236}">
-                <a16:creationId xmlns:a16="http://schemas.microsoft.com/office/drawing/2014/main" id="{1211242D-72EB-4903-BB08-E9AF04DAFABF}"/>
+                <a16:creationId xmlns:a16="http://schemas.microsoft.com/office/drawing/2014/main" id="{5076B7A1-D549-4262-A168-1E3A5994B2F4}"/>
               </a:ext>
             </a:extLst>
           </p:cNvPr>
@@ -7432,7 +7432,7 @@
           <p:cNvPr id="6" name="">
             <a:extLst xmlns:a="http://schemas.openxmlformats.org/drawingml/2006/main">
               <a:ext uri="{FF2B5EF4-FFF2-40B4-BE49-F238E27FC236}">
-                <a16:creationId xmlns:a16="http://schemas.microsoft.com/office/drawing/2014/main" id="{A3ADDD78-6758-4489-B570-104810ED615A}"/>
+                <a16:creationId xmlns:a16="http://schemas.microsoft.com/office/drawing/2014/main" id="{650B008F-48CC-47D1-AC61-6A2A014F8434}"/>
               </a:ext>
             </a:extLst>
           </p:cNvPr>
@@ -7486,7 +7486,7 @@
                 <a:ea typeface="Arial"/>
                 <a:cs typeface="Arial"/>
               </a:rPr>
-              <a:t>Divergências deixam de ser anotações soltas e passam a ter acompanhamento.</a:t>
+              <a:t>Divergências deixam de ser registros avulsos e passam a ter acompanhamento.</a:t>
             </a:r>
           </a:p>
         </p:txBody>
@@ -7496,7 +7496,7 @@
           <p:cNvPr id="7" name="">
             <a:extLst xmlns:a="http://schemas.openxmlformats.org/drawingml/2006/main">
               <a:ext uri="{FF2B5EF4-FFF2-40B4-BE49-F238E27FC236}">
-                <a16:creationId xmlns:a16="http://schemas.microsoft.com/office/drawing/2014/main" id="{91714172-F7B7-4234-9D6F-1AD72A02923E}"/>
+                <a16:creationId xmlns:a16="http://schemas.microsoft.com/office/drawing/2014/main" id="{1303AB94-DE84-442A-87A7-E70611CE9461}"/>
               </a:ext>
             </a:extLst>
           </p:cNvPr>
@@ -7533,7 +7533,7 @@
           <p:nvPr/>
         </p:nvPicPr>
         <p:blipFill>
-          <a:blip xmlns:r="http://schemas.openxmlformats.org/officeDocument/2006/relationships" xmlns:a="http://schemas.openxmlformats.org/drawingml/2006/main" r:embed="R2117966b29104cfa"/>
+          <a:blip xmlns:r="http://schemas.openxmlformats.org/officeDocument/2006/relationships" xmlns:a="http://schemas.openxmlformats.org/drawingml/2006/main" r:embed="R18e75bbc12fe4a06"/>
           <a:stretch xmlns:a="http://schemas.openxmlformats.org/drawingml/2006/main"/>
         </p:blipFill>
         <p:spPr>
@@ -7551,7 +7551,7 @@
           <p:cNvPr id="9" name="">
             <a:extLst xmlns:a="http://schemas.openxmlformats.org/drawingml/2006/main">
               <a:ext uri="{FF2B5EF4-FFF2-40B4-BE49-F238E27FC236}">
-                <a16:creationId xmlns:a16="http://schemas.microsoft.com/office/drawing/2014/main" id="{45430145-5A6E-42D8-8B84-5E6271FCDED3}"/>
+                <a16:creationId xmlns:a16="http://schemas.microsoft.com/office/drawing/2014/main" id="{4C42C508-7570-4FD9-8C4E-D7BCA9260412}"/>
               </a:ext>
             </a:extLst>
           </p:cNvPr>
@@ -7613,7 +7613,7 @@
     </p:spTree>
     <p:extLst>
       <p:ext uri="{BB962C8B-B14F-4D97-AF65-F5344CB8AC3E}">
-        <p14:creationId xmlns:p14="http://schemas.microsoft.com/office/powerpoint/2010/main" val="28378174"/>
+        <p14:creationId xmlns:p14="http://schemas.microsoft.com/office/powerpoint/2010/main" val="228579272"/>
       </p:ext>
     </p:extLst>
   </p:cSld>
@@ -7637,7 +7637,7 @@
           <p:cNvPr id="1" name="">
             <a:extLst xmlns:a="http://schemas.openxmlformats.org/drawingml/2006/main">
               <a:ext uri="{FF2B5EF4-FFF2-40B4-BE49-F238E27FC236}">
-                <a16:creationId xmlns:a16="http://schemas.microsoft.com/office/drawing/2014/main" id="{2C11F806-D6E8-4AEE-A136-4718B06DAD9B}"/>
+                <a16:creationId xmlns:a16="http://schemas.microsoft.com/office/drawing/2014/main" id="{8309DF2B-D175-4E02-927D-C8D11F60B1CD}"/>
               </a:ext>
             </a:extLst>
           </p:cNvPr>
@@ -7672,7 +7672,7 @@
           <p:cNvPr id="2" name="">
             <a:extLst xmlns:a="http://schemas.openxmlformats.org/drawingml/2006/main">
               <a:ext uri="{FF2B5EF4-FFF2-40B4-BE49-F238E27FC236}">
-                <a16:creationId xmlns:a16="http://schemas.microsoft.com/office/drawing/2014/main" id="{20BF0FA2-7D30-402C-B86F-4F469ADABF2B}"/>
+                <a16:creationId xmlns:a16="http://schemas.microsoft.com/office/drawing/2014/main" id="{1A8975BD-10EE-4921-B16E-0295B90AE0CF}"/>
               </a:ext>
             </a:extLst>
           </p:cNvPr>
@@ -7707,7 +7707,7 @@
           <p:cNvPr id="3" name="">
             <a:extLst xmlns:a="http://schemas.openxmlformats.org/drawingml/2006/main">
               <a:ext uri="{FF2B5EF4-FFF2-40B4-BE49-F238E27FC236}">
-                <a16:creationId xmlns:a16="http://schemas.microsoft.com/office/drawing/2014/main" id="{A6830016-F883-4257-80FF-103BBEDBF1F0}"/>
+                <a16:creationId xmlns:a16="http://schemas.microsoft.com/office/drawing/2014/main" id="{5EC49DD5-88C1-46CC-8C01-D08A6D94A38D}"/>
               </a:ext>
             </a:extLst>
           </p:cNvPr>
@@ -7742,7 +7742,7 @@
           <p:cNvPr id="4" name="kicker-16-label">
             <a:extLst xmlns:a="http://schemas.openxmlformats.org/drawingml/2006/main">
               <a:ext uri="{FF2B5EF4-FFF2-40B4-BE49-F238E27FC236}">
-                <a16:creationId xmlns:a16="http://schemas.microsoft.com/office/drawing/2014/main" id="{49157E92-E497-4049-A2AE-89F0241E0C58}"/>
+                <a16:creationId xmlns:a16="http://schemas.microsoft.com/office/drawing/2014/main" id="{F26B368A-AA58-4AE4-95EE-5616E0A8DE10}"/>
               </a:ext>
             </a:extLst>
           </p:cNvPr>
@@ -7806,7 +7806,7 @@
           <p:cNvPr id="5" name="">
             <a:extLst xmlns:a="http://schemas.openxmlformats.org/drawingml/2006/main">
               <a:ext uri="{FF2B5EF4-FFF2-40B4-BE49-F238E27FC236}">
-                <a16:creationId xmlns:a16="http://schemas.microsoft.com/office/drawing/2014/main" id="{4D445E5E-18BD-4B27-BC88-8941D0252DBF}"/>
+                <a16:creationId xmlns:a16="http://schemas.microsoft.com/office/drawing/2014/main" id="{2F9EFC27-510C-4A45-BFE7-9159D61C8723}"/>
               </a:ext>
             </a:extLst>
           </p:cNvPr>
@@ -7870,7 +7870,7 @@
           <p:cNvPr id="6" name="">
             <a:extLst xmlns:a="http://schemas.openxmlformats.org/drawingml/2006/main">
               <a:ext uri="{FF2B5EF4-FFF2-40B4-BE49-F238E27FC236}">
-                <a16:creationId xmlns:a16="http://schemas.microsoft.com/office/drawing/2014/main" id="{7714F0C6-5848-44BD-A8CD-DCB4793A5B07}"/>
+                <a16:creationId xmlns:a16="http://schemas.microsoft.com/office/drawing/2014/main" id="{186938E4-3DFF-49BE-B3D1-41F82794BD63}"/>
               </a:ext>
             </a:extLst>
           </p:cNvPr>
@@ -7934,7 +7934,7 @@
           <p:cNvPr id="7" name="">
             <a:extLst xmlns:a="http://schemas.openxmlformats.org/drawingml/2006/main">
               <a:ext uri="{FF2B5EF4-FFF2-40B4-BE49-F238E27FC236}">
-                <a16:creationId xmlns:a16="http://schemas.microsoft.com/office/drawing/2014/main" id="{793617D2-88C4-4340-943F-9DCEB2B6C478}"/>
+                <a16:creationId xmlns:a16="http://schemas.microsoft.com/office/drawing/2014/main" id="{6CE776D5-9BC5-4CAE-B153-31248C5593E7}"/>
               </a:ext>
             </a:extLst>
           </p:cNvPr>
@@ -7969,7 +7969,7 @@
           <p:cNvPr id="8" name="">
             <a:extLst xmlns:a="http://schemas.openxmlformats.org/drawingml/2006/main">
               <a:ext uri="{FF2B5EF4-FFF2-40B4-BE49-F238E27FC236}">
-                <a16:creationId xmlns:a16="http://schemas.microsoft.com/office/drawing/2014/main" id="{D6B852C4-786E-4C3A-883C-02BF032DC966}"/>
+                <a16:creationId xmlns:a16="http://schemas.microsoft.com/office/drawing/2014/main" id="{8BD06CEE-DA48-4D9C-8750-405F49894FA8}"/>
               </a:ext>
             </a:extLst>
           </p:cNvPr>
@@ -8033,7 +8033,7 @@
           <p:cNvPr id="9" name="">
             <a:extLst xmlns:a="http://schemas.openxmlformats.org/drawingml/2006/main">
               <a:ext uri="{FF2B5EF4-FFF2-40B4-BE49-F238E27FC236}">
-                <a16:creationId xmlns:a16="http://schemas.microsoft.com/office/drawing/2014/main" id="{DADACFE2-0BEF-483E-B1FD-1C63309AFF50}"/>
+                <a16:creationId xmlns:a16="http://schemas.microsoft.com/office/drawing/2014/main" id="{DC597304-D156-4894-86D4-69A1EC279876}"/>
               </a:ext>
             </a:extLst>
           </p:cNvPr>
@@ -8068,7 +8068,7 @@
           <p:cNvPr id="10" name="">
             <a:extLst xmlns:a="http://schemas.openxmlformats.org/drawingml/2006/main">
               <a:ext uri="{FF2B5EF4-FFF2-40B4-BE49-F238E27FC236}">
-                <a16:creationId xmlns:a16="http://schemas.microsoft.com/office/drawing/2014/main" id="{B9833211-DCD1-4834-8D87-86A68D59651F}"/>
+                <a16:creationId xmlns:a16="http://schemas.microsoft.com/office/drawing/2014/main" id="{3807F017-5557-482F-AAB4-8B40FDC3EE36}"/>
               </a:ext>
             </a:extLst>
           </p:cNvPr>
@@ -8132,7 +8132,7 @@
           <p:cNvPr id="11" name="">
             <a:extLst xmlns:a="http://schemas.openxmlformats.org/drawingml/2006/main">
               <a:ext uri="{FF2B5EF4-FFF2-40B4-BE49-F238E27FC236}">
-                <a16:creationId xmlns:a16="http://schemas.microsoft.com/office/drawing/2014/main" id="{751275FE-4848-456D-84A1-E4E2606521BE}"/>
+                <a16:creationId xmlns:a16="http://schemas.microsoft.com/office/drawing/2014/main" id="{721171DE-304B-41A7-878A-54751B357B6C}"/>
               </a:ext>
             </a:extLst>
           </p:cNvPr>
@@ -8167,7 +8167,7 @@
           <p:cNvPr id="12" name="">
             <a:extLst xmlns:a="http://schemas.openxmlformats.org/drawingml/2006/main">
               <a:ext uri="{FF2B5EF4-FFF2-40B4-BE49-F238E27FC236}">
-                <a16:creationId xmlns:a16="http://schemas.microsoft.com/office/drawing/2014/main" id="{D85EBDFD-B455-408E-8C83-297323B071B9}"/>
+                <a16:creationId xmlns:a16="http://schemas.microsoft.com/office/drawing/2014/main" id="{BD53EBFB-B619-4E6D-B42A-EF98A1D1B1E4}"/>
               </a:ext>
             </a:extLst>
           </p:cNvPr>
@@ -8231,7 +8231,7 @@
           <p:cNvPr id="13" name="">
             <a:extLst xmlns:a="http://schemas.openxmlformats.org/drawingml/2006/main">
               <a:ext uri="{FF2B5EF4-FFF2-40B4-BE49-F238E27FC236}">
-                <a16:creationId xmlns:a16="http://schemas.microsoft.com/office/drawing/2014/main" id="{D28F1886-3F5C-45CA-A689-78809A975F67}"/>
+                <a16:creationId xmlns:a16="http://schemas.microsoft.com/office/drawing/2014/main" id="{990280A3-8CC7-4F92-B7DC-9A3C27240A6A}"/>
               </a:ext>
             </a:extLst>
           </p:cNvPr>
@@ -8264,7 +8264,7 @@
           <p:cNvPr id="14" name="">
             <a:extLst xmlns:a="http://schemas.openxmlformats.org/drawingml/2006/main">
               <a:ext uri="{FF2B5EF4-FFF2-40B4-BE49-F238E27FC236}">
-                <a16:creationId xmlns:a16="http://schemas.microsoft.com/office/drawing/2014/main" id="{E13FDB10-9664-4B4F-A7BE-491515FCEE83}"/>
+                <a16:creationId xmlns:a16="http://schemas.microsoft.com/office/drawing/2014/main" id="{65913B18-5F93-4A25-B48B-00550B31F7F7}"/>
               </a:ext>
             </a:extLst>
           </p:cNvPr>
@@ -8328,7 +8328,7 @@
           <p:cNvPr id="15" name="">
             <a:extLst xmlns:a="http://schemas.openxmlformats.org/drawingml/2006/main">
               <a:ext uri="{FF2B5EF4-FFF2-40B4-BE49-F238E27FC236}">
-                <a16:creationId xmlns:a16="http://schemas.microsoft.com/office/drawing/2014/main" id="{870CA847-0119-48B1-90FC-084C4EAC571B}"/>
+                <a16:creationId xmlns:a16="http://schemas.microsoft.com/office/drawing/2014/main" id="{C69DFE6F-1762-46F9-8675-BFA91FE49473}"/>
               </a:ext>
             </a:extLst>
           </p:cNvPr>
@@ -8361,7 +8361,7 @@
           <p:cNvPr id="16" name="">
             <a:extLst xmlns:a="http://schemas.openxmlformats.org/drawingml/2006/main">
               <a:ext uri="{FF2B5EF4-FFF2-40B4-BE49-F238E27FC236}">
-                <a16:creationId xmlns:a16="http://schemas.microsoft.com/office/drawing/2014/main" id="{6D46F0E8-F93C-46BE-9A73-09BE0EA3BB8F}"/>
+                <a16:creationId xmlns:a16="http://schemas.microsoft.com/office/drawing/2014/main" id="{E4803207-8679-4256-BC5A-23A4EAB0F2CC}"/>
               </a:ext>
             </a:extLst>
           </p:cNvPr>
@@ -8425,7 +8425,7 @@
           <p:cNvPr id="17" name="">
             <a:extLst xmlns:a="http://schemas.openxmlformats.org/drawingml/2006/main">
               <a:ext uri="{FF2B5EF4-FFF2-40B4-BE49-F238E27FC236}">
-                <a16:creationId xmlns:a16="http://schemas.microsoft.com/office/drawing/2014/main" id="{4AF3B053-F694-4FFC-8892-44A2D2888DEF}"/>
+                <a16:creationId xmlns:a16="http://schemas.microsoft.com/office/drawing/2014/main" id="{862445F7-3B6B-4518-A297-9BA76AAD2F7E}"/>
               </a:ext>
             </a:extLst>
           </p:cNvPr>
@@ -8458,7 +8458,7 @@
           <p:cNvPr id="18" name="">
             <a:extLst xmlns:a="http://schemas.openxmlformats.org/drawingml/2006/main">
               <a:ext uri="{FF2B5EF4-FFF2-40B4-BE49-F238E27FC236}">
-                <a16:creationId xmlns:a16="http://schemas.microsoft.com/office/drawing/2014/main" id="{2656D515-E805-49A3-A6E7-947A89221D08}"/>
+                <a16:creationId xmlns:a16="http://schemas.microsoft.com/office/drawing/2014/main" id="{58E4DFFF-B1BD-46B7-B9F9-DFF716AE0E6F}"/>
               </a:ext>
             </a:extLst>
           </p:cNvPr>
@@ -8512,7 +8512,7 @@
                 <a:ea typeface="Arial"/>
                 <a:cs typeface="Arial"/>
               </a:rPr>
-              <a:t>item detectado e ausentes classificados</a:t>
+              <a:t>item detectado e itens ausentes classificados</a:t>
             </a:r>
           </a:p>
         </p:txBody>
@@ -8522,7 +8522,7 @@
           <p:cNvPr id="19" name="">
             <a:extLst xmlns:a="http://schemas.openxmlformats.org/drawingml/2006/main">
               <a:ext uri="{FF2B5EF4-FFF2-40B4-BE49-F238E27FC236}">
-                <a16:creationId xmlns:a16="http://schemas.microsoft.com/office/drawing/2014/main" id="{FEF3F5D3-62AB-44A0-8196-6FA11ED4421C}"/>
+                <a16:creationId xmlns:a16="http://schemas.microsoft.com/office/drawing/2014/main" id="{A5CB03F9-0566-4887-B729-56527F343112}"/>
               </a:ext>
             </a:extLst>
           </p:cNvPr>
@@ -8555,7 +8555,7 @@
           <p:cNvPr id="20" name="">
             <a:extLst xmlns:a="http://schemas.openxmlformats.org/drawingml/2006/main">
               <a:ext uri="{FF2B5EF4-FFF2-40B4-BE49-F238E27FC236}">
-                <a16:creationId xmlns:a16="http://schemas.microsoft.com/office/drawing/2014/main" id="{C64EC3D0-1594-46D0-A676-EDB6EE9E5137}"/>
+                <a16:creationId xmlns:a16="http://schemas.microsoft.com/office/drawing/2014/main" id="{ADD0D57C-B2E8-4C23-BD98-AC5ADD25ADCB}"/>
               </a:ext>
             </a:extLst>
           </p:cNvPr>
@@ -8619,7 +8619,7 @@
           <p:cNvPr id="21" name="">
             <a:extLst xmlns:a="http://schemas.openxmlformats.org/drawingml/2006/main">
               <a:ext uri="{FF2B5EF4-FFF2-40B4-BE49-F238E27FC236}">
-                <a16:creationId xmlns:a16="http://schemas.microsoft.com/office/drawing/2014/main" id="{FD9810A6-1730-42B7-9DFD-79DF266642AC}"/>
+                <a16:creationId xmlns:a16="http://schemas.microsoft.com/office/drawing/2014/main" id="{72344EFE-D87E-4226-9529-6CAC6562A4AF}"/>
               </a:ext>
             </a:extLst>
           </p:cNvPr>
@@ -8652,7 +8652,7 @@
           <p:cNvPr id="22" name="">
             <a:extLst xmlns:a="http://schemas.openxmlformats.org/drawingml/2006/main">
               <a:ext uri="{FF2B5EF4-FFF2-40B4-BE49-F238E27FC236}">
-                <a16:creationId xmlns:a16="http://schemas.microsoft.com/office/drawing/2014/main" id="{3DCE87E0-B3AA-4E97-8EBA-DE866E61494C}"/>
+                <a16:creationId xmlns:a16="http://schemas.microsoft.com/office/drawing/2014/main" id="{30027594-2C91-4390-8BA9-64328A9E1954}"/>
               </a:ext>
             </a:extLst>
           </p:cNvPr>
@@ -8716,7 +8716,7 @@
           <p:cNvPr id="23" name="">
             <a:extLst xmlns:a="http://schemas.openxmlformats.org/drawingml/2006/main">
               <a:ext uri="{FF2B5EF4-FFF2-40B4-BE49-F238E27FC236}">
-                <a16:creationId xmlns:a16="http://schemas.microsoft.com/office/drawing/2014/main" id="{36452FD2-9AC9-4F2E-84BE-EC0B46332C17}"/>
+                <a16:creationId xmlns:a16="http://schemas.microsoft.com/office/drawing/2014/main" id="{F216A744-3AA2-42A0-8B5F-B38FE456E10E}"/>
               </a:ext>
             </a:extLst>
           </p:cNvPr>
@@ -8749,7 +8749,7 @@
           <p:cNvPr id="24" name="">
             <a:extLst xmlns:a="http://schemas.openxmlformats.org/drawingml/2006/main">
               <a:ext uri="{FF2B5EF4-FFF2-40B4-BE49-F238E27FC236}">
-                <a16:creationId xmlns:a16="http://schemas.microsoft.com/office/drawing/2014/main" id="{78890526-45E5-4B65-9DBF-4EE7EAB3E060}"/>
+                <a16:creationId xmlns:a16="http://schemas.microsoft.com/office/drawing/2014/main" id="{3408B53C-F481-47E3-B128-91DA475D7A80}"/>
               </a:ext>
             </a:extLst>
           </p:cNvPr>
@@ -8813,7 +8813,7 @@
           <p:cNvPr id="25" name="">
             <a:extLst xmlns:a="http://schemas.openxmlformats.org/drawingml/2006/main">
               <a:ext uri="{FF2B5EF4-FFF2-40B4-BE49-F238E27FC236}">
-                <a16:creationId xmlns:a16="http://schemas.microsoft.com/office/drawing/2014/main" id="{0D5A4913-38BD-47A8-81F9-B4494C0E8264}"/>
+                <a16:creationId xmlns:a16="http://schemas.microsoft.com/office/drawing/2014/main" id="{43BEBED3-F176-4CF9-B61B-6542ADA655ED}"/>
               </a:ext>
             </a:extLst>
           </p:cNvPr>
@@ -8846,7 +8846,7 @@
           <p:cNvPr id="26" name="">
             <a:extLst xmlns:a="http://schemas.openxmlformats.org/drawingml/2006/main">
               <a:ext uri="{FF2B5EF4-FFF2-40B4-BE49-F238E27FC236}">
-                <a16:creationId xmlns:a16="http://schemas.microsoft.com/office/drawing/2014/main" id="{A8F280E1-F0EF-44B5-8098-2353DE3F743F}"/>
+                <a16:creationId xmlns:a16="http://schemas.microsoft.com/office/drawing/2014/main" id="{FCC1CBAE-02F7-4259-85B0-239F6B2B12E6}"/>
               </a:ext>
             </a:extLst>
           </p:cNvPr>
@@ -8910,7 +8910,7 @@
           <p:cNvPr id="27" name="">
             <a:extLst xmlns:a="http://schemas.openxmlformats.org/drawingml/2006/main">
               <a:ext uri="{FF2B5EF4-FFF2-40B4-BE49-F238E27FC236}">
-                <a16:creationId xmlns:a16="http://schemas.microsoft.com/office/drawing/2014/main" id="{74685DC4-3920-4B88-AF5B-31A19F7AF6E3}"/>
+                <a16:creationId xmlns:a16="http://schemas.microsoft.com/office/drawing/2014/main" id="{114F21FD-7520-434D-96BD-1602C36EF03C}"/>
               </a:ext>
             </a:extLst>
           </p:cNvPr>
@@ -8943,7 +8943,7 @@
           <p:cNvPr id="28" name="">
             <a:extLst xmlns:a="http://schemas.openxmlformats.org/drawingml/2006/main">
               <a:ext uri="{FF2B5EF4-FFF2-40B4-BE49-F238E27FC236}">
-                <a16:creationId xmlns:a16="http://schemas.microsoft.com/office/drawing/2014/main" id="{13B1B1B6-A17A-44DB-8CC9-E6E4FBD59F99}"/>
+                <a16:creationId xmlns:a16="http://schemas.microsoft.com/office/drawing/2014/main" id="{EA31F0F8-BE63-4638-BD56-0F7373EC0A2B}"/>
               </a:ext>
             </a:extLst>
           </p:cNvPr>
@@ -9007,7 +9007,7 @@
           <p:cNvPr id="29" name="">
             <a:extLst xmlns:a="http://schemas.openxmlformats.org/drawingml/2006/main">
               <a:ext uri="{FF2B5EF4-FFF2-40B4-BE49-F238E27FC236}">
-                <a16:creationId xmlns:a16="http://schemas.microsoft.com/office/drawing/2014/main" id="{80314F39-9B96-4E2B-A8EC-7FEB6921FC61}"/>
+                <a16:creationId xmlns:a16="http://schemas.microsoft.com/office/drawing/2014/main" id="{3A61A31D-62D9-4677-922F-E200B0BE2864}"/>
               </a:ext>
             </a:extLst>
           </p:cNvPr>
@@ -9040,7 +9040,7 @@
           <p:cNvPr id="30" name="">
             <a:extLst xmlns:a="http://schemas.openxmlformats.org/drawingml/2006/main">
               <a:ext uri="{FF2B5EF4-FFF2-40B4-BE49-F238E27FC236}">
-                <a16:creationId xmlns:a16="http://schemas.microsoft.com/office/drawing/2014/main" id="{A42B51D4-D0D1-44F1-A2BD-C3C61110F313}"/>
+                <a16:creationId xmlns:a16="http://schemas.microsoft.com/office/drawing/2014/main" id="{6387BA0F-C9DD-4E74-BD3F-8B8D02F9AA10}"/>
               </a:ext>
             </a:extLst>
           </p:cNvPr>
@@ -9104,7 +9104,7 @@
           <p:cNvPr id="31" name="">
             <a:extLst xmlns:a="http://schemas.openxmlformats.org/drawingml/2006/main">
               <a:ext uri="{FF2B5EF4-FFF2-40B4-BE49-F238E27FC236}">
-                <a16:creationId xmlns:a16="http://schemas.microsoft.com/office/drawing/2014/main" id="{12D1C2E0-76ED-48F6-8071-0635051BFB08}"/>
+                <a16:creationId xmlns:a16="http://schemas.microsoft.com/office/drawing/2014/main" id="{F3E3921F-481E-42E3-A9D5-A8ECA1E5B667}"/>
               </a:ext>
             </a:extLst>
           </p:cNvPr>
@@ -9137,7 +9137,7 @@
           <p:cNvPr id="32" name="">
             <a:extLst xmlns:a="http://schemas.openxmlformats.org/drawingml/2006/main">
               <a:ext uri="{FF2B5EF4-FFF2-40B4-BE49-F238E27FC236}">
-                <a16:creationId xmlns:a16="http://schemas.microsoft.com/office/drawing/2014/main" id="{511874E4-C9DF-49F8-AE71-6B50EE6C97ED}"/>
+                <a16:creationId xmlns:a16="http://schemas.microsoft.com/office/drawing/2014/main" id="{3C2C63AF-AFD9-40B9-A405-1626491AC54B}"/>
               </a:ext>
             </a:extLst>
           </p:cNvPr>
@@ -9201,7 +9201,7 @@
           <p:cNvPr id="33" name="">
             <a:extLst xmlns:a="http://schemas.openxmlformats.org/drawingml/2006/main">
               <a:ext uri="{FF2B5EF4-FFF2-40B4-BE49-F238E27FC236}">
-                <a16:creationId xmlns:a16="http://schemas.microsoft.com/office/drawing/2014/main" id="{E3046C45-6A38-4932-ACAC-C8A29912F9ED}"/>
+                <a16:creationId xmlns:a16="http://schemas.microsoft.com/office/drawing/2014/main" id="{110604F0-FA1F-46DD-ABBF-5997517C745C}"/>
               </a:ext>
             </a:extLst>
           </p:cNvPr>
@@ -9234,7 +9234,7 @@
           <p:cNvPr id="34" name="">
             <a:extLst xmlns:a="http://schemas.openxmlformats.org/drawingml/2006/main">
               <a:ext uri="{FF2B5EF4-FFF2-40B4-BE49-F238E27FC236}">
-                <a16:creationId xmlns:a16="http://schemas.microsoft.com/office/drawing/2014/main" id="{475E31B5-1F33-410B-9F75-DBBE8DE6AA4B}"/>
+                <a16:creationId xmlns:a16="http://schemas.microsoft.com/office/drawing/2014/main" id="{9751942C-EC42-4261-B38A-D0C75BCD802E}"/>
               </a:ext>
             </a:extLst>
           </p:cNvPr>
@@ -9298,7 +9298,7 @@
           <p:cNvPr id="35" name="">
             <a:extLst xmlns:a="http://schemas.openxmlformats.org/drawingml/2006/main">
               <a:ext uri="{FF2B5EF4-FFF2-40B4-BE49-F238E27FC236}">
-                <a16:creationId xmlns:a16="http://schemas.microsoft.com/office/drawing/2014/main" id="{3AB6E064-C82D-4A92-BA17-BD844FEB581E}"/>
+                <a16:creationId xmlns:a16="http://schemas.microsoft.com/office/drawing/2014/main" id="{C92EA50A-634D-42CC-B490-3552831A003C}"/>
               </a:ext>
             </a:extLst>
           </p:cNvPr>
@@ -9331,7 +9331,7 @@
           <p:cNvPr id="36" name="">
             <a:extLst xmlns:a="http://schemas.openxmlformats.org/drawingml/2006/main">
               <a:ext uri="{FF2B5EF4-FFF2-40B4-BE49-F238E27FC236}">
-                <a16:creationId xmlns:a16="http://schemas.microsoft.com/office/drawing/2014/main" id="{FB8CC4F9-5DF6-4F00-94B4-31F6C9CDAABD}"/>
+                <a16:creationId xmlns:a16="http://schemas.microsoft.com/office/drawing/2014/main" id="{4636EB5E-7A48-45CE-AB89-44C8EF067945}"/>
               </a:ext>
             </a:extLst>
           </p:cNvPr>
@@ -9395,7 +9395,7 @@
           <p:cNvPr id="37" name="">
             <a:extLst xmlns:a="http://schemas.openxmlformats.org/drawingml/2006/main">
               <a:ext uri="{FF2B5EF4-FFF2-40B4-BE49-F238E27FC236}">
-                <a16:creationId xmlns:a16="http://schemas.microsoft.com/office/drawing/2014/main" id="{C3B6248E-31CD-403B-9AC2-F6EECD30D84C}"/>
+                <a16:creationId xmlns:a16="http://schemas.microsoft.com/office/drawing/2014/main" id="{27E894F3-3091-4D08-8BE2-61FC2B6BB0EC}"/>
               </a:ext>
             </a:extLst>
           </p:cNvPr>
@@ -9428,7 +9428,7 @@
           <p:cNvPr id="38" name="">
             <a:extLst xmlns:a="http://schemas.openxmlformats.org/drawingml/2006/main">
               <a:ext uri="{FF2B5EF4-FFF2-40B4-BE49-F238E27FC236}">
-                <a16:creationId xmlns:a16="http://schemas.microsoft.com/office/drawing/2014/main" id="{73269D3B-7B79-4F6F-9CA7-F8275F184105}"/>
+                <a16:creationId xmlns:a16="http://schemas.microsoft.com/office/drawing/2014/main" id="{BBCDCFE6-2817-40E7-81D3-A037266488B0}"/>
               </a:ext>
             </a:extLst>
           </p:cNvPr>
@@ -9492,7 +9492,7 @@
           <p:cNvPr id="39" name="">
             <a:extLst xmlns:a="http://schemas.openxmlformats.org/drawingml/2006/main">
               <a:ext uri="{FF2B5EF4-FFF2-40B4-BE49-F238E27FC236}">
-                <a16:creationId xmlns:a16="http://schemas.microsoft.com/office/drawing/2014/main" id="{B1812F2C-AA8F-4733-81E6-46DD9DE17665}"/>
+                <a16:creationId xmlns:a16="http://schemas.microsoft.com/office/drawing/2014/main" id="{D8933BDF-F14A-4E0E-ABBB-8352C3D63852}"/>
               </a:ext>
             </a:extLst>
           </p:cNvPr>
@@ -9525,7 +9525,7 @@
           <p:cNvPr id="40" name="">
             <a:extLst xmlns:a="http://schemas.openxmlformats.org/drawingml/2006/main">
               <a:ext uri="{FF2B5EF4-FFF2-40B4-BE49-F238E27FC236}">
-                <a16:creationId xmlns:a16="http://schemas.microsoft.com/office/drawing/2014/main" id="{17966A0D-E3A3-4246-80BE-1452B0081EFE}"/>
+                <a16:creationId xmlns:a16="http://schemas.microsoft.com/office/drawing/2014/main" id="{7E27211C-B6A7-4437-9C29-CE5E9C436476}"/>
               </a:ext>
             </a:extLst>
           </p:cNvPr>
@@ -9589,7 +9589,7 @@
           <p:cNvPr id="41" name="">
             <a:extLst xmlns:a="http://schemas.openxmlformats.org/drawingml/2006/main">
               <a:ext uri="{FF2B5EF4-FFF2-40B4-BE49-F238E27FC236}">
-                <a16:creationId xmlns:a16="http://schemas.microsoft.com/office/drawing/2014/main" id="{53B4972D-8B83-4F35-AB3C-6091A5126E9C}"/>
+                <a16:creationId xmlns:a16="http://schemas.microsoft.com/office/drawing/2014/main" id="{4D16A8BE-485A-428F-AA8E-3891F4594331}"/>
               </a:ext>
             </a:extLst>
           </p:cNvPr>
@@ -9622,7 +9622,7 @@
           <p:cNvPr id="42" name="">
             <a:extLst xmlns:a="http://schemas.openxmlformats.org/drawingml/2006/main">
               <a:ext uri="{FF2B5EF4-FFF2-40B4-BE49-F238E27FC236}">
-                <a16:creationId xmlns:a16="http://schemas.microsoft.com/office/drawing/2014/main" id="{B7A4D288-BDCA-472E-9238-96F9EB747D69}"/>
+                <a16:creationId xmlns:a16="http://schemas.microsoft.com/office/drawing/2014/main" id="{33B868A9-EB0A-4086-B14D-36F69BA3AE42}"/>
               </a:ext>
             </a:extLst>
           </p:cNvPr>
@@ -9686,7 +9686,7 @@
           <p:cNvPr id="43" name="">
             <a:extLst xmlns:a="http://schemas.openxmlformats.org/drawingml/2006/main">
               <a:ext uri="{FF2B5EF4-FFF2-40B4-BE49-F238E27FC236}">
-                <a16:creationId xmlns:a16="http://schemas.microsoft.com/office/drawing/2014/main" id="{29D5E0F5-ED58-484B-91EA-361B6EAAF339}"/>
+                <a16:creationId xmlns:a16="http://schemas.microsoft.com/office/drawing/2014/main" id="{5CEE78C3-E42F-416D-A729-E6BE45E8FD94}"/>
               </a:ext>
             </a:extLst>
           </p:cNvPr>
@@ -9719,7 +9719,7 @@
           <p:cNvPr id="44" name="">
             <a:extLst xmlns:a="http://schemas.openxmlformats.org/drawingml/2006/main">
               <a:ext uri="{FF2B5EF4-FFF2-40B4-BE49-F238E27FC236}">
-                <a16:creationId xmlns:a16="http://schemas.microsoft.com/office/drawing/2014/main" id="{A0882B6C-D91C-4083-9275-8BCD991B296A}"/>
+                <a16:creationId xmlns:a16="http://schemas.microsoft.com/office/drawing/2014/main" id="{9BCAE5B2-5E8E-4CE9-8DB5-57349400E8B7}"/>
               </a:ext>
             </a:extLst>
           </p:cNvPr>
@@ -9783,7 +9783,7 @@
           <p:cNvPr id="45" name="">
             <a:extLst xmlns:a="http://schemas.openxmlformats.org/drawingml/2006/main">
               <a:ext uri="{FF2B5EF4-FFF2-40B4-BE49-F238E27FC236}">
-                <a16:creationId xmlns:a16="http://schemas.microsoft.com/office/drawing/2014/main" id="{8736A1F6-5AC4-4E4B-A90D-B24A5D0863CB}"/>
+                <a16:creationId xmlns:a16="http://schemas.microsoft.com/office/drawing/2014/main" id="{326B87D7-B2E6-4826-863D-B9CC41E3EE5F}"/>
               </a:ext>
             </a:extLst>
           </p:cNvPr>
@@ -9816,7 +9816,7 @@
           <p:cNvPr id="46" name="">
             <a:extLst xmlns:a="http://schemas.openxmlformats.org/drawingml/2006/main">
               <a:ext uri="{FF2B5EF4-FFF2-40B4-BE49-F238E27FC236}">
-                <a16:creationId xmlns:a16="http://schemas.microsoft.com/office/drawing/2014/main" id="{D16EE2DF-C4F9-4381-891D-E57CA4A3697F}"/>
+                <a16:creationId xmlns:a16="http://schemas.microsoft.com/office/drawing/2014/main" id="{036F9CC8-5A27-46E4-9251-9D071840412E}"/>
               </a:ext>
             </a:extLst>
           </p:cNvPr>
@@ -9880,7 +9880,7 @@
           <p:cNvPr id="47" name="">
             <a:extLst xmlns:a="http://schemas.openxmlformats.org/drawingml/2006/main">
               <a:ext uri="{FF2B5EF4-FFF2-40B4-BE49-F238E27FC236}">
-                <a16:creationId xmlns:a16="http://schemas.microsoft.com/office/drawing/2014/main" id="{35E1D79B-3D37-4B13-9280-2D16EA0646AA}"/>
+                <a16:creationId xmlns:a16="http://schemas.microsoft.com/office/drawing/2014/main" id="{F541AA5E-306E-4E70-A7B4-898605AC028C}"/>
               </a:ext>
             </a:extLst>
           </p:cNvPr>
@@ -9913,7 +9913,7 @@
           <p:cNvPr id="48" name="">
             <a:extLst xmlns:a="http://schemas.openxmlformats.org/drawingml/2006/main">
               <a:ext uri="{FF2B5EF4-FFF2-40B4-BE49-F238E27FC236}">
-                <a16:creationId xmlns:a16="http://schemas.microsoft.com/office/drawing/2014/main" id="{00AA8A6A-89C2-402B-A8A0-EB151BA61B2B}"/>
+                <a16:creationId xmlns:a16="http://schemas.microsoft.com/office/drawing/2014/main" id="{AF3674C6-720B-4CF9-B700-06212ADFFF57}"/>
               </a:ext>
             </a:extLst>
           </p:cNvPr>
@@ -9967,7 +9967,7 @@
                 <a:ea typeface="Arial"/>
                 <a:cs typeface="Arial"/>
               </a:rPr>
-              <a:t>estado sinalizado</a:t>
+              <a:t>estado sinalizado no sistema</a:t>
             </a:r>
           </a:p>
         </p:txBody>
@@ -9975,7 +9975,7 @@
     </p:spTree>
     <p:extLst>
       <p:ext uri="{BB962C8B-B14F-4D97-AF65-F5344CB8AC3E}">
-        <p14:creationId xmlns:p14="http://schemas.microsoft.com/office/powerpoint/2010/main" val="355289757"/>
+        <p14:creationId xmlns:p14="http://schemas.microsoft.com/office/powerpoint/2010/main" val="531511077"/>
       </p:ext>
     </p:extLst>
   </p:cSld>
@@ -9999,7 +9999,7 @@
           <p:cNvPr id="1" name="">
             <a:extLst xmlns:a="http://schemas.openxmlformats.org/drawingml/2006/main">
               <a:ext uri="{FF2B5EF4-FFF2-40B4-BE49-F238E27FC236}">
-                <a16:creationId xmlns:a16="http://schemas.microsoft.com/office/drawing/2014/main" id="{2BBCA70C-CEDE-4FAE-BE75-94BC2B0C036B}"/>
+                <a16:creationId xmlns:a16="http://schemas.microsoft.com/office/drawing/2014/main" id="{809B73F1-7DDB-4C45-9F51-A2727091BDB7}"/>
               </a:ext>
             </a:extLst>
           </p:cNvPr>
@@ -10034,7 +10034,7 @@
           <p:cNvPr id="2" name="">
             <a:extLst xmlns:a="http://schemas.openxmlformats.org/drawingml/2006/main">
               <a:ext uri="{FF2B5EF4-FFF2-40B4-BE49-F238E27FC236}">
-                <a16:creationId xmlns:a16="http://schemas.microsoft.com/office/drawing/2014/main" id="{C4804D80-A2B2-4707-976F-A78AF89EDC96}"/>
+                <a16:creationId xmlns:a16="http://schemas.microsoft.com/office/drawing/2014/main" id="{50DB641D-DED2-4617-9974-87AE588AAB50}"/>
               </a:ext>
             </a:extLst>
           </p:cNvPr>
@@ -10069,7 +10069,7 @@
           <p:cNvPr id="3" name="">
             <a:extLst xmlns:a="http://schemas.openxmlformats.org/drawingml/2006/main">
               <a:ext uri="{FF2B5EF4-FFF2-40B4-BE49-F238E27FC236}">
-                <a16:creationId xmlns:a16="http://schemas.microsoft.com/office/drawing/2014/main" id="{16DCE24A-A721-42BA-8556-B3F75EC58ED2}"/>
+                <a16:creationId xmlns:a16="http://schemas.microsoft.com/office/drawing/2014/main" id="{36C13617-EE48-45F2-A6CE-806F63EB2475}"/>
               </a:ext>
             </a:extLst>
           </p:cNvPr>
@@ -10104,7 +10104,7 @@
           <p:cNvPr id="4" name="kicker-17-label">
             <a:extLst xmlns:a="http://schemas.openxmlformats.org/drawingml/2006/main">
               <a:ext uri="{FF2B5EF4-FFF2-40B4-BE49-F238E27FC236}">
-                <a16:creationId xmlns:a16="http://schemas.microsoft.com/office/drawing/2014/main" id="{ED60B812-621C-4FAC-BF70-EECFDD31EE5E}"/>
+                <a16:creationId xmlns:a16="http://schemas.microsoft.com/office/drawing/2014/main" id="{F7D66470-4B0F-4862-BD0D-BC8585A16EDC}"/>
               </a:ext>
             </a:extLst>
           </p:cNvPr>
@@ -10168,7 +10168,7 @@
           <p:cNvPr id="5" name="">
             <a:extLst xmlns:a="http://schemas.openxmlformats.org/drawingml/2006/main">
               <a:ext uri="{FF2B5EF4-FFF2-40B4-BE49-F238E27FC236}">
-                <a16:creationId xmlns:a16="http://schemas.microsoft.com/office/drawing/2014/main" id="{F560D539-A803-491F-B5CB-676813C92BA4}"/>
+                <a16:creationId xmlns:a16="http://schemas.microsoft.com/office/drawing/2014/main" id="{2EB904AB-3291-42DC-A322-05879B2CA082}"/>
               </a:ext>
             </a:extLst>
           </p:cNvPr>
@@ -10232,7 +10232,7 @@
           <p:cNvPr id="6" name="">
             <a:extLst xmlns:a="http://schemas.openxmlformats.org/drawingml/2006/main">
               <a:ext uri="{FF2B5EF4-FFF2-40B4-BE49-F238E27FC236}">
-                <a16:creationId xmlns:a16="http://schemas.microsoft.com/office/drawing/2014/main" id="{FE1A3B6A-34B5-4A3D-9920-07B95AAA4CD1}"/>
+                <a16:creationId xmlns:a16="http://schemas.microsoft.com/office/drawing/2014/main" id="{2BB057D3-2000-4513-9CDD-981EA24DCDCE}"/>
               </a:ext>
             </a:extLst>
           </p:cNvPr>
@@ -10296,7 +10296,7 @@
           <p:cNvPr id="7" name="">
             <a:extLst xmlns:a="http://schemas.openxmlformats.org/drawingml/2006/main">
               <a:ext uri="{FF2B5EF4-FFF2-40B4-BE49-F238E27FC236}">
-                <a16:creationId xmlns:a16="http://schemas.microsoft.com/office/drawing/2014/main" id="{2D58D3BF-0D48-49BD-AC84-D38CEFD0A6ED}"/>
+                <a16:creationId xmlns:a16="http://schemas.microsoft.com/office/drawing/2014/main" id="{004DEF1A-65D8-44F1-9247-D69C25C7BB31}"/>
               </a:ext>
             </a:extLst>
           </p:cNvPr>
@@ -10331,7 +10331,7 @@
           <p:cNvPr id="8" name="">
             <a:extLst xmlns:a="http://schemas.openxmlformats.org/drawingml/2006/main">
               <a:ext uri="{FF2B5EF4-FFF2-40B4-BE49-F238E27FC236}">
-                <a16:creationId xmlns:a16="http://schemas.microsoft.com/office/drawing/2014/main" id="{4D2668D3-5EF8-4817-9BFF-6F3BA158E45B}"/>
+                <a16:creationId xmlns:a16="http://schemas.microsoft.com/office/drawing/2014/main" id="{E5600DBC-C655-47EC-AE24-DC7EC8A52D55}"/>
               </a:ext>
             </a:extLst>
           </p:cNvPr>
@@ -10395,7 +10395,7 @@
           <p:cNvPr id="9" name="">
             <a:extLst xmlns:a="http://schemas.openxmlformats.org/drawingml/2006/main">
               <a:ext uri="{FF2B5EF4-FFF2-40B4-BE49-F238E27FC236}">
-                <a16:creationId xmlns:a16="http://schemas.microsoft.com/office/drawing/2014/main" id="{AE3601C0-4457-4FDE-A9CF-B22A1C4D46DD}"/>
+                <a16:creationId xmlns:a16="http://schemas.microsoft.com/office/drawing/2014/main" id="{CC629499-161E-4F4E-A0FE-AA7A5C1C6B8B}"/>
               </a:ext>
             </a:extLst>
           </p:cNvPr>
@@ -10430,7 +10430,7 @@
           <p:cNvPr id="10" name="">
             <a:extLst xmlns:a="http://schemas.openxmlformats.org/drawingml/2006/main">
               <a:ext uri="{FF2B5EF4-FFF2-40B4-BE49-F238E27FC236}">
-                <a16:creationId xmlns:a16="http://schemas.microsoft.com/office/drawing/2014/main" id="{EDAC3A33-8BE0-4F42-8509-440B7D496CE0}"/>
+                <a16:creationId xmlns:a16="http://schemas.microsoft.com/office/drawing/2014/main" id="{8C0CFE0C-43C9-4960-8B78-4DD557507B7B}"/>
               </a:ext>
             </a:extLst>
           </p:cNvPr>
@@ -10494,7 +10494,7 @@
           <p:cNvPr id="11" name="">
             <a:extLst xmlns:a="http://schemas.openxmlformats.org/drawingml/2006/main">
               <a:ext uri="{FF2B5EF4-FFF2-40B4-BE49-F238E27FC236}">
-                <a16:creationId xmlns:a16="http://schemas.microsoft.com/office/drawing/2014/main" id="{486B88CB-3D50-44EA-AAEB-15BC3BBCE2B2}"/>
+                <a16:creationId xmlns:a16="http://schemas.microsoft.com/office/drawing/2014/main" id="{B92ED6C2-99BE-46C6-8F63-94B5410BDEB1}"/>
               </a:ext>
             </a:extLst>
           </p:cNvPr>
@@ -10529,7 +10529,7 @@
           <p:cNvPr id="12" name="">
             <a:extLst xmlns:a="http://schemas.openxmlformats.org/drawingml/2006/main">
               <a:ext uri="{FF2B5EF4-FFF2-40B4-BE49-F238E27FC236}">
-                <a16:creationId xmlns:a16="http://schemas.microsoft.com/office/drawing/2014/main" id="{FCD6A0D3-A50D-44C0-A9AA-712651AFF3F6}"/>
+                <a16:creationId xmlns:a16="http://schemas.microsoft.com/office/drawing/2014/main" id="{5DCC97C0-A81D-4BC6-A5BF-3F2CAF77A95A}"/>
               </a:ext>
             </a:extLst>
           </p:cNvPr>
@@ -10583,7 +10583,7 @@
                 <a:ea typeface="Arial"/>
                 <a:cs typeface="Arial"/>
               </a:rPr>
-              <a:t>Os limites são claros: não foram medidos alcance, taxa de leitura, múltiplas tags ou interferência ambiental.</a:t>
+              <a:t>Os limites permanecem explícitos: não foram medidos alcance, taxa de leitura, múltiplas tags ou interferência ambiental.</a:t>
             </a:r>
           </a:p>
         </p:txBody>
@@ -10593,7 +10593,7 @@
           <p:cNvPr id="13" name="">
             <a:extLst xmlns:a="http://schemas.openxmlformats.org/drawingml/2006/main">
               <a:ext uri="{FF2B5EF4-FFF2-40B4-BE49-F238E27FC236}">
-                <a16:creationId xmlns:a16="http://schemas.microsoft.com/office/drawing/2014/main" id="{E8350B40-AC52-4CBA-BA3B-EAF6991AC172}"/>
+                <a16:creationId xmlns:a16="http://schemas.microsoft.com/office/drawing/2014/main" id="{0BCBF195-C605-4087-B82F-C231D0C53847}"/>
               </a:ext>
             </a:extLst>
           </p:cNvPr>
@@ -10626,7 +10626,7 @@
           <p:cNvPr id="14" name="">
             <a:extLst xmlns:a="http://schemas.openxmlformats.org/drawingml/2006/main">
               <a:ext uri="{FF2B5EF4-FFF2-40B4-BE49-F238E27FC236}">
-                <a16:creationId xmlns:a16="http://schemas.microsoft.com/office/drawing/2014/main" id="{4482BFA2-431A-4716-94BB-AA60A7AF539E}"/>
+                <a16:creationId xmlns:a16="http://schemas.microsoft.com/office/drawing/2014/main" id="{7A7E51EF-2254-413D-A1EE-68C05940287F}"/>
               </a:ext>
             </a:extLst>
           </p:cNvPr>
@@ -10690,7 +10690,7 @@
           <p:cNvPr id="15" name="">
             <a:extLst xmlns:a="http://schemas.openxmlformats.org/drawingml/2006/main">
               <a:ext uri="{FF2B5EF4-FFF2-40B4-BE49-F238E27FC236}">
-                <a16:creationId xmlns:a16="http://schemas.microsoft.com/office/drawing/2014/main" id="{B9981114-9634-4A73-9B44-216CC49931D0}"/>
+                <a16:creationId xmlns:a16="http://schemas.microsoft.com/office/drawing/2014/main" id="{371F9E6C-678A-4858-BD90-CF9B90453FBC}"/>
               </a:ext>
             </a:extLst>
           </p:cNvPr>
@@ -10754,7 +10754,7 @@
           <p:cNvPr id="16" name="">
             <a:extLst xmlns:a="http://schemas.openxmlformats.org/drawingml/2006/main">
               <a:ext uri="{FF2B5EF4-FFF2-40B4-BE49-F238E27FC236}">
-                <a16:creationId xmlns:a16="http://schemas.microsoft.com/office/drawing/2014/main" id="{9BF6DA87-6E73-4930-B902-D75D5B20BD6F}"/>
+                <a16:creationId xmlns:a16="http://schemas.microsoft.com/office/drawing/2014/main" id="{B2C731AA-DD51-4358-8A4B-D526E441202C}"/>
               </a:ext>
             </a:extLst>
           </p:cNvPr>
@@ -10787,7 +10787,7 @@
           <p:cNvPr id="17" name="">
             <a:extLst xmlns:a="http://schemas.openxmlformats.org/drawingml/2006/main">
               <a:ext uri="{FF2B5EF4-FFF2-40B4-BE49-F238E27FC236}">
-                <a16:creationId xmlns:a16="http://schemas.microsoft.com/office/drawing/2014/main" id="{358C2953-B7EB-4999-9767-DE54D47D172B}"/>
+                <a16:creationId xmlns:a16="http://schemas.microsoft.com/office/drawing/2014/main" id="{4206DA77-D982-4C11-BA22-E8216CBF1F23}"/>
               </a:ext>
             </a:extLst>
           </p:cNvPr>
@@ -10851,7 +10851,7 @@
           <p:cNvPr id="18" name="">
             <a:extLst xmlns:a="http://schemas.openxmlformats.org/drawingml/2006/main">
               <a:ext uri="{FF2B5EF4-FFF2-40B4-BE49-F238E27FC236}">
-                <a16:creationId xmlns:a16="http://schemas.microsoft.com/office/drawing/2014/main" id="{4AFDB090-3354-4E36-AE3A-8294F1955148}"/>
+                <a16:creationId xmlns:a16="http://schemas.microsoft.com/office/drawing/2014/main" id="{E0156CA2-2862-4191-8718-B0CE6D56E909}"/>
               </a:ext>
             </a:extLst>
           </p:cNvPr>
@@ -10915,7 +10915,7 @@
           <p:cNvPr id="19" name="">
             <a:extLst xmlns:a="http://schemas.openxmlformats.org/drawingml/2006/main">
               <a:ext uri="{FF2B5EF4-FFF2-40B4-BE49-F238E27FC236}">
-                <a16:creationId xmlns:a16="http://schemas.microsoft.com/office/drawing/2014/main" id="{43B6E0F0-A16B-4D0C-87A3-D101AFD6933B}"/>
+                <a16:creationId xmlns:a16="http://schemas.microsoft.com/office/drawing/2014/main" id="{D0AB648D-7DE3-4EBB-8378-3D9CBC22ED26}"/>
               </a:ext>
             </a:extLst>
           </p:cNvPr>
@@ -10948,7 +10948,7 @@
           <p:cNvPr id="20" name="">
             <a:extLst xmlns:a="http://schemas.openxmlformats.org/drawingml/2006/main">
               <a:ext uri="{FF2B5EF4-FFF2-40B4-BE49-F238E27FC236}">
-                <a16:creationId xmlns:a16="http://schemas.microsoft.com/office/drawing/2014/main" id="{7EA55D50-FA13-4F14-846B-473A90D5EE3C}"/>
+                <a16:creationId xmlns:a16="http://schemas.microsoft.com/office/drawing/2014/main" id="{CE5A2F87-3DAE-4931-9587-48E769D66D14}"/>
               </a:ext>
             </a:extLst>
           </p:cNvPr>
@@ -11012,7 +11012,7 @@
           <p:cNvPr id="21" name="">
             <a:extLst xmlns:a="http://schemas.openxmlformats.org/drawingml/2006/main">
               <a:ext uri="{FF2B5EF4-FFF2-40B4-BE49-F238E27FC236}">
-                <a16:creationId xmlns:a16="http://schemas.microsoft.com/office/drawing/2014/main" id="{AE640119-548A-41F8-ADC4-EEB96A498EA2}"/>
+                <a16:creationId xmlns:a16="http://schemas.microsoft.com/office/drawing/2014/main" id="{24C43E52-D051-46A8-89F1-A8AB463833AF}"/>
               </a:ext>
             </a:extLst>
           </p:cNvPr>
@@ -11074,7 +11074,7 @@
     </p:spTree>
     <p:extLst>
       <p:ext uri="{BB962C8B-B14F-4D97-AF65-F5344CB8AC3E}">
-        <p14:creationId xmlns:p14="http://schemas.microsoft.com/office/powerpoint/2010/main" val="1703301477"/>
+        <p14:creationId xmlns:p14="http://schemas.microsoft.com/office/powerpoint/2010/main" val="1642374200"/>
       </p:ext>
     </p:extLst>
   </p:cSld>
@@ -11098,7 +11098,7 @@
           <p:cNvPr id="1" name="">
             <a:extLst xmlns:a="http://schemas.openxmlformats.org/drawingml/2006/main">
               <a:ext uri="{FF2B5EF4-FFF2-40B4-BE49-F238E27FC236}">
-                <a16:creationId xmlns:a16="http://schemas.microsoft.com/office/drawing/2014/main" id="{56264D3D-FC24-4AF9-B6B7-F2F52A008EAA}"/>
+                <a16:creationId xmlns:a16="http://schemas.microsoft.com/office/drawing/2014/main" id="{4A68556D-3330-47F9-9960-5011FC5DEA24}"/>
               </a:ext>
             </a:extLst>
           </p:cNvPr>
@@ -11133,7 +11133,7 @@
           <p:cNvPr id="2" name="">
             <a:extLst xmlns:a="http://schemas.openxmlformats.org/drawingml/2006/main">
               <a:ext uri="{FF2B5EF4-FFF2-40B4-BE49-F238E27FC236}">
-                <a16:creationId xmlns:a16="http://schemas.microsoft.com/office/drawing/2014/main" id="{15F857AB-36E6-44FD-82F4-DF2CAB00888A}"/>
+                <a16:creationId xmlns:a16="http://schemas.microsoft.com/office/drawing/2014/main" id="{53468982-4B2D-4252-A805-DC34BEEED585}"/>
               </a:ext>
             </a:extLst>
           </p:cNvPr>
@@ -11168,7 +11168,7 @@
           <p:cNvPr id="3" name="">
             <a:extLst xmlns:a="http://schemas.openxmlformats.org/drawingml/2006/main">
               <a:ext uri="{FF2B5EF4-FFF2-40B4-BE49-F238E27FC236}">
-                <a16:creationId xmlns:a16="http://schemas.microsoft.com/office/drawing/2014/main" id="{0AE8D884-ECF4-4727-A11E-1068C8CA3078}"/>
+                <a16:creationId xmlns:a16="http://schemas.microsoft.com/office/drawing/2014/main" id="{D6742722-07D7-4764-BA6D-1925190EED9C}"/>
               </a:ext>
             </a:extLst>
           </p:cNvPr>
@@ -11203,7 +11203,7 @@
           <p:cNvPr id="4" name="kicker-18-label">
             <a:extLst xmlns:a="http://schemas.openxmlformats.org/drawingml/2006/main">
               <a:ext uri="{FF2B5EF4-FFF2-40B4-BE49-F238E27FC236}">
-                <a16:creationId xmlns:a16="http://schemas.microsoft.com/office/drawing/2014/main" id="{E6A3F6B2-4488-46FB-A782-B254DD164ACD}"/>
+                <a16:creationId xmlns:a16="http://schemas.microsoft.com/office/drawing/2014/main" id="{8B1DC06A-315A-4322-A086-1802281CA4F0}"/>
               </a:ext>
             </a:extLst>
           </p:cNvPr>
@@ -11267,7 +11267,7 @@
           <p:cNvPr id="5" name="">
             <a:extLst xmlns:a="http://schemas.openxmlformats.org/drawingml/2006/main">
               <a:ext uri="{FF2B5EF4-FFF2-40B4-BE49-F238E27FC236}">
-                <a16:creationId xmlns:a16="http://schemas.microsoft.com/office/drawing/2014/main" id="{7569DBBD-9C50-4697-B34D-C67769F11B65}"/>
+                <a16:creationId xmlns:a16="http://schemas.microsoft.com/office/drawing/2014/main" id="{22CD2DDD-A51B-45A6-9A79-CEC5B95FE150}"/>
               </a:ext>
             </a:extLst>
           </p:cNvPr>
@@ -11331,7 +11331,7 @@
           <p:cNvPr id="6" name="">
             <a:extLst xmlns:a="http://schemas.openxmlformats.org/drawingml/2006/main">
               <a:ext uri="{FF2B5EF4-FFF2-40B4-BE49-F238E27FC236}">
-                <a16:creationId xmlns:a16="http://schemas.microsoft.com/office/drawing/2014/main" id="{8AD60E3B-EEAC-416F-904A-A39400A27D63}"/>
+                <a16:creationId xmlns:a16="http://schemas.microsoft.com/office/drawing/2014/main" id="{5173379A-C498-4B0A-B770-680E3ACEACB5}"/>
               </a:ext>
             </a:extLst>
           </p:cNvPr>
@@ -11395,7 +11395,7 @@
           <p:cNvPr id="7" name="">
             <a:extLst xmlns:a="http://schemas.openxmlformats.org/drawingml/2006/main">
               <a:ext uri="{FF2B5EF4-FFF2-40B4-BE49-F238E27FC236}">
-                <a16:creationId xmlns:a16="http://schemas.microsoft.com/office/drawing/2014/main" id="{85792C21-F429-4483-A325-4529FBF4C3E9}"/>
+                <a16:creationId xmlns:a16="http://schemas.microsoft.com/office/drawing/2014/main" id="{1744BB83-892C-483E-BD1C-FAD95C066605}"/>
               </a:ext>
             </a:extLst>
           </p:cNvPr>
@@ -11430,7 +11430,7 @@
           <p:cNvPr id="8" name="">
             <a:extLst xmlns:a="http://schemas.openxmlformats.org/drawingml/2006/main">
               <a:ext uri="{FF2B5EF4-FFF2-40B4-BE49-F238E27FC236}">
-                <a16:creationId xmlns:a16="http://schemas.microsoft.com/office/drawing/2014/main" id="{6472C3CB-8349-4B5F-841B-4A094A95E190}"/>
+                <a16:creationId xmlns:a16="http://schemas.microsoft.com/office/drawing/2014/main" id="{8727E9D2-02EA-49CD-8069-C9E318A2F596}"/>
               </a:ext>
             </a:extLst>
           </p:cNvPr>
@@ -11494,7 +11494,7 @@
           <p:cNvPr id="9" name="">
             <a:extLst xmlns:a="http://schemas.openxmlformats.org/drawingml/2006/main">
               <a:ext uri="{FF2B5EF4-FFF2-40B4-BE49-F238E27FC236}">
-                <a16:creationId xmlns:a16="http://schemas.microsoft.com/office/drawing/2014/main" id="{ACCFB778-0DEA-45F0-913A-19A163FA56CF}"/>
+                <a16:creationId xmlns:a16="http://schemas.microsoft.com/office/drawing/2014/main" id="{4850C9E4-63D8-4DD8-936B-C13B1F1A5167}"/>
               </a:ext>
             </a:extLst>
           </p:cNvPr>
@@ -11529,7 +11529,7 @@
           <p:cNvPr id="10" name="">
             <a:extLst xmlns:a="http://schemas.openxmlformats.org/drawingml/2006/main">
               <a:ext uri="{FF2B5EF4-FFF2-40B4-BE49-F238E27FC236}">
-                <a16:creationId xmlns:a16="http://schemas.microsoft.com/office/drawing/2014/main" id="{30388660-2CDF-4C07-A8FF-F9344AD47961}"/>
+                <a16:creationId xmlns:a16="http://schemas.microsoft.com/office/drawing/2014/main" id="{D2317845-8AFB-45A4-91DF-F666D0AE8DCA}"/>
               </a:ext>
             </a:extLst>
           </p:cNvPr>
@@ -11593,7 +11593,7 @@
           <p:cNvPr id="11" name="">
             <a:extLst xmlns:a="http://schemas.openxmlformats.org/drawingml/2006/main">
               <a:ext uri="{FF2B5EF4-FFF2-40B4-BE49-F238E27FC236}">
-                <a16:creationId xmlns:a16="http://schemas.microsoft.com/office/drawing/2014/main" id="{A5E75F25-5E4A-4287-917E-248047129AB4}"/>
+                <a16:creationId xmlns:a16="http://schemas.microsoft.com/office/drawing/2014/main" id="{FCB2ECD1-1E69-4B2C-8423-4A6C343C2034}"/>
               </a:ext>
             </a:extLst>
           </p:cNvPr>
@@ -11628,7 +11628,7 @@
           <p:cNvPr id="12" name="">
             <a:extLst xmlns:a="http://schemas.openxmlformats.org/drawingml/2006/main">
               <a:ext uri="{FF2B5EF4-FFF2-40B4-BE49-F238E27FC236}">
-                <a16:creationId xmlns:a16="http://schemas.microsoft.com/office/drawing/2014/main" id="{E2030871-667C-44E9-83F1-00B48C4BB693}"/>
+                <a16:creationId xmlns:a16="http://schemas.microsoft.com/office/drawing/2014/main" id="{801574FA-3701-4206-AFF8-583B410F9FC1}"/>
               </a:ext>
             </a:extLst>
           </p:cNvPr>
@@ -11692,7 +11692,7 @@
           <p:cNvPr id="13" name="">
             <a:extLst xmlns:a="http://schemas.openxmlformats.org/drawingml/2006/main">
               <a:ext uri="{FF2B5EF4-FFF2-40B4-BE49-F238E27FC236}">
-                <a16:creationId xmlns:a16="http://schemas.microsoft.com/office/drawing/2014/main" id="{7E5F43E4-F59F-4C7D-BFA3-27946005EA54}"/>
+                <a16:creationId xmlns:a16="http://schemas.microsoft.com/office/drawing/2014/main" id="{D76C83CF-AE0E-453A-81E5-3AC79F79A62D}"/>
               </a:ext>
             </a:extLst>
           </p:cNvPr>
@@ -11727,7 +11727,7 @@
           <p:cNvPr id="14" name="">
             <a:extLst xmlns:a="http://schemas.openxmlformats.org/drawingml/2006/main">
               <a:ext uri="{FF2B5EF4-FFF2-40B4-BE49-F238E27FC236}">
-                <a16:creationId xmlns:a16="http://schemas.microsoft.com/office/drawing/2014/main" id="{3EC6B2B7-019B-4FA4-AF2F-F5828F6764FF}"/>
+                <a16:creationId xmlns:a16="http://schemas.microsoft.com/office/drawing/2014/main" id="{1737EC00-5556-4894-9EB7-2C2C5F1C8956}"/>
               </a:ext>
             </a:extLst>
           </p:cNvPr>
@@ -11791,7 +11791,7 @@
           <p:cNvPr id="15" name="">
             <a:extLst xmlns:a="http://schemas.openxmlformats.org/drawingml/2006/main">
               <a:ext uri="{FF2B5EF4-FFF2-40B4-BE49-F238E27FC236}">
-                <a16:creationId xmlns:a16="http://schemas.microsoft.com/office/drawing/2014/main" id="{C85811BA-C642-42D9-81E3-9D6BA43CEBAE}"/>
+                <a16:creationId xmlns:a16="http://schemas.microsoft.com/office/drawing/2014/main" id="{A187A0AF-E0E7-4936-BAA6-4ABE3D0DDE4B}"/>
               </a:ext>
             </a:extLst>
           </p:cNvPr>
@@ -11826,7 +11826,7 @@
           <p:cNvPr id="16" name="">
             <a:extLst xmlns:a="http://schemas.openxmlformats.org/drawingml/2006/main">
               <a:ext uri="{FF2B5EF4-FFF2-40B4-BE49-F238E27FC236}">
-                <a16:creationId xmlns:a16="http://schemas.microsoft.com/office/drawing/2014/main" id="{28F50C39-D136-48FD-9C25-A3AD0F88060A}"/>
+                <a16:creationId xmlns:a16="http://schemas.microsoft.com/office/drawing/2014/main" id="{3F464D85-D073-4DAE-AC8F-9580036DC4B5}"/>
               </a:ext>
             </a:extLst>
           </p:cNvPr>
@@ -11890,7 +11890,7 @@
           <p:cNvPr id="17" name="">
             <a:extLst xmlns:a="http://schemas.openxmlformats.org/drawingml/2006/main">
               <a:ext uri="{FF2B5EF4-FFF2-40B4-BE49-F238E27FC236}">
-                <a16:creationId xmlns:a16="http://schemas.microsoft.com/office/drawing/2014/main" id="{87B0F7BD-938B-4A09-A340-54480F6C0CDB}"/>
+                <a16:creationId xmlns:a16="http://schemas.microsoft.com/office/drawing/2014/main" id="{A40BA6BA-A192-4B3E-9502-146F78D6918A}"/>
               </a:ext>
             </a:extLst>
           </p:cNvPr>
@@ -11925,7 +11925,7 @@
           <p:cNvPr id="18" name="">
             <a:extLst xmlns:a="http://schemas.openxmlformats.org/drawingml/2006/main">
               <a:ext uri="{FF2B5EF4-FFF2-40B4-BE49-F238E27FC236}">
-                <a16:creationId xmlns:a16="http://schemas.microsoft.com/office/drawing/2014/main" id="{8F5D6A14-082D-4AD4-A1B4-718E456E546A}"/>
+                <a16:creationId xmlns:a16="http://schemas.microsoft.com/office/drawing/2014/main" id="{AE2CB222-AFF1-4D1D-BA53-0878D8FFF9CF}"/>
               </a:ext>
             </a:extLst>
           </p:cNvPr>
@@ -11989,7 +11989,7 @@
           <p:cNvPr id="19" name="">
             <a:extLst xmlns:a="http://schemas.openxmlformats.org/drawingml/2006/main">
               <a:ext uri="{FF2B5EF4-FFF2-40B4-BE49-F238E27FC236}">
-                <a16:creationId xmlns:a16="http://schemas.microsoft.com/office/drawing/2014/main" id="{BD748ECB-BB8D-4031-A0DA-D9AAEC3203E2}"/>
+                <a16:creationId xmlns:a16="http://schemas.microsoft.com/office/drawing/2014/main" id="{9C5D158A-6DFC-4125-8D63-C6E6C75DFF49}"/>
               </a:ext>
             </a:extLst>
           </p:cNvPr>
@@ -12024,7 +12024,7 @@
           <p:cNvPr id="20" name="">
             <a:extLst xmlns:a="http://schemas.openxmlformats.org/drawingml/2006/main">
               <a:ext uri="{FF2B5EF4-FFF2-40B4-BE49-F238E27FC236}">
-                <a16:creationId xmlns:a16="http://schemas.microsoft.com/office/drawing/2014/main" id="{FADF5E71-9C16-4E35-A48E-273027A7DE2D}"/>
+                <a16:creationId xmlns:a16="http://schemas.microsoft.com/office/drawing/2014/main" id="{44221127-9C90-4185-9D32-ED58257B944D}"/>
               </a:ext>
             </a:extLst>
           </p:cNvPr>
@@ -12086,7 +12086,7 @@
     </p:spTree>
     <p:extLst>
       <p:ext uri="{BB962C8B-B14F-4D97-AF65-F5344CB8AC3E}">
-        <p14:creationId xmlns:p14="http://schemas.microsoft.com/office/powerpoint/2010/main" val="434034130"/>
+        <p14:creationId xmlns:p14="http://schemas.microsoft.com/office/powerpoint/2010/main" val="1136043387"/>
       </p:ext>
     </p:extLst>
   </p:cSld>
@@ -12110,7 +12110,7 @@
           <p:cNvPr id="1" name="">
             <a:extLst xmlns:a="http://schemas.openxmlformats.org/drawingml/2006/main">
               <a:ext uri="{FF2B5EF4-FFF2-40B4-BE49-F238E27FC236}">
-                <a16:creationId xmlns:a16="http://schemas.microsoft.com/office/drawing/2014/main" id="{E39109FA-1344-4935-9F02-E78F9317B15E}"/>
+                <a16:creationId xmlns:a16="http://schemas.microsoft.com/office/drawing/2014/main" id="{AF475372-66AB-4253-B23E-0017E0E1E12E}"/>
               </a:ext>
             </a:extLst>
           </p:cNvPr>
@@ -12145,7 +12145,7 @@
           <p:cNvPr id="2" name="">
             <a:extLst xmlns:a="http://schemas.openxmlformats.org/drawingml/2006/main">
               <a:ext uri="{FF2B5EF4-FFF2-40B4-BE49-F238E27FC236}">
-                <a16:creationId xmlns:a16="http://schemas.microsoft.com/office/drawing/2014/main" id="{38DF0635-C2D5-4BD7-BEC7-4B9EE2E64327}"/>
+                <a16:creationId xmlns:a16="http://schemas.microsoft.com/office/drawing/2014/main" id="{CFA183BE-934D-4C5C-8D15-0392BC20A0AE}"/>
               </a:ext>
             </a:extLst>
           </p:cNvPr>
@@ -12180,7 +12180,7 @@
           <p:cNvPr id="3" name="">
             <a:extLst xmlns:a="http://schemas.openxmlformats.org/drawingml/2006/main">
               <a:ext uri="{FF2B5EF4-FFF2-40B4-BE49-F238E27FC236}">
-                <a16:creationId xmlns:a16="http://schemas.microsoft.com/office/drawing/2014/main" id="{3C7DAF1A-60B1-4933-AB12-6A1175C95555}"/>
+                <a16:creationId xmlns:a16="http://schemas.microsoft.com/office/drawing/2014/main" id="{EB80431D-6537-4CB2-947B-A60462241039}"/>
               </a:ext>
             </a:extLst>
           </p:cNvPr>
@@ -12215,7 +12215,7 @@
           <p:cNvPr id="4" name="kicker-2-label">
             <a:extLst xmlns:a="http://schemas.openxmlformats.org/drawingml/2006/main">
               <a:ext uri="{FF2B5EF4-FFF2-40B4-BE49-F238E27FC236}">
-                <a16:creationId xmlns:a16="http://schemas.microsoft.com/office/drawing/2014/main" id="{14928FD6-A9B2-4191-8081-AB62544BB292}"/>
+                <a16:creationId xmlns:a16="http://schemas.microsoft.com/office/drawing/2014/main" id="{7436FC57-0028-4CE8-BFA0-104651F5FEF8}"/>
               </a:ext>
             </a:extLst>
           </p:cNvPr>
@@ -12279,7 +12279,7 @@
           <p:cNvPr id="5" name="">
             <a:extLst xmlns:a="http://schemas.openxmlformats.org/drawingml/2006/main">
               <a:ext uri="{FF2B5EF4-FFF2-40B4-BE49-F238E27FC236}">
-                <a16:creationId xmlns:a16="http://schemas.microsoft.com/office/drawing/2014/main" id="{582CBAC1-B0DF-4246-ADD0-DECE81E40D79}"/>
+                <a16:creationId xmlns:a16="http://schemas.microsoft.com/office/drawing/2014/main" id="{1F30E54D-9C1D-4A1D-B867-979C648DDA8F}"/>
               </a:ext>
             </a:extLst>
           </p:cNvPr>
@@ -12343,7 +12343,7 @@
           <p:cNvPr id="6" name="">
             <a:extLst xmlns:a="http://schemas.openxmlformats.org/drawingml/2006/main">
               <a:ext uri="{FF2B5EF4-FFF2-40B4-BE49-F238E27FC236}">
-                <a16:creationId xmlns:a16="http://schemas.microsoft.com/office/drawing/2014/main" id="{1946C33B-8826-4D9D-A61E-5131131468C6}"/>
+                <a16:creationId xmlns:a16="http://schemas.microsoft.com/office/drawing/2014/main" id="{22172801-F913-42F6-82DD-28374E7A7C0A}"/>
               </a:ext>
             </a:extLst>
           </p:cNvPr>
@@ -12407,7 +12407,7 @@
           <p:cNvPr id="7" name="">
             <a:extLst xmlns:a="http://schemas.openxmlformats.org/drawingml/2006/main">
               <a:ext uri="{FF2B5EF4-FFF2-40B4-BE49-F238E27FC236}">
-                <a16:creationId xmlns:a16="http://schemas.microsoft.com/office/drawing/2014/main" id="{0502CE4F-FF41-41BE-B634-FF1EAEC50BA3}"/>
+                <a16:creationId xmlns:a16="http://schemas.microsoft.com/office/drawing/2014/main" id="{A6A0ED1C-4CCC-4F71-95B1-9C36C007617F}"/>
               </a:ext>
             </a:extLst>
           </p:cNvPr>
@@ -12442,7 +12442,7 @@
           <p:cNvPr id="8" name="">
             <a:extLst xmlns:a="http://schemas.openxmlformats.org/drawingml/2006/main">
               <a:ext uri="{FF2B5EF4-FFF2-40B4-BE49-F238E27FC236}">
-                <a16:creationId xmlns:a16="http://schemas.microsoft.com/office/drawing/2014/main" id="{30C3840F-CD3E-4E21-BAD2-6B33A0C26C53}"/>
+                <a16:creationId xmlns:a16="http://schemas.microsoft.com/office/drawing/2014/main" id="{DD8DFD1C-08B4-4380-95DE-1CC1024C0B0B}"/>
               </a:ext>
             </a:extLst>
           </p:cNvPr>
@@ -12506,7 +12506,7 @@
           <p:cNvPr id="9" name="">
             <a:extLst xmlns:a="http://schemas.openxmlformats.org/drawingml/2006/main">
               <a:ext uri="{FF2B5EF4-FFF2-40B4-BE49-F238E27FC236}">
-                <a16:creationId xmlns:a16="http://schemas.microsoft.com/office/drawing/2014/main" id="{85EDA038-F829-4540-B372-3E992FB7DD48}"/>
+                <a16:creationId xmlns:a16="http://schemas.microsoft.com/office/drawing/2014/main" id="{C701E08B-6871-4E79-8A98-BCB21D798558}"/>
               </a:ext>
             </a:extLst>
           </p:cNvPr>
@@ -12541,7 +12541,7 @@
           <p:cNvPr id="10" name="">
             <a:extLst xmlns:a="http://schemas.openxmlformats.org/drawingml/2006/main">
               <a:ext uri="{FF2B5EF4-FFF2-40B4-BE49-F238E27FC236}">
-                <a16:creationId xmlns:a16="http://schemas.microsoft.com/office/drawing/2014/main" id="{2876811A-A333-4D00-97BA-BDE790A254A0}"/>
+                <a16:creationId xmlns:a16="http://schemas.microsoft.com/office/drawing/2014/main" id="{45B38183-092E-4086-A4B4-BEBAABF9F8CF}"/>
               </a:ext>
             </a:extLst>
           </p:cNvPr>
@@ -12605,7 +12605,7 @@
           <p:cNvPr id="11" name="">
             <a:extLst xmlns:a="http://schemas.openxmlformats.org/drawingml/2006/main">
               <a:ext uri="{FF2B5EF4-FFF2-40B4-BE49-F238E27FC236}">
-                <a16:creationId xmlns:a16="http://schemas.microsoft.com/office/drawing/2014/main" id="{D5E57F7E-36C0-4E97-9C85-B60A20D079AA}"/>
+                <a16:creationId xmlns:a16="http://schemas.microsoft.com/office/drawing/2014/main" id="{F13808A8-9C7B-4560-8098-E63A3456DA07}"/>
               </a:ext>
             </a:extLst>
           </p:cNvPr>
@@ -12640,7 +12640,7 @@
           <p:cNvPr id="12" name="">
             <a:extLst xmlns:a="http://schemas.openxmlformats.org/drawingml/2006/main">
               <a:ext uri="{FF2B5EF4-FFF2-40B4-BE49-F238E27FC236}">
-                <a16:creationId xmlns:a16="http://schemas.microsoft.com/office/drawing/2014/main" id="{1DE1C3BB-D877-4E00-ABBD-8B95DE6A1EEB}"/>
+                <a16:creationId xmlns:a16="http://schemas.microsoft.com/office/drawing/2014/main" id="{BBAAAD66-8429-4E6A-B1CB-4F59EC672ABD}"/>
               </a:ext>
             </a:extLst>
           </p:cNvPr>
@@ -12704,7 +12704,7 @@
           <p:cNvPr id="13" name="">
             <a:extLst xmlns:a="http://schemas.openxmlformats.org/drawingml/2006/main">
               <a:ext uri="{FF2B5EF4-FFF2-40B4-BE49-F238E27FC236}">
-                <a16:creationId xmlns:a16="http://schemas.microsoft.com/office/drawing/2014/main" id="{0536F04A-B921-4CB9-94EE-2839ED7A205F}"/>
+                <a16:creationId xmlns:a16="http://schemas.microsoft.com/office/drawing/2014/main" id="{2DE8B99D-E1E3-4124-A37E-DC2BDB94357E}"/>
               </a:ext>
             </a:extLst>
           </p:cNvPr>
@@ -12737,7 +12737,7 @@
           <p:cNvPr id="14" name="">
             <a:extLst xmlns:a="http://schemas.openxmlformats.org/drawingml/2006/main">
               <a:ext uri="{FF2B5EF4-FFF2-40B4-BE49-F238E27FC236}">
-                <a16:creationId xmlns:a16="http://schemas.microsoft.com/office/drawing/2014/main" id="{84D42AB6-CECC-4886-B750-D7A511C4FE63}"/>
+                <a16:creationId xmlns:a16="http://schemas.microsoft.com/office/drawing/2014/main" id="{1C81C4AF-B769-45B9-A04A-AA6EEA8FEB7C}"/>
               </a:ext>
             </a:extLst>
           </p:cNvPr>
@@ -12801,7 +12801,7 @@
           <p:cNvPr id="15" name="">
             <a:extLst xmlns:a="http://schemas.openxmlformats.org/drawingml/2006/main">
               <a:ext uri="{FF2B5EF4-FFF2-40B4-BE49-F238E27FC236}">
-                <a16:creationId xmlns:a16="http://schemas.microsoft.com/office/drawing/2014/main" id="{C50183B4-F2DE-438D-81B8-05F850C1A475}"/>
+                <a16:creationId xmlns:a16="http://schemas.microsoft.com/office/drawing/2014/main" id="{7E121B97-8F6F-4198-8FA2-6D7A2E654CC8}"/>
               </a:ext>
             </a:extLst>
           </p:cNvPr>
@@ -12865,7 +12865,7 @@
           <p:cNvPr id="16" name="">
             <a:extLst xmlns:a="http://schemas.openxmlformats.org/drawingml/2006/main">
               <a:ext uri="{FF2B5EF4-FFF2-40B4-BE49-F238E27FC236}">
-                <a16:creationId xmlns:a16="http://schemas.microsoft.com/office/drawing/2014/main" id="{2B32C97E-B3D5-49CE-B94D-7AFAC32F786E}"/>
+                <a16:creationId xmlns:a16="http://schemas.microsoft.com/office/drawing/2014/main" id="{0EBD66CB-5AD0-47FA-927E-25E2D5566C9E}"/>
               </a:ext>
             </a:extLst>
           </p:cNvPr>
@@ -12898,7 +12898,7 @@
           <p:cNvPr id="17" name="">
             <a:extLst xmlns:a="http://schemas.openxmlformats.org/drawingml/2006/main">
               <a:ext uri="{FF2B5EF4-FFF2-40B4-BE49-F238E27FC236}">
-                <a16:creationId xmlns:a16="http://schemas.microsoft.com/office/drawing/2014/main" id="{20D2057F-DFF6-473D-849C-6E17AA6B0860}"/>
+                <a16:creationId xmlns:a16="http://schemas.microsoft.com/office/drawing/2014/main" id="{25F48C89-B740-4699-97B8-75402DCFE69D}"/>
               </a:ext>
             </a:extLst>
           </p:cNvPr>
@@ -12962,7 +12962,7 @@
           <p:cNvPr id="18" name="">
             <a:extLst xmlns:a="http://schemas.openxmlformats.org/drawingml/2006/main">
               <a:ext uri="{FF2B5EF4-FFF2-40B4-BE49-F238E27FC236}">
-                <a16:creationId xmlns:a16="http://schemas.microsoft.com/office/drawing/2014/main" id="{89BB50CF-D3F5-470D-AA73-38B110800A2F}"/>
+                <a16:creationId xmlns:a16="http://schemas.microsoft.com/office/drawing/2014/main" id="{F614F589-F2B7-4AD7-A211-92A28157EE8E}"/>
               </a:ext>
             </a:extLst>
           </p:cNvPr>
@@ -13026,7 +13026,7 @@
           <p:cNvPr id="19" name="">
             <a:extLst xmlns:a="http://schemas.openxmlformats.org/drawingml/2006/main">
               <a:ext uri="{FF2B5EF4-FFF2-40B4-BE49-F238E27FC236}">
-                <a16:creationId xmlns:a16="http://schemas.microsoft.com/office/drawing/2014/main" id="{CD6B405C-1121-4A50-8FBE-14E3B7E453F1}"/>
+                <a16:creationId xmlns:a16="http://schemas.microsoft.com/office/drawing/2014/main" id="{4A9FC424-9665-4551-AE13-FDA2A30E0549}"/>
               </a:ext>
             </a:extLst>
           </p:cNvPr>
@@ -13059,7 +13059,7 @@
           <p:cNvPr id="20" name="">
             <a:extLst xmlns:a="http://schemas.openxmlformats.org/drawingml/2006/main">
               <a:ext uri="{FF2B5EF4-FFF2-40B4-BE49-F238E27FC236}">
-                <a16:creationId xmlns:a16="http://schemas.microsoft.com/office/drawing/2014/main" id="{BA7A9D36-9AA1-4FD6-99B7-C5C278332989}"/>
+                <a16:creationId xmlns:a16="http://schemas.microsoft.com/office/drawing/2014/main" id="{2FD0F9DA-13D3-44ED-B780-4F0489FFBBCC}"/>
               </a:ext>
             </a:extLst>
           </p:cNvPr>
@@ -13123,7 +13123,7 @@
           <p:cNvPr id="21" name="">
             <a:extLst xmlns:a="http://schemas.openxmlformats.org/drawingml/2006/main">
               <a:ext uri="{FF2B5EF4-FFF2-40B4-BE49-F238E27FC236}">
-                <a16:creationId xmlns:a16="http://schemas.microsoft.com/office/drawing/2014/main" id="{5E6791D9-5C9A-4155-9FFB-44B5036A0528}"/>
+                <a16:creationId xmlns:a16="http://schemas.microsoft.com/office/drawing/2014/main" id="{9DF4A492-BCCF-473D-B717-7F148585E0AC}"/>
               </a:ext>
             </a:extLst>
           </p:cNvPr>
@@ -13185,7 +13185,7 @@
     </p:spTree>
     <p:extLst>
       <p:ext uri="{BB962C8B-B14F-4D97-AF65-F5344CB8AC3E}">
-        <p14:creationId xmlns:p14="http://schemas.microsoft.com/office/powerpoint/2010/main" val="1319033543"/>
+        <p14:creationId xmlns:p14="http://schemas.microsoft.com/office/powerpoint/2010/main" val="1743392795"/>
       </p:ext>
     </p:extLst>
   </p:cSld>
@@ -13209,7 +13209,7 @@
           <p:cNvPr id="1" name="">
             <a:extLst xmlns:a="http://schemas.openxmlformats.org/drawingml/2006/main">
               <a:ext uri="{FF2B5EF4-FFF2-40B4-BE49-F238E27FC236}">
-                <a16:creationId xmlns:a16="http://schemas.microsoft.com/office/drawing/2014/main" id="{F06F2829-4700-494F-9AB2-0EF769F29D55}"/>
+                <a16:creationId xmlns:a16="http://schemas.microsoft.com/office/drawing/2014/main" id="{4691F2F6-4E99-4824-8EA4-19032E74F96A}"/>
               </a:ext>
             </a:extLst>
           </p:cNvPr>
@@ -13244,7 +13244,7 @@
           <p:cNvPr id="2" name="">
             <a:extLst xmlns:a="http://schemas.openxmlformats.org/drawingml/2006/main">
               <a:ext uri="{FF2B5EF4-FFF2-40B4-BE49-F238E27FC236}">
-                <a16:creationId xmlns:a16="http://schemas.microsoft.com/office/drawing/2014/main" id="{991A91B2-034B-45E3-94E6-EEDD0D32FB02}"/>
+                <a16:creationId xmlns:a16="http://schemas.microsoft.com/office/drawing/2014/main" id="{587867B2-3D28-4994-9BE9-A7EFB17B2D83}"/>
               </a:ext>
             </a:extLst>
           </p:cNvPr>
@@ -13279,7 +13279,7 @@
           <p:cNvPr id="3" name="">
             <a:extLst xmlns:a="http://schemas.openxmlformats.org/drawingml/2006/main">
               <a:ext uri="{FF2B5EF4-FFF2-40B4-BE49-F238E27FC236}">
-                <a16:creationId xmlns:a16="http://schemas.microsoft.com/office/drawing/2014/main" id="{6107A644-DD30-4EAC-A173-2C2384042469}"/>
+                <a16:creationId xmlns:a16="http://schemas.microsoft.com/office/drawing/2014/main" id="{054F97CD-8D86-4802-BD93-D57B20D77C85}"/>
               </a:ext>
             </a:extLst>
           </p:cNvPr>
@@ -13314,7 +13314,7 @@
           <p:cNvPr id="4" name="kicker-3-label">
             <a:extLst xmlns:a="http://schemas.openxmlformats.org/drawingml/2006/main">
               <a:ext uri="{FF2B5EF4-FFF2-40B4-BE49-F238E27FC236}">
-                <a16:creationId xmlns:a16="http://schemas.microsoft.com/office/drawing/2014/main" id="{E0BCEBE9-8FCB-41C2-A89E-586868DB8CE0}"/>
+                <a16:creationId xmlns:a16="http://schemas.microsoft.com/office/drawing/2014/main" id="{4C0AD3E6-7E8F-4A42-A9E1-E9EF7C5BD16F}"/>
               </a:ext>
             </a:extLst>
           </p:cNvPr>
@@ -13378,7 +13378,7 @@
           <p:cNvPr id="5" name="">
             <a:extLst xmlns:a="http://schemas.openxmlformats.org/drawingml/2006/main">
               <a:ext uri="{FF2B5EF4-FFF2-40B4-BE49-F238E27FC236}">
-                <a16:creationId xmlns:a16="http://schemas.microsoft.com/office/drawing/2014/main" id="{CD9B4D50-4224-400B-AED1-3FA33196C19B}"/>
+                <a16:creationId xmlns:a16="http://schemas.microsoft.com/office/drawing/2014/main" id="{03A858D0-883C-4AA1-9F07-C8BA3F18EDF3}"/>
               </a:ext>
             </a:extLst>
           </p:cNvPr>
@@ -13442,7 +13442,7 @@
           <p:cNvPr id="6" name="">
             <a:extLst xmlns:a="http://schemas.openxmlformats.org/drawingml/2006/main">
               <a:ext uri="{FF2B5EF4-FFF2-40B4-BE49-F238E27FC236}">
-                <a16:creationId xmlns:a16="http://schemas.microsoft.com/office/drawing/2014/main" id="{9998874B-EF86-427F-BCA7-FDC1FEE9686B}"/>
+                <a16:creationId xmlns:a16="http://schemas.microsoft.com/office/drawing/2014/main" id="{975D1B5F-7878-43D4-93AD-FD016872A3C3}"/>
               </a:ext>
             </a:extLst>
           </p:cNvPr>
@@ -13506,7 +13506,7 @@
           <p:cNvPr id="7" name="">
             <a:extLst xmlns:a="http://schemas.openxmlformats.org/drawingml/2006/main">
               <a:ext uri="{FF2B5EF4-FFF2-40B4-BE49-F238E27FC236}">
-                <a16:creationId xmlns:a16="http://schemas.microsoft.com/office/drawing/2014/main" id="{52D8CBF4-25F4-4871-AFB4-3304AF3C0396}"/>
+                <a16:creationId xmlns:a16="http://schemas.microsoft.com/office/drawing/2014/main" id="{EAAB83F8-145E-49D8-B14F-0394EE5F8F90}"/>
               </a:ext>
             </a:extLst>
           </p:cNvPr>
@@ -13541,7 +13541,7 @@
           <p:cNvPr id="8" name="">
             <a:extLst xmlns:a="http://schemas.openxmlformats.org/drawingml/2006/main">
               <a:ext uri="{FF2B5EF4-FFF2-40B4-BE49-F238E27FC236}">
-                <a16:creationId xmlns:a16="http://schemas.microsoft.com/office/drawing/2014/main" id="{665E4DC2-EDD7-4981-A695-8C67C07E28EF}"/>
+                <a16:creationId xmlns:a16="http://schemas.microsoft.com/office/drawing/2014/main" id="{026E6F50-0493-46EE-8A25-89A8AD024BFA}"/>
               </a:ext>
             </a:extLst>
           </p:cNvPr>
@@ -13605,7 +13605,7 @@
           <p:cNvPr id="9" name="">
             <a:extLst xmlns:a="http://schemas.openxmlformats.org/drawingml/2006/main">
               <a:ext uri="{FF2B5EF4-FFF2-40B4-BE49-F238E27FC236}">
-                <a16:creationId xmlns:a16="http://schemas.microsoft.com/office/drawing/2014/main" id="{C326508D-652B-4B58-B4EF-61C5D2D2D1D9}"/>
+                <a16:creationId xmlns:a16="http://schemas.microsoft.com/office/drawing/2014/main" id="{2065266B-706A-4A29-A8A0-1F9A83FB4A61}"/>
               </a:ext>
             </a:extLst>
           </p:cNvPr>
@@ -13640,7 +13640,7 @@
           <p:cNvPr id="10" name="">
             <a:extLst xmlns:a="http://schemas.openxmlformats.org/drawingml/2006/main">
               <a:ext uri="{FF2B5EF4-FFF2-40B4-BE49-F238E27FC236}">
-                <a16:creationId xmlns:a16="http://schemas.microsoft.com/office/drawing/2014/main" id="{4E13798E-A5B6-4D08-88B6-380DAC43A5CA}"/>
+                <a16:creationId xmlns:a16="http://schemas.microsoft.com/office/drawing/2014/main" id="{7B27D596-A780-4FCF-B019-50EDE94C1742}"/>
               </a:ext>
             </a:extLst>
           </p:cNvPr>
@@ -13704,7 +13704,7 @@
           <p:cNvPr id="11" name="">
             <a:extLst xmlns:a="http://schemas.openxmlformats.org/drawingml/2006/main">
               <a:ext uri="{FF2B5EF4-FFF2-40B4-BE49-F238E27FC236}">
-                <a16:creationId xmlns:a16="http://schemas.microsoft.com/office/drawing/2014/main" id="{1E34759E-833C-4EBB-A99E-58127042B7D5}"/>
+                <a16:creationId xmlns:a16="http://schemas.microsoft.com/office/drawing/2014/main" id="{502995D1-B3E0-4EF5-848F-3E09965E9EDF}"/>
               </a:ext>
             </a:extLst>
           </p:cNvPr>
@@ -13739,7 +13739,7 @@
           <p:cNvPr id="12" name="">
             <a:extLst xmlns:a="http://schemas.openxmlformats.org/drawingml/2006/main">
               <a:ext uri="{FF2B5EF4-FFF2-40B4-BE49-F238E27FC236}">
-                <a16:creationId xmlns:a16="http://schemas.microsoft.com/office/drawing/2014/main" id="{013096B0-70ED-4234-92D3-01098892C535}"/>
+                <a16:creationId xmlns:a16="http://schemas.microsoft.com/office/drawing/2014/main" id="{1E8ECA01-3F9D-4DB1-95D7-7DE57DC93035}"/>
               </a:ext>
             </a:extLst>
           </p:cNvPr>
@@ -13803,7 +13803,7 @@
           <p:cNvPr id="13" name="">
             <a:extLst xmlns:a="http://schemas.openxmlformats.org/drawingml/2006/main">
               <a:ext uri="{FF2B5EF4-FFF2-40B4-BE49-F238E27FC236}">
-                <a16:creationId xmlns:a16="http://schemas.microsoft.com/office/drawing/2014/main" id="{E59F8876-710A-4B88-B2A3-156D77CC8CC9}"/>
+                <a16:creationId xmlns:a16="http://schemas.microsoft.com/office/drawing/2014/main" id="{F5A92C86-245D-4FA7-A247-2BAB91C4F1DA}"/>
               </a:ext>
             </a:extLst>
           </p:cNvPr>
@@ -13836,7 +13836,7 @@
           <p:cNvPr id="14" name="">
             <a:extLst xmlns:a="http://schemas.openxmlformats.org/drawingml/2006/main">
               <a:ext uri="{FF2B5EF4-FFF2-40B4-BE49-F238E27FC236}">
-                <a16:creationId xmlns:a16="http://schemas.microsoft.com/office/drawing/2014/main" id="{47CA8FC4-7BD6-4AD9-87C3-442CE3E4D45E}"/>
+                <a16:creationId xmlns:a16="http://schemas.microsoft.com/office/drawing/2014/main" id="{BD90DA1F-206C-4771-9BA9-FCF4880FFB63}"/>
               </a:ext>
             </a:extLst>
           </p:cNvPr>
@@ -13900,7 +13900,7 @@
           <p:cNvPr id="15" name="">
             <a:extLst xmlns:a="http://schemas.openxmlformats.org/drawingml/2006/main">
               <a:ext uri="{FF2B5EF4-FFF2-40B4-BE49-F238E27FC236}">
-                <a16:creationId xmlns:a16="http://schemas.microsoft.com/office/drawing/2014/main" id="{35100BB9-0F6D-40E3-B515-626F508F3A61}"/>
+                <a16:creationId xmlns:a16="http://schemas.microsoft.com/office/drawing/2014/main" id="{8D02DE6A-6E94-484C-B8A1-E4AE9F4F9810}"/>
               </a:ext>
             </a:extLst>
           </p:cNvPr>
@@ -13964,7 +13964,7 @@
           <p:cNvPr id="16" name="">
             <a:extLst xmlns:a="http://schemas.openxmlformats.org/drawingml/2006/main">
               <a:ext uri="{FF2B5EF4-FFF2-40B4-BE49-F238E27FC236}">
-                <a16:creationId xmlns:a16="http://schemas.microsoft.com/office/drawing/2014/main" id="{65335CA9-9654-4AA4-ADF7-82A1A39E1BA3}"/>
+                <a16:creationId xmlns:a16="http://schemas.microsoft.com/office/drawing/2014/main" id="{9719D2F1-627C-4AFA-94D8-17964EB82CB9}"/>
               </a:ext>
             </a:extLst>
           </p:cNvPr>
@@ -13997,7 +13997,7 @@
           <p:cNvPr id="17" name="">
             <a:extLst xmlns:a="http://schemas.openxmlformats.org/drawingml/2006/main">
               <a:ext uri="{FF2B5EF4-FFF2-40B4-BE49-F238E27FC236}">
-                <a16:creationId xmlns:a16="http://schemas.microsoft.com/office/drawing/2014/main" id="{143B7C96-0201-4286-89D0-1463A7ECF998}"/>
+                <a16:creationId xmlns:a16="http://schemas.microsoft.com/office/drawing/2014/main" id="{783DE76A-8183-4A54-BFD4-C7217E4EC2F5}"/>
               </a:ext>
             </a:extLst>
           </p:cNvPr>
@@ -14061,7 +14061,7 @@
           <p:cNvPr id="18" name="">
             <a:extLst xmlns:a="http://schemas.openxmlformats.org/drawingml/2006/main">
               <a:ext uri="{FF2B5EF4-FFF2-40B4-BE49-F238E27FC236}">
-                <a16:creationId xmlns:a16="http://schemas.microsoft.com/office/drawing/2014/main" id="{5A406FEF-08D3-4A12-83B9-DDE51BBB9A00}"/>
+                <a16:creationId xmlns:a16="http://schemas.microsoft.com/office/drawing/2014/main" id="{B745245E-CA41-4E8F-B531-962D294CC7E1}"/>
               </a:ext>
             </a:extLst>
           </p:cNvPr>
@@ -14125,7 +14125,7 @@
           <p:cNvPr id="19" name="">
             <a:extLst xmlns:a="http://schemas.openxmlformats.org/drawingml/2006/main">
               <a:ext uri="{FF2B5EF4-FFF2-40B4-BE49-F238E27FC236}">
-                <a16:creationId xmlns:a16="http://schemas.microsoft.com/office/drawing/2014/main" id="{AB5924F0-79FE-4567-9B6F-245F40923135}"/>
+                <a16:creationId xmlns:a16="http://schemas.microsoft.com/office/drawing/2014/main" id="{0014A1F1-F346-4409-A8E5-910983E4964F}"/>
               </a:ext>
             </a:extLst>
           </p:cNvPr>
@@ -14158,7 +14158,7 @@
           <p:cNvPr id="20" name="">
             <a:extLst xmlns:a="http://schemas.openxmlformats.org/drawingml/2006/main">
               <a:ext uri="{FF2B5EF4-FFF2-40B4-BE49-F238E27FC236}">
-                <a16:creationId xmlns:a16="http://schemas.microsoft.com/office/drawing/2014/main" id="{43AD9F8C-08BD-4532-835D-7996C93B8641}"/>
+                <a16:creationId xmlns:a16="http://schemas.microsoft.com/office/drawing/2014/main" id="{176B5DB1-4EED-448B-A9AE-C095E55EBCEA}"/>
               </a:ext>
             </a:extLst>
           </p:cNvPr>
@@ -14222,7 +14222,7 @@
           <p:cNvPr id="21" name="">
             <a:extLst xmlns:a="http://schemas.openxmlformats.org/drawingml/2006/main">
               <a:ext uri="{FF2B5EF4-FFF2-40B4-BE49-F238E27FC236}">
-                <a16:creationId xmlns:a16="http://schemas.microsoft.com/office/drawing/2014/main" id="{FFD68075-94E1-4AFE-8073-638A45BC7F26}"/>
+                <a16:creationId xmlns:a16="http://schemas.microsoft.com/office/drawing/2014/main" id="{6BA5DE8F-A02D-4A3E-B88D-CDF232FD9184}"/>
               </a:ext>
             </a:extLst>
           </p:cNvPr>
@@ -14284,7 +14284,7 @@
     </p:spTree>
     <p:extLst>
       <p:ext uri="{BB962C8B-B14F-4D97-AF65-F5344CB8AC3E}">
-        <p14:creationId xmlns:p14="http://schemas.microsoft.com/office/powerpoint/2010/main" val="1668992986"/>
+        <p14:creationId xmlns:p14="http://schemas.microsoft.com/office/powerpoint/2010/main" val="1301372635"/>
       </p:ext>
     </p:extLst>
   </p:cSld>
@@ -14308,7 +14308,7 @@
           <p:cNvPr id="1" name="">
             <a:extLst xmlns:a="http://schemas.openxmlformats.org/drawingml/2006/main">
               <a:ext uri="{FF2B5EF4-FFF2-40B4-BE49-F238E27FC236}">
-                <a16:creationId xmlns:a16="http://schemas.microsoft.com/office/drawing/2014/main" id="{5682A653-7933-48ED-9E8B-99A8ACFA1DC6}"/>
+                <a16:creationId xmlns:a16="http://schemas.microsoft.com/office/drawing/2014/main" id="{A269024F-B8E3-48B0-BF31-CADA46DB9D1D}"/>
               </a:ext>
             </a:extLst>
           </p:cNvPr>
@@ -14343,7 +14343,7 @@
           <p:cNvPr id="2" name="">
             <a:extLst xmlns:a="http://schemas.openxmlformats.org/drawingml/2006/main">
               <a:ext uri="{FF2B5EF4-FFF2-40B4-BE49-F238E27FC236}">
-                <a16:creationId xmlns:a16="http://schemas.microsoft.com/office/drawing/2014/main" id="{2CD3388A-A321-4C7D-BCA7-78460A80AE8C}"/>
+                <a16:creationId xmlns:a16="http://schemas.microsoft.com/office/drawing/2014/main" id="{34A43DD9-A9E7-460D-98C8-FA1FE48F8EEE}"/>
               </a:ext>
             </a:extLst>
           </p:cNvPr>
@@ -14378,7 +14378,7 @@
           <p:cNvPr id="3" name="">
             <a:extLst xmlns:a="http://schemas.openxmlformats.org/drawingml/2006/main">
               <a:ext uri="{FF2B5EF4-FFF2-40B4-BE49-F238E27FC236}">
-                <a16:creationId xmlns:a16="http://schemas.microsoft.com/office/drawing/2014/main" id="{DF4437AD-8CBE-48E2-99ED-AB000F6ED9C3}"/>
+                <a16:creationId xmlns:a16="http://schemas.microsoft.com/office/drawing/2014/main" id="{C04F96EE-75EE-4F0D-A77F-0774A1A53E20}"/>
               </a:ext>
             </a:extLst>
           </p:cNvPr>
@@ -14413,7 +14413,7 @@
           <p:cNvPr id="4" name="kicker-4-label">
             <a:extLst xmlns:a="http://schemas.openxmlformats.org/drawingml/2006/main">
               <a:ext uri="{FF2B5EF4-FFF2-40B4-BE49-F238E27FC236}">
-                <a16:creationId xmlns:a16="http://schemas.microsoft.com/office/drawing/2014/main" id="{6109B01B-6DC8-4B3D-8531-BC43F18CAD4F}"/>
+                <a16:creationId xmlns:a16="http://schemas.microsoft.com/office/drawing/2014/main" id="{0A5BDFAA-5C22-4D27-A1A7-C0F1E8D96FE4}"/>
               </a:ext>
             </a:extLst>
           </p:cNvPr>
@@ -14477,7 +14477,7 @@
           <p:cNvPr id="5" name="">
             <a:extLst xmlns:a="http://schemas.openxmlformats.org/drawingml/2006/main">
               <a:ext uri="{FF2B5EF4-FFF2-40B4-BE49-F238E27FC236}">
-                <a16:creationId xmlns:a16="http://schemas.microsoft.com/office/drawing/2014/main" id="{2E7B36E2-E838-43A7-8461-B4BF26DAA416}"/>
+                <a16:creationId xmlns:a16="http://schemas.microsoft.com/office/drawing/2014/main" id="{AE95B04F-4E39-4D51-9D28-1B5CB5514E73}"/>
               </a:ext>
             </a:extLst>
           </p:cNvPr>
@@ -14541,7 +14541,7 @@
           <p:cNvPr id="6" name="">
             <a:extLst xmlns:a="http://schemas.openxmlformats.org/drawingml/2006/main">
               <a:ext uri="{FF2B5EF4-FFF2-40B4-BE49-F238E27FC236}">
-                <a16:creationId xmlns:a16="http://schemas.microsoft.com/office/drawing/2014/main" id="{22E421D5-536D-48CC-A0BB-3C7D5167358B}"/>
+                <a16:creationId xmlns:a16="http://schemas.microsoft.com/office/drawing/2014/main" id="{D5762D4F-FB51-4719-B58B-B35BD2C1FF80}"/>
               </a:ext>
             </a:extLst>
           </p:cNvPr>
@@ -14605,7 +14605,7 @@
           <p:cNvPr id="7" name="">
             <a:extLst xmlns:a="http://schemas.openxmlformats.org/drawingml/2006/main">
               <a:ext uri="{FF2B5EF4-FFF2-40B4-BE49-F238E27FC236}">
-                <a16:creationId xmlns:a16="http://schemas.microsoft.com/office/drawing/2014/main" id="{075EEC91-B431-4487-B75A-F2AAC2F0939E}"/>
+                <a16:creationId xmlns:a16="http://schemas.microsoft.com/office/drawing/2014/main" id="{D7F74D67-7ECB-43A8-918C-D1F56F5D984D}"/>
               </a:ext>
             </a:extLst>
           </p:cNvPr>
@@ -14640,7 +14640,7 @@
           <p:cNvPr id="8" name="">
             <a:extLst xmlns:a="http://schemas.openxmlformats.org/drawingml/2006/main">
               <a:ext uri="{FF2B5EF4-FFF2-40B4-BE49-F238E27FC236}">
-                <a16:creationId xmlns:a16="http://schemas.microsoft.com/office/drawing/2014/main" id="{E95DBFAE-261E-4357-A713-F2A6CE1626B0}"/>
+                <a16:creationId xmlns:a16="http://schemas.microsoft.com/office/drawing/2014/main" id="{7534387F-1A70-455C-9645-18A09C65A382}"/>
               </a:ext>
             </a:extLst>
           </p:cNvPr>
@@ -14704,7 +14704,7 @@
           <p:cNvPr id="9" name="">
             <a:extLst xmlns:a="http://schemas.openxmlformats.org/drawingml/2006/main">
               <a:ext uri="{FF2B5EF4-FFF2-40B4-BE49-F238E27FC236}">
-                <a16:creationId xmlns:a16="http://schemas.microsoft.com/office/drawing/2014/main" id="{BDF3549F-BE37-4BC2-96DD-A71733C08A96}"/>
+                <a16:creationId xmlns:a16="http://schemas.microsoft.com/office/drawing/2014/main" id="{4A8763F3-04A2-409C-BE81-2C1A2106A8E1}"/>
               </a:ext>
             </a:extLst>
           </p:cNvPr>
@@ -14739,7 +14739,7 @@
           <p:cNvPr id="10" name="">
             <a:extLst xmlns:a="http://schemas.openxmlformats.org/drawingml/2006/main">
               <a:ext uri="{FF2B5EF4-FFF2-40B4-BE49-F238E27FC236}">
-                <a16:creationId xmlns:a16="http://schemas.microsoft.com/office/drawing/2014/main" id="{5EECD15F-3331-4128-AA19-15E63F38CCEC}"/>
+                <a16:creationId xmlns:a16="http://schemas.microsoft.com/office/drawing/2014/main" id="{28B682E1-F876-48A4-9784-0AA4329EA8B6}"/>
               </a:ext>
             </a:extLst>
           </p:cNvPr>
@@ -14803,7 +14803,7 @@
           <p:cNvPr id="11" name="">
             <a:extLst xmlns:a="http://schemas.openxmlformats.org/drawingml/2006/main">
               <a:ext uri="{FF2B5EF4-FFF2-40B4-BE49-F238E27FC236}">
-                <a16:creationId xmlns:a16="http://schemas.microsoft.com/office/drawing/2014/main" id="{01D9BFCB-F03C-45AC-88F0-44124C0BE22F}"/>
+                <a16:creationId xmlns:a16="http://schemas.microsoft.com/office/drawing/2014/main" id="{3A2BA406-93CF-4551-9E19-28FE55C0F45B}"/>
               </a:ext>
             </a:extLst>
           </p:cNvPr>
@@ -14838,7 +14838,7 @@
           <p:cNvPr id="12" name="">
             <a:extLst xmlns:a="http://schemas.openxmlformats.org/drawingml/2006/main">
               <a:ext uri="{FF2B5EF4-FFF2-40B4-BE49-F238E27FC236}">
-                <a16:creationId xmlns:a16="http://schemas.microsoft.com/office/drawing/2014/main" id="{D61C581A-B159-4A3E-8EE6-38DC33E205BE}"/>
+                <a16:creationId xmlns:a16="http://schemas.microsoft.com/office/drawing/2014/main" id="{43DE7BAA-CADA-4FEF-9899-245307978225}"/>
               </a:ext>
             </a:extLst>
           </p:cNvPr>
@@ -14902,7 +14902,7 @@
           <p:cNvPr id="13" name="">
             <a:extLst xmlns:a="http://schemas.openxmlformats.org/drawingml/2006/main">
               <a:ext uri="{FF2B5EF4-FFF2-40B4-BE49-F238E27FC236}">
-                <a16:creationId xmlns:a16="http://schemas.microsoft.com/office/drawing/2014/main" id="{FCC20DC7-0003-409B-AE0B-0045414CF1FC}"/>
+                <a16:creationId xmlns:a16="http://schemas.microsoft.com/office/drawing/2014/main" id="{8A769546-0F4D-4655-B062-C98020120C85}"/>
               </a:ext>
             </a:extLst>
           </p:cNvPr>
@@ -14935,7 +14935,7 @@
           <p:cNvPr id="14" name="">
             <a:extLst xmlns:a="http://schemas.openxmlformats.org/drawingml/2006/main">
               <a:ext uri="{FF2B5EF4-FFF2-40B4-BE49-F238E27FC236}">
-                <a16:creationId xmlns:a16="http://schemas.microsoft.com/office/drawing/2014/main" id="{843636B3-60ED-45CC-A5F2-7E1A4EAF5A62}"/>
+                <a16:creationId xmlns:a16="http://schemas.microsoft.com/office/drawing/2014/main" id="{4820561A-3186-4BDB-9DDD-FF306D2395CA}"/>
               </a:ext>
             </a:extLst>
           </p:cNvPr>
@@ -14999,7 +14999,7 @@
           <p:cNvPr id="15" name="">
             <a:extLst xmlns:a="http://schemas.openxmlformats.org/drawingml/2006/main">
               <a:ext uri="{FF2B5EF4-FFF2-40B4-BE49-F238E27FC236}">
-                <a16:creationId xmlns:a16="http://schemas.microsoft.com/office/drawing/2014/main" id="{A5D37212-666F-42D4-AC42-F90C570E0C41}"/>
+                <a16:creationId xmlns:a16="http://schemas.microsoft.com/office/drawing/2014/main" id="{FDAA47E7-68B7-4423-B20A-9E001595B857}"/>
               </a:ext>
             </a:extLst>
           </p:cNvPr>
@@ -15053,7 +15053,7 @@
                 <a:ea typeface="Arial"/>
                 <a:cs typeface="Arial"/>
               </a:rPr>
-              <a:t>linha de visada e conferência item a item</a:t>
+              <a:t>de conferência visual item a item</a:t>
             </a:r>
           </a:p>
         </p:txBody>
@@ -15063,7 +15063,7 @@
           <p:cNvPr id="16" name="">
             <a:extLst xmlns:a="http://schemas.openxmlformats.org/drawingml/2006/main">
               <a:ext uri="{FF2B5EF4-FFF2-40B4-BE49-F238E27FC236}">
-                <a16:creationId xmlns:a16="http://schemas.microsoft.com/office/drawing/2014/main" id="{41A5C573-7709-407C-9003-F4594B0A9B57}"/>
+                <a16:creationId xmlns:a16="http://schemas.microsoft.com/office/drawing/2014/main" id="{685F7988-B5C6-450A-9F93-85F84633C9C9}"/>
               </a:ext>
             </a:extLst>
           </p:cNvPr>
@@ -15096,7 +15096,7 @@
           <p:cNvPr id="17" name="">
             <a:extLst xmlns:a="http://schemas.openxmlformats.org/drawingml/2006/main">
               <a:ext uri="{FF2B5EF4-FFF2-40B4-BE49-F238E27FC236}">
-                <a16:creationId xmlns:a16="http://schemas.microsoft.com/office/drawing/2014/main" id="{30854912-4823-41B9-9C11-9CC7E8E72DA5}"/>
+                <a16:creationId xmlns:a16="http://schemas.microsoft.com/office/drawing/2014/main" id="{43D552CF-0CE9-4DDB-A2B7-3519106EFA79}"/>
               </a:ext>
             </a:extLst>
           </p:cNvPr>
@@ -15160,7 +15160,7 @@
           <p:cNvPr id="18" name="">
             <a:extLst xmlns:a="http://schemas.openxmlformats.org/drawingml/2006/main">
               <a:ext uri="{FF2B5EF4-FFF2-40B4-BE49-F238E27FC236}">
-                <a16:creationId xmlns:a16="http://schemas.microsoft.com/office/drawing/2014/main" id="{4F956515-99A7-445C-827D-C73136A4D8AF}"/>
+                <a16:creationId xmlns:a16="http://schemas.microsoft.com/office/drawing/2014/main" id="{42F0719D-520F-48B8-B5DE-EBFC290D6BB6}"/>
               </a:ext>
             </a:extLst>
           </p:cNvPr>
@@ -15214,7 +15214,7 @@
                 <a:ea typeface="Arial"/>
                 <a:cs typeface="Arial"/>
               </a:rPr>
-              <a:t>histórico, auditoria e inconsistências</a:t>
+              <a:t>com histórico e auditoria por evento</a:t>
             </a:r>
           </a:p>
         </p:txBody>
@@ -15224,7 +15224,7 @@
           <p:cNvPr id="19" name="">
             <a:extLst xmlns:a="http://schemas.openxmlformats.org/drawingml/2006/main">
               <a:ext uri="{FF2B5EF4-FFF2-40B4-BE49-F238E27FC236}">
-                <a16:creationId xmlns:a16="http://schemas.microsoft.com/office/drawing/2014/main" id="{896F317D-7BAB-4FFF-9927-2F1BDF426DDF}"/>
+                <a16:creationId xmlns:a16="http://schemas.microsoft.com/office/drawing/2014/main" id="{12CCDD70-16A5-40B4-A93F-0A289D667B75}"/>
               </a:ext>
             </a:extLst>
           </p:cNvPr>
@@ -15257,7 +15257,7 @@
           <p:cNvPr id="20" name="">
             <a:extLst xmlns:a="http://schemas.openxmlformats.org/drawingml/2006/main">
               <a:ext uri="{FF2B5EF4-FFF2-40B4-BE49-F238E27FC236}">
-                <a16:creationId xmlns:a16="http://schemas.microsoft.com/office/drawing/2014/main" id="{9583D764-6739-4BCC-ACDE-02B29955FE6A}"/>
+                <a16:creationId xmlns:a16="http://schemas.microsoft.com/office/drawing/2014/main" id="{92B70AEA-A3E3-4E98-8322-5EF9F73B243C}"/>
               </a:ext>
             </a:extLst>
           </p:cNvPr>
@@ -15321,7 +15321,7 @@
           <p:cNvPr id="21" name="">
             <a:extLst xmlns:a="http://schemas.openxmlformats.org/drawingml/2006/main">
               <a:ext uri="{FF2B5EF4-FFF2-40B4-BE49-F238E27FC236}">
-                <a16:creationId xmlns:a16="http://schemas.microsoft.com/office/drawing/2014/main" id="{C601DEDA-DA13-4928-A0D3-F3E733227160}"/>
+                <a16:creationId xmlns:a16="http://schemas.microsoft.com/office/drawing/2014/main" id="{2C0B9707-18E5-413F-84EE-4C716DCC80EE}"/>
               </a:ext>
             </a:extLst>
           </p:cNvPr>
@@ -15375,7 +15375,7 @@
                 <a:ea typeface="Arial"/>
                 <a:cs typeface="Arial"/>
               </a:rPr>
-              <a:t>sem extrapolar alcance ou leitura simultânea</a:t>
+              <a:t>sem extrapolar alcance físico</a:t>
             </a:r>
           </a:p>
         </p:txBody>
@@ -15383,7 +15383,7 @@
     </p:spTree>
     <p:extLst>
       <p:ext uri="{BB962C8B-B14F-4D97-AF65-F5344CB8AC3E}">
-        <p14:creationId xmlns:p14="http://schemas.microsoft.com/office/powerpoint/2010/main" val="1771763336"/>
+        <p14:creationId xmlns:p14="http://schemas.microsoft.com/office/powerpoint/2010/main" val="1320552648"/>
       </p:ext>
     </p:extLst>
   </p:cSld>
@@ -15407,7 +15407,7 @@
           <p:cNvPr id="1" name="">
             <a:extLst xmlns:a="http://schemas.openxmlformats.org/drawingml/2006/main">
               <a:ext uri="{FF2B5EF4-FFF2-40B4-BE49-F238E27FC236}">
-                <a16:creationId xmlns:a16="http://schemas.microsoft.com/office/drawing/2014/main" id="{C07449A2-7D7E-48C2-9FEE-734F7D00C4E3}"/>
+                <a16:creationId xmlns:a16="http://schemas.microsoft.com/office/drawing/2014/main" id="{F8473816-01DC-46AF-A4AF-B016BC4AC8C3}"/>
               </a:ext>
             </a:extLst>
           </p:cNvPr>
@@ -15442,7 +15442,7 @@
           <p:cNvPr id="2" name="">
             <a:extLst xmlns:a="http://schemas.openxmlformats.org/drawingml/2006/main">
               <a:ext uri="{FF2B5EF4-FFF2-40B4-BE49-F238E27FC236}">
-                <a16:creationId xmlns:a16="http://schemas.microsoft.com/office/drawing/2014/main" id="{B4D76861-8FF7-4123-9402-46FD0E0BC1BA}"/>
+                <a16:creationId xmlns:a16="http://schemas.microsoft.com/office/drawing/2014/main" id="{D31AE9C5-B404-4B9F-BB74-602847A5B88E}"/>
               </a:ext>
             </a:extLst>
           </p:cNvPr>
@@ -15477,7 +15477,7 @@
           <p:cNvPr id="3" name="">
             <a:extLst xmlns:a="http://schemas.openxmlformats.org/drawingml/2006/main">
               <a:ext uri="{FF2B5EF4-FFF2-40B4-BE49-F238E27FC236}">
-                <a16:creationId xmlns:a16="http://schemas.microsoft.com/office/drawing/2014/main" id="{F505338C-4D07-4035-BAFB-FE647F680048}"/>
+                <a16:creationId xmlns:a16="http://schemas.microsoft.com/office/drawing/2014/main" id="{EAB931F4-EFC3-417F-A237-672CCC8E309A}"/>
               </a:ext>
             </a:extLst>
           </p:cNvPr>
@@ -15512,7 +15512,7 @@
           <p:cNvPr id="4" name="kicker-5-label">
             <a:extLst xmlns:a="http://schemas.openxmlformats.org/drawingml/2006/main">
               <a:ext uri="{FF2B5EF4-FFF2-40B4-BE49-F238E27FC236}">
-                <a16:creationId xmlns:a16="http://schemas.microsoft.com/office/drawing/2014/main" id="{8FF2698A-BC89-4D04-BF6E-D4531B72DE00}"/>
+                <a16:creationId xmlns:a16="http://schemas.microsoft.com/office/drawing/2014/main" id="{CB53EB09-8532-41F7-8084-12902B584AEE}"/>
               </a:ext>
             </a:extLst>
           </p:cNvPr>
@@ -15576,7 +15576,7 @@
           <p:cNvPr id="5" name="">
             <a:extLst xmlns:a="http://schemas.openxmlformats.org/drawingml/2006/main">
               <a:ext uri="{FF2B5EF4-FFF2-40B4-BE49-F238E27FC236}">
-                <a16:creationId xmlns:a16="http://schemas.microsoft.com/office/drawing/2014/main" id="{423F18EB-38A1-453C-8173-44362C4A62CF}"/>
+                <a16:creationId xmlns:a16="http://schemas.microsoft.com/office/drawing/2014/main" id="{AD412528-65A1-4D2B-9AD6-B0A5E8AE4E2F}"/>
               </a:ext>
             </a:extLst>
           </p:cNvPr>
@@ -15640,7 +15640,7 @@
           <p:cNvPr id="6" name="">
             <a:extLst xmlns:a="http://schemas.openxmlformats.org/drawingml/2006/main">
               <a:ext uri="{FF2B5EF4-FFF2-40B4-BE49-F238E27FC236}">
-                <a16:creationId xmlns:a16="http://schemas.microsoft.com/office/drawing/2014/main" id="{735AF56D-3E94-4211-8F22-D659DF653C06}"/>
+                <a16:creationId xmlns:a16="http://schemas.microsoft.com/office/drawing/2014/main" id="{35231A09-634A-425E-B306-6C74EC5E1249}"/>
               </a:ext>
             </a:extLst>
           </p:cNvPr>
@@ -15704,7 +15704,7 @@
           <p:cNvPr id="7" name="">
             <a:extLst xmlns:a="http://schemas.openxmlformats.org/drawingml/2006/main">
               <a:ext uri="{FF2B5EF4-FFF2-40B4-BE49-F238E27FC236}">
-                <a16:creationId xmlns:a16="http://schemas.microsoft.com/office/drawing/2014/main" id="{E6AC2719-DA4E-459D-A7B7-8C8627371868}"/>
+                <a16:creationId xmlns:a16="http://schemas.microsoft.com/office/drawing/2014/main" id="{6DCFE402-CA74-4125-9C36-AE1C82A1F937}"/>
               </a:ext>
             </a:extLst>
           </p:cNvPr>
@@ -15739,7 +15739,7 @@
           <p:cNvPr id="8" name="">
             <a:extLst xmlns:a="http://schemas.openxmlformats.org/drawingml/2006/main">
               <a:ext uri="{FF2B5EF4-FFF2-40B4-BE49-F238E27FC236}">
-                <a16:creationId xmlns:a16="http://schemas.microsoft.com/office/drawing/2014/main" id="{1A17CBBC-F820-4361-88BC-13B9711AFAAA}"/>
+                <a16:creationId xmlns:a16="http://schemas.microsoft.com/office/drawing/2014/main" id="{35C07D33-E4AD-4B47-BE8F-CEDD99CE1D52}"/>
               </a:ext>
             </a:extLst>
           </p:cNvPr>
@@ -15803,7 +15803,7 @@
           <p:cNvPr id="9" name="">
             <a:extLst xmlns:a="http://schemas.openxmlformats.org/drawingml/2006/main">
               <a:ext uri="{FF2B5EF4-FFF2-40B4-BE49-F238E27FC236}">
-                <a16:creationId xmlns:a16="http://schemas.microsoft.com/office/drawing/2014/main" id="{A5D87CBA-4A41-4D96-ADFF-F068644A9D2A}"/>
+                <a16:creationId xmlns:a16="http://schemas.microsoft.com/office/drawing/2014/main" id="{4C323495-CED3-4156-821A-BA7F5A0D736E}"/>
               </a:ext>
             </a:extLst>
           </p:cNvPr>
@@ -15838,7 +15838,7 @@
           <p:cNvPr id="10" name="">
             <a:extLst xmlns:a="http://schemas.openxmlformats.org/drawingml/2006/main">
               <a:ext uri="{FF2B5EF4-FFF2-40B4-BE49-F238E27FC236}">
-                <a16:creationId xmlns:a16="http://schemas.microsoft.com/office/drawing/2014/main" id="{A0322CAE-1A3A-4F02-83AE-E648CD319C4B}"/>
+                <a16:creationId xmlns:a16="http://schemas.microsoft.com/office/drawing/2014/main" id="{8246E8C3-57C1-4B31-BF9C-F955188875A7}"/>
               </a:ext>
             </a:extLst>
           </p:cNvPr>
@@ -15902,7 +15902,7 @@
           <p:cNvPr id="11" name="">
             <a:extLst xmlns:a="http://schemas.openxmlformats.org/drawingml/2006/main">
               <a:ext uri="{FF2B5EF4-FFF2-40B4-BE49-F238E27FC236}">
-                <a16:creationId xmlns:a16="http://schemas.microsoft.com/office/drawing/2014/main" id="{DC330C25-4282-4158-987F-3389117651E6}"/>
+                <a16:creationId xmlns:a16="http://schemas.microsoft.com/office/drawing/2014/main" id="{334306AA-ECE8-40D0-BA7C-EB0A14AD388C}"/>
               </a:ext>
             </a:extLst>
           </p:cNvPr>
@@ -15937,7 +15937,7 @@
           <p:cNvPr id="12" name="">
             <a:extLst xmlns:a="http://schemas.openxmlformats.org/drawingml/2006/main">
               <a:ext uri="{FF2B5EF4-FFF2-40B4-BE49-F238E27FC236}">
-                <a16:creationId xmlns:a16="http://schemas.microsoft.com/office/drawing/2014/main" id="{61254F03-8A63-4DD6-97F6-AC0D43DB203D}"/>
+                <a16:creationId xmlns:a16="http://schemas.microsoft.com/office/drawing/2014/main" id="{9710CB6D-7B8D-4601-A3D0-A20B78078045}"/>
               </a:ext>
             </a:extLst>
           </p:cNvPr>
@@ -16001,7 +16001,7 @@
           <p:cNvPr id="13" name="">
             <a:extLst xmlns:a="http://schemas.openxmlformats.org/drawingml/2006/main">
               <a:ext uri="{FF2B5EF4-FFF2-40B4-BE49-F238E27FC236}">
-                <a16:creationId xmlns:a16="http://schemas.microsoft.com/office/drawing/2014/main" id="{0777030A-D5BB-440F-9E93-CC2FBB159911}"/>
+                <a16:creationId xmlns:a16="http://schemas.microsoft.com/office/drawing/2014/main" id="{48E12933-B29F-4807-A210-A41DCC1B4EE1}"/>
               </a:ext>
             </a:extLst>
           </p:cNvPr>
@@ -16034,7 +16034,7 @@
           <p:cNvPr id="14" name="">
             <a:extLst xmlns:a="http://schemas.openxmlformats.org/drawingml/2006/main">
               <a:ext uri="{FF2B5EF4-FFF2-40B4-BE49-F238E27FC236}">
-                <a16:creationId xmlns:a16="http://schemas.microsoft.com/office/drawing/2014/main" id="{446E2FC6-0FE8-422F-94E5-CD1BCAB51971}"/>
+                <a16:creationId xmlns:a16="http://schemas.microsoft.com/office/drawing/2014/main" id="{2624E647-AAB1-4EC8-BBA1-D10046F83D6E}"/>
               </a:ext>
             </a:extLst>
           </p:cNvPr>
@@ -16098,7 +16098,7 @@
           <p:cNvPr id="15" name="">
             <a:extLst xmlns:a="http://schemas.openxmlformats.org/drawingml/2006/main">
               <a:ext uri="{FF2B5EF4-FFF2-40B4-BE49-F238E27FC236}">
-                <a16:creationId xmlns:a16="http://schemas.microsoft.com/office/drawing/2014/main" id="{B292A2E0-264F-43BE-9C1C-77129C12795E}"/>
+                <a16:creationId xmlns:a16="http://schemas.microsoft.com/office/drawing/2014/main" id="{1491B5C7-5307-4B7A-B56F-D2B5175FD61D}"/>
               </a:ext>
             </a:extLst>
           </p:cNvPr>
@@ -16162,7 +16162,7 @@
           <p:cNvPr id="16" name="">
             <a:extLst xmlns:a="http://schemas.openxmlformats.org/drawingml/2006/main">
               <a:ext uri="{FF2B5EF4-FFF2-40B4-BE49-F238E27FC236}">
-                <a16:creationId xmlns:a16="http://schemas.microsoft.com/office/drawing/2014/main" id="{D69322F6-670B-4592-BB7A-7DD4E680E891}"/>
+                <a16:creationId xmlns:a16="http://schemas.microsoft.com/office/drawing/2014/main" id="{82799811-A352-492E-965D-EA0357D9ECF4}"/>
               </a:ext>
             </a:extLst>
           </p:cNvPr>
@@ -16195,7 +16195,7 @@
           <p:cNvPr id="17" name="">
             <a:extLst xmlns:a="http://schemas.openxmlformats.org/drawingml/2006/main">
               <a:ext uri="{FF2B5EF4-FFF2-40B4-BE49-F238E27FC236}">
-                <a16:creationId xmlns:a16="http://schemas.microsoft.com/office/drawing/2014/main" id="{92AC1358-C7E6-432D-AC62-CBAE5F4D510B}"/>
+                <a16:creationId xmlns:a16="http://schemas.microsoft.com/office/drawing/2014/main" id="{33B002FB-6EB6-4502-B2D2-C26721877475}"/>
               </a:ext>
             </a:extLst>
           </p:cNvPr>
@@ -16259,7 +16259,7 @@
           <p:cNvPr id="18" name="">
             <a:extLst xmlns:a="http://schemas.openxmlformats.org/drawingml/2006/main">
               <a:ext uri="{FF2B5EF4-FFF2-40B4-BE49-F238E27FC236}">
-                <a16:creationId xmlns:a16="http://schemas.microsoft.com/office/drawing/2014/main" id="{E092E3C7-8C2C-4A70-8896-0D545245FD3B}"/>
+                <a16:creationId xmlns:a16="http://schemas.microsoft.com/office/drawing/2014/main" id="{7546EDD4-4F43-4715-82E8-15CAD7E085C5}"/>
               </a:ext>
             </a:extLst>
           </p:cNvPr>
@@ -16323,7 +16323,7 @@
           <p:cNvPr id="19" name="">
             <a:extLst xmlns:a="http://schemas.openxmlformats.org/drawingml/2006/main">
               <a:ext uri="{FF2B5EF4-FFF2-40B4-BE49-F238E27FC236}">
-                <a16:creationId xmlns:a16="http://schemas.microsoft.com/office/drawing/2014/main" id="{395FF2F4-EF3A-4412-8DA0-FB5CFDBFC02D}"/>
+                <a16:creationId xmlns:a16="http://schemas.microsoft.com/office/drawing/2014/main" id="{45CB3BD6-936D-4049-BF7B-D616D579D4D8}"/>
               </a:ext>
             </a:extLst>
           </p:cNvPr>
@@ -16356,7 +16356,7 @@
           <p:cNvPr id="20" name="">
             <a:extLst xmlns:a="http://schemas.openxmlformats.org/drawingml/2006/main">
               <a:ext uri="{FF2B5EF4-FFF2-40B4-BE49-F238E27FC236}">
-                <a16:creationId xmlns:a16="http://schemas.microsoft.com/office/drawing/2014/main" id="{738615B2-65BE-46F2-81D5-FE7B5233DF7E}"/>
+                <a16:creationId xmlns:a16="http://schemas.microsoft.com/office/drawing/2014/main" id="{0FBB46AC-AAF0-4227-ABB0-F1E10F916D17}"/>
               </a:ext>
             </a:extLst>
           </p:cNvPr>
@@ -16420,7 +16420,7 @@
           <p:cNvPr id="21" name="">
             <a:extLst xmlns:a="http://schemas.openxmlformats.org/drawingml/2006/main">
               <a:ext uri="{FF2B5EF4-FFF2-40B4-BE49-F238E27FC236}">
-                <a16:creationId xmlns:a16="http://schemas.microsoft.com/office/drawing/2014/main" id="{ED5B29A5-4DDB-4655-B736-35F02C2FA365}"/>
+                <a16:creationId xmlns:a16="http://schemas.microsoft.com/office/drawing/2014/main" id="{5294D067-00BC-49EC-80EC-C73A59F25602}"/>
               </a:ext>
             </a:extLst>
           </p:cNvPr>
@@ -16474,7 +16474,7 @@
                 <a:ea typeface="Arial"/>
                 <a:cs typeface="Arial"/>
               </a:rPr>
-              <a:t>comparação lógico/físico</a:t>
+              <a:t>comparação entre lógico e físico</a:t>
             </a:r>
           </a:p>
         </p:txBody>
@@ -16482,7 +16482,7 @@
     </p:spTree>
     <p:extLst>
       <p:ext uri="{BB962C8B-B14F-4D97-AF65-F5344CB8AC3E}">
-        <p14:creationId xmlns:p14="http://schemas.microsoft.com/office/powerpoint/2010/main" val="1974732029"/>
+        <p14:creationId xmlns:p14="http://schemas.microsoft.com/office/powerpoint/2010/main" val="835845221"/>
       </p:ext>
     </p:extLst>
   </p:cSld>
@@ -16506,7 +16506,7 @@
           <p:cNvPr id="1" name="">
             <a:extLst xmlns:a="http://schemas.openxmlformats.org/drawingml/2006/main">
               <a:ext uri="{FF2B5EF4-FFF2-40B4-BE49-F238E27FC236}">
-                <a16:creationId xmlns:a16="http://schemas.microsoft.com/office/drawing/2014/main" id="{2B421B9E-F98B-4C3F-A0D2-2FA74789F6CF}"/>
+                <a16:creationId xmlns:a16="http://schemas.microsoft.com/office/drawing/2014/main" id="{EC904F11-C0BB-4FB9-AE4E-9B13CED80A76}"/>
               </a:ext>
             </a:extLst>
           </p:cNvPr>
@@ -16541,7 +16541,7 @@
           <p:cNvPr id="2" name="">
             <a:extLst xmlns:a="http://schemas.openxmlformats.org/drawingml/2006/main">
               <a:ext uri="{FF2B5EF4-FFF2-40B4-BE49-F238E27FC236}">
-                <a16:creationId xmlns:a16="http://schemas.microsoft.com/office/drawing/2014/main" id="{06360BC1-3784-4EB2-914D-41C9F77C975E}"/>
+                <a16:creationId xmlns:a16="http://schemas.microsoft.com/office/drawing/2014/main" id="{4BC7F43C-CEDD-45F6-8577-331E59696F7E}"/>
               </a:ext>
             </a:extLst>
           </p:cNvPr>
@@ -16576,7 +16576,7 @@
           <p:cNvPr id="3" name="">
             <a:extLst xmlns:a="http://schemas.openxmlformats.org/drawingml/2006/main">
               <a:ext uri="{FF2B5EF4-FFF2-40B4-BE49-F238E27FC236}">
-                <a16:creationId xmlns:a16="http://schemas.microsoft.com/office/drawing/2014/main" id="{1F7C6F19-A2B3-4BC1-BC98-A4D678072F58}"/>
+                <a16:creationId xmlns:a16="http://schemas.microsoft.com/office/drawing/2014/main" id="{35F34332-5C30-4593-BB35-A9B69E6AD13B}"/>
               </a:ext>
             </a:extLst>
           </p:cNvPr>
@@ -16611,7 +16611,7 @@
           <p:cNvPr id="4" name="kicker-6-label">
             <a:extLst xmlns:a="http://schemas.openxmlformats.org/drawingml/2006/main">
               <a:ext uri="{FF2B5EF4-FFF2-40B4-BE49-F238E27FC236}">
-                <a16:creationId xmlns:a16="http://schemas.microsoft.com/office/drawing/2014/main" id="{03E84B96-78C3-4E26-AB1B-4951FDD674D9}"/>
+                <a16:creationId xmlns:a16="http://schemas.microsoft.com/office/drawing/2014/main" id="{D8FCA900-2620-457D-BFB5-B43F5B8BFCB5}"/>
               </a:ext>
             </a:extLst>
           </p:cNvPr>
@@ -16675,7 +16675,7 @@
           <p:cNvPr id="5" name="">
             <a:extLst xmlns:a="http://schemas.openxmlformats.org/drawingml/2006/main">
               <a:ext uri="{FF2B5EF4-FFF2-40B4-BE49-F238E27FC236}">
-                <a16:creationId xmlns:a16="http://schemas.microsoft.com/office/drawing/2014/main" id="{69D5928E-4875-4DCF-AF97-D24FB3CFE159}"/>
+                <a16:creationId xmlns:a16="http://schemas.microsoft.com/office/drawing/2014/main" id="{98B73FCE-637A-4837-96AB-49814E3551F7}"/>
               </a:ext>
             </a:extLst>
           </p:cNvPr>
@@ -16739,7 +16739,7 @@
           <p:cNvPr id="6" name="">
             <a:extLst xmlns:a="http://schemas.openxmlformats.org/drawingml/2006/main">
               <a:ext uri="{FF2B5EF4-FFF2-40B4-BE49-F238E27FC236}">
-                <a16:creationId xmlns:a16="http://schemas.microsoft.com/office/drawing/2014/main" id="{9ABE7433-7DBA-4885-A4A3-E74DAF7C0DF3}"/>
+                <a16:creationId xmlns:a16="http://schemas.microsoft.com/office/drawing/2014/main" id="{214519F2-DC96-4730-85CA-9B675E77FFD7}"/>
               </a:ext>
             </a:extLst>
           </p:cNvPr>
@@ -16793,7 +16793,7 @@
                 <a:ea typeface="Arial"/>
                 <a:cs typeface="Arial"/>
               </a:rPr>
-              <a:t>A literatura reforça RFID, middleware e cautela na validação física.</a:t>
+              <a:t>A literatura fundamenta RFID e middleware, com cautela na validação física.</a:t>
             </a:r>
           </a:p>
         </p:txBody>
@@ -16803,7 +16803,7 @@
           <p:cNvPr id="7" name="">
             <a:extLst xmlns:a="http://schemas.openxmlformats.org/drawingml/2006/main">
               <a:ext uri="{FF2B5EF4-FFF2-40B4-BE49-F238E27FC236}">
-                <a16:creationId xmlns:a16="http://schemas.microsoft.com/office/drawing/2014/main" id="{30912BDF-1171-4658-97D3-F7508745DD56}"/>
+                <a16:creationId xmlns:a16="http://schemas.microsoft.com/office/drawing/2014/main" id="{0CE79FBE-EDAF-4ED3-A165-5C8BB6E21E59}"/>
               </a:ext>
             </a:extLst>
           </p:cNvPr>
@@ -16836,7 +16836,7 @@
           <p:cNvPr id="8" name="">
             <a:extLst xmlns:a="http://schemas.openxmlformats.org/drawingml/2006/main">
               <a:ext uri="{FF2B5EF4-FFF2-40B4-BE49-F238E27FC236}">
-                <a16:creationId xmlns:a16="http://schemas.microsoft.com/office/drawing/2014/main" id="{1FC620EC-9A8A-47CA-A84C-8BEA7FB07D80}"/>
+                <a16:creationId xmlns:a16="http://schemas.microsoft.com/office/drawing/2014/main" id="{D6173A54-D5A3-4873-B231-2E5C9F121B46}"/>
               </a:ext>
             </a:extLst>
           </p:cNvPr>
@@ -16900,7 +16900,7 @@
           <p:cNvPr id="9" name="">
             <a:extLst xmlns:a="http://schemas.openxmlformats.org/drawingml/2006/main">
               <a:ext uri="{FF2B5EF4-FFF2-40B4-BE49-F238E27FC236}">
-                <a16:creationId xmlns:a16="http://schemas.microsoft.com/office/drawing/2014/main" id="{73C9B3B1-DB14-4E3A-9A38-9C4867286E0F}"/>
+                <a16:creationId xmlns:a16="http://schemas.microsoft.com/office/drawing/2014/main" id="{CDB5564D-C1BA-461C-8504-9BBAC1414D2F}"/>
               </a:ext>
             </a:extLst>
           </p:cNvPr>
@@ -16964,7 +16964,7 @@
           <p:cNvPr id="10" name="">
             <a:extLst xmlns:a="http://schemas.openxmlformats.org/drawingml/2006/main">
               <a:ext uri="{FF2B5EF4-FFF2-40B4-BE49-F238E27FC236}">
-                <a16:creationId xmlns:a16="http://schemas.microsoft.com/office/drawing/2014/main" id="{E1861867-8C96-4A3B-9601-CC30A02558D6}"/>
+                <a16:creationId xmlns:a16="http://schemas.microsoft.com/office/drawing/2014/main" id="{94A11E62-EDE9-497A-83F0-CFCACC32939F}"/>
               </a:ext>
             </a:extLst>
           </p:cNvPr>
@@ -16997,7 +16997,7 @@
           <p:cNvPr id="11" name="">
             <a:extLst xmlns:a="http://schemas.openxmlformats.org/drawingml/2006/main">
               <a:ext uri="{FF2B5EF4-FFF2-40B4-BE49-F238E27FC236}">
-                <a16:creationId xmlns:a16="http://schemas.microsoft.com/office/drawing/2014/main" id="{7CF5C5A6-B68F-4412-B266-DF7F678963E4}"/>
+                <a16:creationId xmlns:a16="http://schemas.microsoft.com/office/drawing/2014/main" id="{35665C58-FE04-4920-897C-405CAD51CAAB}"/>
               </a:ext>
             </a:extLst>
           </p:cNvPr>
@@ -17061,7 +17061,7 @@
           <p:cNvPr id="12" name="">
             <a:extLst xmlns:a="http://schemas.openxmlformats.org/drawingml/2006/main">
               <a:ext uri="{FF2B5EF4-FFF2-40B4-BE49-F238E27FC236}">
-                <a16:creationId xmlns:a16="http://schemas.microsoft.com/office/drawing/2014/main" id="{47B3CF00-4847-4BE7-90C2-6C95A3680C0F}"/>
+                <a16:creationId xmlns:a16="http://schemas.microsoft.com/office/drawing/2014/main" id="{E198F8AF-5533-4777-BEE5-9D058B918CC0}"/>
               </a:ext>
             </a:extLst>
           </p:cNvPr>
@@ -17125,7 +17125,7 @@
           <p:cNvPr id="13" name="">
             <a:extLst xmlns:a="http://schemas.openxmlformats.org/drawingml/2006/main">
               <a:ext uri="{FF2B5EF4-FFF2-40B4-BE49-F238E27FC236}">
-                <a16:creationId xmlns:a16="http://schemas.microsoft.com/office/drawing/2014/main" id="{09F53B12-9CF9-454D-9553-BF5B0F643261}"/>
+                <a16:creationId xmlns:a16="http://schemas.microsoft.com/office/drawing/2014/main" id="{F44F5437-F668-47D3-95E4-17083628C59C}"/>
               </a:ext>
             </a:extLst>
           </p:cNvPr>
@@ -17158,7 +17158,7 @@
           <p:cNvPr id="14" name="">
             <a:extLst xmlns:a="http://schemas.openxmlformats.org/drawingml/2006/main">
               <a:ext uri="{FF2B5EF4-FFF2-40B4-BE49-F238E27FC236}">
-                <a16:creationId xmlns:a16="http://schemas.microsoft.com/office/drawing/2014/main" id="{6B7ED31D-4680-40A0-A2B4-7A7F65E12F65}"/>
+                <a16:creationId xmlns:a16="http://schemas.microsoft.com/office/drawing/2014/main" id="{5C55AB55-20F6-4787-AC0D-C06458B534FA}"/>
               </a:ext>
             </a:extLst>
           </p:cNvPr>
@@ -17222,7 +17222,7 @@
           <p:cNvPr id="15" name="">
             <a:extLst xmlns:a="http://schemas.openxmlformats.org/drawingml/2006/main">
               <a:ext uri="{FF2B5EF4-FFF2-40B4-BE49-F238E27FC236}">
-                <a16:creationId xmlns:a16="http://schemas.microsoft.com/office/drawing/2014/main" id="{38F63085-0A41-4777-A259-FDDC28DD3A2E}"/>
+                <a16:creationId xmlns:a16="http://schemas.microsoft.com/office/drawing/2014/main" id="{AE96A801-3D82-4C40-A15F-9E6450DF2EEF}"/>
               </a:ext>
             </a:extLst>
           </p:cNvPr>
@@ -17276,7 +17276,7 @@
                 <a:ea typeface="Arial"/>
                 <a:cs typeface="Arial"/>
               </a:rPr>
-              <a:t>auditoria patrimonial com comparação esperado-observado</a:t>
+              <a:t>auditoria patrimonial entre esperado e observado</a:t>
             </a:r>
           </a:p>
         </p:txBody>
@@ -17286,7 +17286,7 @@
           <p:cNvPr id="16" name="">
             <a:extLst xmlns:a="http://schemas.openxmlformats.org/drawingml/2006/main">
               <a:ext uri="{FF2B5EF4-FFF2-40B4-BE49-F238E27FC236}">
-                <a16:creationId xmlns:a16="http://schemas.microsoft.com/office/drawing/2014/main" id="{131776D3-BF1B-4DA7-A9B4-DB7B282BDDF0}"/>
+                <a16:creationId xmlns:a16="http://schemas.microsoft.com/office/drawing/2014/main" id="{71492C5F-1E55-4547-8694-5C2CACE8A491}"/>
               </a:ext>
             </a:extLst>
           </p:cNvPr>
@@ -17348,7 +17348,7 @@
     </p:spTree>
     <p:extLst>
       <p:ext uri="{BB962C8B-B14F-4D97-AF65-F5344CB8AC3E}">
-        <p14:creationId xmlns:p14="http://schemas.microsoft.com/office/powerpoint/2010/main" val="1041976899"/>
+        <p14:creationId xmlns:p14="http://schemas.microsoft.com/office/powerpoint/2010/main" val="666585265"/>
       </p:ext>
     </p:extLst>
   </p:cSld>
@@ -17372,7 +17372,7 @@
           <p:cNvPr id="1" name="">
             <a:extLst xmlns:a="http://schemas.openxmlformats.org/drawingml/2006/main">
               <a:ext uri="{FF2B5EF4-FFF2-40B4-BE49-F238E27FC236}">
-                <a16:creationId xmlns:a16="http://schemas.microsoft.com/office/drawing/2014/main" id="{4688B10A-E55E-43AD-9185-961C3727704C}"/>
+                <a16:creationId xmlns:a16="http://schemas.microsoft.com/office/drawing/2014/main" id="{9163FB62-9F47-45FE-BEE8-180B4D0A84B4}"/>
               </a:ext>
             </a:extLst>
           </p:cNvPr>
@@ -17407,7 +17407,7 @@
           <p:cNvPr id="2" name="">
             <a:extLst xmlns:a="http://schemas.openxmlformats.org/drawingml/2006/main">
               <a:ext uri="{FF2B5EF4-FFF2-40B4-BE49-F238E27FC236}">
-                <a16:creationId xmlns:a16="http://schemas.microsoft.com/office/drawing/2014/main" id="{7FF85C3A-43E8-48D6-B989-504794C9C392}"/>
+                <a16:creationId xmlns:a16="http://schemas.microsoft.com/office/drawing/2014/main" id="{E30963E9-1851-4147-82C7-2B3D0C5E24F4}"/>
               </a:ext>
             </a:extLst>
           </p:cNvPr>
@@ -17442,7 +17442,7 @@
           <p:cNvPr id="3" name="">
             <a:extLst xmlns:a="http://schemas.openxmlformats.org/drawingml/2006/main">
               <a:ext uri="{FF2B5EF4-FFF2-40B4-BE49-F238E27FC236}">
-                <a16:creationId xmlns:a16="http://schemas.microsoft.com/office/drawing/2014/main" id="{8F225FF3-4211-410D-8D26-5C8F8F2FDDDD}"/>
+                <a16:creationId xmlns:a16="http://schemas.microsoft.com/office/drawing/2014/main" id="{9C867D47-9FAC-4971-B030-D21E4C9CEC78}"/>
               </a:ext>
             </a:extLst>
           </p:cNvPr>
@@ -17477,7 +17477,7 @@
           <p:cNvPr id="4" name="kicker-7-label">
             <a:extLst xmlns:a="http://schemas.openxmlformats.org/drawingml/2006/main">
               <a:ext uri="{FF2B5EF4-FFF2-40B4-BE49-F238E27FC236}">
-                <a16:creationId xmlns:a16="http://schemas.microsoft.com/office/drawing/2014/main" id="{27451451-F106-4926-985E-5EA8FD4B633E}"/>
+                <a16:creationId xmlns:a16="http://schemas.microsoft.com/office/drawing/2014/main" id="{F545D938-825B-4A28-9E9E-0BFD716673A0}"/>
               </a:ext>
             </a:extLst>
           </p:cNvPr>
@@ -17541,7 +17541,7 @@
           <p:cNvPr id="5" name="">
             <a:extLst xmlns:a="http://schemas.openxmlformats.org/drawingml/2006/main">
               <a:ext uri="{FF2B5EF4-FFF2-40B4-BE49-F238E27FC236}">
-                <a16:creationId xmlns:a16="http://schemas.microsoft.com/office/drawing/2014/main" id="{D8E91901-8A7E-41A0-A8E3-CF05EAE35733}"/>
+                <a16:creationId xmlns:a16="http://schemas.microsoft.com/office/drawing/2014/main" id="{CD673141-C2E3-444D-A9F4-A25AEA82546B}"/>
               </a:ext>
             </a:extLst>
           </p:cNvPr>
@@ -17605,7 +17605,7 @@
           <p:cNvPr id="6" name="">
             <a:extLst xmlns:a="http://schemas.openxmlformats.org/drawingml/2006/main">
               <a:ext uri="{FF2B5EF4-FFF2-40B4-BE49-F238E27FC236}">
-                <a16:creationId xmlns:a16="http://schemas.microsoft.com/office/drawing/2014/main" id="{3EF2C3AD-D6ED-463C-822D-99FD0CD2F6A6}"/>
+                <a16:creationId xmlns:a16="http://schemas.microsoft.com/office/drawing/2014/main" id="{9E0B005A-EBA0-452B-856E-1E56D92A3A95}"/>
               </a:ext>
             </a:extLst>
           </p:cNvPr>
@@ -17669,7 +17669,7 @@
           <p:cNvPr id="7" name="">
             <a:extLst xmlns:a="http://schemas.openxmlformats.org/drawingml/2006/main">
               <a:ext uri="{FF2B5EF4-FFF2-40B4-BE49-F238E27FC236}">
-                <a16:creationId xmlns:a16="http://schemas.microsoft.com/office/drawing/2014/main" id="{30C14658-72FD-4D1F-9B59-6AFDA8D29C4E}"/>
+                <a16:creationId xmlns:a16="http://schemas.microsoft.com/office/drawing/2014/main" id="{39EBD25C-5C1E-414A-90B4-1C7BC857E371}"/>
               </a:ext>
             </a:extLst>
           </p:cNvPr>
@@ -17702,7 +17702,7 @@
           <p:cNvPr id="8" name="">
             <a:extLst xmlns:a="http://schemas.openxmlformats.org/drawingml/2006/main">
               <a:ext uri="{FF2B5EF4-FFF2-40B4-BE49-F238E27FC236}">
-                <a16:creationId xmlns:a16="http://schemas.microsoft.com/office/drawing/2014/main" id="{09AEA49A-F237-4ED3-8C95-7C1554E7CEAC}"/>
+                <a16:creationId xmlns:a16="http://schemas.microsoft.com/office/drawing/2014/main" id="{5E597F8A-371A-4340-B6D7-1116B16F23CD}"/>
               </a:ext>
             </a:extLst>
           </p:cNvPr>
@@ -17735,7 +17735,7 @@
           <p:cNvPr id="9" name="">
             <a:extLst xmlns:a="http://schemas.openxmlformats.org/drawingml/2006/main">
               <a:ext uri="{FF2B5EF4-FFF2-40B4-BE49-F238E27FC236}">
-                <a16:creationId xmlns:a16="http://schemas.microsoft.com/office/drawing/2014/main" id="{A5ECDB47-6713-4C1D-AEBA-49285E97540C}"/>
+                <a16:creationId xmlns:a16="http://schemas.microsoft.com/office/drawing/2014/main" id="{0D59B8F0-6712-4411-9489-BD801AAFCD5C}"/>
               </a:ext>
             </a:extLst>
           </p:cNvPr>
@@ -17799,7 +17799,7 @@
           <p:cNvPr id="10" name="">
             <a:extLst xmlns:a="http://schemas.openxmlformats.org/drawingml/2006/main">
               <a:ext uri="{FF2B5EF4-FFF2-40B4-BE49-F238E27FC236}">
-                <a16:creationId xmlns:a16="http://schemas.microsoft.com/office/drawing/2014/main" id="{D8A5C78C-12D2-4E2B-AC94-4B3FAF1DE6E6}"/>
+                <a16:creationId xmlns:a16="http://schemas.microsoft.com/office/drawing/2014/main" id="{884D7218-51F8-48FF-A077-62FF843D0C06}"/>
               </a:ext>
             </a:extLst>
           </p:cNvPr>
@@ -17863,7 +17863,7 @@
           <p:cNvPr id="11" name="">
             <a:extLst xmlns:a="http://schemas.openxmlformats.org/drawingml/2006/main">
               <a:ext uri="{FF2B5EF4-FFF2-40B4-BE49-F238E27FC236}">
-                <a16:creationId xmlns:a16="http://schemas.microsoft.com/office/drawing/2014/main" id="{CEB09167-3824-4E8B-8043-84A9DFE1C600}"/>
+                <a16:creationId xmlns:a16="http://schemas.microsoft.com/office/drawing/2014/main" id="{E2B2C1AF-4960-4549-A064-8A16AD93416D}"/>
               </a:ext>
             </a:extLst>
           </p:cNvPr>
@@ -17927,7 +17927,7 @@
           <p:cNvPr id="12" name="">
             <a:extLst xmlns:a="http://schemas.openxmlformats.org/drawingml/2006/main">
               <a:ext uri="{FF2B5EF4-FFF2-40B4-BE49-F238E27FC236}">
-                <a16:creationId xmlns:a16="http://schemas.microsoft.com/office/drawing/2014/main" id="{ECF4E883-356C-496A-87FC-6758B6FF9D94}"/>
+                <a16:creationId xmlns:a16="http://schemas.microsoft.com/office/drawing/2014/main" id="{CEBE83B5-A6DD-454F-AEED-96FA017FC05B}"/>
               </a:ext>
             </a:extLst>
           </p:cNvPr>
@@ -17960,7 +17960,7 @@
           <p:cNvPr id="13" name="">
             <a:extLst xmlns:a="http://schemas.openxmlformats.org/drawingml/2006/main">
               <a:ext uri="{FF2B5EF4-FFF2-40B4-BE49-F238E27FC236}">
-                <a16:creationId xmlns:a16="http://schemas.microsoft.com/office/drawing/2014/main" id="{A5DD2BE7-593E-4DF6-8A27-749341A8EB7E}"/>
+                <a16:creationId xmlns:a16="http://schemas.microsoft.com/office/drawing/2014/main" id="{3D2270A4-BD3E-4965-A6DD-09FFCEA06509}"/>
               </a:ext>
             </a:extLst>
           </p:cNvPr>
@@ -17993,7 +17993,7 @@
           <p:cNvPr id="14" name="">
             <a:extLst xmlns:a="http://schemas.openxmlformats.org/drawingml/2006/main">
               <a:ext uri="{FF2B5EF4-FFF2-40B4-BE49-F238E27FC236}">
-                <a16:creationId xmlns:a16="http://schemas.microsoft.com/office/drawing/2014/main" id="{45EE3405-2512-4090-AA28-C184057BC20E}"/>
+                <a16:creationId xmlns:a16="http://schemas.microsoft.com/office/drawing/2014/main" id="{29B07EB9-DA23-4D79-B7C6-94D7CD2550FA}"/>
               </a:ext>
             </a:extLst>
           </p:cNvPr>
@@ -18057,7 +18057,7 @@
           <p:cNvPr id="15" name="">
             <a:extLst xmlns:a="http://schemas.openxmlformats.org/drawingml/2006/main">
               <a:ext uri="{FF2B5EF4-FFF2-40B4-BE49-F238E27FC236}">
-                <a16:creationId xmlns:a16="http://schemas.microsoft.com/office/drawing/2014/main" id="{EEBEB5EB-9707-468A-8BB4-19B53B5D20A4}"/>
+                <a16:creationId xmlns:a16="http://schemas.microsoft.com/office/drawing/2014/main" id="{4106548B-AA82-4C91-ABAA-A4AA4FD65C88}"/>
               </a:ext>
             </a:extLst>
           </p:cNvPr>
@@ -18121,7 +18121,7 @@
           <p:cNvPr id="16" name="">
             <a:extLst xmlns:a="http://schemas.openxmlformats.org/drawingml/2006/main">
               <a:ext uri="{FF2B5EF4-FFF2-40B4-BE49-F238E27FC236}">
-                <a16:creationId xmlns:a16="http://schemas.microsoft.com/office/drawing/2014/main" id="{188E8E19-5C1D-497C-838E-8AC1218DC6CD}"/>
+                <a16:creationId xmlns:a16="http://schemas.microsoft.com/office/drawing/2014/main" id="{E06657C8-A008-4DF7-BDA2-69EA70735DB9}"/>
               </a:ext>
             </a:extLst>
           </p:cNvPr>
@@ -18185,7 +18185,7 @@
           <p:cNvPr id="17" name="">
             <a:extLst xmlns:a="http://schemas.openxmlformats.org/drawingml/2006/main">
               <a:ext uri="{FF2B5EF4-FFF2-40B4-BE49-F238E27FC236}">
-                <a16:creationId xmlns:a16="http://schemas.microsoft.com/office/drawing/2014/main" id="{B91DF3D5-1443-4235-8E00-56CC83AE6732}"/>
+                <a16:creationId xmlns:a16="http://schemas.microsoft.com/office/drawing/2014/main" id="{3909492C-C711-4535-BF33-F61501FAC5C4}"/>
               </a:ext>
             </a:extLst>
           </p:cNvPr>
@@ -18218,7 +18218,7 @@
           <p:cNvPr id="18" name="">
             <a:extLst xmlns:a="http://schemas.openxmlformats.org/drawingml/2006/main">
               <a:ext uri="{FF2B5EF4-FFF2-40B4-BE49-F238E27FC236}">
-                <a16:creationId xmlns:a16="http://schemas.microsoft.com/office/drawing/2014/main" id="{5B82170A-477D-41C1-9987-19CBE41B352D}"/>
+                <a16:creationId xmlns:a16="http://schemas.microsoft.com/office/drawing/2014/main" id="{5E76BA26-2978-4967-8F49-D3F28B0B67B6}"/>
               </a:ext>
             </a:extLst>
           </p:cNvPr>
@@ -18251,7 +18251,7 @@
           <p:cNvPr id="19" name="">
             <a:extLst xmlns:a="http://schemas.openxmlformats.org/drawingml/2006/main">
               <a:ext uri="{FF2B5EF4-FFF2-40B4-BE49-F238E27FC236}">
-                <a16:creationId xmlns:a16="http://schemas.microsoft.com/office/drawing/2014/main" id="{843BE51D-E6CC-436C-ABEB-96FE5979CF88}"/>
+                <a16:creationId xmlns:a16="http://schemas.microsoft.com/office/drawing/2014/main" id="{71F5CAD2-6EB1-4CE8-86F5-7602B3600B7D}"/>
               </a:ext>
             </a:extLst>
           </p:cNvPr>
@@ -18315,7 +18315,7 @@
           <p:cNvPr id="20" name="">
             <a:extLst xmlns:a="http://schemas.openxmlformats.org/drawingml/2006/main">
               <a:ext uri="{FF2B5EF4-FFF2-40B4-BE49-F238E27FC236}">
-                <a16:creationId xmlns:a16="http://schemas.microsoft.com/office/drawing/2014/main" id="{470AE754-0972-46C5-82B4-C1A9398971E9}"/>
+                <a16:creationId xmlns:a16="http://schemas.microsoft.com/office/drawing/2014/main" id="{FFB8A36F-0A3C-4016-828C-A7080FE70FDF}"/>
               </a:ext>
             </a:extLst>
           </p:cNvPr>
@@ -18379,7 +18379,7 @@
           <p:cNvPr id="21" name="">
             <a:extLst xmlns:a="http://schemas.openxmlformats.org/drawingml/2006/main">
               <a:ext uri="{FF2B5EF4-FFF2-40B4-BE49-F238E27FC236}">
-                <a16:creationId xmlns:a16="http://schemas.microsoft.com/office/drawing/2014/main" id="{76CE5C56-B465-4987-BA83-CA23D50D0DE0}"/>
+                <a16:creationId xmlns:a16="http://schemas.microsoft.com/office/drawing/2014/main" id="{C5825CF1-E3D9-4283-8359-0521B0EEAB8B}"/>
               </a:ext>
             </a:extLst>
           </p:cNvPr>
@@ -18441,7 +18441,7 @@
     </p:spTree>
     <p:extLst>
       <p:ext uri="{BB962C8B-B14F-4D97-AF65-F5344CB8AC3E}">
-        <p14:creationId xmlns:p14="http://schemas.microsoft.com/office/powerpoint/2010/main" val="1068643559"/>
+        <p14:creationId xmlns:p14="http://schemas.microsoft.com/office/powerpoint/2010/main" val="1559413908"/>
       </p:ext>
     </p:extLst>
   </p:cSld>
@@ -18465,7 +18465,7 @@
           <p:cNvPr id="1" name="">
             <a:extLst xmlns:a="http://schemas.openxmlformats.org/drawingml/2006/main">
               <a:ext uri="{FF2B5EF4-FFF2-40B4-BE49-F238E27FC236}">
-                <a16:creationId xmlns:a16="http://schemas.microsoft.com/office/drawing/2014/main" id="{BD7B27F7-807A-46C7-BC02-518C6DBBBE1E}"/>
+                <a16:creationId xmlns:a16="http://schemas.microsoft.com/office/drawing/2014/main" id="{B87CA378-21C1-4C4D-9863-0B8DB4B61E2C}"/>
               </a:ext>
             </a:extLst>
           </p:cNvPr>
@@ -18500,7 +18500,7 @@
           <p:cNvPr id="2" name="">
             <a:extLst xmlns:a="http://schemas.openxmlformats.org/drawingml/2006/main">
               <a:ext uri="{FF2B5EF4-FFF2-40B4-BE49-F238E27FC236}">
-                <a16:creationId xmlns:a16="http://schemas.microsoft.com/office/drawing/2014/main" id="{95B2A32A-A61A-46FE-B55D-4D3F86407365}"/>
+                <a16:creationId xmlns:a16="http://schemas.microsoft.com/office/drawing/2014/main" id="{CB5A709A-3D79-43A6-A1B7-ABD9202DB771}"/>
               </a:ext>
             </a:extLst>
           </p:cNvPr>
@@ -18535,7 +18535,7 @@
           <p:cNvPr id="3" name="">
             <a:extLst xmlns:a="http://schemas.openxmlformats.org/drawingml/2006/main">
               <a:ext uri="{FF2B5EF4-FFF2-40B4-BE49-F238E27FC236}">
-                <a16:creationId xmlns:a16="http://schemas.microsoft.com/office/drawing/2014/main" id="{4C194B3C-92D0-412C-BA5F-C8C75753DED5}"/>
+                <a16:creationId xmlns:a16="http://schemas.microsoft.com/office/drawing/2014/main" id="{BB02A5F1-2843-4E3A-99AD-BD76C1C99A1A}"/>
               </a:ext>
             </a:extLst>
           </p:cNvPr>
@@ -18570,7 +18570,7 @@
           <p:cNvPr id="4" name="kicker-8-label">
             <a:extLst xmlns:a="http://schemas.openxmlformats.org/drawingml/2006/main">
               <a:ext uri="{FF2B5EF4-FFF2-40B4-BE49-F238E27FC236}">
-                <a16:creationId xmlns:a16="http://schemas.microsoft.com/office/drawing/2014/main" id="{7B462C0A-AF2D-42EA-82EF-95294B274072}"/>
+                <a16:creationId xmlns:a16="http://schemas.microsoft.com/office/drawing/2014/main" id="{4496E2D9-7126-4656-8740-8145ED614BD3}"/>
               </a:ext>
             </a:extLst>
           </p:cNvPr>
@@ -18634,7 +18634,7 @@
           <p:cNvPr id="5" name="">
             <a:extLst xmlns:a="http://schemas.openxmlformats.org/drawingml/2006/main">
               <a:ext uri="{FF2B5EF4-FFF2-40B4-BE49-F238E27FC236}">
-                <a16:creationId xmlns:a16="http://schemas.microsoft.com/office/drawing/2014/main" id="{20D30A2E-4668-4518-98BD-D8E335C24A9E}"/>
+                <a16:creationId xmlns:a16="http://schemas.microsoft.com/office/drawing/2014/main" id="{B0E68D8F-9E84-4AEB-8C88-D655526FE9CC}"/>
               </a:ext>
             </a:extLst>
           </p:cNvPr>
@@ -18698,7 +18698,7 @@
           <p:cNvPr id="6" name="">
             <a:extLst xmlns:a="http://schemas.openxmlformats.org/drawingml/2006/main">
               <a:ext uri="{FF2B5EF4-FFF2-40B4-BE49-F238E27FC236}">
-                <a16:creationId xmlns:a16="http://schemas.microsoft.com/office/drawing/2014/main" id="{45791ECC-19B1-43BA-B3F8-E4E3D971A620}"/>
+                <a16:creationId xmlns:a16="http://schemas.microsoft.com/office/drawing/2014/main" id="{FF70112A-36CE-4296-929C-0B5614DA570A}"/>
               </a:ext>
             </a:extLst>
           </p:cNvPr>
@@ -18762,7 +18762,7 @@
           <p:cNvPr id="7" name="">
             <a:extLst xmlns:a="http://schemas.openxmlformats.org/drawingml/2006/main">
               <a:ext uri="{FF2B5EF4-FFF2-40B4-BE49-F238E27FC236}">
-                <a16:creationId xmlns:a16="http://schemas.microsoft.com/office/drawing/2014/main" id="{9C412276-6715-4500-B072-873F271238BD}"/>
+                <a16:creationId xmlns:a16="http://schemas.microsoft.com/office/drawing/2014/main" id="{6C9DD2D6-2CA5-4E4D-B283-922E9FA97156}"/>
               </a:ext>
             </a:extLst>
           </p:cNvPr>
@@ -18797,7 +18797,7 @@
           <p:cNvPr id="8" name="">
             <a:extLst xmlns:a="http://schemas.openxmlformats.org/drawingml/2006/main">
               <a:ext uri="{FF2B5EF4-FFF2-40B4-BE49-F238E27FC236}">
-                <a16:creationId xmlns:a16="http://schemas.microsoft.com/office/drawing/2014/main" id="{5A625FEA-2F34-4C84-AE65-79E15CF3E2CE}"/>
+                <a16:creationId xmlns:a16="http://schemas.microsoft.com/office/drawing/2014/main" id="{7022F594-E0D9-405C-B1C4-38FC8D7CDF3C}"/>
               </a:ext>
             </a:extLst>
           </p:cNvPr>
@@ -18861,7 +18861,7 @@
           <p:cNvPr id="9" name="">
             <a:extLst xmlns:a="http://schemas.openxmlformats.org/drawingml/2006/main">
               <a:ext uri="{FF2B5EF4-FFF2-40B4-BE49-F238E27FC236}">
-                <a16:creationId xmlns:a16="http://schemas.microsoft.com/office/drawing/2014/main" id="{E202E605-B1BF-4597-B432-B6C6C9EA7313}"/>
+                <a16:creationId xmlns:a16="http://schemas.microsoft.com/office/drawing/2014/main" id="{400C8AA6-6325-40A7-A184-1B89CFC58AB8}"/>
               </a:ext>
             </a:extLst>
           </p:cNvPr>
@@ -18896,7 +18896,7 @@
           <p:cNvPr id="10" name="">
             <a:extLst xmlns:a="http://schemas.openxmlformats.org/drawingml/2006/main">
               <a:ext uri="{FF2B5EF4-FFF2-40B4-BE49-F238E27FC236}">
-                <a16:creationId xmlns:a16="http://schemas.microsoft.com/office/drawing/2014/main" id="{C011CAC3-341F-47CF-AD20-0BF6DA1A3F60}"/>
+                <a16:creationId xmlns:a16="http://schemas.microsoft.com/office/drawing/2014/main" id="{F3ED8C6D-7C7D-490C-9795-0AB90F423AD9}"/>
               </a:ext>
             </a:extLst>
           </p:cNvPr>
@@ -18960,7 +18960,7 @@
           <p:cNvPr id="11" name="">
             <a:extLst xmlns:a="http://schemas.openxmlformats.org/drawingml/2006/main">
               <a:ext uri="{FF2B5EF4-FFF2-40B4-BE49-F238E27FC236}">
-                <a16:creationId xmlns:a16="http://schemas.microsoft.com/office/drawing/2014/main" id="{57CE44C6-F9AF-4FA0-8190-BEA81F688C68}"/>
+                <a16:creationId xmlns:a16="http://schemas.microsoft.com/office/drawing/2014/main" id="{FFB500B6-8D71-474A-A3E6-74C047FA67FB}"/>
               </a:ext>
             </a:extLst>
           </p:cNvPr>
@@ -18995,7 +18995,7 @@
           <p:cNvPr id="12" name="">
             <a:extLst xmlns:a="http://schemas.openxmlformats.org/drawingml/2006/main">
               <a:ext uri="{FF2B5EF4-FFF2-40B4-BE49-F238E27FC236}">
-                <a16:creationId xmlns:a16="http://schemas.microsoft.com/office/drawing/2014/main" id="{597D012E-B4E9-4AB2-BB9E-7380ED4717C3}"/>
+                <a16:creationId xmlns:a16="http://schemas.microsoft.com/office/drawing/2014/main" id="{9C0B39C8-BDCB-413E-B68D-15B31B6F1B58}"/>
               </a:ext>
             </a:extLst>
           </p:cNvPr>
@@ -19059,7 +19059,7 @@
           <p:cNvPr id="13" name="">
             <a:extLst xmlns:a="http://schemas.openxmlformats.org/drawingml/2006/main">
               <a:ext uri="{FF2B5EF4-FFF2-40B4-BE49-F238E27FC236}">
-                <a16:creationId xmlns:a16="http://schemas.microsoft.com/office/drawing/2014/main" id="{CF3D637F-74D3-41CC-8B9D-AD3F9F4DC9EF}"/>
+                <a16:creationId xmlns:a16="http://schemas.microsoft.com/office/drawing/2014/main" id="{8875110B-D448-4C08-87B0-A63022E813A0}"/>
               </a:ext>
             </a:extLst>
           </p:cNvPr>
@@ -19092,7 +19092,7 @@
           <p:cNvPr id="14" name="">
             <a:extLst xmlns:a="http://schemas.openxmlformats.org/drawingml/2006/main">
               <a:ext uri="{FF2B5EF4-FFF2-40B4-BE49-F238E27FC236}">
-                <a16:creationId xmlns:a16="http://schemas.microsoft.com/office/drawing/2014/main" id="{16DE0031-07FB-4092-8316-05959616400C}"/>
+                <a16:creationId xmlns:a16="http://schemas.microsoft.com/office/drawing/2014/main" id="{76F38AFA-8F4F-4C01-8F90-D5CD7E1EEE63}"/>
               </a:ext>
             </a:extLst>
           </p:cNvPr>
@@ -19156,7 +19156,7 @@
           <p:cNvPr id="15" name="">
             <a:extLst xmlns:a="http://schemas.openxmlformats.org/drawingml/2006/main">
               <a:ext uri="{FF2B5EF4-FFF2-40B4-BE49-F238E27FC236}">
-                <a16:creationId xmlns:a16="http://schemas.microsoft.com/office/drawing/2014/main" id="{C168403D-9F84-4B28-B4A4-1A7B27B6A6DE}"/>
+                <a16:creationId xmlns:a16="http://schemas.microsoft.com/office/drawing/2014/main" id="{5DB42B3C-A35B-479D-81C0-0261B29B0B0A}"/>
               </a:ext>
             </a:extLst>
           </p:cNvPr>
@@ -19220,7 +19220,7 @@
           <p:cNvPr id="16" name="">
             <a:extLst xmlns:a="http://schemas.openxmlformats.org/drawingml/2006/main">
               <a:ext uri="{FF2B5EF4-FFF2-40B4-BE49-F238E27FC236}">
-                <a16:creationId xmlns:a16="http://schemas.microsoft.com/office/drawing/2014/main" id="{AC23681E-FFDC-48B1-AAD7-DDB9DA5883A6}"/>
+                <a16:creationId xmlns:a16="http://schemas.microsoft.com/office/drawing/2014/main" id="{D4262282-7414-4D3D-A3C5-CFA881E9BF82}"/>
               </a:ext>
             </a:extLst>
           </p:cNvPr>
@@ -19253,7 +19253,7 @@
           <p:cNvPr id="17" name="">
             <a:extLst xmlns:a="http://schemas.openxmlformats.org/drawingml/2006/main">
               <a:ext uri="{FF2B5EF4-FFF2-40B4-BE49-F238E27FC236}">
-                <a16:creationId xmlns:a16="http://schemas.microsoft.com/office/drawing/2014/main" id="{0D904575-9A1A-4AB8-A82C-0E5A453FB3E2}"/>
+                <a16:creationId xmlns:a16="http://schemas.microsoft.com/office/drawing/2014/main" id="{55710E53-16CB-49EA-AC6D-75672CC0DC67}"/>
               </a:ext>
             </a:extLst>
           </p:cNvPr>
@@ -19317,7 +19317,7 @@
           <p:cNvPr id="18" name="">
             <a:extLst xmlns:a="http://schemas.openxmlformats.org/drawingml/2006/main">
               <a:ext uri="{FF2B5EF4-FFF2-40B4-BE49-F238E27FC236}">
-                <a16:creationId xmlns:a16="http://schemas.microsoft.com/office/drawing/2014/main" id="{1D921895-E3F8-4D82-BA43-B92E02B1B2BB}"/>
+                <a16:creationId xmlns:a16="http://schemas.microsoft.com/office/drawing/2014/main" id="{6D9CB5C7-9091-4E41-A4F9-9FE0734C32D9}"/>
               </a:ext>
             </a:extLst>
           </p:cNvPr>
@@ -19381,7 +19381,7 @@
           <p:cNvPr id="19" name="">
             <a:extLst xmlns:a="http://schemas.openxmlformats.org/drawingml/2006/main">
               <a:ext uri="{FF2B5EF4-FFF2-40B4-BE49-F238E27FC236}">
-                <a16:creationId xmlns:a16="http://schemas.microsoft.com/office/drawing/2014/main" id="{17010D6A-532C-494F-9481-556BB796DC1B}"/>
+                <a16:creationId xmlns:a16="http://schemas.microsoft.com/office/drawing/2014/main" id="{A8E8DBF4-57BD-464B-99AF-777C5BD43A80}"/>
               </a:ext>
             </a:extLst>
           </p:cNvPr>
@@ -19414,7 +19414,7 @@
           <p:cNvPr id="20" name="">
             <a:extLst xmlns:a="http://schemas.openxmlformats.org/drawingml/2006/main">
               <a:ext uri="{FF2B5EF4-FFF2-40B4-BE49-F238E27FC236}">
-                <a16:creationId xmlns:a16="http://schemas.microsoft.com/office/drawing/2014/main" id="{4782762D-1DDF-41C5-8A5D-EEBD67A57FAC}"/>
+                <a16:creationId xmlns:a16="http://schemas.microsoft.com/office/drawing/2014/main" id="{0B3A30F3-E491-4128-9B12-A74EEB3079D7}"/>
               </a:ext>
             </a:extLst>
           </p:cNvPr>
@@ -19478,7 +19478,7 @@
           <p:cNvPr id="21" name="">
             <a:extLst xmlns:a="http://schemas.openxmlformats.org/drawingml/2006/main">
               <a:ext uri="{FF2B5EF4-FFF2-40B4-BE49-F238E27FC236}">
-                <a16:creationId xmlns:a16="http://schemas.microsoft.com/office/drawing/2014/main" id="{B86D6E0A-ABB9-40B9-80F7-458AED28415B}"/>
+                <a16:creationId xmlns:a16="http://schemas.microsoft.com/office/drawing/2014/main" id="{F4F5E6E1-BF48-47C0-8B98-5369E12AAC52}"/>
               </a:ext>
             </a:extLst>
           </p:cNvPr>
@@ -19540,7 +19540,7 @@
     </p:spTree>
     <p:extLst>
       <p:ext uri="{BB962C8B-B14F-4D97-AF65-F5344CB8AC3E}">
-        <p14:creationId xmlns:p14="http://schemas.microsoft.com/office/powerpoint/2010/main" val="1305790616"/>
+        <p14:creationId xmlns:p14="http://schemas.microsoft.com/office/powerpoint/2010/main" val="2077774848"/>
       </p:ext>
     </p:extLst>
   </p:cSld>
@@ -19564,7 +19564,7 @@
           <p:cNvPr id="1" name="">
             <a:extLst xmlns:a="http://schemas.openxmlformats.org/drawingml/2006/main">
               <a:ext uri="{FF2B5EF4-FFF2-40B4-BE49-F238E27FC236}">
-                <a16:creationId xmlns:a16="http://schemas.microsoft.com/office/drawing/2014/main" id="{5ADBCBBC-6253-41D0-ADBB-DB8F9A30F829}"/>
+                <a16:creationId xmlns:a16="http://schemas.microsoft.com/office/drawing/2014/main" id="{3003B01F-95C1-40BA-9DF0-39A5C4EDAB47}"/>
               </a:ext>
             </a:extLst>
           </p:cNvPr>
@@ -19599,7 +19599,7 @@
           <p:cNvPr id="2" name="">
             <a:extLst xmlns:a="http://schemas.openxmlformats.org/drawingml/2006/main">
               <a:ext uri="{FF2B5EF4-FFF2-40B4-BE49-F238E27FC236}">
-                <a16:creationId xmlns:a16="http://schemas.microsoft.com/office/drawing/2014/main" id="{C912C82B-B254-474D-89D1-26A62BDA13DF}"/>
+                <a16:creationId xmlns:a16="http://schemas.microsoft.com/office/drawing/2014/main" id="{B1CB8E51-A5A8-471F-998B-FCF5564C73A8}"/>
               </a:ext>
             </a:extLst>
           </p:cNvPr>
@@ -19634,7 +19634,7 @@
           <p:cNvPr id="3" name="">
             <a:extLst xmlns:a="http://schemas.openxmlformats.org/drawingml/2006/main">
               <a:ext uri="{FF2B5EF4-FFF2-40B4-BE49-F238E27FC236}">
-                <a16:creationId xmlns:a16="http://schemas.microsoft.com/office/drawing/2014/main" id="{2AC6824F-7B5B-4EE5-9B3B-54CF79266457}"/>
+                <a16:creationId xmlns:a16="http://schemas.microsoft.com/office/drawing/2014/main" id="{5DBC14EC-C2EB-40F2-AFA4-33B2E4B0A0A1}"/>
               </a:ext>
             </a:extLst>
           </p:cNvPr>
@@ -19669,7 +19669,7 @@
           <p:cNvPr id="4" name="kicker-9-label">
             <a:extLst xmlns:a="http://schemas.openxmlformats.org/drawingml/2006/main">
               <a:ext uri="{FF2B5EF4-FFF2-40B4-BE49-F238E27FC236}">
-                <a16:creationId xmlns:a16="http://schemas.microsoft.com/office/drawing/2014/main" id="{92CE9E3C-DAD5-4E0C-9B08-4D6FC30F559B}"/>
+                <a16:creationId xmlns:a16="http://schemas.microsoft.com/office/drawing/2014/main" id="{2249C914-C6CE-4EC3-9E7C-45208ABECD7F}"/>
               </a:ext>
             </a:extLst>
           </p:cNvPr>
@@ -19733,7 +19733,7 @@
           <p:cNvPr id="5" name="">
             <a:extLst xmlns:a="http://schemas.openxmlformats.org/drawingml/2006/main">
               <a:ext uri="{FF2B5EF4-FFF2-40B4-BE49-F238E27FC236}">
-                <a16:creationId xmlns:a16="http://schemas.microsoft.com/office/drawing/2014/main" id="{29D4EC95-6836-45E5-82C7-EC65D8D33CBD}"/>
+                <a16:creationId xmlns:a16="http://schemas.microsoft.com/office/drawing/2014/main" id="{8BD24FF5-9CF3-4172-940F-98A2A81D1B3B}"/>
               </a:ext>
             </a:extLst>
           </p:cNvPr>
@@ -19797,7 +19797,7 @@
           <p:cNvPr id="6" name="">
             <a:extLst xmlns:a="http://schemas.openxmlformats.org/drawingml/2006/main">
               <a:ext uri="{FF2B5EF4-FFF2-40B4-BE49-F238E27FC236}">
-                <a16:creationId xmlns:a16="http://schemas.microsoft.com/office/drawing/2014/main" id="{3994148E-8EDE-43D9-9793-8DE7DF3564E9}"/>
+                <a16:creationId xmlns:a16="http://schemas.microsoft.com/office/drawing/2014/main" id="{6CC73660-C896-4AC4-A181-AE5733AE063E}"/>
               </a:ext>
             </a:extLst>
           </p:cNvPr>
@@ -19861,7 +19861,7 @@
           <p:cNvPr id="7" name="">
             <a:extLst xmlns:a="http://schemas.openxmlformats.org/drawingml/2006/main">
               <a:ext uri="{FF2B5EF4-FFF2-40B4-BE49-F238E27FC236}">
-                <a16:creationId xmlns:a16="http://schemas.microsoft.com/office/drawing/2014/main" id="{ED579214-6606-48F5-A897-D4BE9EF3F40E}"/>
+                <a16:creationId xmlns:a16="http://schemas.microsoft.com/office/drawing/2014/main" id="{8472E87A-098E-4416-B97C-69D1FD84F452}"/>
               </a:ext>
             </a:extLst>
           </p:cNvPr>
@@ -19898,7 +19898,7 @@
           <p:nvPr/>
         </p:nvPicPr>
         <p:blipFill>
-          <a:blip xmlns:r="http://schemas.openxmlformats.org/officeDocument/2006/relationships" xmlns:a="http://schemas.openxmlformats.org/drawingml/2006/main" r:embed="Rd536408dfa6f4682"/>
+          <a:blip xmlns:r="http://schemas.openxmlformats.org/officeDocument/2006/relationships" xmlns:a="http://schemas.openxmlformats.org/drawingml/2006/main" r:embed="Rf30456cebc934054"/>
           <a:stretch xmlns:a="http://schemas.openxmlformats.org/drawingml/2006/main"/>
         </p:blipFill>
         <p:spPr>
@@ -19916,7 +19916,7 @@
           <p:cNvPr id="9" name="">
             <a:extLst xmlns:a="http://schemas.openxmlformats.org/drawingml/2006/main">
               <a:ext uri="{FF2B5EF4-FFF2-40B4-BE49-F238E27FC236}">
-                <a16:creationId xmlns:a16="http://schemas.microsoft.com/office/drawing/2014/main" id="{78E3FF44-1FA2-4422-8FF1-4C2831D9C7E9}"/>
+                <a16:creationId xmlns:a16="http://schemas.microsoft.com/office/drawing/2014/main" id="{4BCFCA0F-2CFA-45F1-A078-6B7551BD710C}"/>
               </a:ext>
             </a:extLst>
           </p:cNvPr>
@@ -19978,7 +19978,7 @@
     </p:spTree>
     <p:extLst>
       <p:ext uri="{BB962C8B-B14F-4D97-AF65-F5344CB8AC3E}">
-        <p14:creationId xmlns:p14="http://schemas.microsoft.com/office/powerpoint/2010/main" val="2077401362"/>
+        <p14:creationId xmlns:p14="http://schemas.microsoft.com/office/powerpoint/2010/main" val="1773400220"/>
       </p:ext>
     </p:extLst>
   </p:cSld>

--- a/docs/tcc/apresentacao-inventoryrfid-15min.pptx
+++ b/docs/tcc/apresentacao-inventoryrfid-15min.pptx
@@ -2,29 +2,30 @@
 <file path=ppt/presentation.xml><?xml version="1.0" encoding="utf-8"?>
 <p:presentation xmlns:p="http://schemas.openxmlformats.org/presentationml/2006/main">
   <p:sldMasterIdLst>
-    <p:sldMasterId xmlns:r="http://schemas.openxmlformats.org/officeDocument/2006/relationships" id="2147483648" r:id="R6a07d603c88a4d31"/>
+    <p:sldMasterId xmlns:r="http://schemas.openxmlformats.org/officeDocument/2006/relationships" id="2147483648" r:id="Rc8c66585e71f4a07"/>
   </p:sldMasterIdLst>
   <p:notesMasterIdLst>
-    <p:notesMasterId xmlns:r="http://schemas.openxmlformats.org/officeDocument/2006/relationships" r:id="Rfbd03f6f1635431e"/>
+    <p:notesMasterId xmlns:r="http://schemas.openxmlformats.org/officeDocument/2006/relationships" r:id="R8f9e1bb6df2a4f11"/>
   </p:notesMasterIdLst>
   <p:sldIdLst>
-    <p:sldId xmlns:r="http://schemas.openxmlformats.org/officeDocument/2006/relationships" id="256" r:id="Re581c5a59b7b437c"/>
-    <p:sldId xmlns:r="http://schemas.openxmlformats.org/officeDocument/2006/relationships" id="257" r:id="Rf99ea9f91f0548e0"/>
-    <p:sldId xmlns:r="http://schemas.openxmlformats.org/officeDocument/2006/relationships" id="258" r:id="R006238ba486b484f"/>
-    <p:sldId xmlns:r="http://schemas.openxmlformats.org/officeDocument/2006/relationships" id="259" r:id="R43fbdaeec3934557"/>
-    <p:sldId xmlns:r="http://schemas.openxmlformats.org/officeDocument/2006/relationships" id="260" r:id="R877b86f994004757"/>
-    <p:sldId xmlns:r="http://schemas.openxmlformats.org/officeDocument/2006/relationships" id="261" r:id="R96ca242d6692444e"/>
-    <p:sldId xmlns:r="http://schemas.openxmlformats.org/officeDocument/2006/relationships" id="262" r:id="R98c25efce2e04357"/>
-    <p:sldId xmlns:r="http://schemas.openxmlformats.org/officeDocument/2006/relationships" id="263" r:id="R745ccd2283fa4f26"/>
-    <p:sldId xmlns:r="http://schemas.openxmlformats.org/officeDocument/2006/relationships" id="264" r:id="Rfb5644e2532a4132"/>
-    <p:sldId xmlns:r="http://schemas.openxmlformats.org/officeDocument/2006/relationships" id="265" r:id="R51e2fccf0827415f"/>
-    <p:sldId xmlns:r="http://schemas.openxmlformats.org/officeDocument/2006/relationships" id="266" r:id="R8bb798dec3f745fe"/>
-    <p:sldId xmlns:r="http://schemas.openxmlformats.org/officeDocument/2006/relationships" id="267" r:id="R889414659cc44ff9"/>
-    <p:sldId xmlns:r="http://schemas.openxmlformats.org/officeDocument/2006/relationships" id="268" r:id="Rd675879c482441c3"/>
-    <p:sldId xmlns:r="http://schemas.openxmlformats.org/officeDocument/2006/relationships" id="269" r:id="Re138f15740af46ea"/>
-    <p:sldId xmlns:r="http://schemas.openxmlformats.org/officeDocument/2006/relationships" id="270" r:id="Rf263e07cb9bf4ad9"/>
-    <p:sldId xmlns:r="http://schemas.openxmlformats.org/officeDocument/2006/relationships" id="271" r:id="R12bf01eb53674631"/>
-    <p:sldId xmlns:r="http://schemas.openxmlformats.org/officeDocument/2006/relationships" id="272" r:id="Rd281d81567ca4c2d"/>
+    <p:sldId xmlns:r="http://schemas.openxmlformats.org/officeDocument/2006/relationships" id="256" r:id="Rcbe4a25dede7468a"/>
+    <p:sldId xmlns:r="http://schemas.openxmlformats.org/officeDocument/2006/relationships" id="257" r:id="R2620953277824f5b"/>
+    <p:sldId xmlns:r="http://schemas.openxmlformats.org/officeDocument/2006/relationships" id="258" r:id="R7080d4faa01b4f3a"/>
+    <p:sldId xmlns:r="http://schemas.openxmlformats.org/officeDocument/2006/relationships" id="259" r:id="R76574f0e1217442f"/>
+    <p:sldId xmlns:r="http://schemas.openxmlformats.org/officeDocument/2006/relationships" id="260" r:id="R989dbef39f674f1d"/>
+    <p:sldId xmlns:r="http://schemas.openxmlformats.org/officeDocument/2006/relationships" id="261" r:id="Rf25e841e36ea4bcd"/>
+    <p:sldId xmlns:r="http://schemas.openxmlformats.org/officeDocument/2006/relationships" id="262" r:id="R2b486b647cd84cc4"/>
+    <p:sldId xmlns:r="http://schemas.openxmlformats.org/officeDocument/2006/relationships" id="263" r:id="Rcb2f90e394564cbf"/>
+    <p:sldId xmlns:r="http://schemas.openxmlformats.org/officeDocument/2006/relationships" id="264" r:id="R70131062dcbc4dd6"/>
+    <p:sldId xmlns:r="http://schemas.openxmlformats.org/officeDocument/2006/relationships" id="265" r:id="R6037f662059f4f80"/>
+    <p:sldId xmlns:r="http://schemas.openxmlformats.org/officeDocument/2006/relationships" id="266" r:id="R8f0f00fe23b94167"/>
+    <p:sldId xmlns:r="http://schemas.openxmlformats.org/officeDocument/2006/relationships" id="267" r:id="Rb58a5aff0e264153"/>
+    <p:sldId xmlns:r="http://schemas.openxmlformats.org/officeDocument/2006/relationships" id="268" r:id="R2484f2ed9f15458c"/>
+    <p:sldId xmlns:r="http://schemas.openxmlformats.org/officeDocument/2006/relationships" id="269" r:id="R05517e9449f0421f"/>
+    <p:sldId xmlns:r="http://schemas.openxmlformats.org/officeDocument/2006/relationships" id="270" r:id="R6bd9a81182ae405f"/>
+    <p:sldId xmlns:r="http://schemas.openxmlformats.org/officeDocument/2006/relationships" id="271" r:id="R7f4c97b39257499b"/>
+    <p:sldId xmlns:r="http://schemas.openxmlformats.org/officeDocument/2006/relationships" id="272" r:id="Rda355e4644db4310"/>
+    <p:sldId xmlns:r="http://schemas.openxmlformats.org/officeDocument/2006/relationships" id="273" r:id="Rce06c3893bfe4573"/>
   </p:sldIdLst>
   <p:sldSz cx="12192000" cy="6858000"/>
   <p:notesSz cx="6858000" cy="9144000"/>
@@ -1061,6 +1062,72 @@
 </p:notes>
 </file>
 
+<file path=ppt/notesSlides/notesSlide18.xml><?xml version="1.0" encoding="utf-8"?>
+<p:notes xmlns:p="http://schemas.openxmlformats.org/presentationml/2006/main">
+  <p:cSld>
+    <p:spTree>
+      <p:nvGrpSpPr>
+        <p:cNvPr id="1" name=""/>
+        <p:cNvGrpSpPr/>
+        <p:nvPr/>
+      </p:nvGrpSpPr>
+      <p:grpSpPr>
+        <a:xfrm xmlns:a="http://schemas.openxmlformats.org/drawingml/2006/main"/>
+      </p:grpSpPr>
+      <p:sp>
+        <p:nvSpPr>
+          <p:cNvPr id="2" name="Slide Image Placeholder 1"/>
+          <p:cNvSpPr>
+            <a:spLocks xmlns:a="http://schemas.openxmlformats.org/drawingml/2006/main" noGrp="1"/>
+          </p:cNvSpPr>
+          <p:nvPr>
+            <p:ph type="sldImg" idx="0"/>
+          </p:nvPr>
+        </p:nvSpPr>
+        <p:spPr/>
+      </p:sp>
+      <p:sp>
+        <p:nvSpPr>
+          <p:cNvPr id="3" name="Notes Placeholder 2"/>
+          <p:cNvSpPr>
+            <a:spLocks xmlns:a="http://schemas.openxmlformats.org/drawingml/2006/main" noGrp="1"/>
+          </p:cNvSpPr>
+          <p:nvPr>
+            <p:ph type="body" idx="1"/>
+          </p:nvPr>
+        </p:nvSpPr>
+        <p:spPr/>
+        <p:txBody>
+          <a:bodyPr xmlns:a="http://schemas.openxmlformats.org/drawingml/2006/main"/>
+          <a:lstStyle xmlns:a="http://schemas.openxmlformats.org/drawingml/2006/main"/>
+          <a:p xmlns:a="http://schemas.openxmlformats.org/drawingml/2006/main"/>
+        </p:txBody>
+      </p:sp>
+      <p:sp>
+        <p:nvSpPr>
+          <p:cNvPr id="4" name="Slide Number Placeholder 3"/>
+          <p:cNvSpPr>
+            <a:spLocks xmlns:a="http://schemas.openxmlformats.org/drawingml/2006/main" noGrp="1"/>
+          </p:cNvSpPr>
+          <p:nvPr>
+            <p:ph type="sldNum" idx="5"/>
+          </p:nvPr>
+        </p:nvSpPr>
+        <p:spPr/>
+        <p:txBody>
+          <a:bodyPr xmlns:a="http://schemas.openxmlformats.org/drawingml/2006/main"/>
+          <a:lstStyle xmlns:a="http://schemas.openxmlformats.org/drawingml/2006/main"/>
+          <a:p xmlns:a="http://schemas.openxmlformats.org/drawingml/2006/main"/>
+        </p:txBody>
+      </p:sp>
+    </p:spTree>
+  </p:cSld>
+  <p:clrMapOvr>
+    <a:masterClrMapping xmlns:a="http://schemas.openxmlformats.org/drawingml/2006/main"/>
+  </p:clrMapOvr>
+</p:notes>
+</file>
+
 <file path=ppt/notesSlides/notesSlide2.xml><?xml version="1.0" encoding="utf-8"?>
 <p:notes xmlns:p="http://schemas.openxmlformats.org/presentationml/2006/main">
   <p:cSld>
@@ -1627,7 +1694,7 @@
   </p:cSld>
   <p:clrMap bg1="lt1" tx1="dk1" bg2="lt2" tx2="dk2" accent1="accent1" accent2="accent2" accent3="accent3" accent4="accent4" accent5="accent5" accent6="accent6" hlink="hlink" folHlink="folHlink"/>
   <p:sldLayoutIdLst>
-    <p:sldLayoutId xmlns:r="http://schemas.openxmlformats.org/officeDocument/2006/relationships" id="2147483649" r:id="R43176e04e04e4cc5"/>
+    <p:sldLayoutId xmlns:r="http://schemas.openxmlformats.org/officeDocument/2006/relationships" id="2147483649" r:id="R6c691453be8843fe"/>
   </p:sldLayoutIdLst>
   <p:txStyles>
     <p:titleStyle>
@@ -2125,7 +2192,7 @@
           <p:cNvPr id="1" name="">
             <a:extLst xmlns:a="http://schemas.openxmlformats.org/drawingml/2006/main">
               <a:ext uri="{FF2B5EF4-FFF2-40B4-BE49-F238E27FC236}">
-                <a16:creationId xmlns:a16="http://schemas.microsoft.com/office/drawing/2014/main" id="{A2DAF4E2-6B75-4498-AD7D-2B42BB1248AE}"/>
+                <a16:creationId xmlns:a16="http://schemas.microsoft.com/office/drawing/2014/main" id="{CA9C2F0E-DCE5-4718-84C0-A22E04ECB00C}"/>
               </a:ext>
             </a:extLst>
           </p:cNvPr>
@@ -2160,7 +2227,7 @@
           <p:cNvPr id="2" name="">
             <a:extLst xmlns:a="http://schemas.openxmlformats.org/drawingml/2006/main">
               <a:ext uri="{FF2B5EF4-FFF2-40B4-BE49-F238E27FC236}">
-                <a16:creationId xmlns:a16="http://schemas.microsoft.com/office/drawing/2014/main" id="{02017206-FDFF-4B0D-A667-51DFEFB5CD01}"/>
+                <a16:creationId xmlns:a16="http://schemas.microsoft.com/office/drawing/2014/main" id="{2ADC768D-4514-4064-8A78-E697B873CBA1}"/>
               </a:ext>
             </a:extLst>
           </p:cNvPr>
@@ -2195,7 +2262,7 @@
           <p:cNvPr id="3" name="">
             <a:extLst xmlns:a="http://schemas.openxmlformats.org/drawingml/2006/main">
               <a:ext uri="{FF2B5EF4-FFF2-40B4-BE49-F238E27FC236}">
-                <a16:creationId xmlns:a16="http://schemas.microsoft.com/office/drawing/2014/main" id="{E76AAED3-9566-4057-9117-DD3CADEF5F42}"/>
+                <a16:creationId xmlns:a16="http://schemas.microsoft.com/office/drawing/2014/main" id="{0E678B27-3075-485C-B72D-F8F3DB8543C6}"/>
               </a:ext>
             </a:extLst>
           </p:cNvPr>
@@ -2230,7 +2297,7 @@
           <p:cNvPr id="4" name="">
             <a:extLst xmlns:a="http://schemas.openxmlformats.org/drawingml/2006/main">
               <a:ext uri="{FF2B5EF4-FFF2-40B4-BE49-F238E27FC236}">
-                <a16:creationId xmlns:a16="http://schemas.microsoft.com/office/drawing/2014/main" id="{3CBD9359-A37A-44CD-A440-FB338891C57F}"/>
+                <a16:creationId xmlns:a16="http://schemas.microsoft.com/office/drawing/2014/main" id="{FFF4575F-CD91-4C3E-AB07-39C4A4A6E0DE}"/>
               </a:ext>
             </a:extLst>
           </p:cNvPr>
@@ -2265,7 +2332,7 @@
           <p:cNvPr id="5" name="">
             <a:extLst xmlns:a="http://schemas.openxmlformats.org/drawingml/2006/main">
               <a:ext uri="{FF2B5EF4-FFF2-40B4-BE49-F238E27FC236}">
-                <a16:creationId xmlns:a16="http://schemas.microsoft.com/office/drawing/2014/main" id="{5AF26390-112C-40AF-A7CD-9290D71240B4}"/>
+                <a16:creationId xmlns:a16="http://schemas.microsoft.com/office/drawing/2014/main" id="{68F17BDE-C4C7-48C3-AC5E-A0F28BDC96CF}"/>
               </a:ext>
             </a:extLst>
           </p:cNvPr>
@@ -2300,7 +2367,7 @@
           <p:cNvPr id="6" name="">
             <a:extLst xmlns:a="http://schemas.openxmlformats.org/drawingml/2006/main">
               <a:ext uri="{FF2B5EF4-FFF2-40B4-BE49-F238E27FC236}">
-                <a16:creationId xmlns:a16="http://schemas.microsoft.com/office/drawing/2014/main" id="{1F56590D-F233-4326-8183-3D9F22A346DA}"/>
+                <a16:creationId xmlns:a16="http://schemas.microsoft.com/office/drawing/2014/main" id="{65E7960E-B632-4309-82C9-85CA020857B5}"/>
               </a:ext>
             </a:extLst>
           </p:cNvPr>
@@ -2339,7 +2406,7 @@
           <p:nvPr/>
         </p:nvPicPr>
         <p:blipFill>
-          <a:blip xmlns:r="http://schemas.openxmlformats.org/officeDocument/2006/relationships" xmlns:a="http://schemas.openxmlformats.org/drawingml/2006/main" r:embed="R6b7cdcc386f34702"/>
+          <a:blip xmlns:r="http://schemas.openxmlformats.org/officeDocument/2006/relationships" xmlns:a="http://schemas.openxmlformats.org/drawingml/2006/main" r:embed="R714e8faa79d74062"/>
           <a:stretch xmlns:a="http://schemas.openxmlformats.org/drawingml/2006/main"/>
         </p:blipFill>
         <p:spPr>
@@ -2357,7 +2424,7 @@
           <p:cNvPr id="8" name="">
             <a:extLst xmlns:a="http://schemas.openxmlformats.org/drawingml/2006/main">
               <a:ext uri="{FF2B5EF4-FFF2-40B4-BE49-F238E27FC236}">
-                <a16:creationId xmlns:a16="http://schemas.microsoft.com/office/drawing/2014/main" id="{7938D6CF-F406-4E97-A4CD-B30B4E520FB3}"/>
+                <a16:creationId xmlns:a16="http://schemas.microsoft.com/office/drawing/2014/main" id="{177BC409-5DD2-413C-8C37-2FC5C654691D}"/>
               </a:ext>
             </a:extLst>
           </p:cNvPr>
@@ -2421,7 +2488,7 @@
           <p:cNvPr id="9" name="">
             <a:extLst xmlns:a="http://schemas.openxmlformats.org/drawingml/2006/main">
               <a:ext uri="{FF2B5EF4-FFF2-40B4-BE49-F238E27FC236}">
-                <a16:creationId xmlns:a16="http://schemas.microsoft.com/office/drawing/2014/main" id="{770342CD-9F7B-4C73-B851-111BE7D9953B}"/>
+                <a16:creationId xmlns:a16="http://schemas.microsoft.com/office/drawing/2014/main" id="{5BD0D6C6-47DB-4195-8FBA-815BC2AD59E0}"/>
               </a:ext>
             </a:extLst>
           </p:cNvPr>
@@ -2475,7 +2542,7 @@
                 <a:ea typeface="Arial"/>
                 <a:cs typeface="Arial"/>
               </a:rPr>
-              <a:t>SISTEMA DE INVENTÁRIO BASEADO EM TECNOLOGIA RFID PARA O COLEGIADO DE CIÊNCIA DA COMPUTAÇÃO</a:t>
+              <a:t>Sistema de inventário baseado em tecnologia RFID para o Colegiado de Ciência da Computação</a:t>
             </a:r>
           </a:p>
         </p:txBody>
@@ -2485,18 +2552,18 @@
           <p:cNvPr id="10" name="">
             <a:extLst xmlns:a="http://schemas.openxmlformats.org/drawingml/2006/main">
               <a:ext uri="{FF2B5EF4-FFF2-40B4-BE49-F238E27FC236}">
-                <a16:creationId xmlns:a16="http://schemas.microsoft.com/office/drawing/2014/main" id="{4D532062-1E1D-458B-81EA-309874B420FE}"/>
-              </a:ext>
-            </a:extLst>
-          </p:cNvPr>
-          <p:cNvSpPr>
-            <a:spLocks xmlns:a="http://schemas.openxmlformats.org/drawingml/2006/main" noGrp="1"/>
-          </p:cNvSpPr>
-          <p:nvPr/>
-        </p:nvSpPr>
-        <p:spPr>
-          <a:xfrm xmlns:a="http://schemas.openxmlformats.org/drawingml/2006/main">
-            <a:off x="3143250" y="4095750"/>
+                <a16:creationId xmlns:a16="http://schemas.microsoft.com/office/drawing/2014/main" id="{D6C39FB1-41B9-463A-88EF-AED4BF6BF720}"/>
+              </a:ext>
+            </a:extLst>
+          </p:cNvPr>
+          <p:cNvSpPr>
+            <a:spLocks xmlns:a="http://schemas.openxmlformats.org/drawingml/2006/main" noGrp="1"/>
+          </p:cNvSpPr>
+          <p:nvPr/>
+        </p:nvSpPr>
+        <p:spPr>
+          <a:xfrm xmlns:a="http://schemas.openxmlformats.org/drawingml/2006/main">
+            <a:off x="3143250" y="3943350"/>
             <a:ext cx="5334000" cy="361950"/>
           </a:xfrm>
           <a:prstGeom xmlns:a="http://schemas.openxmlformats.org/drawingml/2006/main" prst="rect">
@@ -2549,18 +2616,18 @@
           <p:cNvPr id="11" name="">
             <a:extLst xmlns:a="http://schemas.openxmlformats.org/drawingml/2006/main">
               <a:ext uri="{FF2B5EF4-FFF2-40B4-BE49-F238E27FC236}">
-                <a16:creationId xmlns:a16="http://schemas.microsoft.com/office/drawing/2014/main" id="{C4D99510-45EB-4339-BD8E-1C1B6013586B}"/>
-              </a:ext>
-            </a:extLst>
-          </p:cNvPr>
-          <p:cNvSpPr>
-            <a:spLocks xmlns:a="http://schemas.openxmlformats.org/drawingml/2006/main" noGrp="1"/>
-          </p:cNvSpPr>
-          <p:nvPr/>
-        </p:nvSpPr>
-        <p:spPr>
-          <a:xfrm xmlns:a="http://schemas.openxmlformats.org/drawingml/2006/main">
-            <a:off x="2686050" y="4762500"/>
+                <a16:creationId xmlns:a16="http://schemas.microsoft.com/office/drawing/2014/main" id="{B4165F95-DF20-46E1-8628-6B3321FD766B}"/>
+              </a:ext>
+            </a:extLst>
+          </p:cNvPr>
+          <p:cNvSpPr>
+            <a:spLocks xmlns:a="http://schemas.openxmlformats.org/drawingml/2006/main" noGrp="1"/>
+          </p:cNvSpPr>
+          <p:nvPr/>
+        </p:nvSpPr>
+        <p:spPr>
+          <a:xfrm xmlns:a="http://schemas.openxmlformats.org/drawingml/2006/main">
+            <a:off x="2686050" y="4610100"/>
             <a:ext cx="6286500" cy="323850"/>
           </a:xfrm>
           <a:prstGeom xmlns:a="http://schemas.openxmlformats.org/drawingml/2006/main" prst="rect">
@@ -2613,7 +2680,7 @@
           <p:cNvPr id="12" name="">
             <a:extLst xmlns:a="http://schemas.openxmlformats.org/drawingml/2006/main">
               <a:ext uri="{FF2B5EF4-FFF2-40B4-BE49-F238E27FC236}">
-                <a16:creationId xmlns:a16="http://schemas.microsoft.com/office/drawing/2014/main" id="{67D9A3EC-8C7E-4435-89ED-9C35D669BFB1}"/>
+                <a16:creationId xmlns:a16="http://schemas.microsoft.com/office/drawing/2014/main" id="{6ECBE39E-15A1-4DC1-80A4-C7305B9C9436}"/>
               </a:ext>
             </a:extLst>
           </p:cNvPr>
@@ -2677,7 +2744,7 @@
           <p:cNvPr id="13" name="">
             <a:extLst xmlns:a="http://schemas.openxmlformats.org/drawingml/2006/main">
               <a:ext uri="{FF2B5EF4-FFF2-40B4-BE49-F238E27FC236}">
-                <a16:creationId xmlns:a16="http://schemas.microsoft.com/office/drawing/2014/main" id="{A20D84E4-B150-4BFE-99BC-83980CDCD87F}"/>
+                <a16:creationId xmlns:a16="http://schemas.microsoft.com/office/drawing/2014/main" id="{E0900F02-C01A-48E1-B851-B2777C960E78}"/>
               </a:ext>
             </a:extLst>
           </p:cNvPr>
@@ -2739,7 +2806,7 @@
     </p:spTree>
     <p:extLst>
       <p:ext uri="{BB962C8B-B14F-4D97-AF65-F5344CB8AC3E}">
-        <p14:creationId xmlns:p14="http://schemas.microsoft.com/office/powerpoint/2010/main" val="1322068460"/>
+        <p14:creationId xmlns:p14="http://schemas.microsoft.com/office/powerpoint/2010/main" val="2032280405"/>
       </p:ext>
     </p:extLst>
   </p:cSld>
@@ -2763,7 +2830,7 @@
           <p:cNvPr id="1" name="">
             <a:extLst xmlns:a="http://schemas.openxmlformats.org/drawingml/2006/main">
               <a:ext uri="{FF2B5EF4-FFF2-40B4-BE49-F238E27FC236}">
-                <a16:creationId xmlns:a16="http://schemas.microsoft.com/office/drawing/2014/main" id="{490840E7-40F0-4EB3-B394-9F9A413C4DEA}"/>
+                <a16:creationId xmlns:a16="http://schemas.microsoft.com/office/drawing/2014/main" id="{D5B605E1-24C4-44F8-AC95-84E80CFFDF90}"/>
               </a:ext>
             </a:extLst>
           </p:cNvPr>
@@ -2798,7 +2865,7 @@
           <p:cNvPr id="2" name="">
             <a:extLst xmlns:a="http://schemas.openxmlformats.org/drawingml/2006/main">
               <a:ext uri="{FF2B5EF4-FFF2-40B4-BE49-F238E27FC236}">
-                <a16:creationId xmlns:a16="http://schemas.microsoft.com/office/drawing/2014/main" id="{D88B040F-24B4-4FF5-AC75-1C289855F885}"/>
+                <a16:creationId xmlns:a16="http://schemas.microsoft.com/office/drawing/2014/main" id="{D3EDBEAC-9D97-4372-BC8E-D6A5568D9BD4}"/>
               </a:ext>
             </a:extLst>
           </p:cNvPr>
@@ -2833,7 +2900,7 @@
           <p:cNvPr id="3" name="">
             <a:extLst xmlns:a="http://schemas.openxmlformats.org/drawingml/2006/main">
               <a:ext uri="{FF2B5EF4-FFF2-40B4-BE49-F238E27FC236}">
-                <a16:creationId xmlns:a16="http://schemas.microsoft.com/office/drawing/2014/main" id="{4648FCFF-9DAE-4E44-A166-0227348A02E9}"/>
+                <a16:creationId xmlns:a16="http://schemas.microsoft.com/office/drawing/2014/main" id="{7E7E0A2A-FDBA-4E79-9850-EFE112978B30}"/>
               </a:ext>
             </a:extLst>
           </p:cNvPr>
@@ -2897,7 +2964,7 @@
           <p:cNvPr id="4" name="">
             <a:extLst xmlns:a="http://schemas.openxmlformats.org/drawingml/2006/main">
               <a:ext uri="{FF2B5EF4-FFF2-40B4-BE49-F238E27FC236}">
-                <a16:creationId xmlns:a16="http://schemas.microsoft.com/office/drawing/2014/main" id="{0E8CD39B-7FC6-4390-AB26-B2B9F1724B43}"/>
+                <a16:creationId xmlns:a16="http://schemas.microsoft.com/office/drawing/2014/main" id="{5CC9A692-1113-48B2-B255-A9CD06986E77}"/>
               </a:ext>
             </a:extLst>
           </p:cNvPr>
@@ -2951,7 +3018,7 @@
                 <a:ea typeface="Arial"/>
                 <a:cs typeface="Arial"/>
               </a:rPr>
-              <a:t>Fluxo de leitura RFID</a:t>
+              <a:t>Fluxo RFID e limite experimental</a:t>
             </a:r>
           </a:p>
         </p:txBody>
@@ -2961,7 +3028,7 @@
           <p:cNvPr id="5" name="">
             <a:extLst xmlns:a="http://schemas.openxmlformats.org/drawingml/2006/main">
               <a:ext uri="{FF2B5EF4-FFF2-40B4-BE49-F238E27FC236}">
-                <a16:creationId xmlns:a16="http://schemas.microsoft.com/office/drawing/2014/main" id="{BCD92D5A-54FA-4253-88FE-B9F3CD82A6F4}"/>
+                <a16:creationId xmlns:a16="http://schemas.microsoft.com/office/drawing/2014/main" id="{DCBF8B21-B10A-44D4-9177-8D8D0269C7EF}"/>
               </a:ext>
             </a:extLst>
           </p:cNvPr>
@@ -3015,7 +3082,7 @@
                 <a:ea typeface="Arial"/>
                 <a:cs typeface="Arial"/>
               </a:rPr>
-              <a:t>O fluxo mostra o caminho percorrido desde a leitura da tag até a comparação com o local esperado.</a:t>
+              <a:t>O slide separa o que foi validado fisicamente do que permanece como caminho escalável da arquitetura.</a:t>
             </a:r>
           </a:p>
         </p:txBody>
@@ -3025,7 +3092,7 @@
           <p:cNvPr id="6" name="">
             <a:extLst xmlns:a="http://schemas.openxmlformats.org/drawingml/2006/main">
               <a:ext uri="{FF2B5EF4-FFF2-40B4-BE49-F238E27FC236}">
-                <a16:creationId xmlns:a16="http://schemas.microsoft.com/office/drawing/2014/main" id="{1C880ABB-9D5D-4AF9-9A6E-E2251873D5E1}"/>
+                <a16:creationId xmlns:a16="http://schemas.microsoft.com/office/drawing/2014/main" id="{0FFCC212-7864-47DC-BB39-9291038F9C72}"/>
               </a:ext>
             </a:extLst>
           </p:cNvPr>
@@ -3058,7 +3125,7 @@
           <p:cNvPr id="7" name="">
             <a:extLst xmlns:a="http://schemas.openxmlformats.org/drawingml/2006/main">
               <a:ext uri="{FF2B5EF4-FFF2-40B4-BE49-F238E27FC236}">
-                <a16:creationId xmlns:a16="http://schemas.microsoft.com/office/drawing/2014/main" id="{145B8105-C976-47D1-AC0D-E636806E521A}"/>
+                <a16:creationId xmlns:a16="http://schemas.microsoft.com/office/drawing/2014/main" id="{2175ECBD-1A01-4826-9649-4C136E6F6E39}"/>
               </a:ext>
             </a:extLst>
           </p:cNvPr>
@@ -3091,7 +3158,7 @@
           <p:cNvPr id="8" name="">
             <a:extLst xmlns:a="http://schemas.openxmlformats.org/drawingml/2006/main">
               <a:ext uri="{FF2B5EF4-FFF2-40B4-BE49-F238E27FC236}">
-                <a16:creationId xmlns:a16="http://schemas.microsoft.com/office/drawing/2014/main" id="{FD9F03FE-8D99-49A8-93B5-A397BB307C38}"/>
+                <a16:creationId xmlns:a16="http://schemas.microsoft.com/office/drawing/2014/main" id="{16CE05BA-446C-45A0-AD6F-15FE0E6A855C}"/>
               </a:ext>
             </a:extLst>
           </p:cNvPr>
@@ -3145,7 +3212,7 @@
                 <a:ea typeface="Arial"/>
                 <a:cs typeface="Arial"/>
               </a:rPr>
-              <a:t>Caminho testado com hardware</a:t>
+              <a:t>Validado fisicamente</a:t>
             </a:r>
           </a:p>
         </p:txBody>
@@ -3155,7 +3222,7 @@
           <p:cNvPr id="9" name="">
             <a:extLst xmlns:a="http://schemas.openxmlformats.org/drawingml/2006/main">
               <a:ext uri="{FF2B5EF4-FFF2-40B4-BE49-F238E27FC236}">
-                <a16:creationId xmlns:a16="http://schemas.microsoft.com/office/drawing/2014/main" id="{52C55E6D-35A4-4A2B-87EA-1A0612F2D8E9}"/>
+                <a16:creationId xmlns:a16="http://schemas.microsoft.com/office/drawing/2014/main" id="{482A02AF-14FB-483E-9E7C-3B6694FFEDB5}"/>
               </a:ext>
             </a:extLst>
           </p:cNvPr>
@@ -3188,7 +3255,7 @@
           <p:cNvPr id="10" name="">
             <a:extLst xmlns:a="http://schemas.openxmlformats.org/drawingml/2006/main">
               <a:ext uri="{FF2B5EF4-FFF2-40B4-BE49-F238E27FC236}">
-                <a16:creationId xmlns:a16="http://schemas.microsoft.com/office/drawing/2014/main" id="{DB6B09C3-882C-4F81-8E01-CE0BE8C1DE0E}"/>
+                <a16:creationId xmlns:a16="http://schemas.microsoft.com/office/drawing/2014/main" id="{4EC2751D-F1F1-4AE1-BC91-2927F8DFF610}"/>
               </a:ext>
             </a:extLst>
           </p:cNvPr>
@@ -3252,7 +3319,7 @@
           <p:cNvPr id="11" name="">
             <a:extLst xmlns:a="http://schemas.openxmlformats.org/drawingml/2006/main">
               <a:ext uri="{FF2B5EF4-FFF2-40B4-BE49-F238E27FC236}">
-                <a16:creationId xmlns:a16="http://schemas.microsoft.com/office/drawing/2014/main" id="{E204E2A5-7D14-438A-B456-49DFEF4F2383}"/>
+                <a16:creationId xmlns:a16="http://schemas.microsoft.com/office/drawing/2014/main" id="{BE91FB7C-7C2C-4C97-97DD-6D3721CF965C}"/>
               </a:ext>
             </a:extLst>
           </p:cNvPr>
@@ -3306,7 +3373,7 @@
                 <a:ea typeface="Arial"/>
                 <a:cs typeface="Arial"/>
               </a:rPr>
-              <a:t>Leitor de proximidade capta a tag</a:t>
+              <a:t>Tag aproximada do leitor</a:t>
             </a:r>
           </a:p>
         </p:txBody>
@@ -3316,7 +3383,7 @@
           <p:cNvPr id="12" name="">
             <a:extLst xmlns:a="http://schemas.openxmlformats.org/drawingml/2006/main">
               <a:ext uri="{FF2B5EF4-FFF2-40B4-BE49-F238E27FC236}">
-                <a16:creationId xmlns:a16="http://schemas.microsoft.com/office/drawing/2014/main" id="{CE0851EC-006C-429B-870A-880EF3592F4F}"/>
+                <a16:creationId xmlns:a16="http://schemas.microsoft.com/office/drawing/2014/main" id="{FBE986D5-3AA0-4469-8416-DBEC4BA7FF49}"/>
               </a:ext>
             </a:extLst>
           </p:cNvPr>
@@ -3349,7 +3416,7 @@
           <p:cNvPr id="13" name="">
             <a:extLst xmlns:a="http://schemas.openxmlformats.org/drawingml/2006/main">
               <a:ext uri="{FF2B5EF4-FFF2-40B4-BE49-F238E27FC236}">
-                <a16:creationId xmlns:a16="http://schemas.microsoft.com/office/drawing/2014/main" id="{2B9672D2-B187-4F12-81C5-51AB6A4B8C61}"/>
+                <a16:creationId xmlns:a16="http://schemas.microsoft.com/office/drawing/2014/main" id="{B091D9CE-7917-4CFB-8CC7-5431C751FB14}"/>
               </a:ext>
             </a:extLst>
           </p:cNvPr>
@@ -3413,7 +3480,7 @@
           <p:cNvPr id="14" name="">
             <a:extLst xmlns:a="http://schemas.openxmlformats.org/drawingml/2006/main">
               <a:ext uri="{FF2B5EF4-FFF2-40B4-BE49-F238E27FC236}">
-                <a16:creationId xmlns:a16="http://schemas.microsoft.com/office/drawing/2014/main" id="{7BA9A1F7-9492-44EF-9013-63995C8E708B}"/>
+                <a16:creationId xmlns:a16="http://schemas.microsoft.com/office/drawing/2014/main" id="{DBF2A2AA-B481-4B1D-B89E-C859BEECC9AC}"/>
               </a:ext>
             </a:extLst>
           </p:cNvPr>
@@ -3467,7 +3534,7 @@
                 <a:ea typeface="Arial"/>
                 <a:cs typeface="Arial"/>
               </a:rPr>
-              <a:t>Comunicador envia a leitura</a:t>
+              <a:t>Comunicador envia evento</a:t>
             </a:r>
           </a:p>
         </p:txBody>
@@ -3477,7 +3544,7 @@
           <p:cNvPr id="15" name="">
             <a:extLst xmlns:a="http://schemas.openxmlformats.org/drawingml/2006/main">
               <a:ext uri="{FF2B5EF4-FFF2-40B4-BE49-F238E27FC236}">
-                <a16:creationId xmlns:a16="http://schemas.microsoft.com/office/drawing/2014/main" id="{072EDEC3-4BD6-48DA-B949-8AD0BEC4D629}"/>
+                <a16:creationId xmlns:a16="http://schemas.microsoft.com/office/drawing/2014/main" id="{2AEC3034-37C2-4357-8B36-B82BE2420FCD}"/>
               </a:ext>
             </a:extLst>
           </p:cNvPr>
@@ -3510,7 +3577,7 @@
           <p:cNvPr id="16" name="">
             <a:extLst xmlns:a="http://schemas.openxmlformats.org/drawingml/2006/main">
               <a:ext uri="{FF2B5EF4-FFF2-40B4-BE49-F238E27FC236}">
-                <a16:creationId xmlns:a16="http://schemas.microsoft.com/office/drawing/2014/main" id="{43552772-E3DC-4532-ACDA-89F4B1B0E608}"/>
+                <a16:creationId xmlns:a16="http://schemas.microsoft.com/office/drawing/2014/main" id="{E4A8D612-392C-457C-B901-6652998C00A0}"/>
               </a:ext>
             </a:extLst>
           </p:cNvPr>
@@ -3574,7 +3641,7 @@
           <p:cNvPr id="17" name="">
             <a:extLst xmlns:a="http://schemas.openxmlformats.org/drawingml/2006/main">
               <a:ext uri="{FF2B5EF4-FFF2-40B4-BE49-F238E27FC236}">
-                <a16:creationId xmlns:a16="http://schemas.microsoft.com/office/drawing/2014/main" id="{A2885096-26C6-4020-A5B1-133FD8A52A7C}"/>
+                <a16:creationId xmlns:a16="http://schemas.microsoft.com/office/drawing/2014/main" id="{75BBAF9A-CD6A-40AD-8A74-6C8771BE4A1E}"/>
               </a:ext>
             </a:extLst>
           </p:cNvPr>
@@ -3628,7 +3695,7 @@
                 <a:ea typeface="Arial"/>
                 <a:cs typeface="Arial"/>
               </a:rPr>
-              <a:t>Sistema recebe o código</a:t>
+              <a:t>API processa a leitura</a:t>
             </a:r>
           </a:p>
         </p:txBody>
@@ -3638,7 +3705,7 @@
           <p:cNvPr id="18" name="">
             <a:extLst xmlns:a="http://schemas.openxmlformats.org/drawingml/2006/main">
               <a:ext uri="{FF2B5EF4-FFF2-40B4-BE49-F238E27FC236}">
-                <a16:creationId xmlns:a16="http://schemas.microsoft.com/office/drawing/2014/main" id="{04330FB5-7C0C-43B2-8047-55CA19858CBC}"/>
+                <a16:creationId xmlns:a16="http://schemas.microsoft.com/office/drawing/2014/main" id="{84AA138C-13E7-4B94-84A6-ADBE41FBD19F}"/>
               </a:ext>
             </a:extLst>
           </p:cNvPr>
@@ -3671,7 +3738,7 @@
           <p:cNvPr id="19" name="">
             <a:extLst xmlns:a="http://schemas.openxmlformats.org/drawingml/2006/main">
               <a:ext uri="{FF2B5EF4-FFF2-40B4-BE49-F238E27FC236}">
-                <a16:creationId xmlns:a16="http://schemas.microsoft.com/office/drawing/2014/main" id="{80412B4D-55BD-4A08-9A42-D699B1D1D0FF}"/>
+                <a16:creationId xmlns:a16="http://schemas.microsoft.com/office/drawing/2014/main" id="{D749F530-FDA3-4269-A639-553ED32E7C3D}"/>
               </a:ext>
             </a:extLst>
           </p:cNvPr>
@@ -3735,7 +3802,7 @@
           <p:cNvPr id="20" name="">
             <a:extLst xmlns:a="http://schemas.openxmlformats.org/drawingml/2006/main">
               <a:ext uri="{FF2B5EF4-FFF2-40B4-BE49-F238E27FC236}">
-                <a16:creationId xmlns:a16="http://schemas.microsoft.com/office/drawing/2014/main" id="{AC567A66-0CEF-4A4E-B286-8042299C5C22}"/>
+                <a16:creationId xmlns:a16="http://schemas.microsoft.com/office/drawing/2014/main" id="{D671836D-494E-4A5F-8C66-133880DCBDFF}"/>
               </a:ext>
             </a:extLst>
           </p:cNvPr>
@@ -3789,7 +3856,7 @@
                 <a:ea typeface="Arial"/>
                 <a:cs typeface="Arial"/>
               </a:rPr>
-              <a:t>Auditoria compara o local</a:t>
+              <a:t>Auditoria registra resultado</a:t>
             </a:r>
           </a:p>
         </p:txBody>
@@ -3799,7 +3866,7 @@
           <p:cNvPr id="21" name="">
             <a:extLst xmlns:a="http://schemas.openxmlformats.org/drawingml/2006/main">
               <a:ext uri="{FF2B5EF4-FFF2-40B4-BE49-F238E27FC236}">
-                <a16:creationId xmlns:a16="http://schemas.microsoft.com/office/drawing/2014/main" id="{B8270E54-3C28-4D2A-8398-1717DAABE5CE}"/>
+                <a16:creationId xmlns:a16="http://schemas.microsoft.com/office/drawing/2014/main" id="{A2AC836C-C22F-4716-A0B7-1C266AA579A9}"/>
               </a:ext>
             </a:extLst>
           </p:cNvPr>
@@ -3834,7 +3901,7 @@
           <p:cNvPr id="22" name="">
             <a:extLst xmlns:a="http://schemas.openxmlformats.org/drawingml/2006/main">
               <a:ext uri="{FF2B5EF4-FFF2-40B4-BE49-F238E27FC236}">
-                <a16:creationId xmlns:a16="http://schemas.microsoft.com/office/drawing/2014/main" id="{D1CBDEDD-8A7C-43B6-A126-C645CB9CC2D2}"/>
+                <a16:creationId xmlns:a16="http://schemas.microsoft.com/office/drawing/2014/main" id="{CBA23C26-C2DF-4FC8-A704-C14C03190C18}"/>
               </a:ext>
             </a:extLst>
           </p:cNvPr>
@@ -3888,7 +3955,7 @@
                 <a:ea typeface="Arial"/>
                 <a:cs typeface="Arial"/>
               </a:rPr>
-              <a:t>Comprovado com leitor de proximidade, uma tag e envio da leitura ao sistema.</a:t>
+              <a:t>Leitor de proximidade, uma tag, comunicador intermediário e API.</a:t>
             </a:r>
           </a:p>
         </p:txBody>
@@ -3898,7 +3965,7 @@
           <p:cNvPr id="23" name="">
             <a:extLst xmlns:a="http://schemas.openxmlformats.org/drawingml/2006/main">
               <a:ext uri="{FF2B5EF4-FFF2-40B4-BE49-F238E27FC236}">
-                <a16:creationId xmlns:a16="http://schemas.microsoft.com/office/drawing/2014/main" id="{4FBF8441-FDA5-4861-9A5E-925A1FC676D3}"/>
+                <a16:creationId xmlns:a16="http://schemas.microsoft.com/office/drawing/2014/main" id="{8256C5D7-146B-4A18-825E-7299475CF28C}"/>
               </a:ext>
             </a:extLst>
           </p:cNvPr>
@@ -3931,7 +3998,7 @@
           <p:cNvPr id="24" name="">
             <a:extLst xmlns:a="http://schemas.openxmlformats.org/drawingml/2006/main">
               <a:ext uri="{FF2B5EF4-FFF2-40B4-BE49-F238E27FC236}">
-                <a16:creationId xmlns:a16="http://schemas.microsoft.com/office/drawing/2014/main" id="{C09DEBAA-6CA9-4DB6-B734-9D2AC6378069}"/>
+                <a16:creationId xmlns:a16="http://schemas.microsoft.com/office/drawing/2014/main" id="{8E09930D-E1FB-4818-BB16-ED554A15285E}"/>
               </a:ext>
             </a:extLst>
           </p:cNvPr>
@@ -3964,7 +4031,7 @@
           <p:cNvPr id="25" name="">
             <a:extLst xmlns:a="http://schemas.openxmlformats.org/drawingml/2006/main">
               <a:ext uri="{FF2B5EF4-FFF2-40B4-BE49-F238E27FC236}">
-                <a16:creationId xmlns:a16="http://schemas.microsoft.com/office/drawing/2014/main" id="{FEEA466E-1BD4-4A84-8D49-FFDABD6EFC84}"/>
+                <a16:creationId xmlns:a16="http://schemas.microsoft.com/office/drawing/2014/main" id="{8300EFB1-D1BC-499F-8658-9E31B94E1FA8}"/>
               </a:ext>
             </a:extLst>
           </p:cNvPr>
@@ -4018,7 +4085,7 @@
                 <a:ea typeface="Arial"/>
                 <a:cs typeface="Arial"/>
               </a:rPr>
-              <a:t>Caminho previsto para expansão</a:t>
+              <a:t>Previsto ou verificado por software</a:t>
             </a:r>
           </a:p>
         </p:txBody>
@@ -4028,7 +4095,7 @@
           <p:cNvPr id="26" name="">
             <a:extLst xmlns:a="http://schemas.openxmlformats.org/drawingml/2006/main">
               <a:ext uri="{FF2B5EF4-FFF2-40B4-BE49-F238E27FC236}">
-                <a16:creationId xmlns:a16="http://schemas.microsoft.com/office/drawing/2014/main" id="{494980DD-E7A9-4FB4-ACA4-C86686E87C95}"/>
+                <a16:creationId xmlns:a16="http://schemas.microsoft.com/office/drawing/2014/main" id="{2AB9060C-3F77-4F4D-9CD9-0E158F58D499}"/>
               </a:ext>
             </a:extLst>
           </p:cNvPr>
@@ -4061,7 +4128,7 @@
           <p:cNvPr id="27" name="">
             <a:extLst xmlns:a="http://schemas.openxmlformats.org/drawingml/2006/main">
               <a:ext uri="{FF2B5EF4-FFF2-40B4-BE49-F238E27FC236}">
-                <a16:creationId xmlns:a16="http://schemas.microsoft.com/office/drawing/2014/main" id="{D3CC1286-4B4A-468A-81AB-7BE1DBFCEEC5}"/>
+                <a16:creationId xmlns:a16="http://schemas.microsoft.com/office/drawing/2014/main" id="{A010387D-9E6C-43C7-8F84-AE96EA798287}"/>
               </a:ext>
             </a:extLst>
           </p:cNvPr>
@@ -4125,7 +4192,7 @@
           <p:cNvPr id="28" name="">
             <a:extLst xmlns:a="http://schemas.openxmlformats.org/drawingml/2006/main">
               <a:ext uri="{FF2B5EF4-FFF2-40B4-BE49-F238E27FC236}">
-                <a16:creationId xmlns:a16="http://schemas.microsoft.com/office/drawing/2014/main" id="{2C06BCA0-8828-42E6-B75A-49F6B29AE91E}"/>
+                <a16:creationId xmlns:a16="http://schemas.microsoft.com/office/drawing/2014/main" id="{5E8D3AA6-537E-4CDE-9264-101244E26175}"/>
               </a:ext>
             </a:extLst>
           </p:cNvPr>
@@ -4179,7 +4246,7 @@
                 <a:ea typeface="Arial"/>
                 <a:cs typeface="Arial"/>
               </a:rPr>
-              <a:t>Sensor ou gateway</a:t>
+              <a:t>Sensor ou gateway aciona</a:t>
             </a:r>
           </a:p>
         </p:txBody>
@@ -4189,7 +4256,7 @@
           <p:cNvPr id="29" name="">
             <a:extLst xmlns:a="http://schemas.openxmlformats.org/drawingml/2006/main">
               <a:ext uri="{FF2B5EF4-FFF2-40B4-BE49-F238E27FC236}">
-                <a16:creationId xmlns:a16="http://schemas.microsoft.com/office/drawing/2014/main" id="{EFBE427C-3C25-497E-AC49-A04021259156}"/>
+                <a16:creationId xmlns:a16="http://schemas.microsoft.com/office/drawing/2014/main" id="{C84F4C79-53C8-443D-8C1A-0B1AEAF16E0B}"/>
               </a:ext>
             </a:extLst>
           </p:cNvPr>
@@ -4222,7 +4289,7 @@
           <p:cNvPr id="30" name="">
             <a:extLst xmlns:a="http://schemas.openxmlformats.org/drawingml/2006/main">
               <a:ext uri="{FF2B5EF4-FFF2-40B4-BE49-F238E27FC236}">
-                <a16:creationId xmlns:a16="http://schemas.microsoft.com/office/drawing/2014/main" id="{C2F457E3-1CA4-4F69-8AAA-8C41F3FCBDE3}"/>
+                <a16:creationId xmlns:a16="http://schemas.microsoft.com/office/drawing/2014/main" id="{0DA258DA-1A43-4824-B718-AC48EBC45FA3}"/>
               </a:ext>
             </a:extLst>
           </p:cNvPr>
@@ -4286,7 +4353,7 @@
           <p:cNvPr id="31" name="">
             <a:extLst xmlns:a="http://schemas.openxmlformats.org/drawingml/2006/main">
               <a:ext uri="{FF2B5EF4-FFF2-40B4-BE49-F238E27FC236}">
-                <a16:creationId xmlns:a16="http://schemas.microsoft.com/office/drawing/2014/main" id="{7D004ABD-BE41-4447-A202-C377FE37558A}"/>
+                <a16:creationId xmlns:a16="http://schemas.microsoft.com/office/drawing/2014/main" id="{DD73B98D-ECCE-49A3-8DD2-21B56D7A3AB2}"/>
               </a:ext>
             </a:extLst>
           </p:cNvPr>
@@ -4340,7 +4407,7 @@
                 <a:ea typeface="Arial"/>
                 <a:cs typeface="Arial"/>
               </a:rPr>
-              <a:t>Sistema inicia leitura</a:t>
+              <a:t>Sistema abre janela</a:t>
             </a:r>
           </a:p>
         </p:txBody>
@@ -4350,7 +4417,7 @@
           <p:cNvPr id="32" name="">
             <a:extLst xmlns:a="http://schemas.openxmlformats.org/drawingml/2006/main">
               <a:ext uri="{FF2B5EF4-FFF2-40B4-BE49-F238E27FC236}">
-                <a16:creationId xmlns:a16="http://schemas.microsoft.com/office/drawing/2014/main" id="{2EABE5CE-0243-491E-9F72-9F47361BF891}"/>
+                <a16:creationId xmlns:a16="http://schemas.microsoft.com/office/drawing/2014/main" id="{52811234-392E-4EDF-B0DB-F0881BDC21C3}"/>
               </a:ext>
             </a:extLst>
           </p:cNvPr>
@@ -4383,7 +4450,7 @@
           <p:cNvPr id="33" name="">
             <a:extLst xmlns:a="http://schemas.openxmlformats.org/drawingml/2006/main">
               <a:ext uri="{FF2B5EF4-FFF2-40B4-BE49-F238E27FC236}">
-                <a16:creationId xmlns:a16="http://schemas.microsoft.com/office/drawing/2014/main" id="{FE862A89-E9F0-4674-927B-9F25CB0DE13F}"/>
+                <a16:creationId xmlns:a16="http://schemas.microsoft.com/office/drawing/2014/main" id="{C199C401-9D70-4790-BFB9-47A89287DFD4}"/>
               </a:ext>
             </a:extLst>
           </p:cNvPr>
@@ -4447,7 +4514,7 @@
           <p:cNvPr id="34" name="">
             <a:extLst xmlns:a="http://schemas.openxmlformats.org/drawingml/2006/main">
               <a:ext uri="{FF2B5EF4-FFF2-40B4-BE49-F238E27FC236}">
-                <a16:creationId xmlns:a16="http://schemas.microsoft.com/office/drawing/2014/main" id="{EA175CCA-2A69-4071-BB2C-46E69FEDF772}"/>
+                <a16:creationId xmlns:a16="http://schemas.microsoft.com/office/drawing/2014/main" id="{947D412A-81FA-4588-860F-FA9ACE747C4A}"/>
               </a:ext>
             </a:extLst>
           </p:cNvPr>
@@ -4501,7 +4568,7 @@
                 <a:ea typeface="Arial"/>
                 <a:cs typeface="Arial"/>
               </a:rPr>
-              <a:t>Leitor registra tags</a:t>
+              <a:t>Leitor envia tags</a:t>
             </a:r>
           </a:p>
         </p:txBody>
@@ -4511,7 +4578,7 @@
           <p:cNvPr id="35" name="">
             <a:extLst xmlns:a="http://schemas.openxmlformats.org/drawingml/2006/main">
               <a:ext uri="{FF2B5EF4-FFF2-40B4-BE49-F238E27FC236}">
-                <a16:creationId xmlns:a16="http://schemas.microsoft.com/office/drawing/2014/main" id="{CB2BFB6A-A8DB-4795-B52C-EFF9A89DF55E}"/>
+                <a16:creationId xmlns:a16="http://schemas.microsoft.com/office/drawing/2014/main" id="{25CA34D6-3E35-44A4-B006-35F96494013C}"/>
               </a:ext>
             </a:extLst>
           </p:cNvPr>
@@ -4544,7 +4611,7 @@
           <p:cNvPr id="36" name="">
             <a:extLst xmlns:a="http://schemas.openxmlformats.org/drawingml/2006/main">
               <a:ext uri="{FF2B5EF4-FFF2-40B4-BE49-F238E27FC236}">
-                <a16:creationId xmlns:a16="http://schemas.microsoft.com/office/drawing/2014/main" id="{14522CF8-D5A4-4A88-8F98-F466597E3EA1}"/>
+                <a16:creationId xmlns:a16="http://schemas.microsoft.com/office/drawing/2014/main" id="{9CF21BC0-14B2-4CA0-ABBC-17870587110A}"/>
               </a:ext>
             </a:extLst>
           </p:cNvPr>
@@ -4608,7 +4675,7 @@
           <p:cNvPr id="37" name="">
             <a:extLst xmlns:a="http://schemas.openxmlformats.org/drawingml/2006/main">
               <a:ext uri="{FF2B5EF4-FFF2-40B4-BE49-F238E27FC236}">
-                <a16:creationId xmlns:a16="http://schemas.microsoft.com/office/drawing/2014/main" id="{31C52B13-C023-44C9-955A-CD195F177598}"/>
+                <a16:creationId xmlns:a16="http://schemas.microsoft.com/office/drawing/2014/main" id="{9F6A2246-3DED-4CAA-855C-50EA1F08D189}"/>
               </a:ext>
             </a:extLst>
           </p:cNvPr>
@@ -4662,7 +4729,7 @@
                 <a:ea typeface="Arial"/>
                 <a:cs typeface="Arial"/>
               </a:rPr>
-              <a:t>Leituras chegam ao sistema</a:t>
+              <a:t>Backend processa evento</a:t>
             </a:r>
           </a:p>
         </p:txBody>
@@ -4672,7 +4739,7 @@
           <p:cNvPr id="38" name="">
             <a:extLst xmlns:a="http://schemas.openxmlformats.org/drawingml/2006/main">
               <a:ext uri="{FF2B5EF4-FFF2-40B4-BE49-F238E27FC236}">
-                <a16:creationId xmlns:a16="http://schemas.microsoft.com/office/drawing/2014/main" id="{6C14E758-314B-449B-A71B-DB9E02F150BC}"/>
+                <a16:creationId xmlns:a16="http://schemas.microsoft.com/office/drawing/2014/main" id="{FD0439D2-4A00-4B68-B5CA-09805E4A7338}"/>
               </a:ext>
             </a:extLst>
           </p:cNvPr>
@@ -4707,7 +4774,7 @@
           <p:cNvPr id="39" name="">
             <a:extLst xmlns:a="http://schemas.openxmlformats.org/drawingml/2006/main">
               <a:ext uri="{FF2B5EF4-FFF2-40B4-BE49-F238E27FC236}">
-                <a16:creationId xmlns:a16="http://schemas.microsoft.com/office/drawing/2014/main" id="{69F62690-14F9-496F-9097-11F06F81B863}"/>
+                <a16:creationId xmlns:a16="http://schemas.microsoft.com/office/drawing/2014/main" id="{7CF59AA7-72EC-45C4-AD62-EEC725DD62B2}"/>
               </a:ext>
             </a:extLst>
           </p:cNvPr>
@@ -4761,7 +4828,7 @@
                 <a:ea typeface="Arial"/>
                 <a:cs typeface="Arial"/>
               </a:rPr>
-              <a:t>Indica uma evolução possível, sem afirmar validação física completa.</a:t>
+              <a:t>Fluxo arquitetural para expansão, sem validação física completa.</a:t>
             </a:r>
           </a:p>
         </p:txBody>
@@ -4769,7 +4836,7 @@
     </p:spTree>
     <p:extLst>
       <p:ext uri="{BB962C8B-B14F-4D97-AF65-F5344CB8AC3E}">
-        <p14:creationId xmlns:p14="http://schemas.microsoft.com/office/powerpoint/2010/main" val="1490037266"/>
+        <p14:creationId xmlns:p14="http://schemas.microsoft.com/office/powerpoint/2010/main" val="29434318"/>
       </p:ext>
     </p:extLst>
   </p:cSld>
@@ -4793,7 +4860,7 @@
           <p:cNvPr id="1" name="">
             <a:extLst xmlns:a="http://schemas.openxmlformats.org/drawingml/2006/main">
               <a:ext uri="{FF2B5EF4-FFF2-40B4-BE49-F238E27FC236}">
-                <a16:creationId xmlns:a16="http://schemas.microsoft.com/office/drawing/2014/main" id="{76EB7DC6-CFDD-4AC3-A6ED-2B86159EE3F5}"/>
+                <a16:creationId xmlns:a16="http://schemas.microsoft.com/office/drawing/2014/main" id="{4A440092-5D4D-4379-A891-6227DC1DBC20}"/>
               </a:ext>
             </a:extLst>
           </p:cNvPr>
@@ -4828,7 +4895,7 @@
           <p:cNvPr id="2" name="">
             <a:extLst xmlns:a="http://schemas.openxmlformats.org/drawingml/2006/main">
               <a:ext uri="{FF2B5EF4-FFF2-40B4-BE49-F238E27FC236}">
-                <a16:creationId xmlns:a16="http://schemas.microsoft.com/office/drawing/2014/main" id="{8BD650BE-CA7B-4CD0-9572-12502EF14D74}"/>
+                <a16:creationId xmlns:a16="http://schemas.microsoft.com/office/drawing/2014/main" id="{50A2E63B-7745-4340-A69B-8003AC411606}"/>
               </a:ext>
             </a:extLst>
           </p:cNvPr>
@@ -4863,7 +4930,7 @@
           <p:cNvPr id="3" name="">
             <a:extLst xmlns:a="http://schemas.openxmlformats.org/drawingml/2006/main">
               <a:ext uri="{FF2B5EF4-FFF2-40B4-BE49-F238E27FC236}">
-                <a16:creationId xmlns:a16="http://schemas.microsoft.com/office/drawing/2014/main" id="{519BF1EF-D588-4E33-B759-BAD6F590B0D4}"/>
+                <a16:creationId xmlns:a16="http://schemas.microsoft.com/office/drawing/2014/main" id="{64CC54D2-3054-48BE-A3AB-DD3A21C94A7F}"/>
               </a:ext>
             </a:extLst>
           </p:cNvPr>
@@ -4927,7 +4994,7 @@
           <p:cNvPr id="4" name="">
             <a:extLst xmlns:a="http://schemas.openxmlformats.org/drawingml/2006/main">
               <a:ext uri="{FF2B5EF4-FFF2-40B4-BE49-F238E27FC236}">
-                <a16:creationId xmlns:a16="http://schemas.microsoft.com/office/drawing/2014/main" id="{48584C24-F6D3-4161-AF41-CA6BCE234AE1}"/>
+                <a16:creationId xmlns:a16="http://schemas.microsoft.com/office/drawing/2014/main" id="{35FF5861-9C6A-4F70-835F-8E1ED4043D19}"/>
               </a:ext>
             </a:extLst>
           </p:cNvPr>
@@ -4991,7 +5058,7 @@
           <p:cNvPr id="5" name="">
             <a:extLst xmlns:a="http://schemas.openxmlformats.org/drawingml/2006/main">
               <a:ext uri="{FF2B5EF4-FFF2-40B4-BE49-F238E27FC236}">
-                <a16:creationId xmlns:a16="http://schemas.microsoft.com/office/drawing/2014/main" id="{FAE1EA81-A711-4C2C-B68F-72E8B2F6EB74}"/>
+                <a16:creationId xmlns:a16="http://schemas.microsoft.com/office/drawing/2014/main" id="{AC6F0EDE-0107-49CA-8C69-0742EC011A89}"/>
               </a:ext>
             </a:extLst>
           </p:cNvPr>
@@ -5045,7 +5112,7 @@
                 <a:ea typeface="Arial"/>
                 <a:cs typeface="Arial"/>
               </a:rPr>
-              <a:t>Depois de receber uma leitura, o sistema identifica o bem e registra o resultado encontrado.</a:t>
+              <a:t>Depois que a leitura chega à API, o sistema decide se ela confirma, altera ou questiona o inventário.</a:t>
             </a:r>
           </a:p>
         </p:txBody>
@@ -5055,7 +5122,7 @@
           <p:cNvPr id="6" name="">
             <a:extLst xmlns:a="http://schemas.openxmlformats.org/drawingml/2006/main">
               <a:ext uri="{FF2B5EF4-FFF2-40B4-BE49-F238E27FC236}">
-                <a16:creationId xmlns:a16="http://schemas.microsoft.com/office/drawing/2014/main" id="{DAC5E591-E0DC-4A11-A171-222D94C26608}"/>
+                <a16:creationId xmlns:a16="http://schemas.microsoft.com/office/drawing/2014/main" id="{11EB30EC-7CA7-418A-9B2F-86750E60F5FD}"/>
               </a:ext>
             </a:extLst>
           </p:cNvPr>
@@ -5088,7 +5155,7 @@
           <p:cNvPr id="7" name="">
             <a:extLst xmlns:a="http://schemas.openxmlformats.org/drawingml/2006/main">
               <a:ext uri="{FF2B5EF4-FFF2-40B4-BE49-F238E27FC236}">
-                <a16:creationId xmlns:a16="http://schemas.microsoft.com/office/drawing/2014/main" id="{5F507BB3-7858-408C-B3D5-6076EBBB7B25}"/>
+                <a16:creationId xmlns:a16="http://schemas.microsoft.com/office/drawing/2014/main" id="{73A0A82D-1B4F-45CD-8303-C74BB4CA5582}"/>
               </a:ext>
             </a:extLst>
           </p:cNvPr>
@@ -5121,7 +5188,7 @@
           <p:cNvPr id="8" name="">
             <a:extLst xmlns:a="http://schemas.openxmlformats.org/drawingml/2006/main">
               <a:ext uri="{FF2B5EF4-FFF2-40B4-BE49-F238E27FC236}">
-                <a16:creationId xmlns:a16="http://schemas.microsoft.com/office/drawing/2014/main" id="{1BDAB8CB-AE0C-42A8-B92C-88C7567D98C9}"/>
+                <a16:creationId xmlns:a16="http://schemas.microsoft.com/office/drawing/2014/main" id="{97189742-D295-4910-A210-385EAD529E61}"/>
               </a:ext>
             </a:extLst>
           </p:cNvPr>
@@ -5185,7 +5252,7 @@
           <p:cNvPr id="9" name="">
             <a:extLst xmlns:a="http://schemas.openxmlformats.org/drawingml/2006/main">
               <a:ext uri="{FF2B5EF4-FFF2-40B4-BE49-F238E27FC236}">
-                <a16:creationId xmlns:a16="http://schemas.microsoft.com/office/drawing/2014/main" id="{146359B2-BE3A-455F-9EC2-CDEC51B0074C}"/>
+                <a16:creationId xmlns:a16="http://schemas.microsoft.com/office/drawing/2014/main" id="{7CD862E0-1970-457E-BF8F-36B1123EECC0}"/>
               </a:ext>
             </a:extLst>
           </p:cNvPr>
@@ -5239,7 +5306,7 @@
                 <a:ea typeface="Arial"/>
                 <a:cs typeface="Arial"/>
               </a:rPr>
-              <a:t>Receber a leitura</a:t>
+              <a:t>Receber evento</a:t>
             </a:r>
           </a:p>
         </p:txBody>
@@ -5249,7 +5316,7 @@
           <p:cNvPr id="10" name="">
             <a:extLst xmlns:a="http://schemas.openxmlformats.org/drawingml/2006/main">
               <a:ext uri="{FF2B5EF4-FFF2-40B4-BE49-F238E27FC236}">
-                <a16:creationId xmlns:a16="http://schemas.microsoft.com/office/drawing/2014/main" id="{430BAADA-CDBA-418A-96F4-E20E506F5233}"/>
+                <a16:creationId xmlns:a16="http://schemas.microsoft.com/office/drawing/2014/main" id="{4358B134-D660-4AF3-87A1-53A66597A3B7}"/>
               </a:ext>
             </a:extLst>
           </p:cNvPr>
@@ -5303,7 +5370,7 @@
                 <a:ea typeface="Arial"/>
                 <a:cs typeface="Arial"/>
               </a:rPr>
-              <a:t>O sistema recebe o código lido pelo equipamento RFID.</a:t>
+              <a:t>A API recebe a tag enviada pelo comunicador ou por uma fonte compatível.</a:t>
             </a:r>
           </a:p>
         </p:txBody>
@@ -5313,7 +5380,7 @@
           <p:cNvPr id="11" name="">
             <a:extLst xmlns:a="http://schemas.openxmlformats.org/drawingml/2006/main">
               <a:ext uri="{FF2B5EF4-FFF2-40B4-BE49-F238E27FC236}">
-                <a16:creationId xmlns:a16="http://schemas.microsoft.com/office/drawing/2014/main" id="{5FDCC9A4-1DF2-4128-A0BB-302D90AF58DF}"/>
+                <a16:creationId xmlns:a16="http://schemas.microsoft.com/office/drawing/2014/main" id="{E8CFB107-ECA2-4485-9B34-BC57AD7FD568}"/>
               </a:ext>
             </a:extLst>
           </p:cNvPr>
@@ -5346,7 +5413,7 @@
           <p:cNvPr id="12" name="">
             <a:extLst xmlns:a="http://schemas.openxmlformats.org/drawingml/2006/main">
               <a:ext uri="{FF2B5EF4-FFF2-40B4-BE49-F238E27FC236}">
-                <a16:creationId xmlns:a16="http://schemas.microsoft.com/office/drawing/2014/main" id="{978CCE65-A807-4579-B2A0-0F6680C91681}"/>
+                <a16:creationId xmlns:a16="http://schemas.microsoft.com/office/drawing/2014/main" id="{9433AA44-CDF8-4D8E-AB6E-64306121D9F7}"/>
               </a:ext>
             </a:extLst>
           </p:cNvPr>
@@ -5379,7 +5446,7 @@
           <p:cNvPr id="13" name="">
             <a:extLst xmlns:a="http://schemas.openxmlformats.org/drawingml/2006/main">
               <a:ext uri="{FF2B5EF4-FFF2-40B4-BE49-F238E27FC236}">
-                <a16:creationId xmlns:a16="http://schemas.microsoft.com/office/drawing/2014/main" id="{77AF34D5-5F5E-4A18-BE9A-F792C767EAD4}"/>
+                <a16:creationId xmlns:a16="http://schemas.microsoft.com/office/drawing/2014/main" id="{815EFC27-DF45-4C24-88EE-882E539EBF3B}"/>
               </a:ext>
             </a:extLst>
           </p:cNvPr>
@@ -5443,7 +5510,7 @@
           <p:cNvPr id="14" name="">
             <a:extLst xmlns:a="http://schemas.openxmlformats.org/drawingml/2006/main">
               <a:ext uri="{FF2B5EF4-FFF2-40B4-BE49-F238E27FC236}">
-                <a16:creationId xmlns:a16="http://schemas.microsoft.com/office/drawing/2014/main" id="{E25D8A65-651B-4000-AA9A-A51148C527E1}"/>
+                <a16:creationId xmlns:a16="http://schemas.microsoft.com/office/drawing/2014/main" id="{26EE00A5-0E86-436D-ABBA-7B73D29D7979}"/>
               </a:ext>
             </a:extLst>
           </p:cNvPr>
@@ -5497,7 +5564,7 @@
                 <a:ea typeface="Arial"/>
                 <a:cs typeface="Arial"/>
               </a:rPr>
-              <a:t>Verificar o bem</a:t>
+              <a:t>Interpretar leitura</a:t>
             </a:r>
           </a:p>
         </p:txBody>
@@ -5507,7 +5574,7 @@
           <p:cNvPr id="15" name="">
             <a:extLst xmlns:a="http://schemas.openxmlformats.org/drawingml/2006/main">
               <a:ext uri="{FF2B5EF4-FFF2-40B4-BE49-F238E27FC236}">
-                <a16:creationId xmlns:a16="http://schemas.microsoft.com/office/drawing/2014/main" id="{EBAB5573-D4F4-4A2D-AE0A-6904A5ACBDAD}"/>
+                <a16:creationId xmlns:a16="http://schemas.microsoft.com/office/drawing/2014/main" id="{D7315922-827C-4653-A40D-FE9AC0B24609}"/>
               </a:ext>
             </a:extLst>
           </p:cNvPr>
@@ -5561,7 +5628,7 @@
                 <a:ea typeface="Arial"/>
                 <a:cs typeface="Arial"/>
               </a:rPr>
-              <a:t>A leitura é conferida para saber se corresponde a um item cadastrado.</a:t>
+              <a:t>O backend valida tag, leitor, janela ativa e possíveis duplicidades.</a:t>
             </a:r>
           </a:p>
         </p:txBody>
@@ -5571,7 +5638,7 @@
           <p:cNvPr id="16" name="">
             <a:extLst xmlns:a="http://schemas.openxmlformats.org/drawingml/2006/main">
               <a:ext uri="{FF2B5EF4-FFF2-40B4-BE49-F238E27FC236}">
-                <a16:creationId xmlns:a16="http://schemas.microsoft.com/office/drawing/2014/main" id="{9514BBDA-51B3-4CB1-B49B-B23374BE1CB8}"/>
+                <a16:creationId xmlns:a16="http://schemas.microsoft.com/office/drawing/2014/main" id="{89345106-8208-4174-A1B7-24A155CEB55C}"/>
               </a:ext>
             </a:extLst>
           </p:cNvPr>
@@ -5604,7 +5671,7 @@
           <p:cNvPr id="17" name="">
             <a:extLst xmlns:a="http://schemas.openxmlformats.org/drawingml/2006/main">
               <a:ext uri="{FF2B5EF4-FFF2-40B4-BE49-F238E27FC236}">
-                <a16:creationId xmlns:a16="http://schemas.microsoft.com/office/drawing/2014/main" id="{9EB80AD6-5DD8-4849-8116-FB4242CA5A67}"/>
+                <a16:creationId xmlns:a16="http://schemas.microsoft.com/office/drawing/2014/main" id="{90975CAE-6A2B-4F9D-AA36-7B25C9D07C0C}"/>
               </a:ext>
             </a:extLst>
           </p:cNvPr>
@@ -5637,7 +5704,7 @@
           <p:cNvPr id="18" name="">
             <a:extLst xmlns:a="http://schemas.openxmlformats.org/drawingml/2006/main">
               <a:ext uri="{FF2B5EF4-FFF2-40B4-BE49-F238E27FC236}">
-                <a16:creationId xmlns:a16="http://schemas.microsoft.com/office/drawing/2014/main" id="{C0E7B8E8-CFD8-4DB5-9AB2-7AC8C68B9F38}"/>
+                <a16:creationId xmlns:a16="http://schemas.microsoft.com/office/drawing/2014/main" id="{8DBA1049-5611-4132-861B-5AE1146C1303}"/>
               </a:ext>
             </a:extLst>
           </p:cNvPr>
@@ -5701,7 +5768,7 @@
           <p:cNvPr id="19" name="">
             <a:extLst xmlns:a="http://schemas.openxmlformats.org/drawingml/2006/main">
               <a:ext uri="{FF2B5EF4-FFF2-40B4-BE49-F238E27FC236}">
-                <a16:creationId xmlns:a16="http://schemas.microsoft.com/office/drawing/2014/main" id="{09840EE6-0168-4CCA-A706-95D76B562810}"/>
+                <a16:creationId xmlns:a16="http://schemas.microsoft.com/office/drawing/2014/main" id="{F7204D59-728E-4E29-BD75-B8406720B0EB}"/>
               </a:ext>
             </a:extLst>
           </p:cNvPr>
@@ -5755,7 +5822,7 @@
                 <a:ea typeface="Arial"/>
                 <a:cs typeface="Arial"/>
               </a:rPr>
-              <a:t>Registrar resultado</a:t>
+              <a:t>Registrar consequência</a:t>
             </a:r>
           </a:p>
         </p:txBody>
@@ -5765,7 +5832,7 @@
           <p:cNvPr id="20" name="">
             <a:extLst xmlns:a="http://schemas.openxmlformats.org/drawingml/2006/main">
               <a:ext uri="{FF2B5EF4-FFF2-40B4-BE49-F238E27FC236}">
-                <a16:creationId xmlns:a16="http://schemas.microsoft.com/office/drawing/2014/main" id="{3280A5DA-5788-4DFB-9B8B-39E842119466}"/>
+                <a16:creationId xmlns:a16="http://schemas.microsoft.com/office/drawing/2014/main" id="{1D3C393E-3FFD-4AA4-AA56-94302FA17AEC}"/>
               </a:ext>
             </a:extLst>
           </p:cNvPr>
@@ -5819,7 +5886,7 @@
                 <a:ea typeface="Arial"/>
                 <a:cs typeface="Arial"/>
               </a:rPr>
-              <a:t>O sistema atualiza o histórico ou aponta uma inconsistência.</a:t>
+              <a:t>O sistema atualiza histórico, auditoria ou inconsistência conforme o resultado.</a:t>
             </a:r>
           </a:p>
         </p:txBody>
@@ -5827,7 +5894,7 @@
     </p:spTree>
     <p:extLst>
       <p:ext uri="{BB962C8B-B14F-4D97-AF65-F5344CB8AC3E}">
-        <p14:creationId xmlns:p14="http://schemas.microsoft.com/office/powerpoint/2010/main" val="1017032721"/>
+        <p14:creationId xmlns:p14="http://schemas.microsoft.com/office/powerpoint/2010/main" val="1435238507"/>
       </p:ext>
     </p:extLst>
   </p:cSld>
@@ -5851,7 +5918,7 @@
           <p:cNvPr id="1" name="">
             <a:extLst xmlns:a="http://schemas.openxmlformats.org/drawingml/2006/main">
               <a:ext uri="{FF2B5EF4-FFF2-40B4-BE49-F238E27FC236}">
-                <a16:creationId xmlns:a16="http://schemas.microsoft.com/office/drawing/2014/main" id="{5C8A1374-DC1C-488D-8CC3-F2217FA8C3AC}"/>
+                <a16:creationId xmlns:a16="http://schemas.microsoft.com/office/drawing/2014/main" id="{43765C77-969C-4D57-B9D4-EA00758E07A2}"/>
               </a:ext>
             </a:extLst>
           </p:cNvPr>
@@ -5886,7 +5953,7 @@
           <p:cNvPr id="2" name="">
             <a:extLst xmlns:a="http://schemas.openxmlformats.org/drawingml/2006/main">
               <a:ext uri="{FF2B5EF4-FFF2-40B4-BE49-F238E27FC236}">
-                <a16:creationId xmlns:a16="http://schemas.microsoft.com/office/drawing/2014/main" id="{A913F2E4-22C6-4A09-96C9-E605DB90878E}"/>
+                <a16:creationId xmlns:a16="http://schemas.microsoft.com/office/drawing/2014/main" id="{E9367D63-D151-4574-BDCA-187414E8CD09}"/>
               </a:ext>
             </a:extLst>
           </p:cNvPr>
@@ -5921,7 +5988,7 @@
           <p:cNvPr id="3" name="">
             <a:extLst xmlns:a="http://schemas.openxmlformats.org/drawingml/2006/main">
               <a:ext uri="{FF2B5EF4-FFF2-40B4-BE49-F238E27FC236}">
-                <a16:creationId xmlns:a16="http://schemas.microsoft.com/office/drawing/2014/main" id="{B16E54A4-F9DA-44EF-B61E-0D3BC933C2D9}"/>
+                <a16:creationId xmlns:a16="http://schemas.microsoft.com/office/drawing/2014/main" id="{318CBBCF-0509-4B93-829B-C5FA6B6AFC4C}"/>
               </a:ext>
             </a:extLst>
           </p:cNvPr>
@@ -5985,7 +6052,7 @@
           <p:cNvPr id="4" name="">
             <a:extLst xmlns:a="http://schemas.openxmlformats.org/drawingml/2006/main">
               <a:ext uri="{FF2B5EF4-FFF2-40B4-BE49-F238E27FC236}">
-                <a16:creationId xmlns:a16="http://schemas.microsoft.com/office/drawing/2014/main" id="{1F4005F4-5F6C-4A5A-AECA-F46A57CBABCD}"/>
+                <a16:creationId xmlns:a16="http://schemas.microsoft.com/office/drawing/2014/main" id="{FBD391C3-0D47-4BE1-8DDC-4DECC82BD2DA}"/>
               </a:ext>
             </a:extLst>
           </p:cNvPr>
@@ -6049,7 +6116,7 @@
           <p:cNvPr id="5" name="">
             <a:extLst xmlns:a="http://schemas.openxmlformats.org/drawingml/2006/main">
               <a:ext uri="{FF2B5EF4-FFF2-40B4-BE49-F238E27FC236}">
-                <a16:creationId xmlns:a16="http://schemas.microsoft.com/office/drawing/2014/main" id="{72F332CD-147C-4AA5-A4C1-88AAC11D18BD}"/>
+                <a16:creationId xmlns:a16="http://schemas.microsoft.com/office/drawing/2014/main" id="{6E5F469C-8BFA-46F3-AF61-41C830391072}"/>
               </a:ext>
             </a:extLst>
           </p:cNvPr>
@@ -6103,7 +6170,7 @@
                 <a:ea typeface="Arial"/>
                 <a:cs typeface="Arial"/>
               </a:rPr>
-              <a:t>A tela inicial reúne informações para acompanhar a situação geral do inventário e das pendências.</a:t>
+              <a:t>A interface transforma o processamento em informação acompanhável para o usuário.</a:t>
             </a:r>
           </a:p>
         </p:txBody>
@@ -6113,7 +6180,7 @@
           <p:cNvPr id="6" name="">
             <a:extLst xmlns:a="http://schemas.openxmlformats.org/drawingml/2006/main">
               <a:ext uri="{FF2B5EF4-FFF2-40B4-BE49-F238E27FC236}">
-                <a16:creationId xmlns:a16="http://schemas.microsoft.com/office/drawing/2014/main" id="{752003BE-C6A3-4F5D-BB3A-A9A770DA5600}"/>
+                <a16:creationId xmlns:a16="http://schemas.microsoft.com/office/drawing/2014/main" id="{41A7C786-DBAF-4DA0-B469-7D087557ABF6}"/>
               </a:ext>
             </a:extLst>
           </p:cNvPr>
@@ -6150,7 +6217,7 @@
           <p:nvPr/>
         </p:nvPicPr>
         <p:blipFill>
-          <a:blip xmlns:r="http://schemas.openxmlformats.org/officeDocument/2006/relationships" xmlns:a="http://schemas.openxmlformats.org/drawingml/2006/main" r:embed="Rec631ee7357342f2"/>
+          <a:blip xmlns:r="http://schemas.openxmlformats.org/officeDocument/2006/relationships" xmlns:a="http://schemas.openxmlformats.org/drawingml/2006/main" r:embed="R872b5b876526450a"/>
           <a:stretch xmlns:a="http://schemas.openxmlformats.org/drawingml/2006/main"/>
         </p:blipFill>
         <p:spPr>
@@ -6168,7 +6235,7 @@
           <p:cNvPr id="8" name="">
             <a:extLst xmlns:a="http://schemas.openxmlformats.org/drawingml/2006/main">
               <a:ext uri="{FF2B5EF4-FFF2-40B4-BE49-F238E27FC236}">
-                <a16:creationId xmlns:a16="http://schemas.microsoft.com/office/drawing/2014/main" id="{FAD6EF8E-7F99-4444-B8E8-D3E291C670BB}"/>
+                <a16:creationId xmlns:a16="http://schemas.microsoft.com/office/drawing/2014/main" id="{CCD00E80-215D-452D-8DDB-CF4FAB0D8DC9}"/>
               </a:ext>
             </a:extLst>
           </p:cNvPr>
@@ -6222,7 +6289,7 @@
                 <a:ea typeface="Arial"/>
                 <a:cs typeface="Arial"/>
               </a:rPr>
-              <a:t>Recorte do painel com indicadores, leitores e inconsistências recentes.</a:t>
+              <a:t>Painel com indicadores, leitores, pendências e eventos recentes do inventário.</a:t>
             </a:r>
           </a:p>
         </p:txBody>
@@ -6230,7 +6297,7 @@
     </p:spTree>
     <p:extLst>
       <p:ext uri="{BB962C8B-B14F-4D97-AF65-F5344CB8AC3E}">
-        <p14:creationId xmlns:p14="http://schemas.microsoft.com/office/powerpoint/2010/main" val="1401814126"/>
+        <p14:creationId xmlns:p14="http://schemas.microsoft.com/office/powerpoint/2010/main" val="1353874185"/>
       </p:ext>
     </p:extLst>
   </p:cSld>
@@ -6254,7 +6321,7 @@
           <p:cNvPr id="1" name="">
             <a:extLst xmlns:a="http://schemas.openxmlformats.org/drawingml/2006/main">
               <a:ext uri="{FF2B5EF4-FFF2-40B4-BE49-F238E27FC236}">
-                <a16:creationId xmlns:a16="http://schemas.microsoft.com/office/drawing/2014/main" id="{65F6B66E-7290-42C5-9E89-A41F0FF0D701}"/>
+                <a16:creationId xmlns:a16="http://schemas.microsoft.com/office/drawing/2014/main" id="{721E90C7-11CB-4151-8EEF-5F9939297D02}"/>
               </a:ext>
             </a:extLst>
           </p:cNvPr>
@@ -6289,7 +6356,7 @@
           <p:cNvPr id="2" name="">
             <a:extLst xmlns:a="http://schemas.openxmlformats.org/drawingml/2006/main">
               <a:ext uri="{FF2B5EF4-FFF2-40B4-BE49-F238E27FC236}">
-                <a16:creationId xmlns:a16="http://schemas.microsoft.com/office/drawing/2014/main" id="{A50B6056-E6EC-45A5-A14C-66316D908F25}"/>
+                <a16:creationId xmlns:a16="http://schemas.microsoft.com/office/drawing/2014/main" id="{5D96006D-7CA7-4DAB-ADB0-ADF44C1AE6EA}"/>
               </a:ext>
             </a:extLst>
           </p:cNvPr>
@@ -6324,7 +6391,7 @@
           <p:cNvPr id="3" name="">
             <a:extLst xmlns:a="http://schemas.openxmlformats.org/drawingml/2006/main">
               <a:ext uri="{FF2B5EF4-FFF2-40B4-BE49-F238E27FC236}">
-                <a16:creationId xmlns:a16="http://schemas.microsoft.com/office/drawing/2014/main" id="{0E45A16B-9C6A-4211-BAC3-EF648779E84E}"/>
+                <a16:creationId xmlns:a16="http://schemas.microsoft.com/office/drawing/2014/main" id="{D3ACEFEF-04D0-4143-9B2E-12E9F5D1CBE3}"/>
               </a:ext>
             </a:extLst>
           </p:cNvPr>
@@ -6388,7 +6455,7 @@
           <p:cNvPr id="4" name="">
             <a:extLst xmlns:a="http://schemas.openxmlformats.org/drawingml/2006/main">
               <a:ext uri="{FF2B5EF4-FFF2-40B4-BE49-F238E27FC236}">
-                <a16:creationId xmlns:a16="http://schemas.microsoft.com/office/drawing/2014/main" id="{0F2080D6-4ACB-4F65-8864-F2C09713D293}"/>
+                <a16:creationId xmlns:a16="http://schemas.microsoft.com/office/drawing/2014/main" id="{92BC97D3-8097-4078-B95F-6B9E6D129138}"/>
               </a:ext>
             </a:extLst>
           </p:cNvPr>
@@ -6452,7 +6519,7 @@
           <p:cNvPr id="5" name="">
             <a:extLst xmlns:a="http://schemas.openxmlformats.org/drawingml/2006/main">
               <a:ext uri="{FF2B5EF4-FFF2-40B4-BE49-F238E27FC236}">
-                <a16:creationId xmlns:a16="http://schemas.microsoft.com/office/drawing/2014/main" id="{23F36620-026D-46D2-9E52-6380BA0FDAE1}"/>
+                <a16:creationId xmlns:a16="http://schemas.microsoft.com/office/drawing/2014/main" id="{46BD28B0-86D5-4D78-801A-98A2142DEFDE}"/>
               </a:ext>
             </a:extLst>
           </p:cNvPr>
@@ -6506,7 +6573,7 @@
                 <a:ea typeface="Arial"/>
                 <a:cs typeface="Arial"/>
               </a:rPr>
-              <a:t>A auditoria é o ponto em que o sistema compara o que foi detectado com o que era esperado.</a:t>
+              <a:t>A auditoria compara o inventário lógico com o inventário físico formado pelas leituras.</a:t>
             </a:r>
           </a:p>
         </p:txBody>
@@ -6516,7 +6583,7 @@
           <p:cNvPr id="6" name="">
             <a:extLst xmlns:a="http://schemas.openxmlformats.org/drawingml/2006/main">
               <a:ext uri="{FF2B5EF4-FFF2-40B4-BE49-F238E27FC236}">
-                <a16:creationId xmlns:a16="http://schemas.microsoft.com/office/drawing/2014/main" id="{3DCB06BD-9CA4-4FA4-BA42-D4460DBDF9B4}"/>
+                <a16:creationId xmlns:a16="http://schemas.microsoft.com/office/drawing/2014/main" id="{2E2190A3-2E90-42C8-B1A6-836A2284DC48}"/>
               </a:ext>
             </a:extLst>
           </p:cNvPr>
@@ -6553,7 +6620,7 @@
           <p:nvPr/>
         </p:nvPicPr>
         <p:blipFill>
-          <a:blip xmlns:r="http://schemas.openxmlformats.org/officeDocument/2006/relationships" xmlns:a="http://schemas.openxmlformats.org/drawingml/2006/main" r:embed="R9465da3daebb4019"/>
+          <a:blip xmlns:r="http://schemas.openxmlformats.org/officeDocument/2006/relationships" xmlns:a="http://schemas.openxmlformats.org/drawingml/2006/main" r:embed="Ree9a4e9bb7ce46d3"/>
           <a:stretch xmlns:a="http://schemas.openxmlformats.org/drawingml/2006/main"/>
         </p:blipFill>
         <p:spPr>
@@ -6571,7 +6638,7 @@
           <p:cNvPr id="8" name="">
             <a:extLst xmlns:a="http://schemas.openxmlformats.org/drawingml/2006/main">
               <a:ext uri="{FF2B5EF4-FFF2-40B4-BE49-F238E27FC236}">
-                <a16:creationId xmlns:a16="http://schemas.microsoft.com/office/drawing/2014/main" id="{9D6051B6-5312-480D-B70E-5F6BAAC2092A}"/>
+                <a16:creationId xmlns:a16="http://schemas.microsoft.com/office/drawing/2014/main" id="{3BC98290-32BD-4782-BB04-A0A6CB05D49C}"/>
               </a:ext>
             </a:extLst>
           </p:cNvPr>
@@ -6633,7 +6700,7 @@
     </p:spTree>
     <p:extLst>
       <p:ext uri="{BB962C8B-B14F-4D97-AF65-F5344CB8AC3E}">
-        <p14:creationId xmlns:p14="http://schemas.microsoft.com/office/powerpoint/2010/main" val="1767194635"/>
+        <p14:creationId xmlns:p14="http://schemas.microsoft.com/office/powerpoint/2010/main" val="283451179"/>
       </p:ext>
     </p:extLst>
   </p:cSld>
@@ -6657,7 +6724,7 @@
           <p:cNvPr id="1" name="">
             <a:extLst xmlns:a="http://schemas.openxmlformats.org/drawingml/2006/main">
               <a:ext uri="{FF2B5EF4-FFF2-40B4-BE49-F238E27FC236}">
-                <a16:creationId xmlns:a16="http://schemas.microsoft.com/office/drawing/2014/main" id="{586E27E4-F17A-4339-AF81-059B22F86D97}"/>
+                <a16:creationId xmlns:a16="http://schemas.microsoft.com/office/drawing/2014/main" id="{3ABD5B9B-D7FC-49F5-9470-9C5D59103DE9}"/>
               </a:ext>
             </a:extLst>
           </p:cNvPr>
@@ -6692,7 +6759,7 @@
           <p:cNvPr id="2" name="">
             <a:extLst xmlns:a="http://schemas.openxmlformats.org/drawingml/2006/main">
               <a:ext uri="{FF2B5EF4-FFF2-40B4-BE49-F238E27FC236}">
-                <a16:creationId xmlns:a16="http://schemas.microsoft.com/office/drawing/2014/main" id="{9F2EF64E-2665-4D8C-9F96-138D858A40A3}"/>
+                <a16:creationId xmlns:a16="http://schemas.microsoft.com/office/drawing/2014/main" id="{EDCE36E9-A289-4BEC-97AF-C7226FC1C62A}"/>
               </a:ext>
             </a:extLst>
           </p:cNvPr>
@@ -6727,7 +6794,7 @@
           <p:cNvPr id="3" name="">
             <a:extLst xmlns:a="http://schemas.openxmlformats.org/drawingml/2006/main">
               <a:ext uri="{FF2B5EF4-FFF2-40B4-BE49-F238E27FC236}">
-                <a16:creationId xmlns:a16="http://schemas.microsoft.com/office/drawing/2014/main" id="{EB1FD62F-EED1-4BD4-BEB3-A61F548D6E3C}"/>
+                <a16:creationId xmlns:a16="http://schemas.microsoft.com/office/drawing/2014/main" id="{ABD007FB-3EE4-432E-9E12-94B67C6BCF51}"/>
               </a:ext>
             </a:extLst>
           </p:cNvPr>
@@ -6791,7 +6858,7 @@
           <p:cNvPr id="4" name="">
             <a:extLst xmlns:a="http://schemas.openxmlformats.org/drawingml/2006/main">
               <a:ext uri="{FF2B5EF4-FFF2-40B4-BE49-F238E27FC236}">
-                <a16:creationId xmlns:a16="http://schemas.microsoft.com/office/drawing/2014/main" id="{32453561-C325-41D3-9A60-F57BB8DD79F9}"/>
+                <a16:creationId xmlns:a16="http://schemas.microsoft.com/office/drawing/2014/main" id="{DE7C9CDD-8A8F-4C91-84F5-806DB4B291F7}"/>
               </a:ext>
             </a:extLst>
           </p:cNvPr>
@@ -6855,7 +6922,7 @@
           <p:cNvPr id="5" name="">
             <a:extLst xmlns:a="http://schemas.openxmlformats.org/drawingml/2006/main">
               <a:ext uri="{FF2B5EF4-FFF2-40B4-BE49-F238E27FC236}">
-                <a16:creationId xmlns:a16="http://schemas.microsoft.com/office/drawing/2014/main" id="{41851469-25D1-4499-92E3-E626A26739A9}"/>
+                <a16:creationId xmlns:a16="http://schemas.microsoft.com/office/drawing/2014/main" id="{DF416B5A-018B-4A68-A43E-E93BCB005913}"/>
               </a:ext>
             </a:extLst>
           </p:cNvPr>
@@ -6909,7 +6976,7 @@
                 <a:ea typeface="Arial"/>
                 <a:cs typeface="Arial"/>
               </a:rPr>
-              <a:t>As inconsistências indicam diferenças entre o local esperado e o local detectado na auditoria.</a:t>
+              <a:t>As inconsistências registram divergências operacionais que precisam de análise ou regularização.</a:t>
             </a:r>
           </a:p>
         </p:txBody>
@@ -6919,7 +6986,7 @@
           <p:cNvPr id="6" name="">
             <a:extLst xmlns:a="http://schemas.openxmlformats.org/drawingml/2006/main">
               <a:ext uri="{FF2B5EF4-FFF2-40B4-BE49-F238E27FC236}">
-                <a16:creationId xmlns:a16="http://schemas.microsoft.com/office/drawing/2014/main" id="{E639903A-736B-4EA0-85B8-BED03705AED7}"/>
+                <a16:creationId xmlns:a16="http://schemas.microsoft.com/office/drawing/2014/main" id="{DF282E0A-D88F-4612-BD38-54030E57F98D}"/>
               </a:ext>
             </a:extLst>
           </p:cNvPr>
@@ -6956,13 +7023,13 @@
           <p:nvPr/>
         </p:nvPicPr>
         <p:blipFill>
-          <a:blip xmlns:r="http://schemas.openxmlformats.org/officeDocument/2006/relationships" xmlns:a="http://schemas.openxmlformats.org/drawingml/2006/main" r:embed="Rc946ed604dfa4710"/>
+          <a:blip xmlns:r="http://schemas.openxmlformats.org/officeDocument/2006/relationships" xmlns:a="http://schemas.openxmlformats.org/drawingml/2006/main" r:embed="R6185118c044b4745"/>
           <a:stretch xmlns:a="http://schemas.openxmlformats.org/drawingml/2006/main"/>
         </p:blipFill>
         <p:spPr>
           <a:xfrm xmlns:a="http://schemas.openxmlformats.org/drawingml/2006/main">
-            <a:off x="952500" y="3171516"/>
-            <a:ext cx="10306050" cy="1448418"/>
+            <a:off x="952500" y="2891942"/>
+            <a:ext cx="10306050" cy="2007567"/>
           </a:xfrm>
           <a:prstGeom xmlns:a="http://schemas.openxmlformats.org/drawingml/2006/main" prst="rect">
             <a:avLst/>
@@ -6974,7 +7041,7 @@
           <p:cNvPr id="8" name="">
             <a:extLst xmlns:a="http://schemas.openxmlformats.org/drawingml/2006/main">
               <a:ext uri="{FF2B5EF4-FFF2-40B4-BE49-F238E27FC236}">
-                <a16:creationId xmlns:a16="http://schemas.microsoft.com/office/drawing/2014/main" id="{D7E740A3-F818-4FE4-B809-6E0106097C1C}"/>
+                <a16:creationId xmlns:a16="http://schemas.microsoft.com/office/drawing/2014/main" id="{82B75264-9700-4539-9FC9-62A3D597095F}"/>
               </a:ext>
             </a:extLst>
           </p:cNvPr>
@@ -7036,7 +7103,7 @@
     </p:spTree>
     <p:extLst>
       <p:ext uri="{BB962C8B-B14F-4D97-AF65-F5344CB8AC3E}">
-        <p14:creationId xmlns:p14="http://schemas.microsoft.com/office/powerpoint/2010/main" val="1147700220"/>
+        <p14:creationId xmlns:p14="http://schemas.microsoft.com/office/powerpoint/2010/main" val="547492545"/>
       </p:ext>
     </p:extLst>
   </p:cSld>
@@ -7060,7 +7127,7 @@
           <p:cNvPr id="1" name="">
             <a:extLst xmlns:a="http://schemas.openxmlformats.org/drawingml/2006/main">
               <a:ext uri="{FF2B5EF4-FFF2-40B4-BE49-F238E27FC236}">
-                <a16:creationId xmlns:a16="http://schemas.microsoft.com/office/drawing/2014/main" id="{82E63092-4DEB-4115-ABA5-3E621800464B}"/>
+                <a16:creationId xmlns:a16="http://schemas.microsoft.com/office/drawing/2014/main" id="{5B62647F-DB07-418E-B1BE-0D94E17B67A8}"/>
               </a:ext>
             </a:extLst>
           </p:cNvPr>
@@ -7095,7 +7162,7 @@
           <p:cNvPr id="2" name="">
             <a:extLst xmlns:a="http://schemas.openxmlformats.org/drawingml/2006/main">
               <a:ext uri="{FF2B5EF4-FFF2-40B4-BE49-F238E27FC236}">
-                <a16:creationId xmlns:a16="http://schemas.microsoft.com/office/drawing/2014/main" id="{9725AF25-AFBC-4F26-B196-7A38871E720B}"/>
+                <a16:creationId xmlns:a16="http://schemas.microsoft.com/office/drawing/2014/main" id="{38CE3F8B-83E0-423C-BC58-4AF66BB7F465}"/>
               </a:ext>
             </a:extLst>
           </p:cNvPr>
@@ -7130,7 +7197,7 @@
           <p:cNvPr id="3" name="">
             <a:extLst xmlns:a="http://schemas.openxmlformats.org/drawingml/2006/main">
               <a:ext uri="{FF2B5EF4-FFF2-40B4-BE49-F238E27FC236}">
-                <a16:creationId xmlns:a16="http://schemas.microsoft.com/office/drawing/2014/main" id="{47F0808E-9083-48B6-A16F-0A1478C24093}"/>
+                <a16:creationId xmlns:a16="http://schemas.microsoft.com/office/drawing/2014/main" id="{48942B89-EB8A-4C5C-B5B0-097724EA03B1}"/>
               </a:ext>
             </a:extLst>
           </p:cNvPr>
@@ -7194,7 +7261,7 @@
           <p:cNvPr id="4" name="">
             <a:extLst xmlns:a="http://schemas.openxmlformats.org/drawingml/2006/main">
               <a:ext uri="{FF2B5EF4-FFF2-40B4-BE49-F238E27FC236}">
-                <a16:creationId xmlns:a16="http://schemas.microsoft.com/office/drawing/2014/main" id="{4B854E6C-9C60-422F-BB6F-8B0EF32FB3BA}"/>
+                <a16:creationId xmlns:a16="http://schemas.microsoft.com/office/drawing/2014/main" id="{136FF187-9C67-4F5A-8617-C586F1E835B4}"/>
               </a:ext>
             </a:extLst>
           </p:cNvPr>
@@ -7248,7 +7315,7 @@
                 <a:ea typeface="Arial"/>
                 <a:cs typeface="Arial"/>
               </a:rPr>
-              <a:t>Resultados da validação funcional</a:t>
+              <a:t>Validação funcional</a:t>
             </a:r>
           </a:p>
         </p:txBody>
@@ -7258,7 +7325,7 @@
           <p:cNvPr id="5" name="">
             <a:extLst xmlns:a="http://schemas.openxmlformats.org/drawingml/2006/main">
               <a:ext uri="{FF2B5EF4-FFF2-40B4-BE49-F238E27FC236}">
-                <a16:creationId xmlns:a16="http://schemas.microsoft.com/office/drawing/2014/main" id="{5BEF1F00-2355-4891-9A0B-1A2F8468C07B}"/>
+                <a16:creationId xmlns:a16="http://schemas.microsoft.com/office/drawing/2014/main" id="{43A57F78-FEE0-4818-B0E8-F6F4A8CA92A1}"/>
               </a:ext>
             </a:extLst>
           </p:cNvPr>
@@ -7322,7 +7389,7 @@
           <p:cNvPr id="6" name="">
             <a:extLst xmlns:a="http://schemas.openxmlformats.org/drawingml/2006/main">
               <a:ext uri="{FF2B5EF4-FFF2-40B4-BE49-F238E27FC236}">
-                <a16:creationId xmlns:a16="http://schemas.microsoft.com/office/drawing/2014/main" id="{A07F4A2A-6F35-46F2-BACE-DCE6F8C5722F}"/>
+                <a16:creationId xmlns:a16="http://schemas.microsoft.com/office/drawing/2014/main" id="{22B73BF7-6170-46E3-BE66-DBBBCB433210}"/>
               </a:ext>
             </a:extLst>
           </p:cNvPr>
@@ -7357,7 +7424,7 @@
           <p:cNvPr id="7" name="">
             <a:extLst xmlns:a="http://schemas.openxmlformats.org/drawingml/2006/main">
               <a:ext uri="{FF2B5EF4-FFF2-40B4-BE49-F238E27FC236}">
-                <a16:creationId xmlns:a16="http://schemas.microsoft.com/office/drawing/2014/main" id="{1B08F030-8509-4BDC-B700-26F3051A9B6C}"/>
+                <a16:creationId xmlns:a16="http://schemas.microsoft.com/office/drawing/2014/main" id="{E4036A42-42A4-4911-84F0-BBEF5E8A739B}"/>
               </a:ext>
             </a:extLst>
           </p:cNvPr>
@@ -7421,7 +7488,7 @@
           <p:cNvPr id="8" name="">
             <a:extLst xmlns:a="http://schemas.openxmlformats.org/drawingml/2006/main">
               <a:ext uri="{FF2B5EF4-FFF2-40B4-BE49-F238E27FC236}">
-                <a16:creationId xmlns:a16="http://schemas.microsoft.com/office/drawing/2014/main" id="{77223242-6F6C-42EC-B5EF-9CBC5D581583}"/>
+                <a16:creationId xmlns:a16="http://schemas.microsoft.com/office/drawing/2014/main" id="{65268BF4-083B-4FE6-BBF0-EE920BE93F90}"/>
               </a:ext>
             </a:extLst>
           </p:cNvPr>
@@ -7456,7 +7523,7 @@
           <p:cNvPr id="9" name="">
             <a:extLst xmlns:a="http://schemas.openxmlformats.org/drawingml/2006/main">
               <a:ext uri="{FF2B5EF4-FFF2-40B4-BE49-F238E27FC236}">
-                <a16:creationId xmlns:a16="http://schemas.microsoft.com/office/drawing/2014/main" id="{CF8642AE-FAA8-4661-A4D5-F113119659AF}"/>
+                <a16:creationId xmlns:a16="http://schemas.microsoft.com/office/drawing/2014/main" id="{30CECF67-C73C-4382-8F7C-37E99E795249}"/>
               </a:ext>
             </a:extLst>
           </p:cNvPr>
@@ -7520,7 +7587,7 @@
           <p:cNvPr id="10" name="">
             <a:extLst xmlns:a="http://schemas.openxmlformats.org/drawingml/2006/main">
               <a:ext uri="{FF2B5EF4-FFF2-40B4-BE49-F238E27FC236}">
-                <a16:creationId xmlns:a16="http://schemas.microsoft.com/office/drawing/2014/main" id="{48AFC503-AA47-4F61-B473-101D2C7C8F90}"/>
+                <a16:creationId xmlns:a16="http://schemas.microsoft.com/office/drawing/2014/main" id="{A3F10896-D952-4CEF-B9F9-68D19EE2D1F2}"/>
               </a:ext>
             </a:extLst>
           </p:cNvPr>
@@ -7555,7 +7622,7 @@
           <p:cNvPr id="11" name="">
             <a:extLst xmlns:a="http://schemas.openxmlformats.org/drawingml/2006/main">
               <a:ext uri="{FF2B5EF4-FFF2-40B4-BE49-F238E27FC236}">
-                <a16:creationId xmlns:a16="http://schemas.microsoft.com/office/drawing/2014/main" id="{D00D5247-76CE-4E98-BCAE-D952CC83ED10}"/>
+                <a16:creationId xmlns:a16="http://schemas.microsoft.com/office/drawing/2014/main" id="{5CCB7410-F04B-4228-8459-DD19257B70A9}"/>
               </a:ext>
             </a:extLst>
           </p:cNvPr>
@@ -7619,7 +7686,7 @@
           <p:cNvPr id="12" name="">
             <a:extLst xmlns:a="http://schemas.openxmlformats.org/drawingml/2006/main">
               <a:ext uri="{FF2B5EF4-FFF2-40B4-BE49-F238E27FC236}">
-                <a16:creationId xmlns:a16="http://schemas.microsoft.com/office/drawing/2014/main" id="{2D1E18F7-E498-4496-A435-EC5D8414A031}"/>
+                <a16:creationId xmlns:a16="http://schemas.microsoft.com/office/drawing/2014/main" id="{CF565A74-FD2B-43DB-8F09-7CEE7D6F7DBB}"/>
               </a:ext>
             </a:extLst>
           </p:cNvPr>
@@ -7652,7 +7719,7 @@
           <p:cNvPr id="13" name="">
             <a:extLst xmlns:a="http://schemas.openxmlformats.org/drawingml/2006/main">
               <a:ext uri="{FF2B5EF4-FFF2-40B4-BE49-F238E27FC236}">
-                <a16:creationId xmlns:a16="http://schemas.microsoft.com/office/drawing/2014/main" id="{79375100-F93A-4D17-B05A-E59DF2DC8C62}"/>
+                <a16:creationId xmlns:a16="http://schemas.microsoft.com/office/drawing/2014/main" id="{5A5F1AAE-AFF7-4D58-9A52-BD3513872183}"/>
               </a:ext>
             </a:extLst>
           </p:cNvPr>
@@ -7716,7 +7783,7 @@
           <p:cNvPr id="14" name="">
             <a:extLst xmlns:a="http://schemas.openxmlformats.org/drawingml/2006/main">
               <a:ext uri="{FF2B5EF4-FFF2-40B4-BE49-F238E27FC236}">
-                <a16:creationId xmlns:a16="http://schemas.microsoft.com/office/drawing/2014/main" id="{9BD7D3DF-5344-47A7-A8A0-EC80C41D9DF9}"/>
+                <a16:creationId xmlns:a16="http://schemas.microsoft.com/office/drawing/2014/main" id="{649F72C0-6AF1-410E-A1A3-2C99C00B952D}"/>
               </a:ext>
             </a:extLst>
           </p:cNvPr>
@@ -7749,7 +7816,7 @@
           <p:cNvPr id="15" name="">
             <a:extLst xmlns:a="http://schemas.openxmlformats.org/drawingml/2006/main">
               <a:ext uri="{FF2B5EF4-FFF2-40B4-BE49-F238E27FC236}">
-                <a16:creationId xmlns:a16="http://schemas.microsoft.com/office/drawing/2014/main" id="{A9F83352-23AE-4D93-A197-B08FD89A4FD1}"/>
+                <a16:creationId xmlns:a16="http://schemas.microsoft.com/office/drawing/2014/main" id="{E23E7196-E38E-4F19-ACFB-1F40BD141481}"/>
               </a:ext>
             </a:extLst>
           </p:cNvPr>
@@ -7813,7 +7880,7 @@
           <p:cNvPr id="16" name="">
             <a:extLst xmlns:a="http://schemas.openxmlformats.org/drawingml/2006/main">
               <a:ext uri="{FF2B5EF4-FFF2-40B4-BE49-F238E27FC236}">
-                <a16:creationId xmlns:a16="http://schemas.microsoft.com/office/drawing/2014/main" id="{FC039C3B-1BBB-40BF-BF3F-E7C757F0CC74}"/>
+                <a16:creationId xmlns:a16="http://schemas.microsoft.com/office/drawing/2014/main" id="{75C009C3-FC25-42D9-BD00-E1506A357047}"/>
               </a:ext>
             </a:extLst>
           </p:cNvPr>
@@ -7846,7 +7913,7 @@
           <p:cNvPr id="17" name="">
             <a:extLst xmlns:a="http://schemas.openxmlformats.org/drawingml/2006/main">
               <a:ext uri="{FF2B5EF4-FFF2-40B4-BE49-F238E27FC236}">
-                <a16:creationId xmlns:a16="http://schemas.microsoft.com/office/drawing/2014/main" id="{2733D401-C88B-4477-9A20-E2972A7B94BD}"/>
+                <a16:creationId xmlns:a16="http://schemas.microsoft.com/office/drawing/2014/main" id="{E6DB783E-FECD-45D9-B3A4-DFBC652151F5}"/>
               </a:ext>
             </a:extLst>
           </p:cNvPr>
@@ -7910,7 +7977,7 @@
           <p:cNvPr id="18" name="">
             <a:extLst xmlns:a="http://schemas.openxmlformats.org/drawingml/2006/main">
               <a:ext uri="{FF2B5EF4-FFF2-40B4-BE49-F238E27FC236}">
-                <a16:creationId xmlns:a16="http://schemas.microsoft.com/office/drawing/2014/main" id="{BE266764-BADF-46DA-B05F-3E3AA2E871F1}"/>
+                <a16:creationId xmlns:a16="http://schemas.microsoft.com/office/drawing/2014/main" id="{77839BCC-F2AF-4637-95D2-70CFE4034974}"/>
               </a:ext>
             </a:extLst>
           </p:cNvPr>
@@ -7943,7 +8010,7 @@
           <p:cNvPr id="19" name="">
             <a:extLst xmlns:a="http://schemas.openxmlformats.org/drawingml/2006/main">
               <a:ext uri="{FF2B5EF4-FFF2-40B4-BE49-F238E27FC236}">
-                <a16:creationId xmlns:a16="http://schemas.microsoft.com/office/drawing/2014/main" id="{60F475C7-1EEB-4F83-9EA4-FF6B9715CE6D}"/>
+                <a16:creationId xmlns:a16="http://schemas.microsoft.com/office/drawing/2014/main" id="{6F9FB98C-FAE9-4BFA-A2BB-BC98435C310E}"/>
               </a:ext>
             </a:extLst>
           </p:cNvPr>
@@ -8007,7 +8074,7 @@
           <p:cNvPr id="20" name="">
             <a:extLst xmlns:a="http://schemas.openxmlformats.org/drawingml/2006/main">
               <a:ext uri="{FF2B5EF4-FFF2-40B4-BE49-F238E27FC236}">
-                <a16:creationId xmlns:a16="http://schemas.microsoft.com/office/drawing/2014/main" id="{5178BE57-B113-448F-BBFB-6E7F41416141}"/>
+                <a16:creationId xmlns:a16="http://schemas.microsoft.com/office/drawing/2014/main" id="{2A5E5AE9-A2E5-46F5-A391-5A26B7CD3F2F}"/>
               </a:ext>
             </a:extLst>
           </p:cNvPr>
@@ -8040,7 +8107,7 @@
           <p:cNvPr id="21" name="">
             <a:extLst xmlns:a="http://schemas.openxmlformats.org/drawingml/2006/main">
               <a:ext uri="{FF2B5EF4-FFF2-40B4-BE49-F238E27FC236}">
-                <a16:creationId xmlns:a16="http://schemas.microsoft.com/office/drawing/2014/main" id="{7373EE8E-A0FA-427D-B38D-C54D2116BEC8}"/>
+                <a16:creationId xmlns:a16="http://schemas.microsoft.com/office/drawing/2014/main" id="{E1C76492-7E0D-4AC8-9852-AF097DF57C3C}"/>
               </a:ext>
             </a:extLst>
           </p:cNvPr>
@@ -8104,7 +8171,7 @@
           <p:cNvPr id="22" name="">
             <a:extLst xmlns:a="http://schemas.openxmlformats.org/drawingml/2006/main">
               <a:ext uri="{FF2B5EF4-FFF2-40B4-BE49-F238E27FC236}">
-                <a16:creationId xmlns:a16="http://schemas.microsoft.com/office/drawing/2014/main" id="{F0FE423F-3A53-45C9-96A1-AF60C9F1AABB}"/>
+                <a16:creationId xmlns:a16="http://schemas.microsoft.com/office/drawing/2014/main" id="{E3B54D01-15EB-4696-ADBC-B477B4874B03}"/>
               </a:ext>
             </a:extLst>
           </p:cNvPr>
@@ -8137,7 +8204,7 @@
           <p:cNvPr id="23" name="">
             <a:extLst xmlns:a="http://schemas.openxmlformats.org/drawingml/2006/main">
               <a:ext uri="{FF2B5EF4-FFF2-40B4-BE49-F238E27FC236}">
-                <a16:creationId xmlns:a16="http://schemas.microsoft.com/office/drawing/2014/main" id="{80890F3E-3940-4A9D-AC26-94465EE63546}"/>
+                <a16:creationId xmlns:a16="http://schemas.microsoft.com/office/drawing/2014/main" id="{A7F28533-8852-4B14-B740-636E11054B1A}"/>
               </a:ext>
             </a:extLst>
           </p:cNvPr>
@@ -8201,7 +8268,7 @@
           <p:cNvPr id="24" name="">
             <a:extLst xmlns:a="http://schemas.openxmlformats.org/drawingml/2006/main">
               <a:ext uri="{FF2B5EF4-FFF2-40B4-BE49-F238E27FC236}">
-                <a16:creationId xmlns:a16="http://schemas.microsoft.com/office/drawing/2014/main" id="{FC702DA3-9B93-4F4E-A470-29D4D5F1F135}"/>
+                <a16:creationId xmlns:a16="http://schemas.microsoft.com/office/drawing/2014/main" id="{41F049B0-7A6D-4056-8C67-30A3B192E8C7}"/>
               </a:ext>
             </a:extLst>
           </p:cNvPr>
@@ -8234,7 +8301,7 @@
           <p:cNvPr id="25" name="">
             <a:extLst xmlns:a="http://schemas.openxmlformats.org/drawingml/2006/main">
               <a:ext uri="{FF2B5EF4-FFF2-40B4-BE49-F238E27FC236}">
-                <a16:creationId xmlns:a16="http://schemas.microsoft.com/office/drawing/2014/main" id="{1ED537CC-ED33-4CF0-8339-F14456DEBE87}"/>
+                <a16:creationId xmlns:a16="http://schemas.microsoft.com/office/drawing/2014/main" id="{2019ACFF-B3AD-46B3-8173-37FE2DA884B2}"/>
               </a:ext>
             </a:extLst>
           </p:cNvPr>
@@ -8298,7 +8365,7 @@
           <p:cNvPr id="26" name="">
             <a:extLst xmlns:a="http://schemas.openxmlformats.org/drawingml/2006/main">
               <a:ext uri="{FF2B5EF4-FFF2-40B4-BE49-F238E27FC236}">
-                <a16:creationId xmlns:a16="http://schemas.microsoft.com/office/drawing/2014/main" id="{B657CABD-0B12-47C4-8F5C-52A5D0EBD1C7}"/>
+                <a16:creationId xmlns:a16="http://schemas.microsoft.com/office/drawing/2014/main" id="{6D831AB2-F1A4-470C-B8F0-C69E8DA39BAF}"/>
               </a:ext>
             </a:extLst>
           </p:cNvPr>
@@ -8331,7 +8398,7 @@
           <p:cNvPr id="27" name="">
             <a:extLst xmlns:a="http://schemas.openxmlformats.org/drawingml/2006/main">
               <a:ext uri="{FF2B5EF4-FFF2-40B4-BE49-F238E27FC236}">
-                <a16:creationId xmlns:a16="http://schemas.microsoft.com/office/drawing/2014/main" id="{87E481A7-3C20-4524-9903-C1B52CDEEC11}"/>
+                <a16:creationId xmlns:a16="http://schemas.microsoft.com/office/drawing/2014/main" id="{8E2A1044-D420-406A-ADF6-AEF36247F53B}"/>
               </a:ext>
             </a:extLst>
           </p:cNvPr>
@@ -8395,7 +8462,7 @@
           <p:cNvPr id="28" name="">
             <a:extLst xmlns:a="http://schemas.openxmlformats.org/drawingml/2006/main">
               <a:ext uri="{FF2B5EF4-FFF2-40B4-BE49-F238E27FC236}">
-                <a16:creationId xmlns:a16="http://schemas.microsoft.com/office/drawing/2014/main" id="{3358728A-2AE4-4BAB-9015-BF782B43CE72}"/>
+                <a16:creationId xmlns:a16="http://schemas.microsoft.com/office/drawing/2014/main" id="{5D30A262-A21A-4E1A-AD2F-4F1BA2328BA3}"/>
               </a:ext>
             </a:extLst>
           </p:cNvPr>
@@ -8428,7 +8495,7 @@
           <p:cNvPr id="29" name="">
             <a:extLst xmlns:a="http://schemas.openxmlformats.org/drawingml/2006/main">
               <a:ext uri="{FF2B5EF4-FFF2-40B4-BE49-F238E27FC236}">
-                <a16:creationId xmlns:a16="http://schemas.microsoft.com/office/drawing/2014/main" id="{6C675705-E525-434F-97D2-9BFD8E072DB1}"/>
+                <a16:creationId xmlns:a16="http://schemas.microsoft.com/office/drawing/2014/main" id="{6F17936A-9633-4B22-8B28-781AE6E70E21}"/>
               </a:ext>
             </a:extLst>
           </p:cNvPr>
@@ -8492,7 +8559,7 @@
           <p:cNvPr id="30" name="">
             <a:extLst xmlns:a="http://schemas.openxmlformats.org/drawingml/2006/main">
               <a:ext uri="{FF2B5EF4-FFF2-40B4-BE49-F238E27FC236}">
-                <a16:creationId xmlns:a16="http://schemas.microsoft.com/office/drawing/2014/main" id="{7C799EA7-D451-43D0-A2AC-1683ECC5533A}"/>
+                <a16:creationId xmlns:a16="http://schemas.microsoft.com/office/drawing/2014/main" id="{923CA8B2-D7AE-4893-9D1C-761AD58E2C34}"/>
               </a:ext>
             </a:extLst>
           </p:cNvPr>
@@ -8525,7 +8592,7 @@
           <p:cNvPr id="31" name="">
             <a:extLst xmlns:a="http://schemas.openxmlformats.org/drawingml/2006/main">
               <a:ext uri="{FF2B5EF4-FFF2-40B4-BE49-F238E27FC236}">
-                <a16:creationId xmlns:a16="http://schemas.microsoft.com/office/drawing/2014/main" id="{B95D064A-3D5F-43C9-B02C-086DF76F20F0}"/>
+                <a16:creationId xmlns:a16="http://schemas.microsoft.com/office/drawing/2014/main" id="{17060E30-E65B-430A-B3CA-0F7D043826DD}"/>
               </a:ext>
             </a:extLst>
           </p:cNvPr>
@@ -8589,7 +8656,7 @@
           <p:cNvPr id="32" name="">
             <a:extLst xmlns:a="http://schemas.openxmlformats.org/drawingml/2006/main">
               <a:ext uri="{FF2B5EF4-FFF2-40B4-BE49-F238E27FC236}">
-                <a16:creationId xmlns:a16="http://schemas.microsoft.com/office/drawing/2014/main" id="{E7C9D5DB-8CF6-4432-B45D-3E46270B3504}"/>
+                <a16:creationId xmlns:a16="http://schemas.microsoft.com/office/drawing/2014/main" id="{FBBA79D5-4D42-4FC3-A0C5-38E7329ACED8}"/>
               </a:ext>
             </a:extLst>
           </p:cNvPr>
@@ -8622,7 +8689,7 @@
           <p:cNvPr id="33" name="">
             <a:extLst xmlns:a="http://schemas.openxmlformats.org/drawingml/2006/main">
               <a:ext uri="{FF2B5EF4-FFF2-40B4-BE49-F238E27FC236}">
-                <a16:creationId xmlns:a16="http://schemas.microsoft.com/office/drawing/2014/main" id="{DEBB8E74-F53B-4D18-A6DA-F4C899B6C2B3}"/>
+                <a16:creationId xmlns:a16="http://schemas.microsoft.com/office/drawing/2014/main" id="{E15032BA-7C57-47FB-9C59-04814A11651F}"/>
               </a:ext>
             </a:extLst>
           </p:cNvPr>
@@ -8686,7 +8753,7 @@
           <p:cNvPr id="34" name="">
             <a:extLst xmlns:a="http://schemas.openxmlformats.org/drawingml/2006/main">
               <a:ext uri="{FF2B5EF4-FFF2-40B4-BE49-F238E27FC236}">
-                <a16:creationId xmlns:a16="http://schemas.microsoft.com/office/drawing/2014/main" id="{D8B9518B-1859-4E17-9A93-17278E908FC3}"/>
+                <a16:creationId xmlns:a16="http://schemas.microsoft.com/office/drawing/2014/main" id="{C8266A6E-E9D5-435F-8AB7-12A46E474601}"/>
               </a:ext>
             </a:extLst>
           </p:cNvPr>
@@ -8719,7 +8786,7 @@
           <p:cNvPr id="35" name="">
             <a:extLst xmlns:a="http://schemas.openxmlformats.org/drawingml/2006/main">
               <a:ext uri="{FF2B5EF4-FFF2-40B4-BE49-F238E27FC236}">
-                <a16:creationId xmlns:a16="http://schemas.microsoft.com/office/drawing/2014/main" id="{7F8F6739-ACC4-41E9-8E1E-7A3AB773E91F}"/>
+                <a16:creationId xmlns:a16="http://schemas.microsoft.com/office/drawing/2014/main" id="{7942C642-553B-4407-B523-DF957609892F}"/>
               </a:ext>
             </a:extLst>
           </p:cNvPr>
@@ -8783,7 +8850,7 @@
           <p:cNvPr id="36" name="">
             <a:extLst xmlns:a="http://schemas.openxmlformats.org/drawingml/2006/main">
               <a:ext uri="{FF2B5EF4-FFF2-40B4-BE49-F238E27FC236}">
-                <a16:creationId xmlns:a16="http://schemas.microsoft.com/office/drawing/2014/main" id="{F2C19DCC-A2CC-4053-9956-24A211A0C00F}"/>
+                <a16:creationId xmlns:a16="http://schemas.microsoft.com/office/drawing/2014/main" id="{8E199DD3-4136-43B2-84BA-DAAFB8C1B49E}"/>
               </a:ext>
             </a:extLst>
           </p:cNvPr>
@@ -8816,7 +8883,7 @@
           <p:cNvPr id="37" name="">
             <a:extLst xmlns:a="http://schemas.openxmlformats.org/drawingml/2006/main">
               <a:ext uri="{FF2B5EF4-FFF2-40B4-BE49-F238E27FC236}">
-                <a16:creationId xmlns:a16="http://schemas.microsoft.com/office/drawing/2014/main" id="{BE761941-72BB-4BF2-A7F9-007FC1283D68}"/>
+                <a16:creationId xmlns:a16="http://schemas.microsoft.com/office/drawing/2014/main" id="{682F798E-F5D8-4EB7-83FE-037FD5B6D451}"/>
               </a:ext>
             </a:extLst>
           </p:cNvPr>
@@ -8880,7 +8947,7 @@
           <p:cNvPr id="38" name="">
             <a:extLst xmlns:a="http://schemas.openxmlformats.org/drawingml/2006/main">
               <a:ext uri="{FF2B5EF4-FFF2-40B4-BE49-F238E27FC236}">
-                <a16:creationId xmlns:a16="http://schemas.microsoft.com/office/drawing/2014/main" id="{8E7C376E-9E7C-491C-B457-5695051B7A81}"/>
+                <a16:creationId xmlns:a16="http://schemas.microsoft.com/office/drawing/2014/main" id="{A376CED1-9CF3-4E67-9A36-571D1F842261}"/>
               </a:ext>
             </a:extLst>
           </p:cNvPr>
@@ -8913,7 +8980,7 @@
           <p:cNvPr id="39" name="">
             <a:extLst xmlns:a="http://schemas.openxmlformats.org/drawingml/2006/main">
               <a:ext uri="{FF2B5EF4-FFF2-40B4-BE49-F238E27FC236}">
-                <a16:creationId xmlns:a16="http://schemas.microsoft.com/office/drawing/2014/main" id="{FAF8DA01-6AC8-4F7B-BC52-6A6783A261F5}"/>
+                <a16:creationId xmlns:a16="http://schemas.microsoft.com/office/drawing/2014/main" id="{BE934757-82D6-4674-9772-545CE40DD8CE}"/>
               </a:ext>
             </a:extLst>
           </p:cNvPr>
@@ -8977,7 +9044,7 @@
           <p:cNvPr id="40" name="">
             <a:extLst xmlns:a="http://schemas.openxmlformats.org/drawingml/2006/main">
               <a:ext uri="{FF2B5EF4-FFF2-40B4-BE49-F238E27FC236}">
-                <a16:creationId xmlns:a16="http://schemas.microsoft.com/office/drawing/2014/main" id="{3CA33AE5-962D-4759-8ABC-9B408E6D5A46}"/>
+                <a16:creationId xmlns:a16="http://schemas.microsoft.com/office/drawing/2014/main" id="{68707006-9F77-4BDA-88F1-BCFB883F7929}"/>
               </a:ext>
             </a:extLst>
           </p:cNvPr>
@@ -9010,7 +9077,7 @@
           <p:cNvPr id="41" name="">
             <a:extLst xmlns:a="http://schemas.openxmlformats.org/drawingml/2006/main">
               <a:ext uri="{FF2B5EF4-FFF2-40B4-BE49-F238E27FC236}">
-                <a16:creationId xmlns:a16="http://schemas.microsoft.com/office/drawing/2014/main" id="{18502D79-1449-4A43-8003-5622EC29BF8B}"/>
+                <a16:creationId xmlns:a16="http://schemas.microsoft.com/office/drawing/2014/main" id="{6075D6C9-44D4-4297-A4B0-0F2A002D3DAD}"/>
               </a:ext>
             </a:extLst>
           </p:cNvPr>
@@ -9074,7 +9141,7 @@
           <p:cNvPr id="42" name="">
             <a:extLst xmlns:a="http://schemas.openxmlformats.org/drawingml/2006/main">
               <a:ext uri="{FF2B5EF4-FFF2-40B4-BE49-F238E27FC236}">
-                <a16:creationId xmlns:a16="http://schemas.microsoft.com/office/drawing/2014/main" id="{F31C7AAC-26AE-4059-809E-FEC9A0CEB31D}"/>
+                <a16:creationId xmlns:a16="http://schemas.microsoft.com/office/drawing/2014/main" id="{374C4983-E8EB-41F7-B363-DABF241C62EB}"/>
               </a:ext>
             </a:extLst>
           </p:cNvPr>
@@ -9107,7 +9174,7 @@
           <p:cNvPr id="43" name="">
             <a:extLst xmlns:a="http://schemas.openxmlformats.org/drawingml/2006/main">
               <a:ext uri="{FF2B5EF4-FFF2-40B4-BE49-F238E27FC236}">
-                <a16:creationId xmlns:a16="http://schemas.microsoft.com/office/drawing/2014/main" id="{A0150C73-3AB5-4E72-826C-F40DC0B3FBEF}"/>
+                <a16:creationId xmlns:a16="http://schemas.microsoft.com/office/drawing/2014/main" id="{CFDA9C8C-4AF7-4241-9E87-EBCF43771EAB}"/>
               </a:ext>
             </a:extLst>
           </p:cNvPr>
@@ -9171,7 +9238,7 @@
           <p:cNvPr id="44" name="">
             <a:extLst xmlns:a="http://schemas.openxmlformats.org/drawingml/2006/main">
               <a:ext uri="{FF2B5EF4-FFF2-40B4-BE49-F238E27FC236}">
-                <a16:creationId xmlns:a16="http://schemas.microsoft.com/office/drawing/2014/main" id="{51048F62-3560-4EE1-BE9A-714B9172DD8D}"/>
+                <a16:creationId xmlns:a16="http://schemas.microsoft.com/office/drawing/2014/main" id="{52935EE8-A61F-4096-8585-A0F8E6B8FCB4}"/>
               </a:ext>
             </a:extLst>
           </p:cNvPr>
@@ -9204,7 +9271,7 @@
           <p:cNvPr id="45" name="">
             <a:extLst xmlns:a="http://schemas.openxmlformats.org/drawingml/2006/main">
               <a:ext uri="{FF2B5EF4-FFF2-40B4-BE49-F238E27FC236}">
-                <a16:creationId xmlns:a16="http://schemas.microsoft.com/office/drawing/2014/main" id="{FCD10EA8-85E4-46F4-B806-C6BB8B90D43F}"/>
+                <a16:creationId xmlns:a16="http://schemas.microsoft.com/office/drawing/2014/main" id="{FBE67EEF-4988-4447-AE71-3899FB0CF0F8}"/>
               </a:ext>
             </a:extLst>
           </p:cNvPr>
@@ -9268,7 +9335,7 @@
           <p:cNvPr id="46" name="">
             <a:extLst xmlns:a="http://schemas.openxmlformats.org/drawingml/2006/main">
               <a:ext uri="{FF2B5EF4-FFF2-40B4-BE49-F238E27FC236}">
-                <a16:creationId xmlns:a16="http://schemas.microsoft.com/office/drawing/2014/main" id="{C3B6AC7B-1705-4906-85B2-87AFB7B88089}"/>
+                <a16:creationId xmlns:a16="http://schemas.microsoft.com/office/drawing/2014/main" id="{4257D0C6-6FD7-40A1-8842-5BC2399FB7D2}"/>
               </a:ext>
             </a:extLst>
           </p:cNvPr>
@@ -9301,7 +9368,7 @@
           <p:cNvPr id="47" name="">
             <a:extLst xmlns:a="http://schemas.openxmlformats.org/drawingml/2006/main">
               <a:ext uri="{FF2B5EF4-FFF2-40B4-BE49-F238E27FC236}">
-                <a16:creationId xmlns:a16="http://schemas.microsoft.com/office/drawing/2014/main" id="{93D0FA4C-960D-4387-A81A-DE13E26C0324}"/>
+                <a16:creationId xmlns:a16="http://schemas.microsoft.com/office/drawing/2014/main" id="{F9AC247E-E663-4F7F-893F-AF2CF4FEABC3}"/>
               </a:ext>
             </a:extLst>
           </p:cNvPr>
@@ -9363,7 +9430,7 @@
     </p:spTree>
     <p:extLst>
       <p:ext uri="{BB962C8B-B14F-4D97-AF65-F5344CB8AC3E}">
-        <p14:creationId xmlns:p14="http://schemas.microsoft.com/office/powerpoint/2010/main" val="1838605184"/>
+        <p14:creationId xmlns:p14="http://schemas.microsoft.com/office/powerpoint/2010/main" val="1206360046"/>
       </p:ext>
     </p:extLst>
   </p:cSld>
@@ -9387,7 +9454,7 @@
           <p:cNvPr id="1" name="">
             <a:extLst xmlns:a="http://schemas.openxmlformats.org/drawingml/2006/main">
               <a:ext uri="{FF2B5EF4-FFF2-40B4-BE49-F238E27FC236}">
-                <a16:creationId xmlns:a16="http://schemas.microsoft.com/office/drawing/2014/main" id="{2CE3708F-2B22-44E3-8029-F8890B4B7573}"/>
+                <a16:creationId xmlns:a16="http://schemas.microsoft.com/office/drawing/2014/main" id="{3C984750-C571-4F67-9BCE-897DB198D6D1}"/>
               </a:ext>
             </a:extLst>
           </p:cNvPr>
@@ -9422,7 +9489,7 @@
           <p:cNvPr id="2" name="">
             <a:extLst xmlns:a="http://schemas.openxmlformats.org/drawingml/2006/main">
               <a:ext uri="{FF2B5EF4-FFF2-40B4-BE49-F238E27FC236}">
-                <a16:creationId xmlns:a16="http://schemas.microsoft.com/office/drawing/2014/main" id="{40F176E3-E6BE-498C-B309-0A2B9EBEC253}"/>
+                <a16:creationId xmlns:a16="http://schemas.microsoft.com/office/drawing/2014/main" id="{36C18E5E-53BC-41E6-9670-DFAB85CD7D43}"/>
               </a:ext>
             </a:extLst>
           </p:cNvPr>
@@ -9457,7 +9524,7 @@
           <p:cNvPr id="3" name="">
             <a:extLst xmlns:a="http://schemas.openxmlformats.org/drawingml/2006/main">
               <a:ext uri="{FF2B5EF4-FFF2-40B4-BE49-F238E27FC236}">
-                <a16:creationId xmlns:a16="http://schemas.microsoft.com/office/drawing/2014/main" id="{F3A54FD5-D742-40AB-9A34-57F9A86BDF8D}"/>
+                <a16:creationId xmlns:a16="http://schemas.microsoft.com/office/drawing/2014/main" id="{2C9A41D0-6048-4C05-84DE-D56EDCD080C4}"/>
               </a:ext>
             </a:extLst>
           </p:cNvPr>
@@ -9521,7 +9588,7 @@
           <p:cNvPr id="4" name="">
             <a:extLst xmlns:a="http://schemas.openxmlformats.org/drawingml/2006/main">
               <a:ext uri="{FF2B5EF4-FFF2-40B4-BE49-F238E27FC236}">
-                <a16:creationId xmlns:a16="http://schemas.microsoft.com/office/drawing/2014/main" id="{DEE95CEF-01F8-4013-AE15-45C32CCE7D48}"/>
+                <a16:creationId xmlns:a16="http://schemas.microsoft.com/office/drawing/2014/main" id="{537CDD5C-B54B-42A4-BB88-075F3192AF73}"/>
               </a:ext>
             </a:extLst>
           </p:cNvPr>
@@ -9575,7 +9642,7 @@
                 <a:ea typeface="Arial"/>
                 <a:cs typeface="Arial"/>
               </a:rPr>
-              <a:t>Contribuição funcional, limite físico claro</a:t>
+              <a:t>Conclusão e limites</a:t>
             </a:r>
           </a:p>
         </p:txBody>
@@ -9585,7 +9652,7 @@
           <p:cNvPr id="5" name="">
             <a:extLst xmlns:a="http://schemas.openxmlformats.org/drawingml/2006/main">
               <a:ext uri="{FF2B5EF4-FFF2-40B4-BE49-F238E27FC236}">
-                <a16:creationId xmlns:a16="http://schemas.microsoft.com/office/drawing/2014/main" id="{BA4B4B71-EF3A-4ACB-B619-55B7147E39CE}"/>
+                <a16:creationId xmlns:a16="http://schemas.microsoft.com/office/drawing/2014/main" id="{BA7EC0FC-584A-40FE-A670-508D976C6E58}"/>
               </a:ext>
             </a:extLst>
           </p:cNvPr>
@@ -9639,7 +9706,7 @@
                 <a:ea typeface="Arial"/>
                 <a:cs typeface="Arial"/>
               </a:rPr>
-              <a:t>O protótipo valida o fluxo de software e separa o que ainda depende de uma implantação física ampliada.</a:t>
+              <a:t>O resultado defendido é a validação funcional do fluxo de software, não o desempenho físico do RFID.</a:t>
             </a:r>
           </a:p>
         </p:txBody>
@@ -9649,7 +9716,7 @@
           <p:cNvPr id="6" name="">
             <a:extLst xmlns:a="http://schemas.openxmlformats.org/drawingml/2006/main">
               <a:ext uri="{FF2B5EF4-FFF2-40B4-BE49-F238E27FC236}">
-                <a16:creationId xmlns:a16="http://schemas.microsoft.com/office/drawing/2014/main" id="{42221B00-F0E6-4693-BB40-5253B6BC0E5A}"/>
+                <a16:creationId xmlns:a16="http://schemas.microsoft.com/office/drawing/2014/main" id="{5860ED9F-9F3C-4C8B-ACCA-C3078F84858C}"/>
               </a:ext>
             </a:extLst>
           </p:cNvPr>
@@ -9684,7 +9751,7 @@
           <p:cNvPr id="7" name="">
             <a:extLst xmlns:a="http://schemas.openxmlformats.org/drawingml/2006/main">
               <a:ext uri="{FF2B5EF4-FFF2-40B4-BE49-F238E27FC236}">
-                <a16:creationId xmlns:a16="http://schemas.microsoft.com/office/drawing/2014/main" id="{A296D4FD-734F-4EBE-B9E7-C3D78967FB97}"/>
+                <a16:creationId xmlns:a16="http://schemas.microsoft.com/office/drawing/2014/main" id="{5A195216-6984-47E0-849A-89CB3B61D23B}"/>
               </a:ext>
             </a:extLst>
           </p:cNvPr>
@@ -9738,7 +9805,7 @@
                 <a:ea typeface="Arial"/>
                 <a:cs typeface="Arial"/>
               </a:rPr>
-              <a:t>Eventos RFID são transformados em evidências para auditoria patrimonial.</a:t>
+              <a:t>O protótipo integra cadastro patrimonial, eventos RFID, API, auditoria, histórico e inconsistências.</a:t>
             </a:r>
           </a:p>
         </p:txBody>
@@ -9748,7 +9815,7 @@
           <p:cNvPr id="8" name="">
             <a:extLst xmlns:a="http://schemas.openxmlformats.org/drawingml/2006/main">
               <a:ext uri="{FF2B5EF4-FFF2-40B4-BE49-F238E27FC236}">
-                <a16:creationId xmlns:a16="http://schemas.microsoft.com/office/drawing/2014/main" id="{16D759BF-D1F6-4BE5-8DCF-ADF49B306787}"/>
+                <a16:creationId xmlns:a16="http://schemas.microsoft.com/office/drawing/2014/main" id="{3871BA3C-546E-491E-ABF6-24F04531D119}"/>
               </a:ext>
             </a:extLst>
           </p:cNvPr>
@@ -9783,7 +9850,7 @@
           <p:cNvPr id="9" name="">
             <a:extLst xmlns:a="http://schemas.openxmlformats.org/drawingml/2006/main">
               <a:ext uri="{FF2B5EF4-FFF2-40B4-BE49-F238E27FC236}">
-                <a16:creationId xmlns:a16="http://schemas.microsoft.com/office/drawing/2014/main" id="{5E6CE96A-2BF9-422C-9C12-0E4877A06351}"/>
+                <a16:creationId xmlns:a16="http://schemas.microsoft.com/office/drawing/2014/main" id="{AC194520-8EC2-492F-BFEA-5AD81B91ECBE}"/>
               </a:ext>
             </a:extLst>
           </p:cNvPr>
@@ -9837,7 +9904,7 @@
                 <a:ea typeface="Arial"/>
                 <a:cs typeface="Arial"/>
               </a:rPr>
-              <a:t>A validação confirmou regras do software em cenário controlado, incluindo o registro de inconsistências.</a:t>
+              <a:t>Os testes confirmaram que leituras e cenários controlados geram consequências rastreáveis no sistema.</a:t>
             </a:r>
           </a:p>
         </p:txBody>
@@ -9847,7 +9914,7 @@
           <p:cNvPr id="10" name="">
             <a:extLst xmlns:a="http://schemas.openxmlformats.org/drawingml/2006/main">
               <a:ext uri="{FF2B5EF4-FFF2-40B4-BE49-F238E27FC236}">
-                <a16:creationId xmlns:a16="http://schemas.microsoft.com/office/drawing/2014/main" id="{64105BDE-4BF5-40F3-A9AB-B223D5BA749E}"/>
+                <a16:creationId xmlns:a16="http://schemas.microsoft.com/office/drawing/2014/main" id="{581DFD23-21CA-4449-A1F2-11B7AC60C0A6}"/>
               </a:ext>
             </a:extLst>
           </p:cNvPr>
@@ -9882,7 +9949,7 @@
           <p:cNvPr id="11" name="">
             <a:extLst xmlns:a="http://schemas.openxmlformats.org/drawingml/2006/main">
               <a:ext uri="{FF2B5EF4-FFF2-40B4-BE49-F238E27FC236}">
-                <a16:creationId xmlns:a16="http://schemas.microsoft.com/office/drawing/2014/main" id="{64A12F8D-FA4B-471E-AE10-6CE3E7B1E748}"/>
+                <a16:creationId xmlns:a16="http://schemas.microsoft.com/office/drawing/2014/main" id="{3CC8A168-7299-4A22-BF11-6BB4F7BB7226}"/>
               </a:ext>
             </a:extLst>
           </p:cNvPr>
@@ -9936,7 +10003,7 @@
                 <a:ea typeface="Arial"/>
                 <a:cs typeface="Arial"/>
               </a:rPr>
-              <a:t>Não foi validada uma instalação real com múltiplos leitores físicos por ambiente.</a:t>
+              <a:t>Não foram avaliados alcance, leitura simultânea, interferência ambiental ou operação institucional em escala.</a:t>
             </a:r>
           </a:p>
         </p:txBody>
@@ -9946,7 +10013,7 @@
           <p:cNvPr id="12" name="">
             <a:extLst xmlns:a="http://schemas.openxmlformats.org/drawingml/2006/main">
               <a:ext uri="{FF2B5EF4-FFF2-40B4-BE49-F238E27FC236}">
-                <a16:creationId xmlns:a16="http://schemas.microsoft.com/office/drawing/2014/main" id="{B8A4E362-4D37-4FCD-9605-32C76C576DB1}"/>
+                <a16:creationId xmlns:a16="http://schemas.microsoft.com/office/drawing/2014/main" id="{53618550-D416-4509-9543-DAFE9D30DF04}"/>
               </a:ext>
             </a:extLst>
           </p:cNvPr>
@@ -9979,7 +10046,7 @@
           <p:cNvPr id="13" name="">
             <a:extLst xmlns:a="http://schemas.openxmlformats.org/drawingml/2006/main">
               <a:ext uri="{FF2B5EF4-FFF2-40B4-BE49-F238E27FC236}">
-                <a16:creationId xmlns:a16="http://schemas.microsoft.com/office/drawing/2014/main" id="{62405515-CABE-4DB0-A353-B09D7191DE78}"/>
+                <a16:creationId xmlns:a16="http://schemas.microsoft.com/office/drawing/2014/main" id="{44B74785-4921-4F55-823E-8B9C9ACECB04}"/>
               </a:ext>
             </a:extLst>
           </p:cNvPr>
@@ -10043,7 +10110,7 @@
           <p:cNvPr id="14" name="">
             <a:extLst xmlns:a="http://schemas.openxmlformats.org/drawingml/2006/main">
               <a:ext uri="{FF2B5EF4-FFF2-40B4-BE49-F238E27FC236}">
-                <a16:creationId xmlns:a16="http://schemas.microsoft.com/office/drawing/2014/main" id="{89BCC131-0A89-418E-95EA-78780DED35FE}"/>
+                <a16:creationId xmlns:a16="http://schemas.microsoft.com/office/drawing/2014/main" id="{C48A4087-5AF1-432B-90AE-1CDC76F90924}"/>
               </a:ext>
             </a:extLst>
           </p:cNvPr>
@@ -10097,7 +10164,7 @@
                 <a:ea typeface="Arial"/>
                 <a:cs typeface="Arial"/>
               </a:rPr>
-              <a:t>comparação entre inventário esperado e leitura detectada</a:t>
+              <a:t>comparação entre inventário esperado e observado</a:t>
             </a:r>
           </a:p>
         </p:txBody>
@@ -10107,7 +10174,7 @@
           <p:cNvPr id="15" name="">
             <a:extLst xmlns:a="http://schemas.openxmlformats.org/drawingml/2006/main">
               <a:ext uri="{FF2B5EF4-FFF2-40B4-BE49-F238E27FC236}">
-                <a16:creationId xmlns:a16="http://schemas.microsoft.com/office/drawing/2014/main" id="{5ADF6CBA-099A-4FF1-9891-6F8F37C41C9F}"/>
+                <a16:creationId xmlns:a16="http://schemas.microsoft.com/office/drawing/2014/main" id="{BBBE75CF-10DC-41D6-A254-EDAFF9F40855}"/>
               </a:ext>
             </a:extLst>
           </p:cNvPr>
@@ -10140,7 +10207,7 @@
           <p:cNvPr id="16" name="">
             <a:extLst xmlns:a="http://schemas.openxmlformats.org/drawingml/2006/main">
               <a:ext uri="{FF2B5EF4-FFF2-40B4-BE49-F238E27FC236}">
-                <a16:creationId xmlns:a16="http://schemas.microsoft.com/office/drawing/2014/main" id="{1445FCF7-87E6-4103-A045-D38FF8F95D6D}"/>
+                <a16:creationId xmlns:a16="http://schemas.microsoft.com/office/drawing/2014/main" id="{9FEBB12D-6CDC-4BE5-8D3A-6CFE8E2710ED}"/>
               </a:ext>
             </a:extLst>
           </p:cNvPr>
@@ -10204,7 +10271,7 @@
           <p:cNvPr id="17" name="">
             <a:extLst xmlns:a="http://schemas.openxmlformats.org/drawingml/2006/main">
               <a:ext uri="{FF2B5EF4-FFF2-40B4-BE49-F238E27FC236}">
-                <a16:creationId xmlns:a16="http://schemas.microsoft.com/office/drawing/2014/main" id="{5C0B16CB-F701-42CD-A290-B16325CE36ED}"/>
+                <a16:creationId xmlns:a16="http://schemas.microsoft.com/office/drawing/2014/main" id="{82DE7E5A-E09A-4FFC-837E-DE947B46204D}"/>
               </a:ext>
             </a:extLst>
           </p:cNvPr>
@@ -10268,7 +10335,7 @@
           <p:cNvPr id="18" name="">
             <a:extLst xmlns:a="http://schemas.openxmlformats.org/drawingml/2006/main">
               <a:ext uri="{FF2B5EF4-FFF2-40B4-BE49-F238E27FC236}">
-                <a16:creationId xmlns:a16="http://schemas.microsoft.com/office/drawing/2014/main" id="{48E75F7D-AFF8-40BE-8C92-C951C23FFBD1}"/>
+                <a16:creationId xmlns:a16="http://schemas.microsoft.com/office/drawing/2014/main" id="{9340EABE-8270-44E5-9D8C-A231001FB362}"/>
               </a:ext>
             </a:extLst>
           </p:cNvPr>
@@ -10301,7 +10368,7 @@
           <p:cNvPr id="19" name="">
             <a:extLst xmlns:a="http://schemas.openxmlformats.org/drawingml/2006/main">
               <a:ext uri="{FF2B5EF4-FFF2-40B4-BE49-F238E27FC236}">
-                <a16:creationId xmlns:a16="http://schemas.microsoft.com/office/drawing/2014/main" id="{21FD7851-50EE-4A78-9DFD-20BAF5653E0A}"/>
+                <a16:creationId xmlns:a16="http://schemas.microsoft.com/office/drawing/2014/main" id="{2BE3C22C-5BE2-45B0-93B5-41EFA6D4E643}"/>
               </a:ext>
             </a:extLst>
           </p:cNvPr>
@@ -10355,7 +10422,7 @@
                 <a:ea typeface="Arial"/>
                 <a:cs typeface="Arial"/>
               </a:rPr>
-              <a:t>Futuro</a:t>
+              <a:t>Continuidade</a:t>
             </a:r>
           </a:p>
         </p:txBody>
@@ -10365,7 +10432,7 @@
           <p:cNvPr id="20" name="">
             <a:extLst xmlns:a="http://schemas.openxmlformats.org/drawingml/2006/main">
               <a:ext uri="{FF2B5EF4-FFF2-40B4-BE49-F238E27FC236}">
-                <a16:creationId xmlns:a16="http://schemas.microsoft.com/office/drawing/2014/main" id="{1BB0B4DF-3933-4724-AD5A-C11F5540E453}"/>
+                <a16:creationId xmlns:a16="http://schemas.microsoft.com/office/drawing/2014/main" id="{5D39F84B-8E17-4E05-B5B2-785CAAE71E02}"/>
               </a:ext>
             </a:extLst>
           </p:cNvPr>
@@ -10419,7 +10486,7 @@
                 <a:ea typeface="Arial"/>
                 <a:cs typeface="Arial"/>
               </a:rPr>
-              <a:t>múltiplos leitores físicos, sensores, antenas e mais tags</a:t>
+              <a:t>múltiplas tags, sensores físicos e antenas de maior alcance</a:t>
             </a:r>
           </a:p>
         </p:txBody>
@@ -10427,7 +10494,7 @@
     </p:spTree>
     <p:extLst>
       <p:ext uri="{BB962C8B-B14F-4D97-AF65-F5344CB8AC3E}">
-        <p14:creationId xmlns:p14="http://schemas.microsoft.com/office/powerpoint/2010/main" val="1275217618"/>
+        <p14:creationId xmlns:p14="http://schemas.microsoft.com/office/powerpoint/2010/main" val="1479348471"/>
       </p:ext>
     </p:extLst>
   </p:cSld>
@@ -10451,7 +10518,7 @@
           <p:cNvPr id="1" name="">
             <a:extLst xmlns:a="http://schemas.openxmlformats.org/drawingml/2006/main">
               <a:ext uri="{FF2B5EF4-FFF2-40B4-BE49-F238E27FC236}">
-                <a16:creationId xmlns:a16="http://schemas.microsoft.com/office/drawing/2014/main" id="{D08E781B-B35A-4D68-BB4B-0D12925DB8E7}"/>
+                <a16:creationId xmlns:a16="http://schemas.microsoft.com/office/drawing/2014/main" id="{49991952-7C0D-4F67-AF57-603AC4D30083}"/>
               </a:ext>
             </a:extLst>
           </p:cNvPr>
@@ -10486,7 +10553,7 @@
           <p:cNvPr id="2" name="">
             <a:extLst xmlns:a="http://schemas.openxmlformats.org/drawingml/2006/main">
               <a:ext uri="{FF2B5EF4-FFF2-40B4-BE49-F238E27FC236}">
-                <a16:creationId xmlns:a16="http://schemas.microsoft.com/office/drawing/2014/main" id="{56A9B004-A220-4A27-B03B-B544074DBF18}"/>
+                <a16:creationId xmlns:a16="http://schemas.microsoft.com/office/drawing/2014/main" id="{C51C6035-8100-44D1-9E4B-A19BECFDEFD5}"/>
               </a:ext>
             </a:extLst>
           </p:cNvPr>
@@ -10521,7 +10588,7 @@
           <p:cNvPr id="3" name="">
             <a:extLst xmlns:a="http://schemas.openxmlformats.org/drawingml/2006/main">
               <a:ext uri="{FF2B5EF4-FFF2-40B4-BE49-F238E27FC236}">
-                <a16:creationId xmlns:a16="http://schemas.microsoft.com/office/drawing/2014/main" id="{34C2DC52-A0F5-4815-8471-9E1BAB2BAB2F}"/>
+                <a16:creationId xmlns:a16="http://schemas.microsoft.com/office/drawing/2014/main" id="{A8CB3459-F07E-4C13-BA65-8E41EE3BD548}"/>
               </a:ext>
             </a:extLst>
           </p:cNvPr>
@@ -10585,18 +10652,18 @@
           <p:cNvPr id="4" name="">
             <a:extLst xmlns:a="http://schemas.openxmlformats.org/drawingml/2006/main">
               <a:ext uri="{FF2B5EF4-FFF2-40B4-BE49-F238E27FC236}">
-                <a16:creationId xmlns:a16="http://schemas.microsoft.com/office/drawing/2014/main" id="{A738FC8F-7C08-4B5F-833C-3480953A2026}"/>
-              </a:ext>
-            </a:extLst>
-          </p:cNvPr>
-          <p:cNvSpPr>
-            <a:spLocks xmlns:a="http://schemas.openxmlformats.org/drawingml/2006/main" noGrp="1"/>
-          </p:cNvSpPr>
-          <p:nvPr/>
-        </p:nvSpPr>
-        <p:spPr>
-          <a:xfrm xmlns:a="http://schemas.openxmlformats.org/drawingml/2006/main">
-            <a:off x="723900" y="838200"/>
+                <a16:creationId xmlns:a16="http://schemas.microsoft.com/office/drawing/2014/main" id="{B4E7BCAF-3258-43E2-A51A-FED00B4EAD06}"/>
+              </a:ext>
+            </a:extLst>
+          </p:cNvPr>
+          <p:cNvSpPr>
+            <a:spLocks xmlns:a="http://schemas.openxmlformats.org/drawingml/2006/main" noGrp="1"/>
+          </p:cNvSpPr>
+          <p:nvPr/>
+        </p:nvSpPr>
+        <p:spPr>
+          <a:xfrm xmlns:a="http://schemas.openxmlformats.org/drawingml/2006/main">
+            <a:off x="723900" y="552450"/>
             <a:ext cx="10287000" cy="1047750"/>
           </a:xfrm>
           <a:prstGeom xmlns:a="http://schemas.openxmlformats.org/drawingml/2006/main" prst="rect">
@@ -10639,6 +10706,1169 @@
                 <a:ea typeface="Arial"/>
                 <a:cs typeface="Arial"/>
               </a:rPr>
+              <a:t>Melhorias futuras</a:t>
+            </a:r>
+          </a:p>
+        </p:txBody>
+      </p:sp>
+      <p:sp>
+        <p:nvSpPr>
+          <p:cNvPr id="5" name="">
+            <a:extLst xmlns:a="http://schemas.openxmlformats.org/drawingml/2006/main">
+              <a:ext uri="{FF2B5EF4-FFF2-40B4-BE49-F238E27FC236}">
+                <a16:creationId xmlns:a16="http://schemas.microsoft.com/office/drawing/2014/main" id="{B9BEEF35-B681-44E7-9C79-E7A9852CF5C2}"/>
+              </a:ext>
+            </a:extLst>
+          </p:cNvPr>
+          <p:cNvSpPr>
+            <a:spLocks xmlns:a="http://schemas.openxmlformats.org/drawingml/2006/main" noGrp="1"/>
+          </p:cNvSpPr>
+          <p:nvPr/>
+        </p:nvSpPr>
+        <p:spPr>
+          <a:xfrm xmlns:a="http://schemas.openxmlformats.org/drawingml/2006/main">
+            <a:off x="742950" y="1200150"/>
+            <a:ext cx="9334500" cy="438150"/>
+          </a:xfrm>
+          <a:prstGeom xmlns:a="http://schemas.openxmlformats.org/drawingml/2006/main" prst="rect">
+            <a:avLst/>
+          </a:prstGeom>
+          <a:solidFill xmlns:a="http://schemas.openxmlformats.org/drawingml/2006/main">
+            <a:srgbClr val="000000">
+              <a:alpha val="0"/>
+            </a:srgbClr>
+          </a:solidFill>
+          <a:ln xmlns:a="http://schemas.openxmlformats.org/drawingml/2006/main" w="0">
+            <a:solidFill>
+              <a:srgbClr val="000000">
+                <a:alpha val="0"/>
+              </a:srgbClr>
+            </a:solidFill>
+            <a:prstDash val="solid"/>
+          </a:ln>
+        </p:spPr>
+        <p:txBody>
+          <a:bodyPr xmlns:a="http://schemas.openxmlformats.org/drawingml/2006/main" lIns="0" tIns="0" rIns="0" bIns="0" anchor="t"/>
+          <a:lstStyle xmlns:a="http://schemas.openxmlformats.org/drawingml/2006/main"/>
+          <a:p xmlns:a="http://schemas.openxmlformats.org/drawingml/2006/main">
+            <a:pPr algn="l">
+              <a:defRPr sz="1500" b="0">
+                <a:solidFill>
+                  <a:srgbClr val="51606F"/>
+                </a:solidFill>
+                <a:latin typeface="Arial"/>
+                <a:ea typeface="Arial"/>
+                <a:cs typeface="Arial"/>
+              </a:defRPr>
+            </a:pPr>
+            <a:r>
+              <a:rPr sz="1500" b="0">
+                <a:solidFill>
+                  <a:srgbClr val="51606F"/>
+                </a:solidFill>
+                <a:latin typeface="Arial"/>
+                <a:ea typeface="Arial"/>
+                <a:cs typeface="Arial"/>
+              </a:rPr>
+              <a:t>As melhorias futuras partem dos limites assumidos na validação e ampliam o protótipo para uso mais próximo de uma operação real.</a:t>
+            </a:r>
+          </a:p>
+        </p:txBody>
+      </p:sp>
+      <p:sp>
+        <p:nvSpPr>
+          <p:cNvPr id="6" name="">
+            <a:extLst xmlns:a="http://schemas.openxmlformats.org/drawingml/2006/main">
+              <a:ext uri="{FF2B5EF4-FFF2-40B4-BE49-F238E27FC236}">
+                <a16:creationId xmlns:a16="http://schemas.microsoft.com/office/drawing/2014/main" id="{EFE2AEC4-96E7-4891-8489-3C9E72657F93}"/>
+              </a:ext>
+            </a:extLst>
+          </p:cNvPr>
+          <p:cNvSpPr>
+            <a:spLocks xmlns:a="http://schemas.openxmlformats.org/drawingml/2006/main" noGrp="1"/>
+          </p:cNvSpPr>
+          <p:nvPr/>
+        </p:nvSpPr>
+        <p:spPr>
+          <a:xfrm xmlns:a="http://schemas.openxmlformats.org/drawingml/2006/main">
+            <a:off x="800100" y="2400300"/>
+            <a:ext cx="133350" cy="133350"/>
+          </a:xfrm>
+          <a:prstGeom xmlns:a="http://schemas.openxmlformats.org/drawingml/2006/main" prst="ellipse">
+            <a:avLst/>
+          </a:prstGeom>
+          <a:solidFill xmlns:a="http://schemas.openxmlformats.org/drawingml/2006/main">
+            <a:srgbClr val="0E7A4F"/>
+          </a:solidFill>
+          <a:ln xmlns:a="http://schemas.openxmlformats.org/drawingml/2006/main" w="0">
+            <a:solidFill>
+              <a:srgbClr val="000000">
+                <a:alpha val="0"/>
+              </a:srgbClr>
+            </a:solidFill>
+            <a:prstDash val="solid"/>
+          </a:ln>
+        </p:spPr>
+      </p:sp>
+      <p:sp>
+        <p:nvSpPr>
+          <p:cNvPr id="7" name="">
+            <a:extLst xmlns:a="http://schemas.openxmlformats.org/drawingml/2006/main">
+              <a:ext uri="{FF2B5EF4-FFF2-40B4-BE49-F238E27FC236}">
+                <a16:creationId xmlns:a16="http://schemas.microsoft.com/office/drawing/2014/main" id="{B411DFE4-F296-4C33-ADA4-3F53CAAD19D6}"/>
+              </a:ext>
+            </a:extLst>
+          </p:cNvPr>
+          <p:cNvSpPr>
+            <a:spLocks xmlns:a="http://schemas.openxmlformats.org/drawingml/2006/main" noGrp="1"/>
+          </p:cNvSpPr>
+          <p:nvPr/>
+        </p:nvSpPr>
+        <p:spPr>
+          <a:xfrm xmlns:a="http://schemas.openxmlformats.org/drawingml/2006/main">
+            <a:off x="1066800" y="2324100"/>
+            <a:ext cx="4953000" cy="609600"/>
+          </a:xfrm>
+          <a:prstGeom xmlns:a="http://schemas.openxmlformats.org/drawingml/2006/main" prst="rect">
+            <a:avLst/>
+          </a:prstGeom>
+          <a:solidFill xmlns:a="http://schemas.openxmlformats.org/drawingml/2006/main">
+            <a:srgbClr val="000000">
+              <a:alpha val="0"/>
+            </a:srgbClr>
+          </a:solidFill>
+          <a:ln xmlns:a="http://schemas.openxmlformats.org/drawingml/2006/main" w="0">
+            <a:solidFill>
+              <a:srgbClr val="000000">
+                <a:alpha val="0"/>
+              </a:srgbClr>
+            </a:solidFill>
+            <a:prstDash val="solid"/>
+          </a:ln>
+        </p:spPr>
+        <p:txBody>
+          <a:bodyPr xmlns:a="http://schemas.openxmlformats.org/drawingml/2006/main" lIns="0" tIns="0" rIns="0" bIns="0" anchor="t"/>
+          <a:lstStyle xmlns:a="http://schemas.openxmlformats.org/drawingml/2006/main"/>
+          <a:p xmlns:a="http://schemas.openxmlformats.org/drawingml/2006/main">
+            <a:pPr algn="l">
+              <a:defRPr sz="1725" b="0">
+                <a:solidFill>
+                  <a:srgbClr val="17202A"/>
+                </a:solidFill>
+                <a:latin typeface="Arial"/>
+                <a:ea typeface="Arial"/>
+                <a:cs typeface="Arial"/>
+              </a:defRPr>
+            </a:pPr>
+            <a:r>
+              <a:rPr sz="1725" b="0">
+                <a:solidFill>
+                  <a:srgbClr val="17202A"/>
+                </a:solidFill>
+                <a:latin typeface="Arial"/>
+                <a:ea typeface="Arial"/>
+                <a:cs typeface="Arial"/>
+              </a:rPr>
+              <a:t>Testar múltiplas tags e leitores RFID físicos em ambientes reais do colegiado.</a:t>
+            </a:r>
+          </a:p>
+        </p:txBody>
+      </p:sp>
+      <p:sp>
+        <p:nvSpPr>
+          <p:cNvPr id="8" name="">
+            <a:extLst xmlns:a="http://schemas.openxmlformats.org/drawingml/2006/main">
+              <a:ext uri="{FF2B5EF4-FFF2-40B4-BE49-F238E27FC236}">
+                <a16:creationId xmlns:a16="http://schemas.microsoft.com/office/drawing/2014/main" id="{F9A7DE85-4D81-40A9-9206-C8AC6643BEF3}"/>
+              </a:ext>
+            </a:extLst>
+          </p:cNvPr>
+          <p:cNvSpPr>
+            <a:spLocks xmlns:a="http://schemas.openxmlformats.org/drawingml/2006/main" noGrp="1"/>
+          </p:cNvSpPr>
+          <p:nvPr/>
+        </p:nvSpPr>
+        <p:spPr>
+          <a:xfrm xmlns:a="http://schemas.openxmlformats.org/drawingml/2006/main">
+            <a:off x="800100" y="3276600"/>
+            <a:ext cx="133350" cy="133350"/>
+          </a:xfrm>
+          <a:prstGeom xmlns:a="http://schemas.openxmlformats.org/drawingml/2006/main" prst="ellipse">
+            <a:avLst/>
+          </a:prstGeom>
+          <a:solidFill xmlns:a="http://schemas.openxmlformats.org/drawingml/2006/main">
+            <a:srgbClr val="0E7A4F"/>
+          </a:solidFill>
+          <a:ln xmlns:a="http://schemas.openxmlformats.org/drawingml/2006/main" w="0">
+            <a:solidFill>
+              <a:srgbClr val="000000">
+                <a:alpha val="0"/>
+              </a:srgbClr>
+            </a:solidFill>
+            <a:prstDash val="solid"/>
+          </a:ln>
+        </p:spPr>
+      </p:sp>
+      <p:sp>
+        <p:nvSpPr>
+          <p:cNvPr id="9" name="">
+            <a:extLst xmlns:a="http://schemas.openxmlformats.org/drawingml/2006/main">
+              <a:ext uri="{FF2B5EF4-FFF2-40B4-BE49-F238E27FC236}">
+                <a16:creationId xmlns:a16="http://schemas.microsoft.com/office/drawing/2014/main" id="{77CE5ECD-61D0-41C2-853C-6CFBC106DFA2}"/>
+              </a:ext>
+            </a:extLst>
+          </p:cNvPr>
+          <p:cNvSpPr>
+            <a:spLocks xmlns:a="http://schemas.openxmlformats.org/drawingml/2006/main" noGrp="1"/>
+          </p:cNvSpPr>
+          <p:nvPr/>
+        </p:nvSpPr>
+        <p:spPr>
+          <a:xfrm xmlns:a="http://schemas.openxmlformats.org/drawingml/2006/main">
+            <a:off x="1066800" y="3200400"/>
+            <a:ext cx="4953000" cy="609600"/>
+          </a:xfrm>
+          <a:prstGeom xmlns:a="http://schemas.openxmlformats.org/drawingml/2006/main" prst="rect">
+            <a:avLst/>
+          </a:prstGeom>
+          <a:solidFill xmlns:a="http://schemas.openxmlformats.org/drawingml/2006/main">
+            <a:srgbClr val="000000">
+              <a:alpha val="0"/>
+            </a:srgbClr>
+          </a:solidFill>
+          <a:ln xmlns:a="http://schemas.openxmlformats.org/drawingml/2006/main" w="0">
+            <a:solidFill>
+              <a:srgbClr val="000000">
+                <a:alpha val="0"/>
+              </a:srgbClr>
+            </a:solidFill>
+            <a:prstDash val="solid"/>
+          </a:ln>
+        </p:spPr>
+        <p:txBody>
+          <a:bodyPr xmlns:a="http://schemas.openxmlformats.org/drawingml/2006/main" lIns="0" tIns="0" rIns="0" bIns="0" anchor="t"/>
+          <a:lstStyle xmlns:a="http://schemas.openxmlformats.org/drawingml/2006/main"/>
+          <a:p xmlns:a="http://schemas.openxmlformats.org/drawingml/2006/main">
+            <a:pPr algn="l">
+              <a:defRPr sz="1725" b="0">
+                <a:solidFill>
+                  <a:srgbClr val="17202A"/>
+                </a:solidFill>
+                <a:latin typeface="Arial"/>
+                <a:ea typeface="Arial"/>
+                <a:cs typeface="Arial"/>
+              </a:defRPr>
+            </a:pPr>
+            <a:r>
+              <a:rPr sz="1725" b="0">
+                <a:solidFill>
+                  <a:srgbClr val="17202A"/>
+                </a:solidFill>
+                <a:latin typeface="Arial"/>
+                <a:ea typeface="Arial"/>
+                <a:cs typeface="Arial"/>
+              </a:rPr>
+              <a:t>Avaliar alcance, leitura simultânea, interferência ambiental e taxa de leitura.</a:t>
+            </a:r>
+          </a:p>
+        </p:txBody>
+      </p:sp>
+      <p:sp>
+        <p:nvSpPr>
+          <p:cNvPr id="10" name="">
+            <a:extLst xmlns:a="http://schemas.openxmlformats.org/drawingml/2006/main">
+              <a:ext uri="{FF2B5EF4-FFF2-40B4-BE49-F238E27FC236}">
+                <a16:creationId xmlns:a16="http://schemas.microsoft.com/office/drawing/2014/main" id="{A6EF4353-16B2-4764-9D46-0DBDF6E32B9A}"/>
+              </a:ext>
+            </a:extLst>
+          </p:cNvPr>
+          <p:cNvSpPr>
+            <a:spLocks xmlns:a="http://schemas.openxmlformats.org/drawingml/2006/main" noGrp="1"/>
+          </p:cNvSpPr>
+          <p:nvPr/>
+        </p:nvSpPr>
+        <p:spPr>
+          <a:xfrm xmlns:a="http://schemas.openxmlformats.org/drawingml/2006/main">
+            <a:off x="800100" y="4152900"/>
+            <a:ext cx="133350" cy="133350"/>
+          </a:xfrm>
+          <a:prstGeom xmlns:a="http://schemas.openxmlformats.org/drawingml/2006/main" prst="ellipse">
+            <a:avLst/>
+          </a:prstGeom>
+          <a:solidFill xmlns:a="http://schemas.openxmlformats.org/drawingml/2006/main">
+            <a:srgbClr val="0E7A4F"/>
+          </a:solidFill>
+          <a:ln xmlns:a="http://schemas.openxmlformats.org/drawingml/2006/main" w="0">
+            <a:solidFill>
+              <a:srgbClr val="000000">
+                <a:alpha val="0"/>
+              </a:srgbClr>
+            </a:solidFill>
+            <a:prstDash val="solid"/>
+          </a:ln>
+        </p:spPr>
+      </p:sp>
+      <p:sp>
+        <p:nvSpPr>
+          <p:cNvPr id="11" name="">
+            <a:extLst xmlns:a="http://schemas.openxmlformats.org/drawingml/2006/main">
+              <a:ext uri="{FF2B5EF4-FFF2-40B4-BE49-F238E27FC236}">
+                <a16:creationId xmlns:a16="http://schemas.microsoft.com/office/drawing/2014/main" id="{5CB0E8AB-51EE-4E10-98AD-010707B5D7FF}"/>
+              </a:ext>
+            </a:extLst>
+          </p:cNvPr>
+          <p:cNvSpPr>
+            <a:spLocks xmlns:a="http://schemas.openxmlformats.org/drawingml/2006/main" noGrp="1"/>
+          </p:cNvSpPr>
+          <p:nvPr/>
+        </p:nvSpPr>
+        <p:spPr>
+          <a:xfrm xmlns:a="http://schemas.openxmlformats.org/drawingml/2006/main">
+            <a:off x="1066800" y="4076700"/>
+            <a:ext cx="4953000" cy="609600"/>
+          </a:xfrm>
+          <a:prstGeom xmlns:a="http://schemas.openxmlformats.org/drawingml/2006/main" prst="rect">
+            <a:avLst/>
+          </a:prstGeom>
+          <a:solidFill xmlns:a="http://schemas.openxmlformats.org/drawingml/2006/main">
+            <a:srgbClr val="000000">
+              <a:alpha val="0"/>
+            </a:srgbClr>
+          </a:solidFill>
+          <a:ln xmlns:a="http://schemas.openxmlformats.org/drawingml/2006/main" w="0">
+            <a:solidFill>
+              <a:srgbClr val="000000">
+                <a:alpha val="0"/>
+              </a:srgbClr>
+            </a:solidFill>
+            <a:prstDash val="solid"/>
+          </a:ln>
+        </p:spPr>
+        <p:txBody>
+          <a:bodyPr xmlns:a="http://schemas.openxmlformats.org/drawingml/2006/main" lIns="0" tIns="0" rIns="0" bIns="0" anchor="t"/>
+          <a:lstStyle xmlns:a="http://schemas.openxmlformats.org/drawingml/2006/main"/>
+          <a:p xmlns:a="http://schemas.openxmlformats.org/drawingml/2006/main">
+            <a:pPr algn="l">
+              <a:defRPr sz="1725" b="0">
+                <a:solidFill>
+                  <a:srgbClr val="17202A"/>
+                </a:solidFill>
+                <a:latin typeface="Arial"/>
+                <a:ea typeface="Arial"/>
+                <a:cs typeface="Arial"/>
+              </a:defRPr>
+            </a:pPr>
+            <a:r>
+              <a:rPr sz="1725" b="0">
+                <a:solidFill>
+                  <a:srgbClr val="17202A"/>
+                </a:solidFill>
+                <a:latin typeface="Arial"/>
+                <a:ea typeface="Arial"/>
+                <a:cs typeface="Arial"/>
+              </a:rPr>
+              <a:t>Integrar sensores ou gateways físicos ao fluxo de eventos já previsto na arquitetura.</a:t>
+            </a:r>
+          </a:p>
+        </p:txBody>
+      </p:sp>
+      <p:sp>
+        <p:nvSpPr>
+          <p:cNvPr id="12" name="">
+            <a:extLst xmlns:a="http://schemas.openxmlformats.org/drawingml/2006/main">
+              <a:ext uri="{FF2B5EF4-FFF2-40B4-BE49-F238E27FC236}">
+                <a16:creationId xmlns:a16="http://schemas.microsoft.com/office/drawing/2014/main" id="{C90FB0CA-7CCF-4915-BFE5-5ACC4750A008}"/>
+              </a:ext>
+            </a:extLst>
+          </p:cNvPr>
+          <p:cNvSpPr>
+            <a:spLocks xmlns:a="http://schemas.openxmlformats.org/drawingml/2006/main" noGrp="1"/>
+          </p:cNvSpPr>
+          <p:nvPr/>
+        </p:nvSpPr>
+        <p:spPr>
+          <a:xfrm xmlns:a="http://schemas.openxmlformats.org/drawingml/2006/main">
+            <a:off x="800100" y="5029200"/>
+            <a:ext cx="133350" cy="133350"/>
+          </a:xfrm>
+          <a:prstGeom xmlns:a="http://schemas.openxmlformats.org/drawingml/2006/main" prst="ellipse">
+            <a:avLst/>
+          </a:prstGeom>
+          <a:solidFill xmlns:a="http://schemas.openxmlformats.org/drawingml/2006/main">
+            <a:srgbClr val="0E7A4F"/>
+          </a:solidFill>
+          <a:ln xmlns:a="http://schemas.openxmlformats.org/drawingml/2006/main" w="0">
+            <a:solidFill>
+              <a:srgbClr val="000000">
+                <a:alpha val="0"/>
+              </a:srgbClr>
+            </a:solidFill>
+            <a:prstDash val="solid"/>
+          </a:ln>
+        </p:spPr>
+      </p:sp>
+      <p:sp>
+        <p:nvSpPr>
+          <p:cNvPr id="13" name="">
+            <a:extLst xmlns:a="http://schemas.openxmlformats.org/drawingml/2006/main">
+              <a:ext uri="{FF2B5EF4-FFF2-40B4-BE49-F238E27FC236}">
+                <a16:creationId xmlns:a16="http://schemas.microsoft.com/office/drawing/2014/main" id="{1A468FF1-E4CB-4C64-BE77-2366ACBEB72B}"/>
+              </a:ext>
+            </a:extLst>
+          </p:cNvPr>
+          <p:cNvSpPr>
+            <a:spLocks xmlns:a="http://schemas.openxmlformats.org/drawingml/2006/main" noGrp="1"/>
+          </p:cNvSpPr>
+          <p:nvPr/>
+        </p:nvSpPr>
+        <p:spPr>
+          <a:xfrm xmlns:a="http://schemas.openxmlformats.org/drawingml/2006/main">
+            <a:off x="1066800" y="4953000"/>
+            <a:ext cx="4953000" cy="609600"/>
+          </a:xfrm>
+          <a:prstGeom xmlns:a="http://schemas.openxmlformats.org/drawingml/2006/main" prst="rect">
+            <a:avLst/>
+          </a:prstGeom>
+          <a:solidFill xmlns:a="http://schemas.openxmlformats.org/drawingml/2006/main">
+            <a:srgbClr val="000000">
+              <a:alpha val="0"/>
+            </a:srgbClr>
+          </a:solidFill>
+          <a:ln xmlns:a="http://schemas.openxmlformats.org/drawingml/2006/main" w="0">
+            <a:solidFill>
+              <a:srgbClr val="000000">
+                <a:alpha val="0"/>
+              </a:srgbClr>
+            </a:solidFill>
+            <a:prstDash val="solid"/>
+          </a:ln>
+        </p:spPr>
+        <p:txBody>
+          <a:bodyPr xmlns:a="http://schemas.openxmlformats.org/drawingml/2006/main" lIns="0" tIns="0" rIns="0" bIns="0" anchor="t"/>
+          <a:lstStyle xmlns:a="http://schemas.openxmlformats.org/drawingml/2006/main"/>
+          <a:p xmlns:a="http://schemas.openxmlformats.org/drawingml/2006/main">
+            <a:pPr algn="l">
+              <a:defRPr sz="1725" b="0">
+                <a:solidFill>
+                  <a:srgbClr val="17202A"/>
+                </a:solidFill>
+                <a:latin typeface="Arial"/>
+                <a:ea typeface="Arial"/>
+                <a:cs typeface="Arial"/>
+              </a:defRPr>
+            </a:pPr>
+            <a:r>
+              <a:rPr sz="1725" b="0">
+                <a:solidFill>
+                  <a:srgbClr val="17202A"/>
+                </a:solidFill>
+                <a:latin typeface="Arial"/>
+                <a:ea typeface="Arial"/>
+                <a:cs typeface="Arial"/>
+              </a:rPr>
+              <a:t>Ampliar relatórios, filtros e trilhas de auditoria para apoiar decisões patrimoniais.</a:t>
+            </a:r>
+          </a:p>
+        </p:txBody>
+      </p:sp>
+      <p:sp>
+        <p:nvSpPr>
+          <p:cNvPr id="14" name="">
+            <a:extLst xmlns:a="http://schemas.openxmlformats.org/drawingml/2006/main">
+              <a:ext uri="{FF2B5EF4-FFF2-40B4-BE49-F238E27FC236}">
+                <a16:creationId xmlns:a16="http://schemas.microsoft.com/office/drawing/2014/main" id="{B5126F83-3A19-499B-9A60-271C619638D0}"/>
+              </a:ext>
+            </a:extLst>
+          </p:cNvPr>
+          <p:cNvSpPr>
+            <a:spLocks xmlns:a="http://schemas.openxmlformats.org/drawingml/2006/main" noGrp="1"/>
+          </p:cNvSpPr>
+          <p:nvPr/>
+        </p:nvSpPr>
+        <p:spPr>
+          <a:xfrm xmlns:a="http://schemas.openxmlformats.org/drawingml/2006/main">
+            <a:off x="6838950" y="2400300"/>
+            <a:ext cx="4000500" cy="723900"/>
+          </a:xfrm>
+          <a:prstGeom xmlns:a="http://schemas.openxmlformats.org/drawingml/2006/main" prst="rect">
+            <a:avLst/>
+          </a:prstGeom>
+          <a:solidFill xmlns:a="http://schemas.openxmlformats.org/drawingml/2006/main">
+            <a:srgbClr val="FFFFFF"/>
+          </a:solidFill>
+          <a:ln xmlns:a="http://schemas.openxmlformats.org/drawingml/2006/main" w="9525">
+            <a:solidFill>
+              <a:srgbClr val="D7DEE6"/>
+            </a:solidFill>
+            <a:prstDash val="solid"/>
+          </a:ln>
+        </p:spPr>
+      </p:sp>
+      <p:sp>
+        <p:nvSpPr>
+          <p:cNvPr id="15" name="">
+            <a:extLst xmlns:a="http://schemas.openxmlformats.org/drawingml/2006/main">
+              <a:ext uri="{FF2B5EF4-FFF2-40B4-BE49-F238E27FC236}">
+                <a16:creationId xmlns:a16="http://schemas.microsoft.com/office/drawing/2014/main" id="{AB293778-B128-4618-9E9B-ECF7F8DA31F8}"/>
+              </a:ext>
+            </a:extLst>
+          </p:cNvPr>
+          <p:cNvSpPr>
+            <a:spLocks xmlns:a="http://schemas.openxmlformats.org/drawingml/2006/main" noGrp="1"/>
+          </p:cNvSpPr>
+          <p:nvPr/>
+        </p:nvSpPr>
+        <p:spPr>
+          <a:xfrm xmlns:a="http://schemas.openxmlformats.org/drawingml/2006/main">
+            <a:off x="7086600" y="2505075"/>
+            <a:ext cx="3429000" cy="266700"/>
+          </a:xfrm>
+          <a:prstGeom xmlns:a="http://schemas.openxmlformats.org/drawingml/2006/main" prst="rect">
+            <a:avLst/>
+          </a:prstGeom>
+          <a:solidFill xmlns:a="http://schemas.openxmlformats.org/drawingml/2006/main">
+            <a:srgbClr val="000000">
+              <a:alpha val="0"/>
+            </a:srgbClr>
+          </a:solidFill>
+          <a:ln xmlns:a="http://schemas.openxmlformats.org/drawingml/2006/main" w="0">
+            <a:solidFill>
+              <a:srgbClr val="000000">
+                <a:alpha val="0"/>
+              </a:srgbClr>
+            </a:solidFill>
+            <a:prstDash val="solid"/>
+          </a:ln>
+        </p:spPr>
+        <p:txBody>
+          <a:bodyPr xmlns:a="http://schemas.openxmlformats.org/drawingml/2006/main" lIns="0" tIns="0" rIns="0" bIns="0" anchor="t"/>
+          <a:lstStyle xmlns:a="http://schemas.openxmlformats.org/drawingml/2006/main"/>
+          <a:p xmlns:a="http://schemas.openxmlformats.org/drawingml/2006/main">
+            <a:pPr algn="l">
+              <a:defRPr sz="1725" b="1">
+                <a:solidFill>
+                  <a:srgbClr val="075D3B"/>
+                </a:solidFill>
+                <a:latin typeface="Arial"/>
+                <a:ea typeface="Arial"/>
+                <a:cs typeface="Arial"/>
+              </a:defRPr>
+            </a:pPr>
+            <a:r>
+              <a:rPr sz="1725" b="1">
+                <a:solidFill>
+                  <a:srgbClr val="075D3B"/>
+                </a:solidFill>
+                <a:latin typeface="Arial"/>
+                <a:ea typeface="Arial"/>
+                <a:cs typeface="Arial"/>
+              </a:rPr>
+              <a:t>Escala física</a:t>
+            </a:r>
+          </a:p>
+        </p:txBody>
+      </p:sp>
+      <p:sp>
+        <p:nvSpPr>
+          <p:cNvPr id="16" name="">
+            <a:extLst xmlns:a="http://schemas.openxmlformats.org/drawingml/2006/main">
+              <a:ext uri="{FF2B5EF4-FFF2-40B4-BE49-F238E27FC236}">
+                <a16:creationId xmlns:a16="http://schemas.microsoft.com/office/drawing/2014/main" id="{777E2F10-0C24-4B00-B872-D6F40BF6DCEF}"/>
+              </a:ext>
+            </a:extLst>
+          </p:cNvPr>
+          <p:cNvSpPr>
+            <a:spLocks xmlns:a="http://schemas.openxmlformats.org/drawingml/2006/main" noGrp="1"/>
+          </p:cNvSpPr>
+          <p:nvPr/>
+        </p:nvSpPr>
+        <p:spPr>
+          <a:xfrm xmlns:a="http://schemas.openxmlformats.org/drawingml/2006/main">
+            <a:off x="7086600" y="2809875"/>
+            <a:ext cx="3333750" cy="228600"/>
+          </a:xfrm>
+          <a:prstGeom xmlns:a="http://schemas.openxmlformats.org/drawingml/2006/main" prst="rect">
+            <a:avLst/>
+          </a:prstGeom>
+          <a:solidFill xmlns:a="http://schemas.openxmlformats.org/drawingml/2006/main">
+            <a:srgbClr val="000000">
+              <a:alpha val="0"/>
+            </a:srgbClr>
+          </a:solidFill>
+          <a:ln xmlns:a="http://schemas.openxmlformats.org/drawingml/2006/main" w="0">
+            <a:solidFill>
+              <a:srgbClr val="000000">
+                <a:alpha val="0"/>
+              </a:srgbClr>
+            </a:solidFill>
+            <a:prstDash val="solid"/>
+          </a:ln>
+        </p:spPr>
+        <p:txBody>
+          <a:bodyPr xmlns:a="http://schemas.openxmlformats.org/drawingml/2006/main" lIns="0" tIns="0" rIns="0" bIns="0" anchor="t"/>
+          <a:lstStyle xmlns:a="http://schemas.openxmlformats.org/drawingml/2006/main"/>
+          <a:p xmlns:a="http://schemas.openxmlformats.org/drawingml/2006/main">
+            <a:pPr algn="l">
+              <a:defRPr sz="1350" b="0">
+                <a:solidFill>
+                  <a:srgbClr val="51606F"/>
+                </a:solidFill>
+                <a:latin typeface="Arial"/>
+                <a:ea typeface="Arial"/>
+                <a:cs typeface="Arial"/>
+              </a:defRPr>
+            </a:pPr>
+            <a:r>
+              <a:rPr sz="1350" b="0">
+                <a:solidFill>
+                  <a:srgbClr val="51606F"/>
+                </a:solidFill>
+                <a:latin typeface="Arial"/>
+                <a:ea typeface="Arial"/>
+                <a:cs typeface="Arial"/>
+              </a:rPr>
+              <a:t>testes com mais tags e leitores</a:t>
+            </a:r>
+          </a:p>
+        </p:txBody>
+      </p:sp>
+      <p:sp>
+        <p:nvSpPr>
+          <p:cNvPr id="17" name="">
+            <a:extLst xmlns:a="http://schemas.openxmlformats.org/drawingml/2006/main">
+              <a:ext uri="{FF2B5EF4-FFF2-40B4-BE49-F238E27FC236}">
+                <a16:creationId xmlns:a16="http://schemas.microsoft.com/office/drawing/2014/main" id="{80632953-F1A4-4DBE-A20C-3D1E3EF3BA94}"/>
+              </a:ext>
+            </a:extLst>
+          </p:cNvPr>
+          <p:cNvSpPr>
+            <a:spLocks xmlns:a="http://schemas.openxmlformats.org/drawingml/2006/main" noGrp="1"/>
+          </p:cNvSpPr>
+          <p:nvPr/>
+        </p:nvSpPr>
+        <p:spPr>
+          <a:xfrm xmlns:a="http://schemas.openxmlformats.org/drawingml/2006/main">
+            <a:off x="6838950" y="3390900"/>
+            <a:ext cx="4000500" cy="723900"/>
+          </a:xfrm>
+          <a:prstGeom xmlns:a="http://schemas.openxmlformats.org/drawingml/2006/main" prst="rect">
+            <a:avLst/>
+          </a:prstGeom>
+          <a:solidFill xmlns:a="http://schemas.openxmlformats.org/drawingml/2006/main">
+            <a:srgbClr val="FFFFFF"/>
+          </a:solidFill>
+          <a:ln xmlns:a="http://schemas.openxmlformats.org/drawingml/2006/main" w="9525">
+            <a:solidFill>
+              <a:srgbClr val="D7DEE6"/>
+            </a:solidFill>
+            <a:prstDash val="solid"/>
+          </a:ln>
+        </p:spPr>
+      </p:sp>
+      <p:sp>
+        <p:nvSpPr>
+          <p:cNvPr id="18" name="">
+            <a:extLst xmlns:a="http://schemas.openxmlformats.org/drawingml/2006/main">
+              <a:ext uri="{FF2B5EF4-FFF2-40B4-BE49-F238E27FC236}">
+                <a16:creationId xmlns:a16="http://schemas.microsoft.com/office/drawing/2014/main" id="{777D7E45-BCFB-480C-9DE0-7224C26A2EC9}"/>
+              </a:ext>
+            </a:extLst>
+          </p:cNvPr>
+          <p:cNvSpPr>
+            <a:spLocks xmlns:a="http://schemas.openxmlformats.org/drawingml/2006/main" noGrp="1"/>
+          </p:cNvSpPr>
+          <p:nvPr/>
+        </p:nvSpPr>
+        <p:spPr>
+          <a:xfrm xmlns:a="http://schemas.openxmlformats.org/drawingml/2006/main">
+            <a:off x="7086600" y="3495675"/>
+            <a:ext cx="3429000" cy="266700"/>
+          </a:xfrm>
+          <a:prstGeom xmlns:a="http://schemas.openxmlformats.org/drawingml/2006/main" prst="rect">
+            <a:avLst/>
+          </a:prstGeom>
+          <a:solidFill xmlns:a="http://schemas.openxmlformats.org/drawingml/2006/main">
+            <a:srgbClr val="000000">
+              <a:alpha val="0"/>
+            </a:srgbClr>
+          </a:solidFill>
+          <a:ln xmlns:a="http://schemas.openxmlformats.org/drawingml/2006/main" w="0">
+            <a:solidFill>
+              <a:srgbClr val="000000">
+                <a:alpha val="0"/>
+              </a:srgbClr>
+            </a:solidFill>
+            <a:prstDash val="solid"/>
+          </a:ln>
+        </p:spPr>
+        <p:txBody>
+          <a:bodyPr xmlns:a="http://schemas.openxmlformats.org/drawingml/2006/main" lIns="0" tIns="0" rIns="0" bIns="0" anchor="t"/>
+          <a:lstStyle xmlns:a="http://schemas.openxmlformats.org/drawingml/2006/main"/>
+          <a:p xmlns:a="http://schemas.openxmlformats.org/drawingml/2006/main">
+            <a:pPr algn="l">
+              <a:defRPr sz="1725" b="1">
+                <a:solidFill>
+                  <a:srgbClr val="075D3B"/>
+                </a:solidFill>
+                <a:latin typeface="Arial"/>
+                <a:ea typeface="Arial"/>
+                <a:cs typeface="Arial"/>
+              </a:defRPr>
+            </a:pPr>
+            <a:r>
+              <a:rPr sz="1725" b="1">
+                <a:solidFill>
+                  <a:srgbClr val="075D3B"/>
+                </a:solidFill>
+                <a:latin typeface="Arial"/>
+                <a:ea typeface="Arial"/>
+                <a:cs typeface="Arial"/>
+              </a:rPr>
+              <a:t>Medição técnica</a:t>
+            </a:r>
+          </a:p>
+        </p:txBody>
+      </p:sp>
+      <p:sp>
+        <p:nvSpPr>
+          <p:cNvPr id="19" name="">
+            <a:extLst xmlns:a="http://schemas.openxmlformats.org/drawingml/2006/main">
+              <a:ext uri="{FF2B5EF4-FFF2-40B4-BE49-F238E27FC236}">
+                <a16:creationId xmlns:a16="http://schemas.microsoft.com/office/drawing/2014/main" id="{70046435-CA6E-4A79-85D8-C87BA11CDDB5}"/>
+              </a:ext>
+            </a:extLst>
+          </p:cNvPr>
+          <p:cNvSpPr>
+            <a:spLocks xmlns:a="http://schemas.openxmlformats.org/drawingml/2006/main" noGrp="1"/>
+          </p:cNvSpPr>
+          <p:nvPr/>
+        </p:nvSpPr>
+        <p:spPr>
+          <a:xfrm xmlns:a="http://schemas.openxmlformats.org/drawingml/2006/main">
+            <a:off x="7086600" y="3800475"/>
+            <a:ext cx="3333750" cy="228600"/>
+          </a:xfrm>
+          <a:prstGeom xmlns:a="http://schemas.openxmlformats.org/drawingml/2006/main" prst="rect">
+            <a:avLst/>
+          </a:prstGeom>
+          <a:solidFill xmlns:a="http://schemas.openxmlformats.org/drawingml/2006/main">
+            <a:srgbClr val="000000">
+              <a:alpha val="0"/>
+            </a:srgbClr>
+          </a:solidFill>
+          <a:ln xmlns:a="http://schemas.openxmlformats.org/drawingml/2006/main" w="0">
+            <a:solidFill>
+              <a:srgbClr val="000000">
+                <a:alpha val="0"/>
+              </a:srgbClr>
+            </a:solidFill>
+            <a:prstDash val="solid"/>
+          </a:ln>
+        </p:spPr>
+        <p:txBody>
+          <a:bodyPr xmlns:a="http://schemas.openxmlformats.org/drawingml/2006/main" lIns="0" tIns="0" rIns="0" bIns="0" anchor="t"/>
+          <a:lstStyle xmlns:a="http://schemas.openxmlformats.org/drawingml/2006/main"/>
+          <a:p xmlns:a="http://schemas.openxmlformats.org/drawingml/2006/main">
+            <a:pPr algn="l">
+              <a:defRPr sz="1350" b="0">
+                <a:solidFill>
+                  <a:srgbClr val="51606F"/>
+                </a:solidFill>
+                <a:latin typeface="Arial"/>
+                <a:ea typeface="Arial"/>
+                <a:cs typeface="Arial"/>
+              </a:defRPr>
+            </a:pPr>
+            <a:r>
+              <a:rPr sz="1350" b="0">
+                <a:solidFill>
+                  <a:srgbClr val="51606F"/>
+                </a:solidFill>
+                <a:latin typeface="Arial"/>
+                <a:ea typeface="Arial"/>
+                <a:cs typeface="Arial"/>
+              </a:rPr>
+              <a:t>alcance, interferência e simultaneidade</a:t>
+            </a:r>
+          </a:p>
+        </p:txBody>
+      </p:sp>
+      <p:sp>
+        <p:nvSpPr>
+          <p:cNvPr id="20" name="">
+            <a:extLst xmlns:a="http://schemas.openxmlformats.org/drawingml/2006/main">
+              <a:ext uri="{FF2B5EF4-FFF2-40B4-BE49-F238E27FC236}">
+                <a16:creationId xmlns:a16="http://schemas.microsoft.com/office/drawing/2014/main" id="{1ADFD32B-9F2F-41C3-BC81-B069FE3487E4}"/>
+              </a:ext>
+            </a:extLst>
+          </p:cNvPr>
+          <p:cNvSpPr>
+            <a:spLocks xmlns:a="http://schemas.openxmlformats.org/drawingml/2006/main" noGrp="1"/>
+          </p:cNvSpPr>
+          <p:nvPr/>
+        </p:nvSpPr>
+        <p:spPr>
+          <a:xfrm xmlns:a="http://schemas.openxmlformats.org/drawingml/2006/main">
+            <a:off x="6838950" y="4381500"/>
+            <a:ext cx="4000500" cy="723900"/>
+          </a:xfrm>
+          <a:prstGeom xmlns:a="http://schemas.openxmlformats.org/drawingml/2006/main" prst="rect">
+            <a:avLst/>
+          </a:prstGeom>
+          <a:solidFill xmlns:a="http://schemas.openxmlformats.org/drawingml/2006/main">
+            <a:srgbClr val="FFFFFF"/>
+          </a:solidFill>
+          <a:ln xmlns:a="http://schemas.openxmlformats.org/drawingml/2006/main" w="9525">
+            <a:solidFill>
+              <a:srgbClr val="D7DEE6"/>
+            </a:solidFill>
+            <a:prstDash val="solid"/>
+          </a:ln>
+        </p:spPr>
+      </p:sp>
+      <p:sp>
+        <p:nvSpPr>
+          <p:cNvPr id="21" name="">
+            <a:extLst xmlns:a="http://schemas.openxmlformats.org/drawingml/2006/main">
+              <a:ext uri="{FF2B5EF4-FFF2-40B4-BE49-F238E27FC236}">
+                <a16:creationId xmlns:a16="http://schemas.microsoft.com/office/drawing/2014/main" id="{FE50BB0E-8B63-4FB9-8022-AFFBDAECCC56}"/>
+              </a:ext>
+            </a:extLst>
+          </p:cNvPr>
+          <p:cNvSpPr>
+            <a:spLocks xmlns:a="http://schemas.openxmlformats.org/drawingml/2006/main" noGrp="1"/>
+          </p:cNvSpPr>
+          <p:nvPr/>
+        </p:nvSpPr>
+        <p:spPr>
+          <a:xfrm xmlns:a="http://schemas.openxmlformats.org/drawingml/2006/main">
+            <a:off x="7086600" y="4486275"/>
+            <a:ext cx="3429000" cy="266700"/>
+          </a:xfrm>
+          <a:prstGeom xmlns:a="http://schemas.openxmlformats.org/drawingml/2006/main" prst="rect">
+            <a:avLst/>
+          </a:prstGeom>
+          <a:solidFill xmlns:a="http://schemas.openxmlformats.org/drawingml/2006/main">
+            <a:srgbClr val="000000">
+              <a:alpha val="0"/>
+            </a:srgbClr>
+          </a:solidFill>
+          <a:ln xmlns:a="http://schemas.openxmlformats.org/drawingml/2006/main" w="0">
+            <a:solidFill>
+              <a:srgbClr val="000000">
+                <a:alpha val="0"/>
+              </a:srgbClr>
+            </a:solidFill>
+            <a:prstDash val="solid"/>
+          </a:ln>
+        </p:spPr>
+        <p:txBody>
+          <a:bodyPr xmlns:a="http://schemas.openxmlformats.org/drawingml/2006/main" lIns="0" tIns="0" rIns="0" bIns="0" anchor="t"/>
+          <a:lstStyle xmlns:a="http://schemas.openxmlformats.org/drawingml/2006/main"/>
+          <a:p xmlns:a="http://schemas.openxmlformats.org/drawingml/2006/main">
+            <a:pPr algn="l">
+              <a:defRPr sz="1725" b="1">
+                <a:solidFill>
+                  <a:srgbClr val="075D3B"/>
+                </a:solidFill>
+                <a:latin typeface="Arial"/>
+                <a:ea typeface="Arial"/>
+                <a:cs typeface="Arial"/>
+              </a:defRPr>
+            </a:pPr>
+            <a:r>
+              <a:rPr sz="1725" b="1">
+                <a:solidFill>
+                  <a:srgbClr val="075D3B"/>
+                </a:solidFill>
+                <a:latin typeface="Arial"/>
+                <a:ea typeface="Arial"/>
+                <a:cs typeface="Arial"/>
+              </a:rPr>
+              <a:t>Uso institucional</a:t>
+            </a:r>
+          </a:p>
+        </p:txBody>
+      </p:sp>
+      <p:sp>
+        <p:nvSpPr>
+          <p:cNvPr id="22" name="">
+            <a:extLst xmlns:a="http://schemas.openxmlformats.org/drawingml/2006/main">
+              <a:ext uri="{FF2B5EF4-FFF2-40B4-BE49-F238E27FC236}">
+                <a16:creationId xmlns:a16="http://schemas.microsoft.com/office/drawing/2014/main" id="{2373C899-CE1B-4E9A-9514-F4972C7B3EE7}"/>
+              </a:ext>
+            </a:extLst>
+          </p:cNvPr>
+          <p:cNvSpPr>
+            <a:spLocks xmlns:a="http://schemas.openxmlformats.org/drawingml/2006/main" noGrp="1"/>
+          </p:cNvSpPr>
+          <p:nvPr/>
+        </p:nvSpPr>
+        <p:spPr>
+          <a:xfrm xmlns:a="http://schemas.openxmlformats.org/drawingml/2006/main">
+            <a:off x="7086600" y="4791075"/>
+            <a:ext cx="3333750" cy="228600"/>
+          </a:xfrm>
+          <a:prstGeom xmlns:a="http://schemas.openxmlformats.org/drawingml/2006/main" prst="rect">
+            <a:avLst/>
+          </a:prstGeom>
+          <a:solidFill xmlns:a="http://schemas.openxmlformats.org/drawingml/2006/main">
+            <a:srgbClr val="000000">
+              <a:alpha val="0"/>
+            </a:srgbClr>
+          </a:solidFill>
+          <a:ln xmlns:a="http://schemas.openxmlformats.org/drawingml/2006/main" w="0">
+            <a:solidFill>
+              <a:srgbClr val="000000">
+                <a:alpha val="0"/>
+              </a:srgbClr>
+            </a:solidFill>
+            <a:prstDash val="solid"/>
+          </a:ln>
+        </p:spPr>
+        <p:txBody>
+          <a:bodyPr xmlns:a="http://schemas.openxmlformats.org/drawingml/2006/main" lIns="0" tIns="0" rIns="0" bIns="0" anchor="t"/>
+          <a:lstStyle xmlns:a="http://schemas.openxmlformats.org/drawingml/2006/main"/>
+          <a:p xmlns:a="http://schemas.openxmlformats.org/drawingml/2006/main">
+            <a:pPr algn="l">
+              <a:defRPr sz="1350" b="0">
+                <a:solidFill>
+                  <a:srgbClr val="51606F"/>
+                </a:solidFill>
+                <a:latin typeface="Arial"/>
+                <a:ea typeface="Arial"/>
+                <a:cs typeface="Arial"/>
+              </a:defRPr>
+            </a:pPr>
+            <a:r>
+              <a:rPr sz="1350" b="0">
+                <a:solidFill>
+                  <a:srgbClr val="51606F"/>
+                </a:solidFill>
+                <a:latin typeface="Arial"/>
+                <a:ea typeface="Arial"/>
+                <a:cs typeface="Arial"/>
+              </a:rPr>
+              <a:t>relatórios e auditoria ampliada</a:t>
+            </a:r>
+          </a:p>
+        </p:txBody>
+      </p:sp>
+    </p:spTree>
+    <p:extLst>
+      <p:ext uri="{BB962C8B-B14F-4D97-AF65-F5344CB8AC3E}">
+        <p14:creationId xmlns:p14="http://schemas.microsoft.com/office/powerpoint/2010/main" val="1390999206"/>
+      </p:ext>
+    </p:extLst>
+  </p:cSld>
+</p:sld>
+</file>
+
+<file path=ppt/slides/slide18.xml><?xml version="1.0" encoding="utf-8"?>
+<p:sld xmlns:p="http://schemas.openxmlformats.org/presentationml/2006/main">
+  <p:cSld>
+    <p:spTree>
+      <p:nvGrpSpPr>
+        <p:cNvPr id="1" name=""/>
+        <p:cNvGrpSpPr/>
+        <p:nvPr/>
+      </p:nvGrpSpPr>
+      <p:grpSpPr>
+        <a:xfrm xmlns:a="http://schemas.openxmlformats.org/drawingml/2006/main"/>
+      </p:grpSpPr>
+      <p:sp>
+        <p:nvSpPr>
+          <p:cNvPr id="1" name="">
+            <a:extLst xmlns:a="http://schemas.openxmlformats.org/drawingml/2006/main">
+              <a:ext uri="{FF2B5EF4-FFF2-40B4-BE49-F238E27FC236}">
+                <a16:creationId xmlns:a16="http://schemas.microsoft.com/office/drawing/2014/main" id="{EFF795B6-2C7A-40FE-AB9A-545DAFB06B16}"/>
+              </a:ext>
+            </a:extLst>
+          </p:cNvPr>
+          <p:cNvSpPr>
+            <a:spLocks xmlns:a="http://schemas.openxmlformats.org/drawingml/2006/main" noGrp="1"/>
+          </p:cNvSpPr>
+          <p:nvPr/>
+        </p:nvSpPr>
+        <p:spPr>
+          <a:xfrm xmlns:a="http://schemas.openxmlformats.org/drawingml/2006/main">
+            <a:off x="0" y="0"/>
+            <a:ext cx="12192000" cy="6858000"/>
+          </a:xfrm>
+          <a:prstGeom xmlns:a="http://schemas.openxmlformats.org/drawingml/2006/main" prst="rect">
+            <a:avLst/>
+          </a:prstGeom>
+          <a:solidFill xmlns:a="http://schemas.openxmlformats.org/drawingml/2006/main">
+            <a:srgbClr val="F7F9FB"/>
+          </a:solidFill>
+          <a:ln xmlns:a="http://schemas.openxmlformats.org/drawingml/2006/main" w="0">
+            <a:solidFill>
+              <a:srgbClr val="000000">
+                <a:alpha val="0"/>
+              </a:srgbClr>
+            </a:solidFill>
+            <a:prstDash val="solid"/>
+          </a:ln>
+        </p:spPr>
+      </p:sp>
+      <p:sp>
+        <p:nvSpPr>
+          <p:cNvPr id="2" name="">
+            <a:extLst xmlns:a="http://schemas.openxmlformats.org/drawingml/2006/main">
+              <a:ext uri="{FF2B5EF4-FFF2-40B4-BE49-F238E27FC236}">
+                <a16:creationId xmlns:a16="http://schemas.microsoft.com/office/drawing/2014/main" id="{E3753095-7885-4C08-93D4-1E1C0B78CBC1}"/>
+              </a:ext>
+            </a:extLst>
+          </p:cNvPr>
+          <p:cNvSpPr>
+            <a:spLocks xmlns:a="http://schemas.openxmlformats.org/drawingml/2006/main" noGrp="1"/>
+          </p:cNvSpPr>
+          <p:nvPr/>
+        </p:nvSpPr>
+        <p:spPr>
+          <a:xfrm xmlns:a="http://schemas.openxmlformats.org/drawingml/2006/main">
+            <a:off x="0" y="0"/>
+            <a:ext cx="171450" cy="6858000"/>
+          </a:xfrm>
+          <a:prstGeom xmlns:a="http://schemas.openxmlformats.org/drawingml/2006/main" prst="rect">
+            <a:avLst/>
+          </a:prstGeom>
+          <a:solidFill xmlns:a="http://schemas.openxmlformats.org/drawingml/2006/main">
+            <a:srgbClr val="0E7A4F"/>
+          </a:solidFill>
+          <a:ln xmlns:a="http://schemas.openxmlformats.org/drawingml/2006/main" w="0">
+            <a:solidFill>
+              <a:srgbClr val="000000">
+                <a:alpha val="0"/>
+              </a:srgbClr>
+            </a:solidFill>
+            <a:prstDash val="solid"/>
+          </a:ln>
+        </p:spPr>
+      </p:sp>
+      <p:sp>
+        <p:nvSpPr>
+          <p:cNvPr id="3" name="">
+            <a:extLst xmlns:a="http://schemas.openxmlformats.org/drawingml/2006/main">
+              <a:ext uri="{FF2B5EF4-FFF2-40B4-BE49-F238E27FC236}">
+                <a16:creationId xmlns:a16="http://schemas.microsoft.com/office/drawing/2014/main" id="{1539E997-6FA1-4C8F-97A8-B192F43D2EA1}"/>
+              </a:ext>
+            </a:extLst>
+          </p:cNvPr>
+          <p:cNvSpPr>
+            <a:spLocks xmlns:a="http://schemas.openxmlformats.org/drawingml/2006/main" noGrp="1"/>
+          </p:cNvSpPr>
+          <p:nvPr/>
+        </p:nvSpPr>
+        <p:spPr>
+          <a:xfrm xmlns:a="http://schemas.openxmlformats.org/drawingml/2006/main">
+            <a:off x="11334750" y="6191250"/>
+            <a:ext cx="419100" cy="266700"/>
+          </a:xfrm>
+          <a:prstGeom xmlns:a="http://schemas.openxmlformats.org/drawingml/2006/main" prst="rect">
+            <a:avLst/>
+          </a:prstGeom>
+          <a:solidFill xmlns:a="http://schemas.openxmlformats.org/drawingml/2006/main">
+            <a:srgbClr val="000000">
+              <a:alpha val="0"/>
+            </a:srgbClr>
+          </a:solidFill>
+          <a:ln xmlns:a="http://schemas.openxmlformats.org/drawingml/2006/main" w="0">
+            <a:solidFill>
+              <a:srgbClr val="000000">
+                <a:alpha val="0"/>
+              </a:srgbClr>
+            </a:solidFill>
+            <a:prstDash val="solid"/>
+          </a:ln>
+        </p:spPr>
+        <p:txBody>
+          <a:bodyPr xmlns:a="http://schemas.openxmlformats.org/drawingml/2006/main" lIns="0" tIns="0" rIns="0" bIns="0" anchor="t"/>
+          <a:lstStyle xmlns:a="http://schemas.openxmlformats.org/drawingml/2006/main"/>
+          <a:p xmlns:a="http://schemas.openxmlformats.org/drawingml/2006/main">
+            <a:pPr algn="r">
+              <a:defRPr sz="1350" b="0">
+                <a:solidFill>
+                  <a:srgbClr val="51606F"/>
+                </a:solidFill>
+                <a:latin typeface="Arial"/>
+                <a:ea typeface="Arial"/>
+                <a:cs typeface="Arial"/>
+              </a:defRPr>
+            </a:pPr>
+            <a:r>
+              <a:rPr sz="1350" b="0">
+                <a:solidFill>
+                  <a:srgbClr val="51606F"/>
+                </a:solidFill>
+                <a:latin typeface="Arial"/>
+                <a:ea typeface="Arial"/>
+                <a:cs typeface="Arial"/>
+              </a:rPr>
+              <a:t>18</a:t>
+            </a:r>
+          </a:p>
+        </p:txBody>
+      </p:sp>
+      <p:sp>
+        <p:nvSpPr>
+          <p:cNvPr id="4" name="">
+            <a:extLst xmlns:a="http://schemas.openxmlformats.org/drawingml/2006/main">
+              <a:ext uri="{FF2B5EF4-FFF2-40B4-BE49-F238E27FC236}">
+                <a16:creationId xmlns:a16="http://schemas.microsoft.com/office/drawing/2014/main" id="{A2E4BF67-6F03-4EA0-AFC2-BF0AFD3AE9DF}"/>
+              </a:ext>
+            </a:extLst>
+          </p:cNvPr>
+          <p:cNvSpPr>
+            <a:spLocks xmlns:a="http://schemas.openxmlformats.org/drawingml/2006/main" noGrp="1"/>
+          </p:cNvSpPr>
+          <p:nvPr/>
+        </p:nvSpPr>
+        <p:spPr>
+          <a:xfrm xmlns:a="http://schemas.openxmlformats.org/drawingml/2006/main">
+            <a:off x="723900" y="838200"/>
+            <a:ext cx="10287000" cy="1047750"/>
+          </a:xfrm>
+          <a:prstGeom xmlns:a="http://schemas.openxmlformats.org/drawingml/2006/main" prst="rect">
+            <a:avLst/>
+          </a:prstGeom>
+          <a:solidFill xmlns:a="http://schemas.openxmlformats.org/drawingml/2006/main">
+            <a:srgbClr val="000000">
+              <a:alpha val="0"/>
+            </a:srgbClr>
+          </a:solidFill>
+          <a:ln xmlns:a="http://schemas.openxmlformats.org/drawingml/2006/main" w="0">
+            <a:solidFill>
+              <a:srgbClr val="000000">
+                <a:alpha val="0"/>
+              </a:srgbClr>
+            </a:solidFill>
+            <a:prstDash val="solid"/>
+          </a:ln>
+        </p:spPr>
+        <p:txBody>
+          <a:bodyPr xmlns:a="http://schemas.openxmlformats.org/drawingml/2006/main" lIns="0" tIns="0" rIns="0" bIns="0" anchor="t"/>
+          <a:lstStyle xmlns:a="http://schemas.openxmlformats.org/drawingml/2006/main"/>
+          <a:p xmlns:a="http://schemas.openxmlformats.org/drawingml/2006/main">
+            <a:pPr algn="l">
+              <a:defRPr sz="2775" b="1">
+                <a:solidFill>
+                  <a:srgbClr val="17202A"/>
+                </a:solidFill>
+                <a:latin typeface="Arial"/>
+                <a:ea typeface="Arial"/>
+                <a:cs typeface="Arial"/>
+              </a:defRPr>
+            </a:pPr>
+            <a:r>
+              <a:rPr sz="2775" b="1">
+                <a:solidFill>
+                  <a:srgbClr val="17202A"/>
+                </a:solidFill>
+                <a:latin typeface="Arial"/>
+                <a:ea typeface="Arial"/>
+                <a:cs typeface="Arial"/>
+              </a:rPr>
               <a:t>Referências principais</a:t>
             </a:r>
           </a:p>
@@ -10649,7 +11879,7 @@
           <p:cNvPr id="5" name="">
             <a:extLst xmlns:a="http://schemas.openxmlformats.org/drawingml/2006/main">
               <a:ext uri="{FF2B5EF4-FFF2-40B4-BE49-F238E27FC236}">
-                <a16:creationId xmlns:a16="http://schemas.microsoft.com/office/drawing/2014/main" id="{A9D34F92-DFC6-47B2-A978-A1FF9325D8D0}"/>
+                <a16:creationId xmlns:a16="http://schemas.microsoft.com/office/drawing/2014/main" id="{9D102968-D6B4-462C-A525-CC08615944F5}"/>
               </a:ext>
             </a:extLst>
           </p:cNvPr>
@@ -10684,7 +11914,7 @@
           <p:cNvPr id="6" name="">
             <a:extLst xmlns:a="http://schemas.openxmlformats.org/drawingml/2006/main">
               <a:ext uri="{FF2B5EF4-FFF2-40B4-BE49-F238E27FC236}">
-                <a16:creationId xmlns:a16="http://schemas.microsoft.com/office/drawing/2014/main" id="{F99D74A1-2BE4-45DA-978E-149FEED463CE}"/>
+                <a16:creationId xmlns:a16="http://schemas.microsoft.com/office/drawing/2014/main" id="{4542ABB4-1B7C-4659-AAB2-EB18E57E17E1}"/>
               </a:ext>
             </a:extLst>
           </p:cNvPr>
@@ -10748,7 +11978,7 @@
           <p:cNvPr id="7" name="">
             <a:extLst xmlns:a="http://schemas.openxmlformats.org/drawingml/2006/main">
               <a:ext uri="{FF2B5EF4-FFF2-40B4-BE49-F238E27FC236}">
-                <a16:creationId xmlns:a16="http://schemas.microsoft.com/office/drawing/2014/main" id="{28829511-F243-455F-BB8C-9EB6ADDF0DB8}"/>
+                <a16:creationId xmlns:a16="http://schemas.microsoft.com/office/drawing/2014/main" id="{7F31C2A9-0BD9-42B8-BBCE-F751D7D74CAB}"/>
               </a:ext>
             </a:extLst>
           </p:cNvPr>
@@ -10783,7 +12013,7 @@
           <p:cNvPr id="8" name="">
             <a:extLst xmlns:a="http://schemas.openxmlformats.org/drawingml/2006/main">
               <a:ext uri="{FF2B5EF4-FFF2-40B4-BE49-F238E27FC236}">
-                <a16:creationId xmlns:a16="http://schemas.microsoft.com/office/drawing/2014/main" id="{A7E8B3E5-CA2D-440E-BA18-1AA9C72E3164}"/>
+                <a16:creationId xmlns:a16="http://schemas.microsoft.com/office/drawing/2014/main" id="{6B1DF261-5F93-429D-95B1-1D597E48D588}"/>
               </a:ext>
             </a:extLst>
           </p:cNvPr>
@@ -10847,7 +12077,7 @@
           <p:cNvPr id="9" name="">
             <a:extLst xmlns:a="http://schemas.openxmlformats.org/drawingml/2006/main">
               <a:ext uri="{FF2B5EF4-FFF2-40B4-BE49-F238E27FC236}">
-                <a16:creationId xmlns:a16="http://schemas.microsoft.com/office/drawing/2014/main" id="{9899B311-F00B-484F-B7D5-8E37B0D6E6D5}"/>
+                <a16:creationId xmlns:a16="http://schemas.microsoft.com/office/drawing/2014/main" id="{4D4B045B-6D75-4FE1-94CE-234588109FD6}"/>
               </a:ext>
             </a:extLst>
           </p:cNvPr>
@@ -10882,7 +12112,7 @@
           <p:cNvPr id="10" name="">
             <a:extLst xmlns:a="http://schemas.openxmlformats.org/drawingml/2006/main">
               <a:ext uri="{FF2B5EF4-FFF2-40B4-BE49-F238E27FC236}">
-                <a16:creationId xmlns:a16="http://schemas.microsoft.com/office/drawing/2014/main" id="{267C63F5-1803-4662-88D9-B6F671B45068}"/>
+                <a16:creationId xmlns:a16="http://schemas.microsoft.com/office/drawing/2014/main" id="{0524D29A-1E6D-419A-B4FA-0040EB8EA7F9}"/>
               </a:ext>
             </a:extLst>
           </p:cNvPr>
@@ -10946,7 +12176,7 @@
           <p:cNvPr id="11" name="">
             <a:extLst xmlns:a="http://schemas.openxmlformats.org/drawingml/2006/main">
               <a:ext uri="{FF2B5EF4-FFF2-40B4-BE49-F238E27FC236}">
-                <a16:creationId xmlns:a16="http://schemas.microsoft.com/office/drawing/2014/main" id="{4E769A5E-E983-4E85-8849-B2A4695B3347}"/>
+                <a16:creationId xmlns:a16="http://schemas.microsoft.com/office/drawing/2014/main" id="{90D3F19F-15FC-4037-9EA2-E5DE5507B4E9}"/>
               </a:ext>
             </a:extLst>
           </p:cNvPr>
@@ -10981,7 +12211,7 @@
           <p:cNvPr id="12" name="">
             <a:extLst xmlns:a="http://schemas.openxmlformats.org/drawingml/2006/main">
               <a:ext uri="{FF2B5EF4-FFF2-40B4-BE49-F238E27FC236}">
-                <a16:creationId xmlns:a16="http://schemas.microsoft.com/office/drawing/2014/main" id="{DDA1F824-C95C-4161-857C-487865DEE7A8}"/>
+                <a16:creationId xmlns:a16="http://schemas.microsoft.com/office/drawing/2014/main" id="{077C30D1-2C2E-4DA7-92A5-91C796D4DD64}"/>
               </a:ext>
             </a:extLst>
           </p:cNvPr>
@@ -11045,7 +12275,7 @@
           <p:cNvPr id="13" name="">
             <a:extLst xmlns:a="http://schemas.openxmlformats.org/drawingml/2006/main">
               <a:ext uri="{FF2B5EF4-FFF2-40B4-BE49-F238E27FC236}">
-                <a16:creationId xmlns:a16="http://schemas.microsoft.com/office/drawing/2014/main" id="{EB00467A-D91C-4D19-B007-7C34AB558F02}"/>
+                <a16:creationId xmlns:a16="http://schemas.microsoft.com/office/drawing/2014/main" id="{643F6E09-E2C7-4018-9081-DD907012008D}"/>
               </a:ext>
             </a:extLst>
           </p:cNvPr>
@@ -11080,7 +12310,7 @@
           <p:cNvPr id="14" name="">
             <a:extLst xmlns:a="http://schemas.openxmlformats.org/drawingml/2006/main">
               <a:ext uri="{FF2B5EF4-FFF2-40B4-BE49-F238E27FC236}">
-                <a16:creationId xmlns:a16="http://schemas.microsoft.com/office/drawing/2014/main" id="{B972192B-6EF1-408E-9465-EFF8D9A83945}"/>
+                <a16:creationId xmlns:a16="http://schemas.microsoft.com/office/drawing/2014/main" id="{10D3A991-5B6D-4AEA-85ED-79A1AFC14C7E}"/>
               </a:ext>
             </a:extLst>
           </p:cNvPr>
@@ -11144,7 +12374,7 @@
           <p:cNvPr id="15" name="">
             <a:extLst xmlns:a="http://schemas.openxmlformats.org/drawingml/2006/main">
               <a:ext uri="{FF2B5EF4-FFF2-40B4-BE49-F238E27FC236}">
-                <a16:creationId xmlns:a16="http://schemas.microsoft.com/office/drawing/2014/main" id="{4AFAF7DE-1BD1-4B7A-847D-4A522CA64013}"/>
+                <a16:creationId xmlns:a16="http://schemas.microsoft.com/office/drawing/2014/main" id="{F7B2EB95-0714-4836-A379-FDBB8891E286}"/>
               </a:ext>
             </a:extLst>
           </p:cNvPr>
@@ -11179,7 +12409,7 @@
           <p:cNvPr id="16" name="">
             <a:extLst xmlns:a="http://schemas.openxmlformats.org/drawingml/2006/main">
               <a:ext uri="{FF2B5EF4-FFF2-40B4-BE49-F238E27FC236}">
-                <a16:creationId xmlns:a16="http://schemas.microsoft.com/office/drawing/2014/main" id="{CD537DB6-77AB-4673-8239-DA58A71C86B7}"/>
+                <a16:creationId xmlns:a16="http://schemas.microsoft.com/office/drawing/2014/main" id="{09095BFC-7381-4B4B-80DD-0FF4537BA627}"/>
               </a:ext>
             </a:extLst>
           </p:cNvPr>
@@ -11243,7 +12473,7 @@
           <p:cNvPr id="17" name="">
             <a:extLst xmlns:a="http://schemas.openxmlformats.org/drawingml/2006/main">
               <a:ext uri="{FF2B5EF4-FFF2-40B4-BE49-F238E27FC236}">
-                <a16:creationId xmlns:a16="http://schemas.microsoft.com/office/drawing/2014/main" id="{62D5AA4C-6B96-44A1-BE99-7E603841EE9E}"/>
+                <a16:creationId xmlns:a16="http://schemas.microsoft.com/office/drawing/2014/main" id="{63E23474-FFA1-4503-9F6A-F5878EE73E05}"/>
               </a:ext>
             </a:extLst>
           </p:cNvPr>
@@ -11278,7 +12508,7 @@
           <p:cNvPr id="18" name="">
             <a:extLst xmlns:a="http://schemas.openxmlformats.org/drawingml/2006/main">
               <a:ext uri="{FF2B5EF4-FFF2-40B4-BE49-F238E27FC236}">
-                <a16:creationId xmlns:a16="http://schemas.microsoft.com/office/drawing/2014/main" id="{F9B82F55-8A1E-42C8-864C-06E3B2F5F17C}"/>
+                <a16:creationId xmlns:a16="http://schemas.microsoft.com/office/drawing/2014/main" id="{59571BDB-E2DD-43B5-BAE1-1B5B1F6FD356}"/>
               </a:ext>
             </a:extLst>
           </p:cNvPr>
@@ -11340,7 +12570,7 @@
     </p:spTree>
     <p:extLst>
       <p:ext uri="{BB962C8B-B14F-4D97-AF65-F5344CB8AC3E}">
-        <p14:creationId xmlns:p14="http://schemas.microsoft.com/office/powerpoint/2010/main" val="170257291"/>
+        <p14:creationId xmlns:p14="http://schemas.microsoft.com/office/powerpoint/2010/main" val="170335745"/>
       </p:ext>
     </p:extLst>
   </p:cSld>
@@ -11364,7 +12594,7 @@
           <p:cNvPr id="1" name="">
             <a:extLst xmlns:a="http://schemas.openxmlformats.org/drawingml/2006/main">
               <a:ext uri="{FF2B5EF4-FFF2-40B4-BE49-F238E27FC236}">
-                <a16:creationId xmlns:a16="http://schemas.microsoft.com/office/drawing/2014/main" id="{AE4CFEA7-13D9-4F68-97DE-4ADC5FF3F136}"/>
+                <a16:creationId xmlns:a16="http://schemas.microsoft.com/office/drawing/2014/main" id="{E558A561-96BB-4727-8B31-E0F563D9F108}"/>
               </a:ext>
             </a:extLst>
           </p:cNvPr>
@@ -11399,7 +12629,7 @@
           <p:cNvPr id="2" name="">
             <a:extLst xmlns:a="http://schemas.openxmlformats.org/drawingml/2006/main">
               <a:ext uri="{FF2B5EF4-FFF2-40B4-BE49-F238E27FC236}">
-                <a16:creationId xmlns:a16="http://schemas.microsoft.com/office/drawing/2014/main" id="{70A88E9A-1856-4F34-B5E5-FF819FA37383}"/>
+                <a16:creationId xmlns:a16="http://schemas.microsoft.com/office/drawing/2014/main" id="{CFC43C79-4470-4699-99A2-7EB60A34D71F}"/>
               </a:ext>
             </a:extLst>
           </p:cNvPr>
@@ -11434,7 +12664,7 @@
           <p:cNvPr id="3" name="">
             <a:extLst xmlns:a="http://schemas.openxmlformats.org/drawingml/2006/main">
               <a:ext uri="{FF2B5EF4-FFF2-40B4-BE49-F238E27FC236}">
-                <a16:creationId xmlns:a16="http://schemas.microsoft.com/office/drawing/2014/main" id="{74099673-122A-46A1-A6E6-5562CF22F376}"/>
+                <a16:creationId xmlns:a16="http://schemas.microsoft.com/office/drawing/2014/main" id="{EEFCEAD6-5B21-4525-A2A1-3E990811D51D}"/>
               </a:ext>
             </a:extLst>
           </p:cNvPr>
@@ -11498,7 +12728,7 @@
           <p:cNvPr id="4" name="">
             <a:extLst xmlns:a="http://schemas.openxmlformats.org/drawingml/2006/main">
               <a:ext uri="{FF2B5EF4-FFF2-40B4-BE49-F238E27FC236}">
-                <a16:creationId xmlns:a16="http://schemas.microsoft.com/office/drawing/2014/main" id="{0EB95CA7-F5A3-422A-B909-F9AA475072D6}"/>
+                <a16:creationId xmlns:a16="http://schemas.microsoft.com/office/drawing/2014/main" id="{E2AEE5E7-1C6E-46A6-A7F1-588CAF123ABC}"/>
               </a:ext>
             </a:extLst>
           </p:cNvPr>
@@ -11552,7 +12782,7 @@
                 <a:ea typeface="Arial"/>
                 <a:cs typeface="Arial"/>
               </a:rPr>
-              <a:t>Problema: inventário manual</a:t>
+              <a:t>Contexto do trabalho</a:t>
             </a:r>
           </a:p>
         </p:txBody>
@@ -11562,7 +12792,7 @@
           <p:cNvPr id="5" name="">
             <a:extLst xmlns:a="http://schemas.openxmlformats.org/drawingml/2006/main">
               <a:ext uri="{FF2B5EF4-FFF2-40B4-BE49-F238E27FC236}">
-                <a16:creationId xmlns:a16="http://schemas.microsoft.com/office/drawing/2014/main" id="{D7D2E473-5AD3-48EF-AD14-65627C9DEFEE}"/>
+                <a16:creationId xmlns:a16="http://schemas.microsoft.com/office/drawing/2014/main" id="{0F5F7F4E-102C-452B-974A-2D08302481A4}"/>
               </a:ext>
             </a:extLst>
           </p:cNvPr>
@@ -11616,7 +12846,7 @@
                 <a:ea typeface="Arial"/>
                 <a:cs typeface="Arial"/>
               </a:rPr>
-              <a:t>A dificuldade central é manter o registro do sistema alinhado com a localização real dos bens.</a:t>
+              <a:t>O controle patrimonial no colegiado exige rastreabilidade entre registros administrativos e bens fisicamente encontrados.</a:t>
             </a:r>
           </a:p>
         </p:txBody>
@@ -11626,7 +12856,7 @@
           <p:cNvPr id="6" name="">
             <a:extLst xmlns:a="http://schemas.openxmlformats.org/drawingml/2006/main">
               <a:ext uri="{FF2B5EF4-FFF2-40B4-BE49-F238E27FC236}">
-                <a16:creationId xmlns:a16="http://schemas.microsoft.com/office/drawing/2014/main" id="{42487CF7-7835-4C91-AD5F-71D89F582450}"/>
+                <a16:creationId xmlns:a16="http://schemas.microsoft.com/office/drawing/2014/main" id="{8BE2E6B7-ABE8-4112-B054-EFBBC3AE0F41}"/>
               </a:ext>
             </a:extLst>
           </p:cNvPr>
@@ -11661,7 +12891,7 @@
           <p:cNvPr id="7" name="">
             <a:extLst xmlns:a="http://schemas.openxmlformats.org/drawingml/2006/main">
               <a:ext uri="{FF2B5EF4-FFF2-40B4-BE49-F238E27FC236}">
-                <a16:creationId xmlns:a16="http://schemas.microsoft.com/office/drawing/2014/main" id="{32BDDBE9-AE7F-42A8-9E1E-4377814515BC}"/>
+                <a16:creationId xmlns:a16="http://schemas.microsoft.com/office/drawing/2014/main" id="{2824F918-CC13-4332-9E8B-5F88066AC7D4}"/>
               </a:ext>
             </a:extLst>
           </p:cNvPr>
@@ -11715,7 +12945,7 @@
                 <a:ea typeface="Arial"/>
                 <a:cs typeface="Arial"/>
               </a:rPr>
-              <a:t>Equipamentos circulam entre laboratórios, salas e espaços compartilhados.</a:t>
+              <a:t>Equipamentos ficam distribuídos entre laboratórios, salas administrativas e espaços compartilhados.</a:t>
             </a:r>
           </a:p>
         </p:txBody>
@@ -11725,7 +12955,7 @@
           <p:cNvPr id="8" name="">
             <a:extLst xmlns:a="http://schemas.openxmlformats.org/drawingml/2006/main">
               <a:ext uri="{FF2B5EF4-FFF2-40B4-BE49-F238E27FC236}">
-                <a16:creationId xmlns:a16="http://schemas.microsoft.com/office/drawing/2014/main" id="{631DD6EA-FFAB-4E28-8B1A-902683203719}"/>
+                <a16:creationId xmlns:a16="http://schemas.microsoft.com/office/drawing/2014/main" id="{3495ADA0-C501-4A7E-9F0F-377254255E16}"/>
               </a:ext>
             </a:extLst>
           </p:cNvPr>
@@ -11760,7 +12990,7 @@
           <p:cNvPr id="9" name="">
             <a:extLst xmlns:a="http://schemas.openxmlformats.org/drawingml/2006/main">
               <a:ext uri="{FF2B5EF4-FFF2-40B4-BE49-F238E27FC236}">
-                <a16:creationId xmlns:a16="http://schemas.microsoft.com/office/drawing/2014/main" id="{FB532502-BF80-42E4-B6F6-88C2BA0D53D1}"/>
+                <a16:creationId xmlns:a16="http://schemas.microsoft.com/office/drawing/2014/main" id="{360F9F68-4617-497D-A40B-4D7D606D54B3}"/>
               </a:ext>
             </a:extLst>
           </p:cNvPr>
@@ -11814,7 +13044,7 @@
                 <a:ea typeface="Arial"/>
                 <a:cs typeface="Arial"/>
               </a:rPr>
-              <a:t>A conferência visual exige tempo e atualização constante dos registros.</a:t>
+              <a:t>A conferência patrimonial precisa indicar onde o bem deveria estar e o que foi observado no ambiente.</a:t>
             </a:r>
           </a:p>
         </p:txBody>
@@ -11824,7 +13054,7 @@
           <p:cNvPr id="10" name="">
             <a:extLst xmlns:a="http://schemas.openxmlformats.org/drawingml/2006/main">
               <a:ext uri="{FF2B5EF4-FFF2-40B4-BE49-F238E27FC236}">
-                <a16:creationId xmlns:a16="http://schemas.microsoft.com/office/drawing/2014/main" id="{45E26BDA-4D14-42AF-87A0-1BC531519033}"/>
+                <a16:creationId xmlns:a16="http://schemas.microsoft.com/office/drawing/2014/main" id="{03ABF093-2F8D-44A8-AA57-CB755EFD2BF4}"/>
               </a:ext>
             </a:extLst>
           </p:cNvPr>
@@ -11859,7 +13089,7 @@
           <p:cNvPr id="11" name="">
             <a:extLst xmlns:a="http://schemas.openxmlformats.org/drawingml/2006/main">
               <a:ext uri="{FF2B5EF4-FFF2-40B4-BE49-F238E27FC236}">
-                <a16:creationId xmlns:a16="http://schemas.microsoft.com/office/drawing/2014/main" id="{D7737F9F-835F-4559-870D-8D277DAD2E74}"/>
+                <a16:creationId xmlns:a16="http://schemas.microsoft.com/office/drawing/2014/main" id="{EDB95871-9BEE-4E73-AD6A-92A53B0792C7}"/>
               </a:ext>
             </a:extLst>
           </p:cNvPr>
@@ -11913,7 +13143,7 @@
                 <a:ea typeface="Arial"/>
                 <a:cs typeface="Arial"/>
               </a:rPr>
-              <a:t>Quando o registro não acompanha o bem físico, surgem divergências de localização.</a:t>
+              <a:t>Essa relação exige organização para apoiar inventário, auditoria e acompanhamento patrimonial.</a:t>
             </a:r>
           </a:p>
         </p:txBody>
@@ -11923,7 +13153,7 @@
           <p:cNvPr id="12" name="">
             <a:extLst xmlns:a="http://schemas.openxmlformats.org/drawingml/2006/main">
               <a:ext uri="{FF2B5EF4-FFF2-40B4-BE49-F238E27FC236}">
-                <a16:creationId xmlns:a16="http://schemas.microsoft.com/office/drawing/2014/main" id="{EF77B27E-DE7A-4AD0-9283-10F72099EF45}"/>
+                <a16:creationId xmlns:a16="http://schemas.microsoft.com/office/drawing/2014/main" id="{9823F14C-F960-4284-A423-3E1044078661}"/>
               </a:ext>
             </a:extLst>
           </p:cNvPr>
@@ -11956,7 +13186,7 @@
           <p:cNvPr id="13" name="">
             <a:extLst xmlns:a="http://schemas.openxmlformats.org/drawingml/2006/main">
               <a:ext uri="{FF2B5EF4-FFF2-40B4-BE49-F238E27FC236}">
-                <a16:creationId xmlns:a16="http://schemas.microsoft.com/office/drawing/2014/main" id="{9853CBE9-63AF-4736-BE5D-8E8B795655AD}"/>
+                <a16:creationId xmlns:a16="http://schemas.microsoft.com/office/drawing/2014/main" id="{D22E6DAD-EA31-48F9-B189-BDD38F2DF913}"/>
               </a:ext>
             </a:extLst>
           </p:cNvPr>
@@ -12010,7 +13240,7 @@
                 <a:ea typeface="Arial"/>
                 <a:cs typeface="Arial"/>
               </a:rPr>
-              <a:t>Inventário lógico</a:t>
+              <a:t>Registro administrativo</a:t>
             </a:r>
           </a:p>
         </p:txBody>
@@ -12020,7 +13250,7 @@
           <p:cNvPr id="14" name="">
             <a:extLst xmlns:a="http://schemas.openxmlformats.org/drawingml/2006/main">
               <a:ext uri="{FF2B5EF4-FFF2-40B4-BE49-F238E27FC236}">
-                <a16:creationId xmlns:a16="http://schemas.microsoft.com/office/drawing/2014/main" id="{A4D447F1-C039-4718-AEB6-1E7D50DFEB45}"/>
+                <a16:creationId xmlns:a16="http://schemas.microsoft.com/office/drawing/2014/main" id="{47BA5736-1B14-41A9-8159-4ED1A7531210}"/>
               </a:ext>
             </a:extLst>
           </p:cNvPr>
@@ -12074,7 +13304,7 @@
                 <a:ea typeface="Arial"/>
                 <a:cs typeface="Arial"/>
               </a:rPr>
-              <a:t>registro esperado no sistema</a:t>
+              <a:t>informação esperada sobre o bem</a:t>
             </a:r>
           </a:p>
         </p:txBody>
@@ -12084,7 +13314,7 @@
           <p:cNvPr id="15" name="">
             <a:extLst xmlns:a="http://schemas.openxmlformats.org/drawingml/2006/main">
               <a:ext uri="{FF2B5EF4-FFF2-40B4-BE49-F238E27FC236}">
-                <a16:creationId xmlns:a16="http://schemas.microsoft.com/office/drawing/2014/main" id="{7C512B17-5016-4298-9AEC-C0F77EF70E69}"/>
+                <a16:creationId xmlns:a16="http://schemas.microsoft.com/office/drawing/2014/main" id="{69DC11A5-4E25-4F6D-8B00-4989A4465B64}"/>
               </a:ext>
             </a:extLst>
           </p:cNvPr>
@@ -12117,7 +13347,7 @@
           <p:cNvPr id="16" name="">
             <a:extLst xmlns:a="http://schemas.openxmlformats.org/drawingml/2006/main">
               <a:ext uri="{FF2B5EF4-FFF2-40B4-BE49-F238E27FC236}">
-                <a16:creationId xmlns:a16="http://schemas.microsoft.com/office/drawing/2014/main" id="{820B8819-0A1A-4B63-BC02-E3CBD8074C4A}"/>
+                <a16:creationId xmlns:a16="http://schemas.microsoft.com/office/drawing/2014/main" id="{1546847E-C2B4-44E9-B50F-088B3C01CE31}"/>
               </a:ext>
             </a:extLst>
           </p:cNvPr>
@@ -12171,7 +13401,7 @@
                 <a:ea typeface="Arial"/>
                 <a:cs typeface="Arial"/>
               </a:rPr>
-              <a:t>Inventário físico</a:t>
+              <a:t>Conferência física</a:t>
             </a:r>
           </a:p>
         </p:txBody>
@@ -12181,7 +13411,7 @@
           <p:cNvPr id="17" name="">
             <a:extLst xmlns:a="http://schemas.openxmlformats.org/drawingml/2006/main">
               <a:ext uri="{FF2B5EF4-FFF2-40B4-BE49-F238E27FC236}">
-                <a16:creationId xmlns:a16="http://schemas.microsoft.com/office/drawing/2014/main" id="{63AFF0DB-377D-4AC8-8B55-225D901D9018}"/>
+                <a16:creationId xmlns:a16="http://schemas.microsoft.com/office/drawing/2014/main" id="{AB0664C2-95A0-4362-970C-2DFE0F6723B3}"/>
               </a:ext>
             </a:extLst>
           </p:cNvPr>
@@ -12245,7 +13475,7 @@
           <p:cNvPr id="18" name="">
             <a:extLst xmlns:a="http://schemas.openxmlformats.org/drawingml/2006/main">
               <a:ext uri="{FF2B5EF4-FFF2-40B4-BE49-F238E27FC236}">
-                <a16:creationId xmlns:a16="http://schemas.microsoft.com/office/drawing/2014/main" id="{0DACF8F1-9308-466B-94AF-1AADB91D9AEE}"/>
+                <a16:creationId xmlns:a16="http://schemas.microsoft.com/office/drawing/2014/main" id="{0C834C67-6467-495B-BD6D-65F9B7D0E9F1}"/>
               </a:ext>
             </a:extLst>
           </p:cNvPr>
@@ -12278,7 +13508,7 @@
           <p:cNvPr id="19" name="">
             <a:extLst xmlns:a="http://schemas.openxmlformats.org/drawingml/2006/main">
               <a:ext uri="{FF2B5EF4-FFF2-40B4-BE49-F238E27FC236}">
-                <a16:creationId xmlns:a16="http://schemas.microsoft.com/office/drawing/2014/main" id="{4E5B155E-DFE5-446B-B3BF-0F0BE96DFCEC}"/>
+                <a16:creationId xmlns:a16="http://schemas.microsoft.com/office/drawing/2014/main" id="{35BF16AC-A352-400F-BE2F-DED355782D84}"/>
               </a:ext>
             </a:extLst>
           </p:cNvPr>
@@ -12332,7 +13562,7 @@
                 <a:ea typeface="Arial"/>
                 <a:cs typeface="Arial"/>
               </a:rPr>
-              <a:t>Inconsistência</a:t>
+              <a:t>Rastreabilidade</a:t>
             </a:r>
           </a:p>
         </p:txBody>
@@ -12342,7 +13572,7 @@
           <p:cNvPr id="20" name="">
             <a:extLst xmlns:a="http://schemas.openxmlformats.org/drawingml/2006/main">
               <a:ext uri="{FF2B5EF4-FFF2-40B4-BE49-F238E27FC236}">
-                <a16:creationId xmlns:a16="http://schemas.microsoft.com/office/drawing/2014/main" id="{0A300EFB-4ECF-4A4E-A16C-5C7164822E04}"/>
+                <a16:creationId xmlns:a16="http://schemas.microsoft.com/office/drawing/2014/main" id="{729CB685-5C75-44FE-A186-7296D00098AD}"/>
               </a:ext>
             </a:extLst>
           </p:cNvPr>
@@ -12396,7 +13626,7 @@
                 <a:ea typeface="Arial"/>
                 <a:cs typeface="Arial"/>
               </a:rPr>
-              <a:t>diferença a ser tratada pela auditoria</a:t>
+              <a:t>histórico para análise patrimonial</a:t>
             </a:r>
           </a:p>
         </p:txBody>
@@ -12404,7 +13634,7 @@
     </p:spTree>
     <p:extLst>
       <p:ext uri="{BB962C8B-B14F-4D97-AF65-F5344CB8AC3E}">
-        <p14:creationId xmlns:p14="http://schemas.microsoft.com/office/powerpoint/2010/main" val="1167306775"/>
+        <p14:creationId xmlns:p14="http://schemas.microsoft.com/office/powerpoint/2010/main" val="1188568360"/>
       </p:ext>
     </p:extLst>
   </p:cSld>
@@ -12428,7 +13658,7 @@
           <p:cNvPr id="1" name="">
             <a:extLst xmlns:a="http://schemas.openxmlformats.org/drawingml/2006/main">
               <a:ext uri="{FF2B5EF4-FFF2-40B4-BE49-F238E27FC236}">
-                <a16:creationId xmlns:a16="http://schemas.microsoft.com/office/drawing/2014/main" id="{15217F0C-6D4F-4E7D-AAC7-3984F5C0FF90}"/>
+                <a16:creationId xmlns:a16="http://schemas.microsoft.com/office/drawing/2014/main" id="{BDB8D409-BE61-4FE5-BE98-AD6509166A55}"/>
               </a:ext>
             </a:extLst>
           </p:cNvPr>
@@ -12463,7 +13693,7 @@
           <p:cNvPr id="2" name="">
             <a:extLst xmlns:a="http://schemas.openxmlformats.org/drawingml/2006/main">
               <a:ext uri="{FF2B5EF4-FFF2-40B4-BE49-F238E27FC236}">
-                <a16:creationId xmlns:a16="http://schemas.microsoft.com/office/drawing/2014/main" id="{445F2425-79A7-44AA-813E-AFCB7F751EC2}"/>
+                <a16:creationId xmlns:a16="http://schemas.microsoft.com/office/drawing/2014/main" id="{EB319889-2EF5-4879-B6D3-8D84D1E3E682}"/>
               </a:ext>
             </a:extLst>
           </p:cNvPr>
@@ -12498,7 +13728,7 @@
           <p:cNvPr id="3" name="">
             <a:extLst xmlns:a="http://schemas.openxmlformats.org/drawingml/2006/main">
               <a:ext uri="{FF2B5EF4-FFF2-40B4-BE49-F238E27FC236}">
-                <a16:creationId xmlns:a16="http://schemas.microsoft.com/office/drawing/2014/main" id="{5EA38122-8D08-4983-9B1E-74582C1663D0}"/>
+                <a16:creationId xmlns:a16="http://schemas.microsoft.com/office/drawing/2014/main" id="{0D1449D1-DA99-4FE4-B409-C126B2C107AF}"/>
               </a:ext>
             </a:extLst>
           </p:cNvPr>
@@ -12562,7 +13792,7 @@
           <p:cNvPr id="4" name="">
             <a:extLst xmlns:a="http://schemas.openxmlformats.org/drawingml/2006/main">
               <a:ext uri="{FF2B5EF4-FFF2-40B4-BE49-F238E27FC236}">
-                <a16:creationId xmlns:a16="http://schemas.microsoft.com/office/drawing/2014/main" id="{EBDBFAC7-64BC-4543-9770-4326E50949C0}"/>
+                <a16:creationId xmlns:a16="http://schemas.microsoft.com/office/drawing/2014/main" id="{FDC6EF13-C018-4DBF-839D-BE13FD5C4B63}"/>
               </a:ext>
             </a:extLst>
           </p:cNvPr>
@@ -12616,7 +13846,7 @@
                 <a:ea typeface="Arial"/>
                 <a:cs typeface="Arial"/>
               </a:rPr>
-              <a:t>Proposta: RFID integrado ao sistema</a:t>
+              <a:t>Problema observado</a:t>
             </a:r>
           </a:p>
         </p:txBody>
@@ -12626,7 +13856,7 @@
           <p:cNvPr id="5" name="">
             <a:extLst xmlns:a="http://schemas.openxmlformats.org/drawingml/2006/main">
               <a:ext uri="{FF2B5EF4-FFF2-40B4-BE49-F238E27FC236}">
-                <a16:creationId xmlns:a16="http://schemas.microsoft.com/office/drawing/2014/main" id="{E6E9550D-2F1F-4D92-9807-E0E7C8EC8788}"/>
+                <a16:creationId xmlns:a16="http://schemas.microsoft.com/office/drawing/2014/main" id="{90036727-70EF-4516-8D90-D3AB6D69F9FD}"/>
               </a:ext>
             </a:extLst>
           </p:cNvPr>
@@ -12680,7 +13910,7 @@
                 <a:ea typeface="Arial"/>
                 <a:cs typeface="Arial"/>
               </a:rPr>
-              <a:t>A leitura RFID conecta a conferência física ao registro digital, reduzindo dependência de verificação visual.</a:t>
+              <a:t>A dificuldade central está em manter os registros patrimoniais alinhados à situação real dos bens.</a:t>
             </a:r>
           </a:p>
         </p:txBody>
@@ -12690,7 +13920,7 @@
           <p:cNvPr id="6" name="">
             <a:extLst xmlns:a="http://schemas.openxmlformats.org/drawingml/2006/main">
               <a:ext uri="{FF2B5EF4-FFF2-40B4-BE49-F238E27FC236}">
-                <a16:creationId xmlns:a16="http://schemas.microsoft.com/office/drawing/2014/main" id="{9F5CAB6A-6EDF-439C-A17A-CD4722E8624C}"/>
+                <a16:creationId xmlns:a16="http://schemas.microsoft.com/office/drawing/2014/main" id="{325991E9-123C-47B4-BD77-977A4FD49789}"/>
               </a:ext>
             </a:extLst>
           </p:cNvPr>
@@ -12725,7 +13955,7 @@
           <p:cNvPr id="7" name="">
             <a:extLst xmlns:a="http://schemas.openxmlformats.org/drawingml/2006/main">
               <a:ext uri="{FF2B5EF4-FFF2-40B4-BE49-F238E27FC236}">
-                <a16:creationId xmlns:a16="http://schemas.microsoft.com/office/drawing/2014/main" id="{9BD887DD-9A63-4BB2-AD1A-4B94EACF6BD5}"/>
+                <a16:creationId xmlns:a16="http://schemas.microsoft.com/office/drawing/2014/main" id="{C5027EF5-D26D-4179-A9E5-27C172C703BF}"/>
               </a:ext>
             </a:extLst>
           </p:cNvPr>
@@ -12779,7 +14009,7 @@
                 <a:ea typeface="Arial"/>
                 <a:cs typeface="Arial"/>
               </a:rPr>
-              <a:t>Cada bem recebe uma tag associada ao cadastro patrimonial.</a:t>
+              <a:t>A conferência visual ou manual depende de verificação individual e atualização constante.</a:t>
             </a:r>
           </a:p>
         </p:txBody>
@@ -12789,7 +14019,7 @@
           <p:cNvPr id="8" name="">
             <a:extLst xmlns:a="http://schemas.openxmlformats.org/drawingml/2006/main">
               <a:ext uri="{FF2B5EF4-FFF2-40B4-BE49-F238E27FC236}">
-                <a16:creationId xmlns:a16="http://schemas.microsoft.com/office/drawing/2014/main" id="{065601A6-A753-433F-AF9D-56459F852F34}"/>
+                <a16:creationId xmlns:a16="http://schemas.microsoft.com/office/drawing/2014/main" id="{2CE7CDBC-D7B0-4E6F-9D9A-1DFC08937E6D}"/>
               </a:ext>
             </a:extLst>
           </p:cNvPr>
@@ -12824,7 +14054,7 @@
           <p:cNvPr id="9" name="">
             <a:extLst xmlns:a="http://schemas.openxmlformats.org/drawingml/2006/main">
               <a:ext uri="{FF2B5EF4-FFF2-40B4-BE49-F238E27FC236}">
-                <a16:creationId xmlns:a16="http://schemas.microsoft.com/office/drawing/2014/main" id="{2427CFDB-E91A-4D56-94FC-F9A342FA93C6}"/>
+                <a16:creationId xmlns:a16="http://schemas.microsoft.com/office/drawing/2014/main" id="{00943B7E-AF93-4928-BFD6-41E329F14B58}"/>
               </a:ext>
             </a:extLst>
           </p:cNvPr>
@@ -12878,7 +14108,7 @@
                 <a:ea typeface="Arial"/>
                 <a:cs typeface="Arial"/>
               </a:rPr>
-              <a:t>Quando a tag é lida, o sistema identifica qual bem foi encontrado.</a:t>
+              <a:t>Bens podem não ser localizados ou aparecer em local diferente do registrado.</a:t>
             </a:r>
           </a:p>
         </p:txBody>
@@ -12888,7 +14118,7 @@
           <p:cNvPr id="10" name="">
             <a:extLst xmlns:a="http://schemas.openxmlformats.org/drawingml/2006/main">
               <a:ext uri="{FF2B5EF4-FFF2-40B4-BE49-F238E27FC236}">
-                <a16:creationId xmlns:a16="http://schemas.microsoft.com/office/drawing/2014/main" id="{40C76C85-05AF-4413-9E88-213829279556}"/>
+                <a16:creationId xmlns:a16="http://schemas.microsoft.com/office/drawing/2014/main" id="{0C18350B-7C16-4BE2-A242-44C4B8144A77}"/>
               </a:ext>
             </a:extLst>
           </p:cNvPr>
@@ -12923,7 +14153,7 @@
           <p:cNvPr id="11" name="">
             <a:extLst xmlns:a="http://schemas.openxmlformats.org/drawingml/2006/main">
               <a:ext uri="{FF2B5EF4-FFF2-40B4-BE49-F238E27FC236}">
-                <a16:creationId xmlns:a16="http://schemas.microsoft.com/office/drawing/2014/main" id="{3D607BEC-B23B-4CA9-8313-30615AA7B09D}"/>
+                <a16:creationId xmlns:a16="http://schemas.microsoft.com/office/drawing/2014/main" id="{DEA6FAB3-9C12-48BF-A4A6-F39BD3D016E0}"/>
               </a:ext>
             </a:extLst>
           </p:cNvPr>
@@ -12977,7 +14207,7 @@
                 <a:ea typeface="Arial"/>
                 <a:cs typeface="Arial"/>
               </a:rPr>
-              <a:t>A leitura ajuda a conferir se o bem está no local esperado.</a:t>
+              <a:t>Sem tratamento organizado, essas divergências dificultam a conferência e a tomada de decisão patrimonial.</a:t>
             </a:r>
           </a:p>
         </p:txBody>
@@ -12987,7 +14217,7 @@
           <p:cNvPr id="12" name="">
             <a:extLst xmlns:a="http://schemas.openxmlformats.org/drawingml/2006/main">
               <a:ext uri="{FF2B5EF4-FFF2-40B4-BE49-F238E27FC236}">
-                <a16:creationId xmlns:a16="http://schemas.microsoft.com/office/drawing/2014/main" id="{63C23E9D-D439-4355-A4D1-0D6F1CE4B96A}"/>
+                <a16:creationId xmlns:a16="http://schemas.microsoft.com/office/drawing/2014/main" id="{4CD2B1B7-D8BC-492C-BD97-3553BB1F496E}"/>
               </a:ext>
             </a:extLst>
           </p:cNvPr>
@@ -13020,7 +14250,7 @@
           <p:cNvPr id="13" name="">
             <a:extLst xmlns:a="http://schemas.openxmlformats.org/drawingml/2006/main">
               <a:ext uri="{FF2B5EF4-FFF2-40B4-BE49-F238E27FC236}">
-                <a16:creationId xmlns:a16="http://schemas.microsoft.com/office/drawing/2014/main" id="{14F87822-25E9-4064-A68C-46EDFD22F127}"/>
+                <a16:creationId xmlns:a16="http://schemas.microsoft.com/office/drawing/2014/main" id="{2B25B227-B975-4C03-8F2E-D5D246BA2422}"/>
               </a:ext>
             </a:extLst>
           </p:cNvPr>
@@ -13074,7 +14304,7 @@
                 <a:ea typeface="Arial"/>
                 <a:cs typeface="Arial"/>
               </a:rPr>
-              <a:t>Identificação</a:t>
+              <a:t>Registro</a:t>
             </a:r>
           </a:p>
         </p:txBody>
@@ -13084,7 +14314,7 @@
           <p:cNvPr id="14" name="">
             <a:extLst xmlns:a="http://schemas.openxmlformats.org/drawingml/2006/main">
               <a:ext uri="{FF2B5EF4-FFF2-40B4-BE49-F238E27FC236}">
-                <a16:creationId xmlns:a16="http://schemas.microsoft.com/office/drawing/2014/main" id="{66FCF72F-67B6-4CD1-B323-582304F37971}"/>
+                <a16:creationId xmlns:a16="http://schemas.microsoft.com/office/drawing/2014/main" id="{40B76733-7551-42B3-84C5-9434C7436D04}"/>
               </a:ext>
             </a:extLst>
           </p:cNvPr>
@@ -13138,7 +14368,7 @@
                 <a:ea typeface="Arial"/>
                 <a:cs typeface="Arial"/>
               </a:rPr>
-              <a:t>vínculo entre bem físico e registro</a:t>
+              <a:t>informação administrativa do bem</a:t>
             </a:r>
           </a:p>
         </p:txBody>
@@ -13148,7 +14378,7 @@
           <p:cNvPr id="15" name="">
             <a:extLst xmlns:a="http://schemas.openxmlformats.org/drawingml/2006/main">
               <a:ext uri="{FF2B5EF4-FFF2-40B4-BE49-F238E27FC236}">
-                <a16:creationId xmlns:a16="http://schemas.microsoft.com/office/drawing/2014/main" id="{0220051C-073F-4B86-A8A2-D722BF3F4B4C}"/>
+                <a16:creationId xmlns:a16="http://schemas.microsoft.com/office/drawing/2014/main" id="{1665982E-C0E9-45F9-934F-ED2156CD1B83}"/>
               </a:ext>
             </a:extLst>
           </p:cNvPr>
@@ -13181,7 +14411,7 @@
           <p:cNvPr id="16" name="">
             <a:extLst xmlns:a="http://schemas.openxmlformats.org/drawingml/2006/main">
               <a:ext uri="{FF2B5EF4-FFF2-40B4-BE49-F238E27FC236}">
-                <a16:creationId xmlns:a16="http://schemas.microsoft.com/office/drawing/2014/main" id="{0711B5EF-1535-4027-BF16-49FFDD771467}"/>
+                <a16:creationId xmlns:a16="http://schemas.microsoft.com/office/drawing/2014/main" id="{D59CC3ED-CF0A-42DE-90B8-A3F44C71AD88}"/>
               </a:ext>
             </a:extLst>
           </p:cNvPr>
@@ -13235,7 +14465,7 @@
                 <a:ea typeface="Arial"/>
                 <a:cs typeface="Arial"/>
               </a:rPr>
-              <a:t>Rastreabilidade</a:t>
+              <a:t>Localização</a:t>
             </a:r>
           </a:p>
         </p:txBody>
@@ -13245,7 +14475,7 @@
           <p:cNvPr id="17" name="">
             <a:extLst xmlns:a="http://schemas.openxmlformats.org/drawingml/2006/main">
               <a:ext uri="{FF2B5EF4-FFF2-40B4-BE49-F238E27FC236}">
-                <a16:creationId xmlns:a16="http://schemas.microsoft.com/office/drawing/2014/main" id="{6186EF1C-CDCC-43C1-BD0B-0A30C136A21F}"/>
+                <a16:creationId xmlns:a16="http://schemas.microsoft.com/office/drawing/2014/main" id="{D28B5D49-C52E-40B9-9381-F610D7AAF21D}"/>
               </a:ext>
             </a:extLst>
           </p:cNvPr>
@@ -13299,7 +14529,7 @@
                 <a:ea typeface="Arial"/>
                 <a:cs typeface="Arial"/>
               </a:rPr>
-              <a:t>histórico do que foi lido</a:t>
+              <a:t>situação observada na conferência</a:t>
             </a:r>
           </a:p>
         </p:txBody>
@@ -13309,7 +14539,7 @@
           <p:cNvPr id="18" name="">
             <a:extLst xmlns:a="http://schemas.openxmlformats.org/drawingml/2006/main">
               <a:ext uri="{FF2B5EF4-FFF2-40B4-BE49-F238E27FC236}">
-                <a16:creationId xmlns:a16="http://schemas.microsoft.com/office/drawing/2014/main" id="{90FFEF25-AC03-4521-BB92-97AC1009B917}"/>
+                <a16:creationId xmlns:a16="http://schemas.microsoft.com/office/drawing/2014/main" id="{6663A907-35C5-4ABF-B1DE-791A6AC630AB}"/>
               </a:ext>
             </a:extLst>
           </p:cNvPr>
@@ -13342,7 +14572,7 @@
           <p:cNvPr id="19" name="">
             <a:extLst xmlns:a="http://schemas.openxmlformats.org/drawingml/2006/main">
               <a:ext uri="{FF2B5EF4-FFF2-40B4-BE49-F238E27FC236}">
-                <a16:creationId xmlns:a16="http://schemas.microsoft.com/office/drawing/2014/main" id="{28821365-17CC-4ABF-884C-141037BC573C}"/>
+                <a16:creationId xmlns:a16="http://schemas.microsoft.com/office/drawing/2014/main" id="{35D35293-63E4-4E00-9DA8-EDBAAAF995E7}"/>
               </a:ext>
             </a:extLst>
           </p:cNvPr>
@@ -13396,7 +14626,7 @@
                 <a:ea typeface="Arial"/>
                 <a:cs typeface="Arial"/>
               </a:rPr>
-              <a:t>Delimitação</a:t>
+              <a:t>Divergência</a:t>
             </a:r>
           </a:p>
         </p:txBody>
@@ -13406,7 +14636,7 @@
           <p:cNvPr id="20" name="">
             <a:extLst xmlns:a="http://schemas.openxmlformats.org/drawingml/2006/main">
               <a:ext uri="{FF2B5EF4-FFF2-40B4-BE49-F238E27FC236}">
-                <a16:creationId xmlns:a16="http://schemas.microsoft.com/office/drawing/2014/main" id="{19963415-C0CA-4073-891D-2AA4A6225FAD}"/>
+                <a16:creationId xmlns:a16="http://schemas.microsoft.com/office/drawing/2014/main" id="{82969022-9D47-4977-A87D-9257A64CBB6B}"/>
               </a:ext>
             </a:extLst>
           </p:cNvPr>
@@ -13460,7 +14690,7 @@
                 <a:ea typeface="Arial"/>
                 <a:cs typeface="Arial"/>
               </a:rPr>
-              <a:t>validação física sem extrapolar alcance</a:t>
+              <a:t>diferença a ser analisada</a:t>
             </a:r>
           </a:p>
         </p:txBody>
@@ -13468,7 +14698,7 @@
     </p:spTree>
     <p:extLst>
       <p:ext uri="{BB962C8B-B14F-4D97-AF65-F5344CB8AC3E}">
-        <p14:creationId xmlns:p14="http://schemas.microsoft.com/office/powerpoint/2010/main" val="605665630"/>
+        <p14:creationId xmlns:p14="http://schemas.microsoft.com/office/powerpoint/2010/main" val="1932245144"/>
       </p:ext>
     </p:extLst>
   </p:cSld>
@@ -13492,7 +14722,7 @@
           <p:cNvPr id="1" name="">
             <a:extLst xmlns:a="http://schemas.openxmlformats.org/drawingml/2006/main">
               <a:ext uri="{FF2B5EF4-FFF2-40B4-BE49-F238E27FC236}">
-                <a16:creationId xmlns:a16="http://schemas.microsoft.com/office/drawing/2014/main" id="{21221C8B-7EEB-4EC3-806B-B314FA0C8D88}"/>
+                <a16:creationId xmlns:a16="http://schemas.microsoft.com/office/drawing/2014/main" id="{92A6556B-0DD7-4732-9023-8F0CE140C302}"/>
               </a:ext>
             </a:extLst>
           </p:cNvPr>
@@ -13527,7 +14757,7 @@
           <p:cNvPr id="2" name="">
             <a:extLst xmlns:a="http://schemas.openxmlformats.org/drawingml/2006/main">
               <a:ext uri="{FF2B5EF4-FFF2-40B4-BE49-F238E27FC236}">
-                <a16:creationId xmlns:a16="http://schemas.microsoft.com/office/drawing/2014/main" id="{BB4631F2-3FD2-4900-836A-26BAF47C5DFE}"/>
+                <a16:creationId xmlns:a16="http://schemas.microsoft.com/office/drawing/2014/main" id="{4ED42F18-AA1E-4588-A40B-E1E74085B50D}"/>
               </a:ext>
             </a:extLst>
           </p:cNvPr>
@@ -13562,7 +14792,7 @@
           <p:cNvPr id="3" name="">
             <a:extLst xmlns:a="http://schemas.openxmlformats.org/drawingml/2006/main">
               <a:ext uri="{FF2B5EF4-FFF2-40B4-BE49-F238E27FC236}">
-                <a16:creationId xmlns:a16="http://schemas.microsoft.com/office/drawing/2014/main" id="{C29C6734-8D3F-4101-93DE-83EAA03F102A}"/>
+                <a16:creationId xmlns:a16="http://schemas.microsoft.com/office/drawing/2014/main" id="{044A6532-EAB3-4156-BAE8-8474500F7257}"/>
               </a:ext>
             </a:extLst>
           </p:cNvPr>
@@ -13626,7 +14856,7 @@
           <p:cNvPr id="4" name="">
             <a:extLst xmlns:a="http://schemas.openxmlformats.org/drawingml/2006/main">
               <a:ext uri="{FF2B5EF4-FFF2-40B4-BE49-F238E27FC236}">
-                <a16:creationId xmlns:a16="http://schemas.microsoft.com/office/drawing/2014/main" id="{F4C9D912-F902-4238-B5D6-B51B841814FD}"/>
+                <a16:creationId xmlns:a16="http://schemas.microsoft.com/office/drawing/2014/main" id="{624D5EB5-8EAE-4F2C-8306-BA9F05C03D59}"/>
               </a:ext>
             </a:extLst>
           </p:cNvPr>
@@ -13680,7 +14910,7 @@
                 <a:ea typeface="Arial"/>
                 <a:cs typeface="Arial"/>
               </a:rPr>
-              <a:t>Objetivos do trabalho</a:t>
+              <a:t>Proposta do protótipo</a:t>
             </a:r>
           </a:p>
         </p:txBody>
@@ -13690,7 +14920,7 @@
           <p:cNvPr id="5" name="">
             <a:extLst xmlns:a="http://schemas.openxmlformats.org/drawingml/2006/main">
               <a:ext uri="{FF2B5EF4-FFF2-40B4-BE49-F238E27FC236}">
-                <a16:creationId xmlns:a16="http://schemas.microsoft.com/office/drawing/2014/main" id="{5DA831B6-5FEB-4B8C-90A9-3F64F7C613AA}"/>
+                <a16:creationId xmlns:a16="http://schemas.microsoft.com/office/drawing/2014/main" id="{651B39C1-2F9F-4151-853D-C0959264A65B}"/>
               </a:ext>
             </a:extLst>
           </p:cNvPr>
@@ -13744,7 +14974,7 @@
                 <a:ea typeface="Arial"/>
                 <a:cs typeface="Arial"/>
               </a:rPr>
-              <a:t>O trabalho busca construir e verificar um protótipo capaz de apoiar a conferência patrimonial.</a:t>
+              <a:t>O protótipo integra sistema web, API e eventos RFID para apoiar a auditoria patrimonial.</a:t>
             </a:r>
           </a:p>
         </p:txBody>
@@ -13754,7 +14984,7 @@
           <p:cNvPr id="6" name="">
             <a:extLst xmlns:a="http://schemas.openxmlformats.org/drawingml/2006/main">
               <a:ext uri="{FF2B5EF4-FFF2-40B4-BE49-F238E27FC236}">
-                <a16:creationId xmlns:a16="http://schemas.microsoft.com/office/drawing/2014/main" id="{3A793DCE-1879-44EB-8B3F-7B2CE736C901}"/>
+                <a16:creationId xmlns:a16="http://schemas.microsoft.com/office/drawing/2014/main" id="{DC374C4B-5A72-4B18-B802-AC023E7C5AA8}"/>
               </a:ext>
             </a:extLst>
           </p:cNvPr>
@@ -13789,7 +15019,7 @@
           <p:cNvPr id="7" name="">
             <a:extLst xmlns:a="http://schemas.openxmlformats.org/drawingml/2006/main">
               <a:ext uri="{FF2B5EF4-FFF2-40B4-BE49-F238E27FC236}">
-                <a16:creationId xmlns:a16="http://schemas.microsoft.com/office/drawing/2014/main" id="{670385DD-7B64-4E22-B048-C8125FC2FB26}"/>
+                <a16:creationId xmlns:a16="http://schemas.microsoft.com/office/drawing/2014/main" id="{FF3201E6-7CEE-47AD-9298-3233745442BC}"/>
               </a:ext>
             </a:extLst>
           </p:cNvPr>
@@ -13843,7 +15073,7 @@
                 <a:ea typeface="Arial"/>
                 <a:cs typeface="Arial"/>
               </a:rPr>
-              <a:t>Organizar os cadastros de bens, locais e leitores RFID.</a:t>
+              <a:t>Locais, leitores, bens e tags formam a base do inventário lógico.</a:t>
             </a:r>
           </a:p>
         </p:txBody>
@@ -13853,7 +15083,7 @@
           <p:cNvPr id="8" name="">
             <a:extLst xmlns:a="http://schemas.openxmlformats.org/drawingml/2006/main">
               <a:ext uri="{FF2B5EF4-FFF2-40B4-BE49-F238E27FC236}">
-                <a16:creationId xmlns:a16="http://schemas.microsoft.com/office/drawing/2014/main" id="{9769E583-12F4-41B7-B077-FDF9AD0ACD2B}"/>
+                <a16:creationId xmlns:a16="http://schemas.microsoft.com/office/drawing/2014/main" id="{083BFEE6-97E4-410C-B0BB-5D1CF15F1E97}"/>
               </a:ext>
             </a:extLst>
           </p:cNvPr>
@@ -13888,7 +15118,7 @@
           <p:cNvPr id="9" name="">
             <a:extLst xmlns:a="http://schemas.openxmlformats.org/drawingml/2006/main">
               <a:ext uri="{FF2B5EF4-FFF2-40B4-BE49-F238E27FC236}">
-                <a16:creationId xmlns:a16="http://schemas.microsoft.com/office/drawing/2014/main" id="{2016E2BA-BB33-4894-995D-38BCC5450DE1}"/>
+                <a16:creationId xmlns:a16="http://schemas.microsoft.com/office/drawing/2014/main" id="{1D906CF6-6DCC-4367-96D4-1C064BCFE567}"/>
               </a:ext>
             </a:extLst>
           </p:cNvPr>
@@ -13942,7 +15172,7 @@
                 <a:ea typeface="Arial"/>
                 <a:cs typeface="Arial"/>
               </a:rPr>
-              <a:t>Usar as leituras para apoiar a conferência da localização dos bens.</a:t>
+              <a:t>O leitor de proximidade envia a tag ao sistema por meio de um comunicador intermediário.</a:t>
             </a:r>
           </a:p>
         </p:txBody>
@@ -13952,7 +15182,7 @@
           <p:cNvPr id="10" name="">
             <a:extLst xmlns:a="http://schemas.openxmlformats.org/drawingml/2006/main">
               <a:ext uri="{FF2B5EF4-FFF2-40B4-BE49-F238E27FC236}">
-                <a16:creationId xmlns:a16="http://schemas.microsoft.com/office/drawing/2014/main" id="{A92F5B30-761A-4BA4-9411-9F84CE86709A}"/>
+                <a16:creationId xmlns:a16="http://schemas.microsoft.com/office/drawing/2014/main" id="{01D84EAF-AE9A-4F76-BFE8-4B2FDB72608E}"/>
               </a:ext>
             </a:extLst>
           </p:cNvPr>
@@ -13987,7 +15217,7 @@
           <p:cNvPr id="11" name="">
             <a:extLst xmlns:a="http://schemas.openxmlformats.org/drawingml/2006/main">
               <a:ext uri="{FF2B5EF4-FFF2-40B4-BE49-F238E27FC236}">
-                <a16:creationId xmlns:a16="http://schemas.microsoft.com/office/drawing/2014/main" id="{5963F9AE-D99D-4790-B7CA-05F0D20B719B}"/>
+                <a16:creationId xmlns:a16="http://schemas.microsoft.com/office/drawing/2014/main" id="{CB7827A2-3FB8-452F-8C42-133D492F001B}"/>
               </a:ext>
             </a:extLst>
           </p:cNvPr>
@@ -14041,7 +15271,7 @@
                 <a:ea typeface="Arial"/>
                 <a:cs typeface="Arial"/>
               </a:rPr>
-              <a:t>Testar se o caminho da leitura até o registro no sistema funciona corretamente.</a:t>
+              <a:t>A API processa o evento e registra histórico, auditoria ou inconsistência conforme o caso.</a:t>
             </a:r>
           </a:p>
         </p:txBody>
@@ -14051,19 +15281,19 @@
           <p:cNvPr id="12" name="">
             <a:extLst xmlns:a="http://schemas.openxmlformats.org/drawingml/2006/main">
               <a:ext uri="{FF2B5EF4-FFF2-40B4-BE49-F238E27FC236}">
-                <a16:creationId xmlns:a16="http://schemas.microsoft.com/office/drawing/2014/main" id="{EBA9EECB-1434-4578-96AA-8879F5C3E3F5}"/>
-              </a:ext>
-            </a:extLst>
-          </p:cNvPr>
-          <p:cNvSpPr>
-            <a:spLocks xmlns:a="http://schemas.openxmlformats.org/drawingml/2006/main" noGrp="1"/>
-          </p:cNvSpPr>
-          <p:nvPr/>
-        </p:nvSpPr>
-        <p:spPr>
-          <a:xfrm xmlns:a="http://schemas.openxmlformats.org/drawingml/2006/main">
-            <a:off x="6858000" y="2381250"/>
-            <a:ext cx="3886200" cy="781050"/>
+                <a16:creationId xmlns:a16="http://schemas.microsoft.com/office/drawing/2014/main" id="{97393359-9454-49D9-9570-5E2C22487FD2}"/>
+              </a:ext>
+            </a:extLst>
+          </p:cNvPr>
+          <p:cNvSpPr>
+            <a:spLocks xmlns:a="http://schemas.openxmlformats.org/drawingml/2006/main" noGrp="1"/>
+          </p:cNvSpPr>
+          <p:nvPr/>
+        </p:nvSpPr>
+        <p:spPr>
+          <a:xfrm xmlns:a="http://schemas.openxmlformats.org/drawingml/2006/main">
+            <a:off x="6838950" y="2400300"/>
+            <a:ext cx="4000500" cy="723900"/>
           </a:xfrm>
           <a:prstGeom xmlns:a="http://schemas.openxmlformats.org/drawingml/2006/main" prst="rect">
             <a:avLst/>
@@ -14084,19 +15314,19 @@
           <p:cNvPr id="13" name="">
             <a:extLst xmlns:a="http://schemas.openxmlformats.org/drawingml/2006/main">
               <a:ext uri="{FF2B5EF4-FFF2-40B4-BE49-F238E27FC236}">
-                <a16:creationId xmlns:a16="http://schemas.microsoft.com/office/drawing/2014/main" id="{A633240E-68E4-4EA5-9DD5-0DBD51365187}"/>
-              </a:ext>
-            </a:extLst>
-          </p:cNvPr>
-          <p:cNvSpPr>
-            <a:spLocks xmlns:a="http://schemas.openxmlformats.org/drawingml/2006/main" noGrp="1"/>
-          </p:cNvSpPr>
-          <p:nvPr/>
-        </p:nvSpPr>
-        <p:spPr>
-          <a:xfrm xmlns:a="http://schemas.openxmlformats.org/drawingml/2006/main">
-            <a:off x="7105650" y="2476500"/>
-            <a:ext cx="1619250" cy="323850"/>
+                <a16:creationId xmlns:a16="http://schemas.microsoft.com/office/drawing/2014/main" id="{F0B82487-876F-40DA-A03E-ECED8CD75174}"/>
+              </a:ext>
+            </a:extLst>
+          </p:cNvPr>
+          <p:cNvSpPr>
+            <a:spLocks xmlns:a="http://schemas.openxmlformats.org/drawingml/2006/main" noGrp="1"/>
+          </p:cNvSpPr>
+          <p:nvPr/>
+        </p:nvSpPr>
+        <p:spPr>
+          <a:xfrm xmlns:a="http://schemas.openxmlformats.org/drawingml/2006/main">
+            <a:off x="7086600" y="2505075"/>
+            <a:ext cx="3429000" cy="266700"/>
           </a:xfrm>
           <a:prstGeom xmlns:a="http://schemas.openxmlformats.org/drawingml/2006/main" prst="rect">
             <a:avLst/>
@@ -14120,7 +15350,7 @@
           <a:lstStyle xmlns:a="http://schemas.openxmlformats.org/drawingml/2006/main"/>
           <a:p xmlns:a="http://schemas.openxmlformats.org/drawingml/2006/main">
             <a:pPr algn="l">
-              <a:defRPr sz="2250" b="1">
+              <a:defRPr sz="1725" b="1">
                 <a:solidFill>
                   <a:srgbClr val="075D3B"/>
                 </a:solidFill>
@@ -14130,7 +15360,7 @@
               </a:defRPr>
             </a:pPr>
             <a:r>
-              <a:rPr sz="2250" b="1">
+              <a:rPr sz="1725" b="1">
                 <a:solidFill>
                   <a:srgbClr val="075D3B"/>
                 </a:solidFill>
@@ -14138,7 +15368,7 @@
                 <a:ea typeface="Arial"/>
                 <a:cs typeface="Arial"/>
               </a:rPr>
-              <a:t>Sistema</a:t>
+              <a:t>Sistema web</a:t>
             </a:r>
           </a:p>
         </p:txBody>
@@ -14148,19 +15378,19 @@
           <p:cNvPr id="14" name="">
             <a:extLst xmlns:a="http://schemas.openxmlformats.org/drawingml/2006/main">
               <a:ext uri="{FF2B5EF4-FFF2-40B4-BE49-F238E27FC236}">
-                <a16:creationId xmlns:a16="http://schemas.microsoft.com/office/drawing/2014/main" id="{EAF21A5E-5813-446D-928A-3CB132855267}"/>
-              </a:ext>
-            </a:extLst>
-          </p:cNvPr>
-          <p:cNvSpPr>
-            <a:spLocks xmlns:a="http://schemas.openxmlformats.org/drawingml/2006/main" noGrp="1"/>
-          </p:cNvSpPr>
-          <p:nvPr/>
-        </p:nvSpPr>
-        <p:spPr>
-          <a:xfrm xmlns:a="http://schemas.openxmlformats.org/drawingml/2006/main">
-            <a:off x="7105650" y="2838450"/>
-            <a:ext cx="3238500" cy="228600"/>
+                <a16:creationId xmlns:a16="http://schemas.microsoft.com/office/drawing/2014/main" id="{9F8DEB4D-1DC6-4D17-A1AD-DC962CFF373B}"/>
+              </a:ext>
+            </a:extLst>
+          </p:cNvPr>
+          <p:cNvSpPr>
+            <a:spLocks xmlns:a="http://schemas.openxmlformats.org/drawingml/2006/main" noGrp="1"/>
+          </p:cNvSpPr>
+          <p:nvPr/>
+        </p:nvSpPr>
+        <p:spPr>
+          <a:xfrm xmlns:a="http://schemas.openxmlformats.org/drawingml/2006/main">
+            <a:off x="7086600" y="2809875"/>
+            <a:ext cx="3333750" cy="228600"/>
           </a:xfrm>
           <a:prstGeom xmlns:a="http://schemas.openxmlformats.org/drawingml/2006/main" prst="rect">
             <a:avLst/>
@@ -14184,7 +15414,7 @@
           <a:lstStyle xmlns:a="http://schemas.openxmlformats.org/drawingml/2006/main"/>
           <a:p xmlns:a="http://schemas.openxmlformats.org/drawingml/2006/main">
             <a:pPr algn="l">
-              <a:defRPr sz="1425" b="0">
+              <a:defRPr sz="1350" b="0">
                 <a:solidFill>
                   <a:srgbClr val="51606F"/>
                 </a:solidFill>
@@ -14194,7 +15424,7 @@
               </a:defRPr>
             </a:pPr>
             <a:r>
-              <a:rPr sz="1425" b="0">
+              <a:rPr sz="1350" b="0">
                 <a:solidFill>
                   <a:srgbClr val="51606F"/>
                 </a:solidFill>
@@ -14202,7 +15432,7 @@
                 <a:ea typeface="Arial"/>
                 <a:cs typeface="Arial"/>
               </a:rPr>
-              <a:t>registro centralizado</a:t>
+              <a:t>cadastro e acompanhamento</a:t>
             </a:r>
           </a:p>
         </p:txBody>
@@ -14212,25 +15442,25 @@
           <p:cNvPr id="15" name="">
             <a:extLst xmlns:a="http://schemas.openxmlformats.org/drawingml/2006/main">
               <a:ext uri="{FF2B5EF4-FFF2-40B4-BE49-F238E27FC236}">
-                <a16:creationId xmlns:a16="http://schemas.microsoft.com/office/drawing/2014/main" id="{EAB8AF17-4496-438F-91D3-3A82283E5580}"/>
-              </a:ext>
-            </a:extLst>
-          </p:cNvPr>
-          <p:cNvSpPr>
-            <a:spLocks xmlns:a="http://schemas.openxmlformats.org/drawingml/2006/main" noGrp="1"/>
-          </p:cNvSpPr>
-          <p:nvPr/>
-        </p:nvSpPr>
-        <p:spPr>
-          <a:xfrm xmlns:a="http://schemas.openxmlformats.org/drawingml/2006/main">
-            <a:off x="6858000" y="3448050"/>
-            <a:ext cx="3886200" cy="781050"/>
-          </a:xfrm>
-          <a:prstGeom xmlns:a="http://schemas.openxmlformats.org/drawingml/2006/main" prst="rect">
-            <a:avLst/>
-          </a:prstGeom>
-          <a:solidFill xmlns:a="http://schemas.openxmlformats.org/drawingml/2006/main">
-            <a:srgbClr val="FFF4CF"/>
+                <a16:creationId xmlns:a16="http://schemas.microsoft.com/office/drawing/2014/main" id="{E641D507-9D33-4E48-9ED3-D24DABC91432}"/>
+              </a:ext>
+            </a:extLst>
+          </p:cNvPr>
+          <p:cNvSpPr>
+            <a:spLocks xmlns:a="http://schemas.openxmlformats.org/drawingml/2006/main" noGrp="1"/>
+          </p:cNvSpPr>
+          <p:nvPr/>
+        </p:nvSpPr>
+        <p:spPr>
+          <a:xfrm xmlns:a="http://schemas.openxmlformats.org/drawingml/2006/main">
+            <a:off x="6838950" y="3390900"/>
+            <a:ext cx="4000500" cy="723900"/>
+          </a:xfrm>
+          <a:prstGeom xmlns:a="http://schemas.openxmlformats.org/drawingml/2006/main" prst="rect">
+            <a:avLst/>
+          </a:prstGeom>
+          <a:solidFill xmlns:a="http://schemas.openxmlformats.org/drawingml/2006/main">
+            <a:srgbClr val="FFFFFF"/>
           </a:solidFill>
           <a:ln xmlns:a="http://schemas.openxmlformats.org/drawingml/2006/main" w="9525">
             <a:solidFill>
@@ -14245,19 +15475,19 @@
           <p:cNvPr id="16" name="">
             <a:extLst xmlns:a="http://schemas.openxmlformats.org/drawingml/2006/main">
               <a:ext uri="{FF2B5EF4-FFF2-40B4-BE49-F238E27FC236}">
-                <a16:creationId xmlns:a16="http://schemas.microsoft.com/office/drawing/2014/main" id="{F9EF70C3-39CC-40D0-A56F-A6D1FEFDC72E}"/>
-              </a:ext>
-            </a:extLst>
-          </p:cNvPr>
-          <p:cNvSpPr>
-            <a:spLocks xmlns:a="http://schemas.openxmlformats.org/drawingml/2006/main" noGrp="1"/>
-          </p:cNvSpPr>
-          <p:nvPr/>
-        </p:nvSpPr>
-        <p:spPr>
-          <a:xfrm xmlns:a="http://schemas.openxmlformats.org/drawingml/2006/main">
-            <a:off x="7105650" y="3543300"/>
-            <a:ext cx="1619250" cy="323850"/>
+                <a16:creationId xmlns:a16="http://schemas.microsoft.com/office/drawing/2014/main" id="{E87A1178-6861-477A-B62A-610F9190FEE6}"/>
+              </a:ext>
+            </a:extLst>
+          </p:cNvPr>
+          <p:cNvSpPr>
+            <a:spLocks xmlns:a="http://schemas.openxmlformats.org/drawingml/2006/main" noGrp="1"/>
+          </p:cNvSpPr>
+          <p:nvPr/>
+        </p:nvSpPr>
+        <p:spPr>
+          <a:xfrm xmlns:a="http://schemas.openxmlformats.org/drawingml/2006/main">
+            <a:off x="7086600" y="3495675"/>
+            <a:ext cx="3429000" cy="266700"/>
           </a:xfrm>
           <a:prstGeom xmlns:a="http://schemas.openxmlformats.org/drawingml/2006/main" prst="rect">
             <a:avLst/>
@@ -14281,7 +15511,7 @@
           <a:lstStyle xmlns:a="http://schemas.openxmlformats.org/drawingml/2006/main"/>
           <a:p xmlns:a="http://schemas.openxmlformats.org/drawingml/2006/main">
             <a:pPr algn="l">
-              <a:defRPr sz="2250" b="1">
+              <a:defRPr sz="1725" b="1">
                 <a:solidFill>
                   <a:srgbClr val="075D3B"/>
                 </a:solidFill>
@@ -14291,7 +15521,168 @@
               </a:defRPr>
             </a:pPr>
             <a:r>
-              <a:rPr sz="2250" b="1">
+              <a:rPr sz="1725" b="1">
+                <a:solidFill>
+                  <a:srgbClr val="075D3B"/>
+                </a:solidFill>
+                <a:latin typeface="Arial"/>
+                <a:ea typeface="Arial"/>
+                <a:cs typeface="Arial"/>
+              </a:rPr>
+              <a:t>API REST</a:t>
+            </a:r>
+          </a:p>
+        </p:txBody>
+      </p:sp>
+      <p:sp>
+        <p:nvSpPr>
+          <p:cNvPr id="17" name="">
+            <a:extLst xmlns:a="http://schemas.openxmlformats.org/drawingml/2006/main">
+              <a:ext uri="{FF2B5EF4-FFF2-40B4-BE49-F238E27FC236}">
+                <a16:creationId xmlns:a16="http://schemas.microsoft.com/office/drawing/2014/main" id="{D0E9BF2F-3447-4B10-8265-BD7B6B6D73CE}"/>
+              </a:ext>
+            </a:extLst>
+          </p:cNvPr>
+          <p:cNvSpPr>
+            <a:spLocks xmlns:a="http://schemas.openxmlformats.org/drawingml/2006/main" noGrp="1"/>
+          </p:cNvSpPr>
+          <p:nvPr/>
+        </p:nvSpPr>
+        <p:spPr>
+          <a:xfrm xmlns:a="http://schemas.openxmlformats.org/drawingml/2006/main">
+            <a:off x="7086600" y="3800475"/>
+            <a:ext cx="3333750" cy="228600"/>
+          </a:xfrm>
+          <a:prstGeom xmlns:a="http://schemas.openxmlformats.org/drawingml/2006/main" prst="rect">
+            <a:avLst/>
+          </a:prstGeom>
+          <a:solidFill xmlns:a="http://schemas.openxmlformats.org/drawingml/2006/main">
+            <a:srgbClr val="000000">
+              <a:alpha val="0"/>
+            </a:srgbClr>
+          </a:solidFill>
+          <a:ln xmlns:a="http://schemas.openxmlformats.org/drawingml/2006/main" w="0">
+            <a:solidFill>
+              <a:srgbClr val="000000">
+                <a:alpha val="0"/>
+              </a:srgbClr>
+            </a:solidFill>
+            <a:prstDash val="solid"/>
+          </a:ln>
+        </p:spPr>
+        <p:txBody>
+          <a:bodyPr xmlns:a="http://schemas.openxmlformats.org/drawingml/2006/main" lIns="0" tIns="0" rIns="0" bIns="0" anchor="t"/>
+          <a:lstStyle xmlns:a="http://schemas.openxmlformats.org/drawingml/2006/main"/>
+          <a:p xmlns:a="http://schemas.openxmlformats.org/drawingml/2006/main">
+            <a:pPr algn="l">
+              <a:defRPr sz="1350" b="0">
+                <a:solidFill>
+                  <a:srgbClr val="51606F"/>
+                </a:solidFill>
+                <a:latin typeface="Arial"/>
+                <a:ea typeface="Arial"/>
+                <a:cs typeface="Arial"/>
+              </a:defRPr>
+            </a:pPr>
+            <a:r>
+              <a:rPr sz="1350" b="0">
+                <a:solidFill>
+                  <a:srgbClr val="51606F"/>
+                </a:solidFill>
+                <a:latin typeface="Arial"/>
+                <a:ea typeface="Arial"/>
+                <a:cs typeface="Arial"/>
+              </a:rPr>
+              <a:t>entrada padronizada de eventos</a:t>
+            </a:r>
+          </a:p>
+        </p:txBody>
+      </p:sp>
+      <p:sp>
+        <p:nvSpPr>
+          <p:cNvPr id="18" name="">
+            <a:extLst xmlns:a="http://schemas.openxmlformats.org/drawingml/2006/main">
+              <a:ext uri="{FF2B5EF4-FFF2-40B4-BE49-F238E27FC236}">
+                <a16:creationId xmlns:a16="http://schemas.microsoft.com/office/drawing/2014/main" id="{70CA2F7E-5B4B-4488-B7B6-73D6A40B9713}"/>
+              </a:ext>
+            </a:extLst>
+          </p:cNvPr>
+          <p:cNvSpPr>
+            <a:spLocks xmlns:a="http://schemas.openxmlformats.org/drawingml/2006/main" noGrp="1"/>
+          </p:cNvSpPr>
+          <p:nvPr/>
+        </p:nvSpPr>
+        <p:spPr>
+          <a:xfrm xmlns:a="http://schemas.openxmlformats.org/drawingml/2006/main">
+            <a:off x="6838950" y="4381500"/>
+            <a:ext cx="4000500" cy="723900"/>
+          </a:xfrm>
+          <a:prstGeom xmlns:a="http://schemas.openxmlformats.org/drawingml/2006/main" prst="rect">
+            <a:avLst/>
+          </a:prstGeom>
+          <a:solidFill xmlns:a="http://schemas.openxmlformats.org/drawingml/2006/main">
+            <a:srgbClr val="FFFFFF"/>
+          </a:solidFill>
+          <a:ln xmlns:a="http://schemas.openxmlformats.org/drawingml/2006/main" w="9525">
+            <a:solidFill>
+              <a:srgbClr val="D7DEE6"/>
+            </a:solidFill>
+            <a:prstDash val="solid"/>
+          </a:ln>
+        </p:spPr>
+      </p:sp>
+      <p:sp>
+        <p:nvSpPr>
+          <p:cNvPr id="19" name="">
+            <a:extLst xmlns:a="http://schemas.openxmlformats.org/drawingml/2006/main">
+              <a:ext uri="{FF2B5EF4-FFF2-40B4-BE49-F238E27FC236}">
+                <a16:creationId xmlns:a16="http://schemas.microsoft.com/office/drawing/2014/main" id="{6D4C0E17-3EFB-44DD-9925-C0669041A54C}"/>
+              </a:ext>
+            </a:extLst>
+          </p:cNvPr>
+          <p:cNvSpPr>
+            <a:spLocks xmlns:a="http://schemas.openxmlformats.org/drawingml/2006/main" noGrp="1"/>
+          </p:cNvSpPr>
+          <p:nvPr/>
+        </p:nvSpPr>
+        <p:spPr>
+          <a:xfrm xmlns:a="http://schemas.openxmlformats.org/drawingml/2006/main">
+            <a:off x="7086600" y="4486275"/>
+            <a:ext cx="3429000" cy="266700"/>
+          </a:xfrm>
+          <a:prstGeom xmlns:a="http://schemas.openxmlformats.org/drawingml/2006/main" prst="rect">
+            <a:avLst/>
+          </a:prstGeom>
+          <a:solidFill xmlns:a="http://schemas.openxmlformats.org/drawingml/2006/main">
+            <a:srgbClr val="000000">
+              <a:alpha val="0"/>
+            </a:srgbClr>
+          </a:solidFill>
+          <a:ln xmlns:a="http://schemas.openxmlformats.org/drawingml/2006/main" w="0">
+            <a:solidFill>
+              <a:srgbClr val="000000">
+                <a:alpha val="0"/>
+              </a:srgbClr>
+            </a:solidFill>
+            <a:prstDash val="solid"/>
+          </a:ln>
+        </p:spPr>
+        <p:txBody>
+          <a:bodyPr xmlns:a="http://schemas.openxmlformats.org/drawingml/2006/main" lIns="0" tIns="0" rIns="0" bIns="0" anchor="t"/>
+          <a:lstStyle xmlns:a="http://schemas.openxmlformats.org/drawingml/2006/main"/>
+          <a:p xmlns:a="http://schemas.openxmlformats.org/drawingml/2006/main">
+            <a:pPr algn="l">
+              <a:defRPr sz="1725" b="1">
+                <a:solidFill>
+                  <a:srgbClr val="075D3B"/>
+                </a:solidFill>
+                <a:latin typeface="Arial"/>
+                <a:ea typeface="Arial"/>
+                <a:cs typeface="Arial"/>
+              </a:defRPr>
+            </a:pPr>
+            <a:r>
+              <a:rPr sz="1725" b="1">
                 <a:solidFill>
                   <a:srgbClr val="075D3B"/>
                 </a:solidFill>
@@ -14306,22 +15697,22 @@
       </p:sp>
       <p:sp>
         <p:nvSpPr>
-          <p:cNvPr id="17" name="">
-            <a:extLst xmlns:a="http://schemas.openxmlformats.org/drawingml/2006/main">
-              <a:ext uri="{FF2B5EF4-FFF2-40B4-BE49-F238E27FC236}">
-                <a16:creationId xmlns:a16="http://schemas.microsoft.com/office/drawing/2014/main" id="{D1F836CA-176F-4571-B3D0-275F128D8C9F}"/>
-              </a:ext>
-            </a:extLst>
-          </p:cNvPr>
-          <p:cNvSpPr>
-            <a:spLocks xmlns:a="http://schemas.openxmlformats.org/drawingml/2006/main" noGrp="1"/>
-          </p:cNvSpPr>
-          <p:nvPr/>
-        </p:nvSpPr>
-        <p:spPr>
-          <a:xfrm xmlns:a="http://schemas.openxmlformats.org/drawingml/2006/main">
-            <a:off x="7105650" y="3905250"/>
-            <a:ext cx="3238500" cy="228600"/>
+          <p:cNvPr id="20" name="">
+            <a:extLst xmlns:a="http://schemas.openxmlformats.org/drawingml/2006/main">
+              <a:ext uri="{FF2B5EF4-FFF2-40B4-BE49-F238E27FC236}">
+                <a16:creationId xmlns:a16="http://schemas.microsoft.com/office/drawing/2014/main" id="{4B96C5EB-F447-4B60-B10A-977ADCFE6AEB}"/>
+              </a:ext>
+            </a:extLst>
+          </p:cNvPr>
+          <p:cNvSpPr>
+            <a:spLocks xmlns:a="http://schemas.openxmlformats.org/drawingml/2006/main" noGrp="1"/>
+          </p:cNvSpPr>
+          <p:nvPr/>
+        </p:nvSpPr>
+        <p:spPr>
+          <a:xfrm xmlns:a="http://schemas.openxmlformats.org/drawingml/2006/main">
+            <a:off x="7086600" y="4791075"/>
+            <a:ext cx="3333750" cy="228600"/>
           </a:xfrm>
           <a:prstGeom xmlns:a="http://schemas.openxmlformats.org/drawingml/2006/main" prst="rect">
             <a:avLst/>
@@ -14345,7 +15736,7 @@
           <a:lstStyle xmlns:a="http://schemas.openxmlformats.org/drawingml/2006/main"/>
           <a:p xmlns:a="http://schemas.openxmlformats.org/drawingml/2006/main">
             <a:pPr algn="l">
-              <a:defRPr sz="1425" b="0">
+              <a:defRPr sz="1350" b="0">
                 <a:solidFill>
                   <a:srgbClr val="51606F"/>
                 </a:solidFill>
@@ -14355,7 +15746,7 @@
               </a:defRPr>
             </a:pPr>
             <a:r>
-              <a:rPr sz="1425" b="0">
+              <a:rPr sz="1350" b="0">
                 <a:solidFill>
                   <a:srgbClr val="51606F"/>
                 </a:solidFill>
@@ -14363,168 +15754,7 @@
                 <a:ea typeface="Arial"/>
                 <a:cs typeface="Arial"/>
               </a:rPr>
-              <a:t>identificação física</a:t>
-            </a:r>
-          </a:p>
-        </p:txBody>
-      </p:sp>
-      <p:sp>
-        <p:nvSpPr>
-          <p:cNvPr id="18" name="">
-            <a:extLst xmlns:a="http://schemas.openxmlformats.org/drawingml/2006/main">
-              <a:ext uri="{FF2B5EF4-FFF2-40B4-BE49-F238E27FC236}">
-                <a16:creationId xmlns:a16="http://schemas.microsoft.com/office/drawing/2014/main" id="{B490FE9D-BB49-4D49-8DE7-7DD5BDD7476E}"/>
-              </a:ext>
-            </a:extLst>
-          </p:cNvPr>
-          <p:cNvSpPr>
-            <a:spLocks xmlns:a="http://schemas.openxmlformats.org/drawingml/2006/main" noGrp="1"/>
-          </p:cNvSpPr>
-          <p:nvPr/>
-        </p:nvSpPr>
-        <p:spPr>
-          <a:xfrm xmlns:a="http://schemas.openxmlformats.org/drawingml/2006/main">
-            <a:off x="6858000" y="4514850"/>
-            <a:ext cx="3886200" cy="781050"/>
-          </a:xfrm>
-          <a:prstGeom xmlns:a="http://schemas.openxmlformats.org/drawingml/2006/main" prst="rect">
-            <a:avLst/>
-          </a:prstGeom>
-          <a:solidFill xmlns:a="http://schemas.openxmlformats.org/drawingml/2006/main">
-            <a:srgbClr val="FFFFFF"/>
-          </a:solidFill>
-          <a:ln xmlns:a="http://schemas.openxmlformats.org/drawingml/2006/main" w="9525">
-            <a:solidFill>
-              <a:srgbClr val="D7DEE6"/>
-            </a:solidFill>
-            <a:prstDash val="solid"/>
-          </a:ln>
-        </p:spPr>
-      </p:sp>
-      <p:sp>
-        <p:nvSpPr>
-          <p:cNvPr id="19" name="">
-            <a:extLst xmlns:a="http://schemas.openxmlformats.org/drawingml/2006/main">
-              <a:ext uri="{FF2B5EF4-FFF2-40B4-BE49-F238E27FC236}">
-                <a16:creationId xmlns:a16="http://schemas.microsoft.com/office/drawing/2014/main" id="{9FA5ADB1-6C56-4DF6-AC61-3F2E2814ACB6}"/>
-              </a:ext>
-            </a:extLst>
-          </p:cNvPr>
-          <p:cNvSpPr>
-            <a:spLocks xmlns:a="http://schemas.openxmlformats.org/drawingml/2006/main" noGrp="1"/>
-          </p:cNvSpPr>
-          <p:nvPr/>
-        </p:nvSpPr>
-        <p:spPr>
-          <a:xfrm xmlns:a="http://schemas.openxmlformats.org/drawingml/2006/main">
-            <a:off x="7105650" y="4610100"/>
-            <a:ext cx="1619250" cy="323850"/>
-          </a:xfrm>
-          <a:prstGeom xmlns:a="http://schemas.openxmlformats.org/drawingml/2006/main" prst="rect">
-            <a:avLst/>
-          </a:prstGeom>
-          <a:solidFill xmlns:a="http://schemas.openxmlformats.org/drawingml/2006/main">
-            <a:srgbClr val="000000">
-              <a:alpha val="0"/>
-            </a:srgbClr>
-          </a:solidFill>
-          <a:ln xmlns:a="http://schemas.openxmlformats.org/drawingml/2006/main" w="0">
-            <a:solidFill>
-              <a:srgbClr val="000000">
-                <a:alpha val="0"/>
-              </a:srgbClr>
-            </a:solidFill>
-            <a:prstDash val="solid"/>
-          </a:ln>
-        </p:spPr>
-        <p:txBody>
-          <a:bodyPr xmlns:a="http://schemas.openxmlformats.org/drawingml/2006/main" lIns="0" tIns="0" rIns="0" bIns="0" anchor="t"/>
-          <a:lstStyle xmlns:a="http://schemas.openxmlformats.org/drawingml/2006/main"/>
-          <a:p xmlns:a="http://schemas.openxmlformats.org/drawingml/2006/main">
-            <a:pPr algn="l">
-              <a:defRPr sz="2250" b="1">
-                <a:solidFill>
-                  <a:srgbClr val="075D3B"/>
-                </a:solidFill>
-                <a:latin typeface="Arial"/>
-                <a:ea typeface="Arial"/>
-                <a:cs typeface="Arial"/>
-              </a:defRPr>
-            </a:pPr>
-            <a:r>
-              <a:rPr sz="2250" b="1">
-                <a:solidFill>
-                  <a:srgbClr val="075D3B"/>
-                </a:solidFill>
-                <a:latin typeface="Arial"/>
-                <a:ea typeface="Arial"/>
-                <a:cs typeface="Arial"/>
-              </a:rPr>
-              <a:t>Auditoria</a:t>
-            </a:r>
-          </a:p>
-        </p:txBody>
-      </p:sp>
-      <p:sp>
-        <p:nvSpPr>
-          <p:cNvPr id="20" name="">
-            <a:extLst xmlns:a="http://schemas.openxmlformats.org/drawingml/2006/main">
-              <a:ext uri="{FF2B5EF4-FFF2-40B4-BE49-F238E27FC236}">
-                <a16:creationId xmlns:a16="http://schemas.microsoft.com/office/drawing/2014/main" id="{E13691A7-2572-454A-9D1B-076B4230AE16}"/>
-              </a:ext>
-            </a:extLst>
-          </p:cNvPr>
-          <p:cNvSpPr>
-            <a:spLocks xmlns:a="http://schemas.openxmlformats.org/drawingml/2006/main" noGrp="1"/>
-          </p:cNvSpPr>
-          <p:nvPr/>
-        </p:nvSpPr>
-        <p:spPr>
-          <a:xfrm xmlns:a="http://schemas.openxmlformats.org/drawingml/2006/main">
-            <a:off x="7105650" y="4972050"/>
-            <a:ext cx="3238500" cy="228600"/>
-          </a:xfrm>
-          <a:prstGeom xmlns:a="http://schemas.openxmlformats.org/drawingml/2006/main" prst="rect">
-            <a:avLst/>
-          </a:prstGeom>
-          <a:solidFill xmlns:a="http://schemas.openxmlformats.org/drawingml/2006/main">
-            <a:srgbClr val="000000">
-              <a:alpha val="0"/>
-            </a:srgbClr>
-          </a:solidFill>
-          <a:ln xmlns:a="http://schemas.openxmlformats.org/drawingml/2006/main" w="0">
-            <a:solidFill>
-              <a:srgbClr val="000000">
-                <a:alpha val="0"/>
-              </a:srgbClr>
-            </a:solidFill>
-            <a:prstDash val="solid"/>
-          </a:ln>
-        </p:spPr>
-        <p:txBody>
-          <a:bodyPr xmlns:a="http://schemas.openxmlformats.org/drawingml/2006/main" lIns="0" tIns="0" rIns="0" bIns="0" anchor="t"/>
-          <a:lstStyle xmlns:a="http://schemas.openxmlformats.org/drawingml/2006/main"/>
-          <a:p xmlns:a="http://schemas.openxmlformats.org/drawingml/2006/main">
-            <a:pPr algn="l">
-              <a:defRPr sz="1425" b="0">
-                <a:solidFill>
-                  <a:srgbClr val="51606F"/>
-                </a:solidFill>
-                <a:latin typeface="Arial"/>
-                <a:ea typeface="Arial"/>
-                <a:cs typeface="Arial"/>
-              </a:defRPr>
-            </a:pPr>
-            <a:r>
-              <a:rPr sz="1425" b="0">
-                <a:solidFill>
-                  <a:srgbClr val="51606F"/>
-                </a:solidFill>
-                <a:latin typeface="Arial"/>
-                <a:ea typeface="Arial"/>
-                <a:cs typeface="Arial"/>
-              </a:rPr>
-              <a:t>comparação com o local esperado</a:t>
+              <a:t>evidência física em cenário controlado</a:t>
             </a:r>
           </a:p>
         </p:txBody>
@@ -14532,7 +15762,7 @@
     </p:spTree>
     <p:extLst>
       <p:ext uri="{BB962C8B-B14F-4D97-AF65-F5344CB8AC3E}">
-        <p14:creationId xmlns:p14="http://schemas.microsoft.com/office/powerpoint/2010/main" val="1213425747"/>
+        <p14:creationId xmlns:p14="http://schemas.microsoft.com/office/powerpoint/2010/main" val="1611317163"/>
       </p:ext>
     </p:extLst>
   </p:cSld>
@@ -14556,7 +15786,7 @@
           <p:cNvPr id="1" name="">
             <a:extLst xmlns:a="http://schemas.openxmlformats.org/drawingml/2006/main">
               <a:ext uri="{FF2B5EF4-FFF2-40B4-BE49-F238E27FC236}">
-                <a16:creationId xmlns:a16="http://schemas.microsoft.com/office/drawing/2014/main" id="{9E3624C8-F72C-4548-A78C-042B49146F2D}"/>
+                <a16:creationId xmlns:a16="http://schemas.microsoft.com/office/drawing/2014/main" id="{1369A23D-9450-4223-A5FA-74A9D0C4CC7E}"/>
               </a:ext>
             </a:extLst>
           </p:cNvPr>
@@ -14591,7 +15821,7 @@
           <p:cNvPr id="2" name="">
             <a:extLst xmlns:a="http://schemas.openxmlformats.org/drawingml/2006/main">
               <a:ext uri="{FF2B5EF4-FFF2-40B4-BE49-F238E27FC236}">
-                <a16:creationId xmlns:a16="http://schemas.microsoft.com/office/drawing/2014/main" id="{87CBB196-4463-4313-9526-7A18799FD15A}"/>
+                <a16:creationId xmlns:a16="http://schemas.microsoft.com/office/drawing/2014/main" id="{8AD280C0-CD93-4BF2-862D-641CC09FB7D2}"/>
               </a:ext>
             </a:extLst>
           </p:cNvPr>
@@ -14626,7 +15856,7 @@
           <p:cNvPr id="3" name="">
             <a:extLst xmlns:a="http://schemas.openxmlformats.org/drawingml/2006/main">
               <a:ext uri="{FF2B5EF4-FFF2-40B4-BE49-F238E27FC236}">
-                <a16:creationId xmlns:a16="http://schemas.microsoft.com/office/drawing/2014/main" id="{0044C028-0270-4F78-86BD-89EAF219BAFC}"/>
+                <a16:creationId xmlns:a16="http://schemas.microsoft.com/office/drawing/2014/main" id="{516B32F2-46B8-4BD2-A45A-4D48FE177434}"/>
               </a:ext>
             </a:extLst>
           </p:cNvPr>
@@ -14690,7 +15920,7 @@
           <p:cNvPr id="4" name="">
             <a:extLst xmlns:a="http://schemas.openxmlformats.org/drawingml/2006/main">
               <a:ext uri="{FF2B5EF4-FFF2-40B4-BE49-F238E27FC236}">
-                <a16:creationId xmlns:a16="http://schemas.microsoft.com/office/drawing/2014/main" id="{E854ADC2-C7AD-4816-8589-8BAF86F63C02}"/>
+                <a16:creationId xmlns:a16="http://schemas.microsoft.com/office/drawing/2014/main" id="{548B9F54-B13F-46D7-A1A4-D5A001BCEDCB}"/>
               </a:ext>
             </a:extLst>
           </p:cNvPr>
@@ -14744,7 +15974,7 @@
                 <a:ea typeface="Arial"/>
                 <a:cs typeface="Arial"/>
               </a:rPr>
-              <a:t>Base teórica e diferencial</a:t>
+              <a:t>Objetivos do trabalho</a:t>
             </a:r>
           </a:p>
         </p:txBody>
@@ -14754,7 +15984,7 @@
           <p:cNvPr id="5" name="">
             <a:extLst xmlns:a="http://schemas.openxmlformats.org/drawingml/2006/main">
               <a:ext uri="{FF2B5EF4-FFF2-40B4-BE49-F238E27FC236}">
-                <a16:creationId xmlns:a16="http://schemas.microsoft.com/office/drawing/2014/main" id="{3B5CF8C4-6697-497D-B06E-619D402181DD}"/>
+                <a16:creationId xmlns:a16="http://schemas.microsoft.com/office/drawing/2014/main" id="{44E1A912-FAD6-45FF-ACFF-94C3D2743530}"/>
               </a:ext>
             </a:extLst>
           </p:cNvPr>
@@ -14808,7 +16038,7 @@
                 <a:ea typeface="Arial"/>
                 <a:cs typeface="Arial"/>
               </a:rPr>
-              <a:t>A revisão sustenta duas bases: identificação por RFID e integração das leituras com sistemas de informação.</a:t>
+              <a:t>Desenvolver e validar funcionalmente um protótipo web de inventário patrimonial baseado em RFID.</a:t>
             </a:r>
           </a:p>
         </p:txBody>
@@ -14818,29 +16048,31 @@
           <p:cNvPr id="6" name="">
             <a:extLst xmlns:a="http://schemas.openxmlformats.org/drawingml/2006/main">
               <a:ext uri="{FF2B5EF4-FFF2-40B4-BE49-F238E27FC236}">
-                <a16:creationId xmlns:a16="http://schemas.microsoft.com/office/drawing/2014/main" id="{F82F6510-BDE5-4494-8D24-6305FE8CAD5A}"/>
-              </a:ext>
-            </a:extLst>
-          </p:cNvPr>
-          <p:cNvSpPr>
-            <a:spLocks xmlns:a="http://schemas.openxmlformats.org/drawingml/2006/main" noGrp="1"/>
-          </p:cNvSpPr>
-          <p:nvPr/>
-        </p:nvSpPr>
-        <p:spPr>
-          <a:xfrm xmlns:a="http://schemas.openxmlformats.org/drawingml/2006/main">
-            <a:off x="1066800" y="2857500"/>
-            <a:ext cx="2743200" cy="1695450"/>
-          </a:xfrm>
-          <a:prstGeom xmlns:a="http://schemas.openxmlformats.org/drawingml/2006/main" prst="rect">
-            <a:avLst/>
-          </a:prstGeom>
-          <a:solidFill xmlns:a="http://schemas.openxmlformats.org/drawingml/2006/main">
-            <a:srgbClr val="FFFFFF"/>
-          </a:solidFill>
-          <a:ln xmlns:a="http://schemas.openxmlformats.org/drawingml/2006/main" w="9525">
-            <a:solidFill>
-              <a:srgbClr val="D7DEE6"/>
+                <a16:creationId xmlns:a16="http://schemas.microsoft.com/office/drawing/2014/main" id="{8556C9BB-AF58-4CB6-841D-A6861CD5B69C}"/>
+              </a:ext>
+            </a:extLst>
+          </p:cNvPr>
+          <p:cNvSpPr>
+            <a:spLocks xmlns:a="http://schemas.openxmlformats.org/drawingml/2006/main" noGrp="1"/>
+          </p:cNvSpPr>
+          <p:nvPr/>
+        </p:nvSpPr>
+        <p:spPr>
+          <a:xfrm xmlns:a="http://schemas.openxmlformats.org/drawingml/2006/main">
+            <a:off x="800100" y="2400300"/>
+            <a:ext cx="133350" cy="133350"/>
+          </a:xfrm>
+          <a:prstGeom xmlns:a="http://schemas.openxmlformats.org/drawingml/2006/main" prst="ellipse">
+            <a:avLst/>
+          </a:prstGeom>
+          <a:solidFill xmlns:a="http://schemas.openxmlformats.org/drawingml/2006/main">
+            <a:srgbClr val="0E7A4F"/>
+          </a:solidFill>
+          <a:ln xmlns:a="http://schemas.openxmlformats.org/drawingml/2006/main" w="0">
+            <a:solidFill>
+              <a:srgbClr val="000000">
+                <a:alpha val="0"/>
+              </a:srgbClr>
             </a:solidFill>
             <a:prstDash val="solid"/>
           </a:ln>
@@ -14851,19 +16083,19 @@
           <p:cNvPr id="7" name="">
             <a:extLst xmlns:a="http://schemas.openxmlformats.org/drawingml/2006/main">
               <a:ext uri="{FF2B5EF4-FFF2-40B4-BE49-F238E27FC236}">
-                <a16:creationId xmlns:a16="http://schemas.microsoft.com/office/drawing/2014/main" id="{128022A8-6BE1-4F4C-84F3-0FEBC75333C1}"/>
-              </a:ext>
-            </a:extLst>
-          </p:cNvPr>
-          <p:cNvSpPr>
-            <a:spLocks xmlns:a="http://schemas.openxmlformats.org/drawingml/2006/main" noGrp="1"/>
-          </p:cNvSpPr>
-          <p:nvPr/>
-        </p:nvSpPr>
-        <p:spPr>
-          <a:xfrm xmlns:a="http://schemas.openxmlformats.org/drawingml/2006/main">
-            <a:off x="1276350" y="3105150"/>
-            <a:ext cx="2209800" cy="323850"/>
+                <a16:creationId xmlns:a16="http://schemas.microsoft.com/office/drawing/2014/main" id="{711C3F03-7D86-4044-BFC3-239ED80E0414}"/>
+              </a:ext>
+            </a:extLst>
+          </p:cNvPr>
+          <p:cNvSpPr>
+            <a:spLocks xmlns:a="http://schemas.openxmlformats.org/drawingml/2006/main" noGrp="1"/>
+          </p:cNvSpPr>
+          <p:nvPr/>
+        </p:nvSpPr>
+        <p:spPr>
+          <a:xfrm xmlns:a="http://schemas.openxmlformats.org/drawingml/2006/main">
+            <a:off x="1066800" y="2324100"/>
+            <a:ext cx="4953000" cy="609600"/>
           </a:xfrm>
           <a:prstGeom xmlns:a="http://schemas.openxmlformats.org/drawingml/2006/main" prst="rect">
             <a:avLst/>
@@ -14887,9 +16119,9 @@
           <a:lstStyle xmlns:a="http://schemas.openxmlformats.org/drawingml/2006/main"/>
           <a:p xmlns:a="http://schemas.openxmlformats.org/drawingml/2006/main">
             <a:pPr algn="l">
-              <a:defRPr sz="1800" b="1">
-                <a:solidFill>
-                  <a:srgbClr val="075D3B"/>
+              <a:defRPr sz="1725" b="0">
+                <a:solidFill>
+                  <a:srgbClr val="17202A"/>
                 </a:solidFill>
                 <a:latin typeface="Arial"/>
                 <a:ea typeface="Arial"/>
@@ -14897,15 +16129,15 @@
               </a:defRPr>
             </a:pPr>
             <a:r>
-              <a:rPr sz="1800" b="1">
-                <a:solidFill>
-                  <a:srgbClr val="075D3B"/>
+              <a:rPr sz="1725" b="0">
+                <a:solidFill>
+                  <a:srgbClr val="17202A"/>
                 </a:solidFill>
                 <a:latin typeface="Arial"/>
                 <a:ea typeface="Arial"/>
                 <a:cs typeface="Arial"/>
               </a:rPr>
-              <a:t>RFID em inventário</a:t>
+              <a:t>Implementar cadastros, consulta, auditoria, histórico e tratamento de inconsistências.</a:t>
             </a:r>
           </a:p>
         </p:txBody>
@@ -14915,19 +16147,54 @@
           <p:cNvPr id="8" name="">
             <a:extLst xmlns:a="http://schemas.openxmlformats.org/drawingml/2006/main">
               <a:ext uri="{FF2B5EF4-FFF2-40B4-BE49-F238E27FC236}">
-                <a16:creationId xmlns:a16="http://schemas.microsoft.com/office/drawing/2014/main" id="{C3D18E06-9AF8-47E5-B4C1-4C3B24B985AB}"/>
-              </a:ext>
-            </a:extLst>
-          </p:cNvPr>
-          <p:cNvSpPr>
-            <a:spLocks xmlns:a="http://schemas.openxmlformats.org/drawingml/2006/main" noGrp="1"/>
-          </p:cNvSpPr>
-          <p:nvPr/>
-        </p:nvSpPr>
-        <p:spPr>
-          <a:xfrm xmlns:a="http://schemas.openxmlformats.org/drawingml/2006/main">
-            <a:off x="1276350" y="3619500"/>
-            <a:ext cx="2209800" cy="647700"/>
+                <a16:creationId xmlns:a16="http://schemas.microsoft.com/office/drawing/2014/main" id="{3CE39ADB-E199-42EF-ABEA-DBF6B0E0DC3A}"/>
+              </a:ext>
+            </a:extLst>
+          </p:cNvPr>
+          <p:cNvSpPr>
+            <a:spLocks xmlns:a="http://schemas.openxmlformats.org/drawingml/2006/main" noGrp="1"/>
+          </p:cNvSpPr>
+          <p:nvPr/>
+        </p:nvSpPr>
+        <p:spPr>
+          <a:xfrm xmlns:a="http://schemas.openxmlformats.org/drawingml/2006/main">
+            <a:off x="800100" y="3276600"/>
+            <a:ext cx="133350" cy="133350"/>
+          </a:xfrm>
+          <a:prstGeom xmlns:a="http://schemas.openxmlformats.org/drawingml/2006/main" prst="ellipse">
+            <a:avLst/>
+          </a:prstGeom>
+          <a:solidFill xmlns:a="http://schemas.openxmlformats.org/drawingml/2006/main">
+            <a:srgbClr val="0E7A4F"/>
+          </a:solidFill>
+          <a:ln xmlns:a="http://schemas.openxmlformats.org/drawingml/2006/main" w="0">
+            <a:solidFill>
+              <a:srgbClr val="000000">
+                <a:alpha val="0"/>
+              </a:srgbClr>
+            </a:solidFill>
+            <a:prstDash val="solid"/>
+          </a:ln>
+        </p:spPr>
+      </p:sp>
+      <p:sp>
+        <p:nvSpPr>
+          <p:cNvPr id="9" name="">
+            <a:extLst xmlns:a="http://schemas.openxmlformats.org/drawingml/2006/main">
+              <a:ext uri="{FF2B5EF4-FFF2-40B4-BE49-F238E27FC236}">
+                <a16:creationId xmlns:a16="http://schemas.microsoft.com/office/drawing/2014/main" id="{864A7277-629B-471A-AD32-77AAACBD615E}"/>
+              </a:ext>
+            </a:extLst>
+          </p:cNvPr>
+          <p:cNvSpPr>
+            <a:spLocks xmlns:a="http://schemas.openxmlformats.org/drawingml/2006/main" noGrp="1"/>
+          </p:cNvSpPr>
+          <p:nvPr/>
+        </p:nvSpPr>
+        <p:spPr>
+          <a:xfrm xmlns:a="http://schemas.openxmlformats.org/drawingml/2006/main">
+            <a:off x="1066800" y="3200400"/>
+            <a:ext cx="4953000" cy="609600"/>
           </a:xfrm>
           <a:prstGeom xmlns:a="http://schemas.openxmlformats.org/drawingml/2006/main" prst="rect">
             <a:avLst/>
@@ -14951,7 +16218,7 @@
           <a:lstStyle xmlns:a="http://schemas.openxmlformats.org/drawingml/2006/main"/>
           <a:p xmlns:a="http://schemas.openxmlformats.org/drawingml/2006/main">
             <a:pPr algn="l">
-              <a:defRPr sz="1575" b="0">
+              <a:defRPr sz="1725" b="0">
                 <a:solidFill>
                   <a:srgbClr val="17202A"/>
                 </a:solidFill>
@@ -14961,7 +16228,7 @@
               </a:defRPr>
             </a:pPr>
             <a:r>
-              <a:rPr sz="1575" b="0">
+              <a:rPr sz="1725" b="0">
                 <a:solidFill>
                   <a:srgbClr val="17202A"/>
                 </a:solidFill>
@@ -14969,62 +16236,64 @@
                 <a:ea typeface="Arial"/>
                 <a:cs typeface="Arial"/>
               </a:rPr>
-              <a:t>identificação automática de bens</a:t>
+              <a:t>Projetar uma arquitetura modular para receber e processar eventos RFID.</a:t>
             </a:r>
           </a:p>
         </p:txBody>
       </p:sp>
       <p:sp>
         <p:nvSpPr>
-          <p:cNvPr id="9" name="">
-            <a:extLst xmlns:a="http://schemas.openxmlformats.org/drawingml/2006/main">
-              <a:ext uri="{FF2B5EF4-FFF2-40B4-BE49-F238E27FC236}">
-                <a16:creationId xmlns:a16="http://schemas.microsoft.com/office/drawing/2014/main" id="{FD943AB9-AD0D-49C6-8BEF-2AF144B99DF9}"/>
-              </a:ext>
-            </a:extLst>
-          </p:cNvPr>
-          <p:cNvSpPr>
-            <a:spLocks xmlns:a="http://schemas.openxmlformats.org/drawingml/2006/main" noGrp="1"/>
-          </p:cNvSpPr>
-          <p:nvPr/>
-        </p:nvSpPr>
-        <p:spPr>
-          <a:xfrm xmlns:a="http://schemas.openxmlformats.org/drawingml/2006/main">
-            <a:off x="4400550" y="2857500"/>
-            <a:ext cx="2743200" cy="1695450"/>
-          </a:xfrm>
-          <a:prstGeom xmlns:a="http://schemas.openxmlformats.org/drawingml/2006/main" prst="rect">
-            <a:avLst/>
-          </a:prstGeom>
-          <a:solidFill xmlns:a="http://schemas.openxmlformats.org/drawingml/2006/main">
-            <a:srgbClr val="FFFFFF"/>
-          </a:solidFill>
-          <a:ln xmlns:a="http://schemas.openxmlformats.org/drawingml/2006/main" w="9525">
-            <a:solidFill>
-              <a:srgbClr val="D7DEE6"/>
-            </a:solidFill>
-            <a:prstDash val="solid"/>
-          </a:ln>
-        </p:spPr>
-      </p:sp>
-      <p:sp>
-        <p:nvSpPr>
           <p:cNvPr id="10" name="">
             <a:extLst xmlns:a="http://schemas.openxmlformats.org/drawingml/2006/main">
               <a:ext uri="{FF2B5EF4-FFF2-40B4-BE49-F238E27FC236}">
-                <a16:creationId xmlns:a16="http://schemas.microsoft.com/office/drawing/2014/main" id="{F0625ACE-61AA-4A8D-9503-EB519EE1E15F}"/>
-              </a:ext>
-            </a:extLst>
-          </p:cNvPr>
-          <p:cNvSpPr>
-            <a:spLocks xmlns:a="http://schemas.openxmlformats.org/drawingml/2006/main" noGrp="1"/>
-          </p:cNvSpPr>
-          <p:nvPr/>
-        </p:nvSpPr>
-        <p:spPr>
-          <a:xfrm xmlns:a="http://schemas.openxmlformats.org/drawingml/2006/main">
-            <a:off x="4610100" y="3105150"/>
-            <a:ext cx="2209800" cy="323850"/>
+                <a16:creationId xmlns:a16="http://schemas.microsoft.com/office/drawing/2014/main" id="{857E86D7-42C9-40C5-898F-69173DC538F2}"/>
+              </a:ext>
+            </a:extLst>
+          </p:cNvPr>
+          <p:cNvSpPr>
+            <a:spLocks xmlns:a="http://schemas.openxmlformats.org/drawingml/2006/main" noGrp="1"/>
+          </p:cNvSpPr>
+          <p:nvPr/>
+        </p:nvSpPr>
+        <p:spPr>
+          <a:xfrm xmlns:a="http://schemas.openxmlformats.org/drawingml/2006/main">
+            <a:off x="800100" y="4152900"/>
+            <a:ext cx="133350" cy="133350"/>
+          </a:xfrm>
+          <a:prstGeom xmlns:a="http://schemas.openxmlformats.org/drawingml/2006/main" prst="ellipse">
+            <a:avLst/>
+          </a:prstGeom>
+          <a:solidFill xmlns:a="http://schemas.openxmlformats.org/drawingml/2006/main">
+            <a:srgbClr val="0E7A4F"/>
+          </a:solidFill>
+          <a:ln xmlns:a="http://schemas.openxmlformats.org/drawingml/2006/main" w="0">
+            <a:solidFill>
+              <a:srgbClr val="000000">
+                <a:alpha val="0"/>
+              </a:srgbClr>
+            </a:solidFill>
+            <a:prstDash val="solid"/>
+          </a:ln>
+        </p:spPr>
+      </p:sp>
+      <p:sp>
+        <p:nvSpPr>
+          <p:cNvPr id="11" name="">
+            <a:extLst xmlns:a="http://schemas.openxmlformats.org/drawingml/2006/main">
+              <a:ext uri="{FF2B5EF4-FFF2-40B4-BE49-F238E27FC236}">
+                <a16:creationId xmlns:a16="http://schemas.microsoft.com/office/drawing/2014/main" id="{8010034C-3583-4EEF-BD98-4F6779DBFF8C}"/>
+              </a:ext>
+            </a:extLst>
+          </p:cNvPr>
+          <p:cNvSpPr>
+            <a:spLocks xmlns:a="http://schemas.openxmlformats.org/drawingml/2006/main" noGrp="1"/>
+          </p:cNvSpPr>
+          <p:nvPr/>
+        </p:nvSpPr>
+        <p:spPr>
+          <a:xfrm xmlns:a="http://schemas.openxmlformats.org/drawingml/2006/main">
+            <a:off x="1066800" y="4076700"/>
+            <a:ext cx="4953000" cy="609600"/>
           </a:xfrm>
           <a:prstGeom xmlns:a="http://schemas.openxmlformats.org/drawingml/2006/main" prst="rect">
             <a:avLst/>
@@ -15048,9 +16317,9 @@
           <a:lstStyle xmlns:a="http://schemas.openxmlformats.org/drawingml/2006/main"/>
           <a:p xmlns:a="http://schemas.openxmlformats.org/drawingml/2006/main">
             <a:pPr algn="l">
-              <a:defRPr sz="1800" b="1">
-                <a:solidFill>
-                  <a:srgbClr val="075D3B"/>
+              <a:defRPr sz="1725" b="0">
+                <a:solidFill>
+                  <a:srgbClr val="17202A"/>
                 </a:solidFill>
                 <a:latin typeface="Arial"/>
                 <a:ea typeface="Arial"/>
@@ -15058,37 +16327,70 @@
               </a:defRPr>
             </a:pPr>
             <a:r>
-              <a:rPr sz="1800" b="1">
-                <a:solidFill>
-                  <a:srgbClr val="075D3B"/>
+              <a:rPr sz="1725" b="0">
+                <a:solidFill>
+                  <a:srgbClr val="17202A"/>
                 </a:solidFill>
                 <a:latin typeface="Arial"/>
                 <a:ea typeface="Arial"/>
                 <a:cs typeface="Arial"/>
               </a:rPr>
-              <a:t>Integração com sistemas</a:t>
+              <a:t>Verificar o fluxo de leitura, processamento e atualização do inventário em ambiente controlado.</a:t>
             </a:r>
           </a:p>
         </p:txBody>
       </p:sp>
       <p:sp>
         <p:nvSpPr>
-          <p:cNvPr id="11" name="">
-            <a:extLst xmlns:a="http://schemas.openxmlformats.org/drawingml/2006/main">
-              <a:ext uri="{FF2B5EF4-FFF2-40B4-BE49-F238E27FC236}">
-                <a16:creationId xmlns:a16="http://schemas.microsoft.com/office/drawing/2014/main" id="{A2BE4DB5-0826-4124-9A41-AAEA74262576}"/>
-              </a:ext>
-            </a:extLst>
-          </p:cNvPr>
-          <p:cNvSpPr>
-            <a:spLocks xmlns:a="http://schemas.openxmlformats.org/drawingml/2006/main" noGrp="1"/>
-          </p:cNvSpPr>
-          <p:nvPr/>
-        </p:nvSpPr>
-        <p:spPr>
-          <a:xfrm xmlns:a="http://schemas.openxmlformats.org/drawingml/2006/main">
-            <a:off x="4610100" y="3619500"/>
-            <a:ext cx="2209800" cy="647700"/>
+          <p:cNvPr id="12" name="">
+            <a:extLst xmlns:a="http://schemas.openxmlformats.org/drawingml/2006/main">
+              <a:ext uri="{FF2B5EF4-FFF2-40B4-BE49-F238E27FC236}">
+                <a16:creationId xmlns:a16="http://schemas.microsoft.com/office/drawing/2014/main" id="{B9D0A42B-A366-49B6-93AA-E77AF8EF0D16}"/>
+              </a:ext>
+            </a:extLst>
+          </p:cNvPr>
+          <p:cNvSpPr>
+            <a:spLocks xmlns:a="http://schemas.openxmlformats.org/drawingml/2006/main" noGrp="1"/>
+          </p:cNvSpPr>
+          <p:nvPr/>
+        </p:nvSpPr>
+        <p:spPr>
+          <a:xfrm xmlns:a="http://schemas.openxmlformats.org/drawingml/2006/main">
+            <a:off x="6858000" y="2381250"/>
+            <a:ext cx="3886200" cy="781050"/>
+          </a:xfrm>
+          <a:prstGeom xmlns:a="http://schemas.openxmlformats.org/drawingml/2006/main" prst="rect">
+            <a:avLst/>
+          </a:prstGeom>
+          <a:solidFill xmlns:a="http://schemas.openxmlformats.org/drawingml/2006/main">
+            <a:srgbClr val="FFFFFF"/>
+          </a:solidFill>
+          <a:ln xmlns:a="http://schemas.openxmlformats.org/drawingml/2006/main" w="9525">
+            <a:solidFill>
+              <a:srgbClr val="D7DEE6"/>
+            </a:solidFill>
+            <a:prstDash val="solid"/>
+          </a:ln>
+        </p:spPr>
+      </p:sp>
+      <p:sp>
+        <p:nvSpPr>
+          <p:cNvPr id="13" name="">
+            <a:extLst xmlns:a="http://schemas.openxmlformats.org/drawingml/2006/main">
+              <a:ext uri="{FF2B5EF4-FFF2-40B4-BE49-F238E27FC236}">
+                <a16:creationId xmlns:a16="http://schemas.microsoft.com/office/drawing/2014/main" id="{6ABF646C-8A87-4E38-8998-99F2808F8630}"/>
+              </a:ext>
+            </a:extLst>
+          </p:cNvPr>
+          <p:cNvSpPr>
+            <a:spLocks xmlns:a="http://schemas.openxmlformats.org/drawingml/2006/main" noGrp="1"/>
+          </p:cNvSpPr>
+          <p:nvPr/>
+        </p:nvSpPr>
+        <p:spPr>
+          <a:xfrm xmlns:a="http://schemas.openxmlformats.org/drawingml/2006/main">
+            <a:off x="7105650" y="2476500"/>
+            <a:ext cx="3143250" cy="323850"/>
           </a:xfrm>
           <a:prstGeom xmlns:a="http://schemas.openxmlformats.org/drawingml/2006/main" prst="rect">
             <a:avLst/>
@@ -15112,9 +16414,9 @@
           <a:lstStyle xmlns:a="http://schemas.openxmlformats.org/drawingml/2006/main"/>
           <a:p xmlns:a="http://schemas.openxmlformats.org/drawingml/2006/main">
             <a:pPr algn="l">
-              <a:defRPr sz="1575" b="0">
-                <a:solidFill>
-                  <a:srgbClr val="17202A"/>
+              <a:defRPr sz="2250" b="1">
+                <a:solidFill>
+                  <a:srgbClr val="075D3B"/>
                 </a:solidFill>
                 <a:latin typeface="Arial"/>
                 <a:ea typeface="Arial"/>
@@ -15122,70 +16424,37 @@
               </a:defRPr>
             </a:pPr>
             <a:r>
-              <a:rPr sz="1575" b="0">
-                <a:solidFill>
-                  <a:srgbClr val="17202A"/>
+              <a:rPr sz="2250" b="1">
+                <a:solidFill>
+                  <a:srgbClr val="075D3B"/>
                 </a:solidFill>
                 <a:latin typeface="Arial"/>
                 <a:ea typeface="Arial"/>
                 <a:cs typeface="Arial"/>
               </a:rPr>
-              <a:t>envio de leituras para processamento</a:t>
+              <a:t>Construir</a:t>
             </a:r>
           </a:p>
         </p:txBody>
       </p:sp>
       <p:sp>
         <p:nvSpPr>
-          <p:cNvPr id="12" name="">
-            <a:extLst xmlns:a="http://schemas.openxmlformats.org/drawingml/2006/main">
-              <a:ext uri="{FF2B5EF4-FFF2-40B4-BE49-F238E27FC236}">
-                <a16:creationId xmlns:a16="http://schemas.microsoft.com/office/drawing/2014/main" id="{518EDDF0-E035-4D5C-9529-ABF95B599FCA}"/>
-              </a:ext>
-            </a:extLst>
-          </p:cNvPr>
-          <p:cNvSpPr>
-            <a:spLocks xmlns:a="http://schemas.openxmlformats.org/drawingml/2006/main" noGrp="1"/>
-          </p:cNvSpPr>
-          <p:nvPr/>
-        </p:nvSpPr>
-        <p:spPr>
-          <a:xfrm xmlns:a="http://schemas.openxmlformats.org/drawingml/2006/main">
-            <a:off x="7734300" y="2857500"/>
-            <a:ext cx="2743200" cy="1695450"/>
-          </a:xfrm>
-          <a:prstGeom xmlns:a="http://schemas.openxmlformats.org/drawingml/2006/main" prst="rect">
-            <a:avLst/>
-          </a:prstGeom>
-          <a:solidFill xmlns:a="http://schemas.openxmlformats.org/drawingml/2006/main">
-            <a:srgbClr val="E7F4EE"/>
-          </a:solidFill>
-          <a:ln xmlns:a="http://schemas.openxmlformats.org/drawingml/2006/main" w="9525">
-            <a:solidFill>
-              <a:srgbClr val="0E7A4F"/>
-            </a:solidFill>
-            <a:prstDash val="solid"/>
-          </a:ln>
-        </p:spPr>
-      </p:sp>
-      <p:sp>
-        <p:nvSpPr>
-          <p:cNvPr id="13" name="">
-            <a:extLst xmlns:a="http://schemas.openxmlformats.org/drawingml/2006/main">
-              <a:ext uri="{FF2B5EF4-FFF2-40B4-BE49-F238E27FC236}">
-                <a16:creationId xmlns:a16="http://schemas.microsoft.com/office/drawing/2014/main" id="{5BF80AA7-6E47-4C54-8509-CB4F87A9533A}"/>
-              </a:ext>
-            </a:extLst>
-          </p:cNvPr>
-          <p:cNvSpPr>
-            <a:spLocks xmlns:a="http://schemas.openxmlformats.org/drawingml/2006/main" noGrp="1"/>
-          </p:cNvSpPr>
-          <p:nvPr/>
-        </p:nvSpPr>
-        <p:spPr>
-          <a:xfrm xmlns:a="http://schemas.openxmlformats.org/drawingml/2006/main">
-            <a:off x="7943850" y="3105150"/>
-            <a:ext cx="2209800" cy="323850"/>
+          <p:cNvPr id="14" name="">
+            <a:extLst xmlns:a="http://schemas.openxmlformats.org/drawingml/2006/main">
+              <a:ext uri="{FF2B5EF4-FFF2-40B4-BE49-F238E27FC236}">
+                <a16:creationId xmlns:a16="http://schemas.microsoft.com/office/drawing/2014/main" id="{507EC289-6751-4826-9B9C-907B4060C945}"/>
+              </a:ext>
+            </a:extLst>
+          </p:cNvPr>
+          <p:cNvSpPr>
+            <a:spLocks xmlns:a="http://schemas.openxmlformats.org/drawingml/2006/main" noGrp="1"/>
+          </p:cNvSpPr>
+          <p:nvPr/>
+        </p:nvSpPr>
+        <p:spPr>
+          <a:xfrm xmlns:a="http://schemas.openxmlformats.org/drawingml/2006/main">
+            <a:off x="7105650" y="2838450"/>
+            <a:ext cx="3238500" cy="228600"/>
           </a:xfrm>
           <a:prstGeom xmlns:a="http://schemas.openxmlformats.org/drawingml/2006/main" prst="rect">
             <a:avLst/>
@@ -15209,9 +16478,9 @@
           <a:lstStyle xmlns:a="http://schemas.openxmlformats.org/drawingml/2006/main"/>
           <a:p xmlns:a="http://schemas.openxmlformats.org/drawingml/2006/main">
             <a:pPr algn="l">
-              <a:defRPr sz="1800" b="1">
-                <a:solidFill>
-                  <a:srgbClr val="075D3B"/>
+              <a:defRPr sz="1425" b="0">
+                <a:solidFill>
+                  <a:srgbClr val="51606F"/>
                 </a:solidFill>
                 <a:latin typeface="Arial"/>
                 <a:ea typeface="Arial"/>
@@ -15219,37 +16488,70 @@
               </a:defRPr>
             </a:pPr>
             <a:r>
-              <a:rPr sz="1800" b="1">
-                <a:solidFill>
-                  <a:srgbClr val="075D3B"/>
+              <a:rPr sz="1425" b="0">
+                <a:solidFill>
+                  <a:srgbClr val="51606F"/>
                 </a:solidFill>
                 <a:latin typeface="Arial"/>
                 <a:ea typeface="Arial"/>
                 <a:cs typeface="Arial"/>
               </a:rPr>
-              <a:t>InventoryRFID</a:t>
+              <a:t>protótipo web funcional</a:t>
             </a:r>
           </a:p>
         </p:txBody>
       </p:sp>
       <p:sp>
         <p:nvSpPr>
-          <p:cNvPr id="14" name="">
-            <a:extLst xmlns:a="http://schemas.openxmlformats.org/drawingml/2006/main">
-              <a:ext uri="{FF2B5EF4-FFF2-40B4-BE49-F238E27FC236}">
-                <a16:creationId xmlns:a16="http://schemas.microsoft.com/office/drawing/2014/main" id="{5B99EA2D-6ACC-4E3A-BD8D-26BD20F4F200}"/>
-              </a:ext>
-            </a:extLst>
-          </p:cNvPr>
-          <p:cNvSpPr>
-            <a:spLocks xmlns:a="http://schemas.openxmlformats.org/drawingml/2006/main" noGrp="1"/>
-          </p:cNvSpPr>
-          <p:nvPr/>
-        </p:nvSpPr>
-        <p:spPr>
-          <a:xfrm xmlns:a="http://schemas.openxmlformats.org/drawingml/2006/main">
-            <a:off x="7943850" y="3619500"/>
-            <a:ext cx="2209800" cy="647700"/>
+          <p:cNvPr id="15" name="">
+            <a:extLst xmlns:a="http://schemas.openxmlformats.org/drawingml/2006/main">
+              <a:ext uri="{FF2B5EF4-FFF2-40B4-BE49-F238E27FC236}">
+                <a16:creationId xmlns:a16="http://schemas.microsoft.com/office/drawing/2014/main" id="{55AC1627-9968-4A30-A1B2-69FF0DDFEF21}"/>
+              </a:ext>
+            </a:extLst>
+          </p:cNvPr>
+          <p:cNvSpPr>
+            <a:spLocks xmlns:a="http://schemas.openxmlformats.org/drawingml/2006/main" noGrp="1"/>
+          </p:cNvSpPr>
+          <p:nvPr/>
+        </p:nvSpPr>
+        <p:spPr>
+          <a:xfrm xmlns:a="http://schemas.openxmlformats.org/drawingml/2006/main">
+            <a:off x="6858000" y="3448050"/>
+            <a:ext cx="3886200" cy="781050"/>
+          </a:xfrm>
+          <a:prstGeom xmlns:a="http://schemas.openxmlformats.org/drawingml/2006/main" prst="rect">
+            <a:avLst/>
+          </a:prstGeom>
+          <a:solidFill xmlns:a="http://schemas.openxmlformats.org/drawingml/2006/main">
+            <a:srgbClr val="FFF4CF"/>
+          </a:solidFill>
+          <a:ln xmlns:a="http://schemas.openxmlformats.org/drawingml/2006/main" w="9525">
+            <a:solidFill>
+              <a:srgbClr val="D7DEE6"/>
+            </a:solidFill>
+            <a:prstDash val="solid"/>
+          </a:ln>
+        </p:spPr>
+      </p:sp>
+      <p:sp>
+        <p:nvSpPr>
+          <p:cNvPr id="16" name="">
+            <a:extLst xmlns:a="http://schemas.openxmlformats.org/drawingml/2006/main">
+              <a:ext uri="{FF2B5EF4-FFF2-40B4-BE49-F238E27FC236}">
+                <a16:creationId xmlns:a16="http://schemas.microsoft.com/office/drawing/2014/main" id="{CEE24D7D-CB5B-4631-835E-1631A36976A2}"/>
+              </a:ext>
+            </a:extLst>
+          </p:cNvPr>
+          <p:cNvSpPr>
+            <a:spLocks xmlns:a="http://schemas.openxmlformats.org/drawingml/2006/main" noGrp="1"/>
+          </p:cNvSpPr>
+          <p:nvPr/>
+        </p:nvSpPr>
+        <p:spPr>
+          <a:xfrm xmlns:a="http://schemas.openxmlformats.org/drawingml/2006/main">
+            <a:off x="7105650" y="3543300"/>
+            <a:ext cx="3143250" cy="323850"/>
           </a:xfrm>
           <a:prstGeom xmlns:a="http://schemas.openxmlformats.org/drawingml/2006/main" prst="rect">
             <a:avLst/>
@@ -15273,9 +16575,9 @@
           <a:lstStyle xmlns:a="http://schemas.openxmlformats.org/drawingml/2006/main"/>
           <a:p xmlns:a="http://schemas.openxmlformats.org/drawingml/2006/main">
             <a:pPr algn="l">
-              <a:defRPr sz="1575" b="0">
-                <a:solidFill>
-                  <a:srgbClr val="17202A"/>
+              <a:defRPr sz="2250" b="1">
+                <a:solidFill>
+                  <a:srgbClr val="075D3B"/>
                 </a:solidFill>
                 <a:latin typeface="Arial"/>
                 <a:ea typeface="Arial"/>
@@ -15283,37 +16585,37 @@
               </a:defRPr>
             </a:pPr>
             <a:r>
-              <a:rPr sz="1575" b="0">
-                <a:solidFill>
-                  <a:srgbClr val="17202A"/>
+              <a:rPr sz="2250" b="1">
+                <a:solidFill>
+                  <a:srgbClr val="075D3B"/>
                 </a:solidFill>
                 <a:latin typeface="Arial"/>
                 <a:ea typeface="Arial"/>
                 <a:cs typeface="Arial"/>
               </a:rPr>
-              <a:t>auditoria entre local esperado e detectado</a:t>
+              <a:t>Integrar</a:t>
             </a:r>
           </a:p>
         </p:txBody>
       </p:sp>
       <p:sp>
         <p:nvSpPr>
-          <p:cNvPr id="15" name="">
-            <a:extLst xmlns:a="http://schemas.openxmlformats.org/drawingml/2006/main">
-              <a:ext uri="{FF2B5EF4-FFF2-40B4-BE49-F238E27FC236}">
-                <a16:creationId xmlns:a16="http://schemas.microsoft.com/office/drawing/2014/main" id="{DCFB18F1-8189-43DE-AFC4-8DE16765B6A7}"/>
-              </a:ext>
-            </a:extLst>
-          </p:cNvPr>
-          <p:cNvSpPr>
-            <a:spLocks xmlns:a="http://schemas.openxmlformats.org/drawingml/2006/main" noGrp="1"/>
-          </p:cNvSpPr>
-          <p:nvPr/>
-        </p:nvSpPr>
-        <p:spPr>
-          <a:xfrm xmlns:a="http://schemas.openxmlformats.org/drawingml/2006/main">
-            <a:off x="1200150" y="4991100"/>
-            <a:ext cx="8382000" cy="514350"/>
+          <p:cNvPr id="17" name="">
+            <a:extLst xmlns:a="http://schemas.openxmlformats.org/drawingml/2006/main">
+              <a:ext uri="{FF2B5EF4-FFF2-40B4-BE49-F238E27FC236}">
+                <a16:creationId xmlns:a16="http://schemas.microsoft.com/office/drawing/2014/main" id="{5772EAF3-1C5A-4431-9861-2CD2C345784C}"/>
+              </a:ext>
+            </a:extLst>
+          </p:cNvPr>
+          <p:cNvSpPr>
+            <a:spLocks xmlns:a="http://schemas.openxmlformats.org/drawingml/2006/main" noGrp="1"/>
+          </p:cNvSpPr>
+          <p:nvPr/>
+        </p:nvSpPr>
+        <p:spPr>
+          <a:xfrm xmlns:a="http://schemas.openxmlformats.org/drawingml/2006/main">
+            <a:off x="7105650" y="3905250"/>
+            <a:ext cx="3238500" cy="228600"/>
           </a:xfrm>
           <a:prstGeom xmlns:a="http://schemas.openxmlformats.org/drawingml/2006/main" prst="rect">
             <a:avLst/>
@@ -15337,7 +16639,7 @@
           <a:lstStyle xmlns:a="http://schemas.openxmlformats.org/drawingml/2006/main"/>
           <a:p xmlns:a="http://schemas.openxmlformats.org/drawingml/2006/main">
             <a:pPr algn="l">
-              <a:defRPr sz="1575" b="0">
+              <a:defRPr sz="1425" b="0">
                 <a:solidFill>
                   <a:srgbClr val="51606F"/>
                 </a:solidFill>
@@ -15347,7 +16649,7 @@
               </a:defRPr>
             </a:pPr>
             <a:r>
-              <a:rPr sz="1575" b="0">
+              <a:rPr sz="1425" b="0">
                 <a:solidFill>
                   <a:srgbClr val="51606F"/>
                 </a:solidFill>
@@ -15355,7 +16657,168 @@
                 <a:ea typeface="Arial"/>
                 <a:cs typeface="Arial"/>
               </a:rPr>
-              <a:t>Síntese: o diferencial do protótipo é usar a leitura RFID como evidência para auditoria patrimonial, não apenas como identificação.</a:t>
+              <a:t>leitura RFID e API</a:t>
+            </a:r>
+          </a:p>
+        </p:txBody>
+      </p:sp>
+      <p:sp>
+        <p:nvSpPr>
+          <p:cNvPr id="18" name="">
+            <a:extLst xmlns:a="http://schemas.openxmlformats.org/drawingml/2006/main">
+              <a:ext uri="{FF2B5EF4-FFF2-40B4-BE49-F238E27FC236}">
+                <a16:creationId xmlns:a16="http://schemas.microsoft.com/office/drawing/2014/main" id="{40774A21-F323-441E-AE55-A82948D7460B}"/>
+              </a:ext>
+            </a:extLst>
+          </p:cNvPr>
+          <p:cNvSpPr>
+            <a:spLocks xmlns:a="http://schemas.openxmlformats.org/drawingml/2006/main" noGrp="1"/>
+          </p:cNvSpPr>
+          <p:nvPr/>
+        </p:nvSpPr>
+        <p:spPr>
+          <a:xfrm xmlns:a="http://schemas.openxmlformats.org/drawingml/2006/main">
+            <a:off x="6858000" y="4514850"/>
+            <a:ext cx="3886200" cy="781050"/>
+          </a:xfrm>
+          <a:prstGeom xmlns:a="http://schemas.openxmlformats.org/drawingml/2006/main" prst="rect">
+            <a:avLst/>
+          </a:prstGeom>
+          <a:solidFill xmlns:a="http://schemas.openxmlformats.org/drawingml/2006/main">
+            <a:srgbClr val="FFFFFF"/>
+          </a:solidFill>
+          <a:ln xmlns:a="http://schemas.openxmlformats.org/drawingml/2006/main" w="9525">
+            <a:solidFill>
+              <a:srgbClr val="D7DEE6"/>
+            </a:solidFill>
+            <a:prstDash val="solid"/>
+          </a:ln>
+        </p:spPr>
+      </p:sp>
+      <p:sp>
+        <p:nvSpPr>
+          <p:cNvPr id="19" name="">
+            <a:extLst xmlns:a="http://schemas.openxmlformats.org/drawingml/2006/main">
+              <a:ext uri="{FF2B5EF4-FFF2-40B4-BE49-F238E27FC236}">
+                <a16:creationId xmlns:a16="http://schemas.microsoft.com/office/drawing/2014/main" id="{4291660D-C20C-4B32-A047-32D39B5211A4}"/>
+              </a:ext>
+            </a:extLst>
+          </p:cNvPr>
+          <p:cNvSpPr>
+            <a:spLocks xmlns:a="http://schemas.openxmlformats.org/drawingml/2006/main" noGrp="1"/>
+          </p:cNvSpPr>
+          <p:nvPr/>
+        </p:nvSpPr>
+        <p:spPr>
+          <a:xfrm xmlns:a="http://schemas.openxmlformats.org/drawingml/2006/main">
+            <a:off x="7105650" y="4610100"/>
+            <a:ext cx="3143250" cy="323850"/>
+          </a:xfrm>
+          <a:prstGeom xmlns:a="http://schemas.openxmlformats.org/drawingml/2006/main" prst="rect">
+            <a:avLst/>
+          </a:prstGeom>
+          <a:solidFill xmlns:a="http://schemas.openxmlformats.org/drawingml/2006/main">
+            <a:srgbClr val="000000">
+              <a:alpha val="0"/>
+            </a:srgbClr>
+          </a:solidFill>
+          <a:ln xmlns:a="http://schemas.openxmlformats.org/drawingml/2006/main" w="0">
+            <a:solidFill>
+              <a:srgbClr val="000000">
+                <a:alpha val="0"/>
+              </a:srgbClr>
+            </a:solidFill>
+            <a:prstDash val="solid"/>
+          </a:ln>
+        </p:spPr>
+        <p:txBody>
+          <a:bodyPr xmlns:a="http://schemas.openxmlformats.org/drawingml/2006/main" lIns="0" tIns="0" rIns="0" bIns="0" anchor="t"/>
+          <a:lstStyle xmlns:a="http://schemas.openxmlformats.org/drawingml/2006/main"/>
+          <a:p xmlns:a="http://schemas.openxmlformats.org/drawingml/2006/main">
+            <a:pPr algn="l">
+              <a:defRPr sz="2250" b="1">
+                <a:solidFill>
+                  <a:srgbClr val="075D3B"/>
+                </a:solidFill>
+                <a:latin typeface="Arial"/>
+                <a:ea typeface="Arial"/>
+                <a:cs typeface="Arial"/>
+              </a:defRPr>
+            </a:pPr>
+            <a:r>
+              <a:rPr sz="2250" b="1">
+                <a:solidFill>
+                  <a:srgbClr val="075D3B"/>
+                </a:solidFill>
+                <a:latin typeface="Arial"/>
+                <a:ea typeface="Arial"/>
+                <a:cs typeface="Arial"/>
+              </a:rPr>
+              <a:t>Validar</a:t>
+            </a:r>
+          </a:p>
+        </p:txBody>
+      </p:sp>
+      <p:sp>
+        <p:nvSpPr>
+          <p:cNvPr id="20" name="">
+            <a:extLst xmlns:a="http://schemas.openxmlformats.org/drawingml/2006/main">
+              <a:ext uri="{FF2B5EF4-FFF2-40B4-BE49-F238E27FC236}">
+                <a16:creationId xmlns:a16="http://schemas.microsoft.com/office/drawing/2014/main" id="{C5F1149D-FC43-4664-A0FC-C4553EB43EB5}"/>
+              </a:ext>
+            </a:extLst>
+          </p:cNvPr>
+          <p:cNvSpPr>
+            <a:spLocks xmlns:a="http://schemas.openxmlformats.org/drawingml/2006/main" noGrp="1"/>
+          </p:cNvSpPr>
+          <p:nvPr/>
+        </p:nvSpPr>
+        <p:spPr>
+          <a:xfrm xmlns:a="http://schemas.openxmlformats.org/drawingml/2006/main">
+            <a:off x="7105650" y="4972050"/>
+            <a:ext cx="3238500" cy="228600"/>
+          </a:xfrm>
+          <a:prstGeom xmlns:a="http://schemas.openxmlformats.org/drawingml/2006/main" prst="rect">
+            <a:avLst/>
+          </a:prstGeom>
+          <a:solidFill xmlns:a="http://schemas.openxmlformats.org/drawingml/2006/main">
+            <a:srgbClr val="000000">
+              <a:alpha val="0"/>
+            </a:srgbClr>
+          </a:solidFill>
+          <a:ln xmlns:a="http://schemas.openxmlformats.org/drawingml/2006/main" w="0">
+            <a:solidFill>
+              <a:srgbClr val="000000">
+                <a:alpha val="0"/>
+              </a:srgbClr>
+            </a:solidFill>
+            <a:prstDash val="solid"/>
+          </a:ln>
+        </p:spPr>
+        <p:txBody>
+          <a:bodyPr xmlns:a="http://schemas.openxmlformats.org/drawingml/2006/main" lIns="0" tIns="0" rIns="0" bIns="0" anchor="t"/>
+          <a:lstStyle xmlns:a="http://schemas.openxmlformats.org/drawingml/2006/main"/>
+          <a:p xmlns:a="http://schemas.openxmlformats.org/drawingml/2006/main">
+            <a:pPr algn="l">
+              <a:defRPr sz="1425" b="0">
+                <a:solidFill>
+                  <a:srgbClr val="51606F"/>
+                </a:solidFill>
+                <a:latin typeface="Arial"/>
+                <a:ea typeface="Arial"/>
+                <a:cs typeface="Arial"/>
+              </a:defRPr>
+            </a:pPr>
+            <a:r>
+              <a:rPr sz="1425" b="0">
+                <a:solidFill>
+                  <a:srgbClr val="51606F"/>
+                </a:solidFill>
+                <a:latin typeface="Arial"/>
+                <a:ea typeface="Arial"/>
+                <a:cs typeface="Arial"/>
+              </a:rPr>
+              <a:t>fluxo funcional do sistema</a:t>
             </a:r>
           </a:p>
         </p:txBody>
@@ -15363,7 +16826,7 @@
     </p:spTree>
     <p:extLst>
       <p:ext uri="{BB962C8B-B14F-4D97-AF65-F5344CB8AC3E}">
-        <p14:creationId xmlns:p14="http://schemas.microsoft.com/office/powerpoint/2010/main" val="1498353769"/>
+        <p14:creationId xmlns:p14="http://schemas.microsoft.com/office/powerpoint/2010/main" val="342699534"/>
       </p:ext>
     </p:extLst>
   </p:cSld>
@@ -15387,7 +16850,7 @@
           <p:cNvPr id="1" name="">
             <a:extLst xmlns:a="http://schemas.openxmlformats.org/drawingml/2006/main">
               <a:ext uri="{FF2B5EF4-FFF2-40B4-BE49-F238E27FC236}">
-                <a16:creationId xmlns:a16="http://schemas.microsoft.com/office/drawing/2014/main" id="{D993ECD7-94C5-494B-83F0-69233DDDD409}"/>
+                <a16:creationId xmlns:a16="http://schemas.microsoft.com/office/drawing/2014/main" id="{CEE82CF1-A03D-4195-9AD8-F4058AABB360}"/>
               </a:ext>
             </a:extLst>
           </p:cNvPr>
@@ -15422,7 +16885,7 @@
           <p:cNvPr id="2" name="">
             <a:extLst xmlns:a="http://schemas.openxmlformats.org/drawingml/2006/main">
               <a:ext uri="{FF2B5EF4-FFF2-40B4-BE49-F238E27FC236}">
-                <a16:creationId xmlns:a16="http://schemas.microsoft.com/office/drawing/2014/main" id="{5076B9AD-6F59-428C-9D83-0F1094E5D39E}"/>
+                <a16:creationId xmlns:a16="http://schemas.microsoft.com/office/drawing/2014/main" id="{C70C70B0-58AC-40F9-8EC1-0955BD910D79}"/>
               </a:ext>
             </a:extLst>
           </p:cNvPr>
@@ -15457,7 +16920,7 @@
           <p:cNvPr id="3" name="">
             <a:extLst xmlns:a="http://schemas.openxmlformats.org/drawingml/2006/main">
               <a:ext uri="{FF2B5EF4-FFF2-40B4-BE49-F238E27FC236}">
-                <a16:creationId xmlns:a16="http://schemas.microsoft.com/office/drawing/2014/main" id="{3E112B25-9571-418F-A1E1-F09B43ACD1A9}"/>
+                <a16:creationId xmlns:a16="http://schemas.microsoft.com/office/drawing/2014/main" id="{3B2572C4-0EA0-45EE-BDC3-C9FFC53D685D}"/>
               </a:ext>
             </a:extLst>
           </p:cNvPr>
@@ -15521,7 +16984,7 @@
           <p:cNvPr id="4" name="">
             <a:extLst xmlns:a="http://schemas.openxmlformats.org/drawingml/2006/main">
               <a:ext uri="{FF2B5EF4-FFF2-40B4-BE49-F238E27FC236}">
-                <a16:creationId xmlns:a16="http://schemas.microsoft.com/office/drawing/2014/main" id="{A2DAEE2D-CEF9-40F5-BB7A-18FC0FCC5A20}"/>
+                <a16:creationId xmlns:a16="http://schemas.microsoft.com/office/drawing/2014/main" id="{25BBF1D4-939A-4C84-8C21-D9CDC6A1790F}"/>
               </a:ext>
             </a:extLst>
           </p:cNvPr>
@@ -15575,7 +17038,7 @@
                 <a:ea typeface="Arial"/>
                 <a:cs typeface="Arial"/>
               </a:rPr>
-              <a:t>Metodologia de desenvolvimento</a:t>
+              <a:t>Comparação com trabalhos relacionados</a:t>
             </a:r>
           </a:p>
         </p:txBody>
@@ -15585,7 +17048,7 @@
           <p:cNvPr id="5" name="">
             <a:extLst xmlns:a="http://schemas.openxmlformats.org/drawingml/2006/main">
               <a:ext uri="{FF2B5EF4-FFF2-40B4-BE49-F238E27FC236}">
-                <a16:creationId xmlns:a16="http://schemas.microsoft.com/office/drawing/2014/main" id="{16F351DD-C325-450E-AB73-8AC2831CA6CE}"/>
+                <a16:creationId xmlns:a16="http://schemas.microsoft.com/office/drawing/2014/main" id="{85D15208-6C14-4D86-B9DE-408D1C961553}"/>
               </a:ext>
             </a:extLst>
           </p:cNvPr>
@@ -15639,7 +17102,7 @@
                 <a:ea typeface="Arial"/>
                 <a:cs typeface="Arial"/>
               </a:rPr>
-              <a:t>A pesquisa foi conduzida em três momentos: entender o problema, construir o protótipo e testar o funcionamento.</a:t>
+              <a:t>A literatura sustenta RFID, integração com sistemas e cautela na avaliação física da tecnologia.</a:t>
             </a:r>
           </a:p>
         </p:txBody>
@@ -15649,19 +17112,19 @@
           <p:cNvPr id="6" name="">
             <a:extLst xmlns:a="http://schemas.openxmlformats.org/drawingml/2006/main">
               <a:ext uri="{FF2B5EF4-FFF2-40B4-BE49-F238E27FC236}">
-                <a16:creationId xmlns:a16="http://schemas.microsoft.com/office/drawing/2014/main" id="{E152F497-3EB6-4DDF-AA3D-32A2D2239259}"/>
-              </a:ext>
-            </a:extLst>
-          </p:cNvPr>
-          <p:cNvSpPr>
-            <a:spLocks xmlns:a="http://schemas.openxmlformats.org/drawingml/2006/main" noGrp="1"/>
-          </p:cNvSpPr>
-          <p:nvPr/>
-        </p:nvSpPr>
-        <p:spPr>
-          <a:xfrm xmlns:a="http://schemas.openxmlformats.org/drawingml/2006/main">
-            <a:off x="876300" y="2609850"/>
-            <a:ext cx="2971800" cy="2743200"/>
+                <a16:creationId xmlns:a16="http://schemas.microsoft.com/office/drawing/2014/main" id="{061606C9-7DEA-4BD6-A49F-659B0AFEBAB4}"/>
+              </a:ext>
+            </a:extLst>
+          </p:cNvPr>
+          <p:cNvSpPr>
+            <a:spLocks xmlns:a="http://schemas.openxmlformats.org/drawingml/2006/main" noGrp="1"/>
+          </p:cNvSpPr>
+          <p:nvPr/>
+        </p:nvSpPr>
+        <p:spPr>
+          <a:xfrm xmlns:a="http://schemas.openxmlformats.org/drawingml/2006/main">
+            <a:off x="1066800" y="2857500"/>
+            <a:ext cx="2743200" cy="1695450"/>
           </a:xfrm>
           <a:prstGeom xmlns:a="http://schemas.openxmlformats.org/drawingml/2006/main" prst="rect">
             <a:avLst/>
@@ -15682,52 +17145,19 @@
           <p:cNvPr id="7" name="">
             <a:extLst xmlns:a="http://schemas.openxmlformats.org/drawingml/2006/main">
               <a:ext uri="{FF2B5EF4-FFF2-40B4-BE49-F238E27FC236}">
-                <a16:creationId xmlns:a16="http://schemas.microsoft.com/office/drawing/2014/main" id="{7DB6DF0C-E159-421B-AD37-37468A03AB6F}"/>
-              </a:ext>
-            </a:extLst>
-          </p:cNvPr>
-          <p:cNvSpPr>
-            <a:spLocks xmlns:a="http://schemas.openxmlformats.org/drawingml/2006/main" noGrp="1"/>
-          </p:cNvSpPr>
-          <p:nvPr/>
-        </p:nvSpPr>
-        <p:spPr>
-          <a:xfrm xmlns:a="http://schemas.openxmlformats.org/drawingml/2006/main">
-            <a:off x="1104900" y="3028950"/>
-            <a:ext cx="323850" cy="323850"/>
-          </a:xfrm>
-          <a:prstGeom xmlns:a="http://schemas.openxmlformats.org/drawingml/2006/main" prst="ellipse">
-            <a:avLst/>
-          </a:prstGeom>
-          <a:solidFill xmlns:a="http://schemas.openxmlformats.org/drawingml/2006/main">
-            <a:srgbClr val="E7F4EE"/>
-          </a:solidFill>
-          <a:ln xmlns:a="http://schemas.openxmlformats.org/drawingml/2006/main" w="9525">
-            <a:solidFill>
-              <a:srgbClr val="0E7A4F"/>
-            </a:solidFill>
-            <a:prstDash val="solid"/>
-          </a:ln>
-        </p:spPr>
-      </p:sp>
-      <p:sp>
-        <p:nvSpPr>
-          <p:cNvPr id="8" name="">
-            <a:extLst xmlns:a="http://schemas.openxmlformats.org/drawingml/2006/main">
-              <a:ext uri="{FF2B5EF4-FFF2-40B4-BE49-F238E27FC236}">
-                <a16:creationId xmlns:a16="http://schemas.microsoft.com/office/drawing/2014/main" id="{AA6194A7-FE3D-497A-8608-0A3EF9BA9C03}"/>
-              </a:ext>
-            </a:extLst>
-          </p:cNvPr>
-          <p:cNvSpPr>
-            <a:spLocks xmlns:a="http://schemas.openxmlformats.org/drawingml/2006/main" noGrp="1"/>
-          </p:cNvSpPr>
-          <p:nvPr/>
-        </p:nvSpPr>
-        <p:spPr>
-          <a:xfrm xmlns:a="http://schemas.openxmlformats.org/drawingml/2006/main">
-            <a:off x="1104900" y="3086100"/>
-            <a:ext cx="323850" cy="209550"/>
+                <a16:creationId xmlns:a16="http://schemas.microsoft.com/office/drawing/2014/main" id="{77E6F525-92F3-43EC-A079-DE3ED63A0C23}"/>
+              </a:ext>
+            </a:extLst>
+          </p:cNvPr>
+          <p:cNvSpPr>
+            <a:spLocks xmlns:a="http://schemas.openxmlformats.org/drawingml/2006/main" noGrp="1"/>
+          </p:cNvSpPr>
+          <p:nvPr/>
+        </p:nvSpPr>
+        <p:spPr>
+          <a:xfrm xmlns:a="http://schemas.openxmlformats.org/drawingml/2006/main">
+            <a:off x="1276350" y="3105150"/>
+            <a:ext cx="2209800" cy="323850"/>
           </a:xfrm>
           <a:prstGeom xmlns:a="http://schemas.openxmlformats.org/drawingml/2006/main" prst="rect">
             <a:avLst/>
@@ -15747,11 +17177,11 @@
           </a:ln>
         </p:spPr>
         <p:txBody>
-          <a:bodyPr xmlns:a="http://schemas.openxmlformats.org/drawingml/2006/main" lIns="0" tIns="0" rIns="0" bIns="0" anchor="ctr"/>
+          <a:bodyPr xmlns:a="http://schemas.openxmlformats.org/drawingml/2006/main" lIns="0" tIns="0" rIns="0" bIns="0" anchor="t"/>
           <a:lstStyle xmlns:a="http://schemas.openxmlformats.org/drawingml/2006/main"/>
           <a:p xmlns:a="http://schemas.openxmlformats.org/drawingml/2006/main">
-            <a:pPr algn="ctr">
-              <a:defRPr sz="1275" b="1">
+            <a:pPr algn="l">
+              <a:defRPr sz="1800" b="1">
                 <a:solidFill>
                   <a:srgbClr val="075D3B"/>
                 </a:solidFill>
@@ -15761,7 +17191,7 @@
               </a:defRPr>
             </a:pPr>
             <a:r>
-              <a:rPr sz="1275" b="1">
+              <a:rPr sz="1800" b="1">
                 <a:solidFill>
                   <a:srgbClr val="075D3B"/>
                 </a:solidFill>
@@ -15769,29 +17199,29 @@
                 <a:ea typeface="Arial"/>
                 <a:cs typeface="Arial"/>
               </a:rPr>
-              <a:t>1</a:t>
+              <a:t>RFID em inventário</a:t>
             </a:r>
           </a:p>
         </p:txBody>
       </p:sp>
       <p:sp>
         <p:nvSpPr>
-          <p:cNvPr id="9" name="">
-            <a:extLst xmlns:a="http://schemas.openxmlformats.org/drawingml/2006/main">
-              <a:ext uri="{FF2B5EF4-FFF2-40B4-BE49-F238E27FC236}">
-                <a16:creationId xmlns:a16="http://schemas.microsoft.com/office/drawing/2014/main" id="{88A11FAA-ACFB-4731-9C53-D26B0C035B95}"/>
-              </a:ext>
-            </a:extLst>
-          </p:cNvPr>
-          <p:cNvSpPr>
-            <a:spLocks xmlns:a="http://schemas.openxmlformats.org/drawingml/2006/main" noGrp="1"/>
-          </p:cNvSpPr>
-          <p:nvPr/>
-        </p:nvSpPr>
-        <p:spPr>
-          <a:xfrm xmlns:a="http://schemas.openxmlformats.org/drawingml/2006/main">
-            <a:off x="1562100" y="2971800"/>
-            <a:ext cx="1885950" cy="514350"/>
+          <p:cNvPr id="8" name="">
+            <a:extLst xmlns:a="http://schemas.openxmlformats.org/drawingml/2006/main">
+              <a:ext uri="{FF2B5EF4-FFF2-40B4-BE49-F238E27FC236}">
+                <a16:creationId xmlns:a16="http://schemas.microsoft.com/office/drawing/2014/main" id="{37E3FD81-554F-46BA-84FA-E437BBA1B854}"/>
+              </a:ext>
+            </a:extLst>
+          </p:cNvPr>
+          <p:cNvSpPr>
+            <a:spLocks xmlns:a="http://schemas.openxmlformats.org/drawingml/2006/main" noGrp="1"/>
+          </p:cNvSpPr>
+          <p:nvPr/>
+        </p:nvSpPr>
+        <p:spPr>
+          <a:xfrm xmlns:a="http://schemas.openxmlformats.org/drawingml/2006/main">
+            <a:off x="1276350" y="3619500"/>
+            <a:ext cx="2209800" cy="647700"/>
           </a:xfrm>
           <a:prstGeom xmlns:a="http://schemas.openxmlformats.org/drawingml/2006/main" prst="rect">
             <a:avLst/>
@@ -15811,11 +17241,11 @@
           </a:ln>
         </p:spPr>
         <p:txBody>
-          <a:bodyPr xmlns:a="http://schemas.openxmlformats.org/drawingml/2006/main" lIns="0" tIns="0" rIns="0" bIns="0" anchor="ctr"/>
+          <a:bodyPr xmlns:a="http://schemas.openxmlformats.org/drawingml/2006/main" lIns="0" tIns="0" rIns="0" bIns="0" anchor="t"/>
           <a:lstStyle xmlns:a="http://schemas.openxmlformats.org/drawingml/2006/main"/>
           <a:p xmlns:a="http://schemas.openxmlformats.org/drawingml/2006/main">
             <a:pPr algn="l">
-              <a:defRPr sz="1650" b="1">
+              <a:defRPr sz="1575" b="0">
                 <a:solidFill>
                   <a:srgbClr val="17202A"/>
                 </a:solidFill>
@@ -15825,7 +17255,7 @@
               </a:defRPr>
             </a:pPr>
             <a:r>
-              <a:rPr sz="1650" b="1">
+              <a:rPr sz="1575" b="0">
                 <a:solidFill>
                   <a:srgbClr val="17202A"/>
                 </a:solidFill>
@@ -15833,29 +17263,62 @@
                 <a:ea typeface="Arial"/>
                 <a:cs typeface="Arial"/>
               </a:rPr>
-              <a:t>Entender o problema</a:t>
+              <a:t>identificação automática de bens</a:t>
             </a:r>
           </a:p>
         </p:txBody>
       </p:sp>
       <p:sp>
         <p:nvSpPr>
+          <p:cNvPr id="9" name="">
+            <a:extLst xmlns:a="http://schemas.openxmlformats.org/drawingml/2006/main">
+              <a:ext uri="{FF2B5EF4-FFF2-40B4-BE49-F238E27FC236}">
+                <a16:creationId xmlns:a16="http://schemas.microsoft.com/office/drawing/2014/main" id="{1932608D-0B9A-4C34-8DFA-2D91A8A73FA0}"/>
+              </a:ext>
+            </a:extLst>
+          </p:cNvPr>
+          <p:cNvSpPr>
+            <a:spLocks xmlns:a="http://schemas.openxmlformats.org/drawingml/2006/main" noGrp="1"/>
+          </p:cNvSpPr>
+          <p:nvPr/>
+        </p:nvSpPr>
+        <p:spPr>
+          <a:xfrm xmlns:a="http://schemas.openxmlformats.org/drawingml/2006/main">
+            <a:off x="4400550" y="2857500"/>
+            <a:ext cx="2743200" cy="1695450"/>
+          </a:xfrm>
+          <a:prstGeom xmlns:a="http://schemas.openxmlformats.org/drawingml/2006/main" prst="rect">
+            <a:avLst/>
+          </a:prstGeom>
+          <a:solidFill xmlns:a="http://schemas.openxmlformats.org/drawingml/2006/main">
+            <a:srgbClr val="FFFFFF"/>
+          </a:solidFill>
+          <a:ln xmlns:a="http://schemas.openxmlformats.org/drawingml/2006/main" w="9525">
+            <a:solidFill>
+              <a:srgbClr val="D7DEE6"/>
+            </a:solidFill>
+            <a:prstDash val="solid"/>
+          </a:ln>
+        </p:spPr>
+      </p:sp>
+      <p:sp>
+        <p:nvSpPr>
           <p:cNvPr id="10" name="">
             <a:extLst xmlns:a="http://schemas.openxmlformats.org/drawingml/2006/main">
               <a:ext uri="{FF2B5EF4-FFF2-40B4-BE49-F238E27FC236}">
-                <a16:creationId xmlns:a16="http://schemas.microsoft.com/office/drawing/2014/main" id="{EDEB5472-295D-4FA4-8348-E856CE315548}"/>
-              </a:ext>
-            </a:extLst>
-          </p:cNvPr>
-          <p:cNvSpPr>
-            <a:spLocks xmlns:a="http://schemas.openxmlformats.org/drawingml/2006/main" noGrp="1"/>
-          </p:cNvSpPr>
-          <p:nvPr/>
-        </p:nvSpPr>
-        <p:spPr>
-          <a:xfrm xmlns:a="http://schemas.openxmlformats.org/drawingml/2006/main">
-            <a:off x="1104900" y="3810000"/>
-            <a:ext cx="2381250" cy="1047750"/>
+                <a16:creationId xmlns:a16="http://schemas.microsoft.com/office/drawing/2014/main" id="{DEB87E08-29D0-40D8-98B4-5F359289AD63}"/>
+              </a:ext>
+            </a:extLst>
+          </p:cNvPr>
+          <p:cNvSpPr>
+            <a:spLocks xmlns:a="http://schemas.openxmlformats.org/drawingml/2006/main" noGrp="1"/>
+          </p:cNvSpPr>
+          <p:nvPr/>
+        </p:nvSpPr>
+        <p:spPr>
+          <a:xfrm xmlns:a="http://schemas.openxmlformats.org/drawingml/2006/main">
+            <a:off x="4610100" y="3105150"/>
+            <a:ext cx="2209800" cy="323850"/>
           </a:xfrm>
           <a:prstGeom xmlns:a="http://schemas.openxmlformats.org/drawingml/2006/main" prst="rect">
             <a:avLst/>
@@ -15879,9 +17342,9 @@
           <a:lstStyle xmlns:a="http://schemas.openxmlformats.org/drawingml/2006/main"/>
           <a:p xmlns:a="http://schemas.openxmlformats.org/drawingml/2006/main">
             <a:pPr algn="l">
-              <a:defRPr sz="1500" b="0">
-                <a:solidFill>
-                  <a:srgbClr val="51606F"/>
+              <a:defRPr sz="1800" b="1">
+                <a:solidFill>
+                  <a:srgbClr val="075D3B"/>
                 </a:solidFill>
                 <a:latin typeface="Arial"/>
                 <a:ea typeface="Arial"/>
@@ -15889,15 +17352,15 @@
               </a:defRPr>
             </a:pPr>
             <a:r>
-              <a:rPr sz="1500" b="0">
-                <a:solidFill>
-                  <a:srgbClr val="51606F"/>
+              <a:rPr sz="1800" b="1">
+                <a:solidFill>
+                  <a:srgbClr val="075D3B"/>
                 </a:solidFill>
                 <a:latin typeface="Arial"/>
                 <a:ea typeface="Arial"/>
                 <a:cs typeface="Arial"/>
               </a:rPr>
-              <a:t>Levantamento sobre controle patrimonial, RFID e trabalhos relacionados.</a:t>
+              <a:t>Middleware e IoT</a:t>
             </a:r>
           </a:p>
         </p:txBody>
@@ -15907,85 +17370,19 @@
           <p:cNvPr id="11" name="">
             <a:extLst xmlns:a="http://schemas.openxmlformats.org/drawingml/2006/main">
               <a:ext uri="{FF2B5EF4-FFF2-40B4-BE49-F238E27FC236}">
-                <a16:creationId xmlns:a16="http://schemas.microsoft.com/office/drawing/2014/main" id="{9E0C9CD1-EE33-4727-BB66-5C04D2E1E5A7}"/>
-              </a:ext>
-            </a:extLst>
-          </p:cNvPr>
-          <p:cNvSpPr>
-            <a:spLocks xmlns:a="http://schemas.openxmlformats.org/drawingml/2006/main" noGrp="1"/>
-          </p:cNvSpPr>
-          <p:nvPr/>
-        </p:nvSpPr>
-        <p:spPr>
-          <a:xfrm xmlns:a="http://schemas.openxmlformats.org/drawingml/2006/main">
-            <a:off x="4438650" y="2609850"/>
-            <a:ext cx="2971800" cy="2743200"/>
-          </a:xfrm>
-          <a:prstGeom xmlns:a="http://schemas.openxmlformats.org/drawingml/2006/main" prst="rect">
-            <a:avLst/>
-          </a:prstGeom>
-          <a:solidFill xmlns:a="http://schemas.openxmlformats.org/drawingml/2006/main">
-            <a:srgbClr val="FFFFFF"/>
-          </a:solidFill>
-          <a:ln xmlns:a="http://schemas.openxmlformats.org/drawingml/2006/main" w="9525">
-            <a:solidFill>
-              <a:srgbClr val="D7DEE6"/>
-            </a:solidFill>
-            <a:prstDash val="solid"/>
-          </a:ln>
-        </p:spPr>
-      </p:sp>
-      <p:sp>
-        <p:nvSpPr>
-          <p:cNvPr id="12" name="">
-            <a:extLst xmlns:a="http://schemas.openxmlformats.org/drawingml/2006/main">
-              <a:ext uri="{FF2B5EF4-FFF2-40B4-BE49-F238E27FC236}">
-                <a16:creationId xmlns:a16="http://schemas.microsoft.com/office/drawing/2014/main" id="{4E0AA435-79A8-4520-B236-48AF613B0ADC}"/>
-              </a:ext>
-            </a:extLst>
-          </p:cNvPr>
-          <p:cNvSpPr>
-            <a:spLocks xmlns:a="http://schemas.openxmlformats.org/drawingml/2006/main" noGrp="1"/>
-          </p:cNvSpPr>
-          <p:nvPr/>
-        </p:nvSpPr>
-        <p:spPr>
-          <a:xfrm xmlns:a="http://schemas.openxmlformats.org/drawingml/2006/main">
-            <a:off x="4667250" y="3028950"/>
-            <a:ext cx="323850" cy="323850"/>
-          </a:xfrm>
-          <a:prstGeom xmlns:a="http://schemas.openxmlformats.org/drawingml/2006/main" prst="ellipse">
-            <a:avLst/>
-          </a:prstGeom>
-          <a:solidFill xmlns:a="http://schemas.openxmlformats.org/drawingml/2006/main">
-            <a:srgbClr val="E7F4EE"/>
-          </a:solidFill>
-          <a:ln xmlns:a="http://schemas.openxmlformats.org/drawingml/2006/main" w="9525">
-            <a:solidFill>
-              <a:srgbClr val="0E7A4F"/>
-            </a:solidFill>
-            <a:prstDash val="solid"/>
-          </a:ln>
-        </p:spPr>
-      </p:sp>
-      <p:sp>
-        <p:nvSpPr>
-          <p:cNvPr id="13" name="">
-            <a:extLst xmlns:a="http://schemas.openxmlformats.org/drawingml/2006/main">
-              <a:ext uri="{FF2B5EF4-FFF2-40B4-BE49-F238E27FC236}">
-                <a16:creationId xmlns:a16="http://schemas.microsoft.com/office/drawing/2014/main" id="{D7CEF51B-55B0-4002-BF83-D12518EF4C8D}"/>
-              </a:ext>
-            </a:extLst>
-          </p:cNvPr>
-          <p:cNvSpPr>
-            <a:spLocks xmlns:a="http://schemas.openxmlformats.org/drawingml/2006/main" noGrp="1"/>
-          </p:cNvSpPr>
-          <p:nvPr/>
-        </p:nvSpPr>
-        <p:spPr>
-          <a:xfrm xmlns:a="http://schemas.openxmlformats.org/drawingml/2006/main">
-            <a:off x="4667250" y="3086100"/>
-            <a:ext cx="323850" cy="209550"/>
+                <a16:creationId xmlns:a16="http://schemas.microsoft.com/office/drawing/2014/main" id="{D0D4F8B5-FFBC-41F1-A485-4B13D712CAA1}"/>
+              </a:ext>
+            </a:extLst>
+          </p:cNvPr>
+          <p:cNvSpPr>
+            <a:spLocks xmlns:a="http://schemas.openxmlformats.org/drawingml/2006/main" noGrp="1"/>
+          </p:cNvSpPr>
+          <p:nvPr/>
+        </p:nvSpPr>
+        <p:spPr>
+          <a:xfrm xmlns:a="http://schemas.openxmlformats.org/drawingml/2006/main">
+            <a:off x="4610100" y="3619500"/>
+            <a:ext cx="2209800" cy="647700"/>
           </a:xfrm>
           <a:prstGeom xmlns:a="http://schemas.openxmlformats.org/drawingml/2006/main" prst="rect">
             <a:avLst/>
@@ -16005,13 +17402,13 @@
           </a:ln>
         </p:spPr>
         <p:txBody>
-          <a:bodyPr xmlns:a="http://schemas.openxmlformats.org/drawingml/2006/main" lIns="0" tIns="0" rIns="0" bIns="0" anchor="ctr"/>
+          <a:bodyPr xmlns:a="http://schemas.openxmlformats.org/drawingml/2006/main" lIns="0" tIns="0" rIns="0" bIns="0" anchor="t"/>
           <a:lstStyle xmlns:a="http://schemas.openxmlformats.org/drawingml/2006/main"/>
           <a:p xmlns:a="http://schemas.openxmlformats.org/drawingml/2006/main">
-            <a:pPr algn="ctr">
-              <a:defRPr sz="1275" b="1">
-                <a:solidFill>
-                  <a:srgbClr val="075D3B"/>
+            <a:pPr algn="l">
+              <a:defRPr sz="1575" b="0">
+                <a:solidFill>
+                  <a:srgbClr val="17202A"/>
                 </a:solidFill>
                 <a:latin typeface="Arial"/>
                 <a:ea typeface="Arial"/>
@@ -16019,37 +17416,70 @@
               </a:defRPr>
             </a:pPr>
             <a:r>
-              <a:rPr sz="1275" b="1">
-                <a:solidFill>
-                  <a:srgbClr val="075D3B"/>
+              <a:rPr sz="1575" b="0">
+                <a:solidFill>
+                  <a:srgbClr val="17202A"/>
                 </a:solidFill>
                 <a:latin typeface="Arial"/>
                 <a:ea typeface="Arial"/>
                 <a:cs typeface="Arial"/>
               </a:rPr>
-              <a:t>2</a:t>
+              <a:t>integração de eventos a sistemas</a:t>
             </a:r>
           </a:p>
         </p:txBody>
       </p:sp>
       <p:sp>
         <p:nvSpPr>
-          <p:cNvPr id="14" name="">
-            <a:extLst xmlns:a="http://schemas.openxmlformats.org/drawingml/2006/main">
-              <a:ext uri="{FF2B5EF4-FFF2-40B4-BE49-F238E27FC236}">
-                <a16:creationId xmlns:a16="http://schemas.microsoft.com/office/drawing/2014/main" id="{1724C15B-249B-4569-B1B2-05576A2C8A1C}"/>
-              </a:ext>
-            </a:extLst>
-          </p:cNvPr>
-          <p:cNvSpPr>
-            <a:spLocks xmlns:a="http://schemas.openxmlformats.org/drawingml/2006/main" noGrp="1"/>
-          </p:cNvSpPr>
-          <p:nvPr/>
-        </p:nvSpPr>
-        <p:spPr>
-          <a:xfrm xmlns:a="http://schemas.openxmlformats.org/drawingml/2006/main">
-            <a:off x="5124450" y="2971800"/>
-            <a:ext cx="1885950" cy="514350"/>
+          <p:cNvPr id="12" name="">
+            <a:extLst xmlns:a="http://schemas.openxmlformats.org/drawingml/2006/main">
+              <a:ext uri="{FF2B5EF4-FFF2-40B4-BE49-F238E27FC236}">
+                <a16:creationId xmlns:a16="http://schemas.microsoft.com/office/drawing/2014/main" id="{A2ABAA70-ECAF-4929-9C09-E77B83B6A798}"/>
+              </a:ext>
+            </a:extLst>
+          </p:cNvPr>
+          <p:cNvSpPr>
+            <a:spLocks xmlns:a="http://schemas.openxmlformats.org/drawingml/2006/main" noGrp="1"/>
+          </p:cNvSpPr>
+          <p:nvPr/>
+        </p:nvSpPr>
+        <p:spPr>
+          <a:xfrm xmlns:a="http://schemas.openxmlformats.org/drawingml/2006/main">
+            <a:off x="7734300" y="2857500"/>
+            <a:ext cx="2743200" cy="1695450"/>
+          </a:xfrm>
+          <a:prstGeom xmlns:a="http://schemas.openxmlformats.org/drawingml/2006/main" prst="rect">
+            <a:avLst/>
+          </a:prstGeom>
+          <a:solidFill xmlns:a="http://schemas.openxmlformats.org/drawingml/2006/main">
+            <a:srgbClr val="E7F4EE"/>
+          </a:solidFill>
+          <a:ln xmlns:a="http://schemas.openxmlformats.org/drawingml/2006/main" w="9525">
+            <a:solidFill>
+              <a:srgbClr val="0E7A4F"/>
+            </a:solidFill>
+            <a:prstDash val="solid"/>
+          </a:ln>
+        </p:spPr>
+      </p:sp>
+      <p:sp>
+        <p:nvSpPr>
+          <p:cNvPr id="13" name="">
+            <a:extLst xmlns:a="http://schemas.openxmlformats.org/drawingml/2006/main">
+              <a:ext uri="{FF2B5EF4-FFF2-40B4-BE49-F238E27FC236}">
+                <a16:creationId xmlns:a16="http://schemas.microsoft.com/office/drawing/2014/main" id="{F445BF8C-C0B3-496A-B800-A1408F80EA5D}"/>
+              </a:ext>
+            </a:extLst>
+          </p:cNvPr>
+          <p:cNvSpPr>
+            <a:spLocks xmlns:a="http://schemas.openxmlformats.org/drawingml/2006/main" noGrp="1"/>
+          </p:cNvSpPr>
+          <p:nvPr/>
+        </p:nvSpPr>
+        <p:spPr>
+          <a:xfrm xmlns:a="http://schemas.openxmlformats.org/drawingml/2006/main">
+            <a:off x="7943850" y="3105150"/>
+            <a:ext cx="2209800" cy="323850"/>
           </a:xfrm>
           <a:prstGeom xmlns:a="http://schemas.openxmlformats.org/drawingml/2006/main" prst="rect">
             <a:avLst/>
@@ -16069,13 +17499,13 @@
           </a:ln>
         </p:spPr>
         <p:txBody>
-          <a:bodyPr xmlns:a="http://schemas.openxmlformats.org/drawingml/2006/main" lIns="0" tIns="0" rIns="0" bIns="0" anchor="ctr"/>
+          <a:bodyPr xmlns:a="http://schemas.openxmlformats.org/drawingml/2006/main" lIns="0" tIns="0" rIns="0" bIns="0" anchor="t"/>
           <a:lstStyle xmlns:a="http://schemas.openxmlformats.org/drawingml/2006/main"/>
           <a:p xmlns:a="http://schemas.openxmlformats.org/drawingml/2006/main">
             <a:pPr algn="l">
-              <a:defRPr sz="1650" b="1">
-                <a:solidFill>
-                  <a:srgbClr val="17202A"/>
+              <a:defRPr sz="1800" b="1">
+                <a:solidFill>
+                  <a:srgbClr val="075D3B"/>
                 </a:solidFill>
                 <a:latin typeface="Arial"/>
                 <a:ea typeface="Arial"/>
@@ -16083,37 +17513,37 @@
               </a:defRPr>
             </a:pPr>
             <a:r>
-              <a:rPr sz="1650" b="1">
-                <a:solidFill>
-                  <a:srgbClr val="17202A"/>
+              <a:rPr sz="1800" b="1">
+                <a:solidFill>
+                  <a:srgbClr val="075D3B"/>
                 </a:solidFill>
                 <a:latin typeface="Arial"/>
                 <a:ea typeface="Arial"/>
                 <a:cs typeface="Arial"/>
               </a:rPr>
-              <a:t>Construir o protótipo</a:t>
+              <a:t>InventoryRFID</a:t>
             </a:r>
           </a:p>
         </p:txBody>
       </p:sp>
       <p:sp>
         <p:nvSpPr>
-          <p:cNvPr id="15" name="">
-            <a:extLst xmlns:a="http://schemas.openxmlformats.org/drawingml/2006/main">
-              <a:ext uri="{FF2B5EF4-FFF2-40B4-BE49-F238E27FC236}">
-                <a16:creationId xmlns:a16="http://schemas.microsoft.com/office/drawing/2014/main" id="{900E6FA9-0486-4305-9A7C-9CA30152DF52}"/>
-              </a:ext>
-            </a:extLst>
-          </p:cNvPr>
-          <p:cNvSpPr>
-            <a:spLocks xmlns:a="http://schemas.openxmlformats.org/drawingml/2006/main" noGrp="1"/>
-          </p:cNvSpPr>
-          <p:nvPr/>
-        </p:nvSpPr>
-        <p:spPr>
-          <a:xfrm xmlns:a="http://schemas.openxmlformats.org/drawingml/2006/main">
-            <a:off x="4667250" y="3810000"/>
-            <a:ext cx="2381250" cy="1047750"/>
+          <p:cNvPr id="14" name="">
+            <a:extLst xmlns:a="http://schemas.openxmlformats.org/drawingml/2006/main">
+              <a:ext uri="{FF2B5EF4-FFF2-40B4-BE49-F238E27FC236}">
+                <a16:creationId xmlns:a16="http://schemas.microsoft.com/office/drawing/2014/main" id="{6234F1FE-52A4-4273-A95D-D888CE53217B}"/>
+              </a:ext>
+            </a:extLst>
+          </p:cNvPr>
+          <p:cNvSpPr>
+            <a:spLocks xmlns:a="http://schemas.openxmlformats.org/drawingml/2006/main" noGrp="1"/>
+          </p:cNvSpPr>
+          <p:nvPr/>
+        </p:nvSpPr>
+        <p:spPr>
+          <a:xfrm xmlns:a="http://schemas.openxmlformats.org/drawingml/2006/main">
+            <a:off x="7943850" y="3619500"/>
+            <a:ext cx="2209800" cy="647700"/>
           </a:xfrm>
           <a:prstGeom xmlns:a="http://schemas.openxmlformats.org/drawingml/2006/main" prst="rect">
             <a:avLst/>
@@ -16137,9 +17567,9 @@
           <a:lstStyle xmlns:a="http://schemas.openxmlformats.org/drawingml/2006/main"/>
           <a:p xmlns:a="http://schemas.openxmlformats.org/drawingml/2006/main">
             <a:pPr algn="l">
-              <a:defRPr sz="1500" b="0">
-                <a:solidFill>
-                  <a:srgbClr val="51606F"/>
+              <a:defRPr sz="1575" b="0">
+                <a:solidFill>
+                  <a:srgbClr val="17202A"/>
                 </a:solidFill>
                 <a:latin typeface="Arial"/>
                 <a:ea typeface="Arial"/>
@@ -16147,103 +17577,37 @@
               </a:defRPr>
             </a:pPr>
             <a:r>
-              <a:rPr sz="1500" b="0">
-                <a:solidFill>
-                  <a:srgbClr val="51606F"/>
+              <a:rPr sz="1575" b="0">
+                <a:solidFill>
+                  <a:srgbClr val="17202A"/>
                 </a:solidFill>
                 <a:latin typeface="Arial"/>
                 <a:ea typeface="Arial"/>
                 <a:cs typeface="Arial"/>
               </a:rPr>
-              <a:t>Criação das telas, cadastros e regras para interpretar as leituras.</a:t>
+              <a:t>auditoria e resolução de inconsistências</a:t>
             </a:r>
           </a:p>
         </p:txBody>
       </p:sp>
       <p:sp>
         <p:nvSpPr>
-          <p:cNvPr id="16" name="">
-            <a:extLst xmlns:a="http://schemas.openxmlformats.org/drawingml/2006/main">
-              <a:ext uri="{FF2B5EF4-FFF2-40B4-BE49-F238E27FC236}">
-                <a16:creationId xmlns:a16="http://schemas.microsoft.com/office/drawing/2014/main" id="{FF1CB08B-3C4E-48F6-99F0-2BA0D8AB8075}"/>
-              </a:ext>
-            </a:extLst>
-          </p:cNvPr>
-          <p:cNvSpPr>
-            <a:spLocks xmlns:a="http://schemas.openxmlformats.org/drawingml/2006/main" noGrp="1"/>
-          </p:cNvSpPr>
-          <p:nvPr/>
-        </p:nvSpPr>
-        <p:spPr>
-          <a:xfrm xmlns:a="http://schemas.openxmlformats.org/drawingml/2006/main">
-            <a:off x="8001000" y="2609850"/>
-            <a:ext cx="2971800" cy="2743200"/>
-          </a:xfrm>
-          <a:prstGeom xmlns:a="http://schemas.openxmlformats.org/drawingml/2006/main" prst="rect">
-            <a:avLst/>
-          </a:prstGeom>
-          <a:solidFill xmlns:a="http://schemas.openxmlformats.org/drawingml/2006/main">
-            <a:srgbClr val="FFFFFF"/>
-          </a:solidFill>
-          <a:ln xmlns:a="http://schemas.openxmlformats.org/drawingml/2006/main" w="9525">
-            <a:solidFill>
-              <a:srgbClr val="D7DEE6"/>
-            </a:solidFill>
-            <a:prstDash val="solid"/>
-          </a:ln>
-        </p:spPr>
-      </p:sp>
-      <p:sp>
-        <p:nvSpPr>
-          <p:cNvPr id="17" name="">
-            <a:extLst xmlns:a="http://schemas.openxmlformats.org/drawingml/2006/main">
-              <a:ext uri="{FF2B5EF4-FFF2-40B4-BE49-F238E27FC236}">
-                <a16:creationId xmlns:a16="http://schemas.microsoft.com/office/drawing/2014/main" id="{3314FDD0-1091-4642-9150-AEE2FDC65A89}"/>
-              </a:ext>
-            </a:extLst>
-          </p:cNvPr>
-          <p:cNvSpPr>
-            <a:spLocks xmlns:a="http://schemas.openxmlformats.org/drawingml/2006/main" noGrp="1"/>
-          </p:cNvSpPr>
-          <p:nvPr/>
-        </p:nvSpPr>
-        <p:spPr>
-          <a:xfrm xmlns:a="http://schemas.openxmlformats.org/drawingml/2006/main">
-            <a:off x="8229600" y="3028950"/>
-            <a:ext cx="323850" cy="323850"/>
-          </a:xfrm>
-          <a:prstGeom xmlns:a="http://schemas.openxmlformats.org/drawingml/2006/main" prst="ellipse">
-            <a:avLst/>
-          </a:prstGeom>
-          <a:solidFill xmlns:a="http://schemas.openxmlformats.org/drawingml/2006/main">
-            <a:srgbClr val="E7F4EE"/>
-          </a:solidFill>
-          <a:ln xmlns:a="http://schemas.openxmlformats.org/drawingml/2006/main" w="9525">
-            <a:solidFill>
-              <a:srgbClr val="0E7A4F"/>
-            </a:solidFill>
-            <a:prstDash val="solid"/>
-          </a:ln>
-        </p:spPr>
-      </p:sp>
-      <p:sp>
-        <p:nvSpPr>
-          <p:cNvPr id="18" name="">
-            <a:extLst xmlns:a="http://schemas.openxmlformats.org/drawingml/2006/main">
-              <a:ext uri="{FF2B5EF4-FFF2-40B4-BE49-F238E27FC236}">
-                <a16:creationId xmlns:a16="http://schemas.microsoft.com/office/drawing/2014/main" id="{A6A7EDEF-FF48-4069-BDAE-CCB563599935}"/>
-              </a:ext>
-            </a:extLst>
-          </p:cNvPr>
-          <p:cNvSpPr>
-            <a:spLocks xmlns:a="http://schemas.openxmlformats.org/drawingml/2006/main" noGrp="1"/>
-          </p:cNvSpPr>
-          <p:nvPr/>
-        </p:nvSpPr>
-        <p:spPr>
-          <a:xfrm xmlns:a="http://schemas.openxmlformats.org/drawingml/2006/main">
-            <a:off x="8229600" y="3086100"/>
-            <a:ext cx="323850" cy="209550"/>
+          <p:cNvPr id="15" name="">
+            <a:extLst xmlns:a="http://schemas.openxmlformats.org/drawingml/2006/main">
+              <a:ext uri="{FF2B5EF4-FFF2-40B4-BE49-F238E27FC236}">
+                <a16:creationId xmlns:a16="http://schemas.microsoft.com/office/drawing/2014/main" id="{F8AE51CA-3C30-4453-9EF8-F60CC408F325}"/>
+              </a:ext>
+            </a:extLst>
+          </p:cNvPr>
+          <p:cNvSpPr>
+            <a:spLocks xmlns:a="http://schemas.openxmlformats.org/drawingml/2006/main" noGrp="1"/>
+          </p:cNvSpPr>
+          <p:nvPr/>
+        </p:nvSpPr>
+        <p:spPr>
+          <a:xfrm xmlns:a="http://schemas.openxmlformats.org/drawingml/2006/main">
+            <a:off x="1200150" y="4991100"/>
+            <a:ext cx="8382000" cy="514350"/>
           </a:xfrm>
           <a:prstGeom xmlns:a="http://schemas.openxmlformats.org/drawingml/2006/main" prst="rect">
             <a:avLst/>
@@ -16263,13 +17627,13 @@
           </a:ln>
         </p:spPr>
         <p:txBody>
-          <a:bodyPr xmlns:a="http://schemas.openxmlformats.org/drawingml/2006/main" lIns="0" tIns="0" rIns="0" bIns="0" anchor="ctr"/>
+          <a:bodyPr xmlns:a="http://schemas.openxmlformats.org/drawingml/2006/main" lIns="0" tIns="0" rIns="0" bIns="0" anchor="t"/>
           <a:lstStyle xmlns:a="http://schemas.openxmlformats.org/drawingml/2006/main"/>
           <a:p xmlns:a="http://schemas.openxmlformats.org/drawingml/2006/main">
-            <a:pPr algn="ctr">
-              <a:defRPr sz="1275" b="1">
-                <a:solidFill>
-                  <a:srgbClr val="075D3B"/>
+            <a:pPr algn="l">
+              <a:defRPr sz="1575" b="0">
+                <a:solidFill>
+                  <a:srgbClr val="51606F"/>
                 </a:solidFill>
                 <a:latin typeface="Arial"/>
                 <a:ea typeface="Arial"/>
@@ -16277,143 +17641,15 @@
               </a:defRPr>
             </a:pPr>
             <a:r>
-              <a:rPr sz="1275" b="1">
-                <a:solidFill>
-                  <a:srgbClr val="075D3B"/>
+              <a:rPr sz="1575" b="0">
+                <a:solidFill>
+                  <a:srgbClr val="51606F"/>
                 </a:solidFill>
                 <a:latin typeface="Arial"/>
                 <a:ea typeface="Arial"/>
                 <a:cs typeface="Arial"/>
               </a:rPr>
-              <a:t>3</a:t>
-            </a:r>
-          </a:p>
-        </p:txBody>
-      </p:sp>
-      <p:sp>
-        <p:nvSpPr>
-          <p:cNvPr id="19" name="">
-            <a:extLst xmlns:a="http://schemas.openxmlformats.org/drawingml/2006/main">
-              <a:ext uri="{FF2B5EF4-FFF2-40B4-BE49-F238E27FC236}">
-                <a16:creationId xmlns:a16="http://schemas.microsoft.com/office/drawing/2014/main" id="{4245D9AE-B36B-4479-ABD5-493CDADA973F}"/>
-              </a:ext>
-            </a:extLst>
-          </p:cNvPr>
-          <p:cNvSpPr>
-            <a:spLocks xmlns:a="http://schemas.openxmlformats.org/drawingml/2006/main" noGrp="1"/>
-          </p:cNvSpPr>
-          <p:nvPr/>
-        </p:nvSpPr>
-        <p:spPr>
-          <a:xfrm xmlns:a="http://schemas.openxmlformats.org/drawingml/2006/main">
-            <a:off x="8686800" y="2971800"/>
-            <a:ext cx="1885950" cy="514350"/>
-          </a:xfrm>
-          <a:prstGeom xmlns:a="http://schemas.openxmlformats.org/drawingml/2006/main" prst="rect">
-            <a:avLst/>
-          </a:prstGeom>
-          <a:solidFill xmlns:a="http://schemas.openxmlformats.org/drawingml/2006/main">
-            <a:srgbClr val="000000">
-              <a:alpha val="0"/>
-            </a:srgbClr>
-          </a:solidFill>
-          <a:ln xmlns:a="http://schemas.openxmlformats.org/drawingml/2006/main" w="0">
-            <a:solidFill>
-              <a:srgbClr val="000000">
-                <a:alpha val="0"/>
-              </a:srgbClr>
-            </a:solidFill>
-            <a:prstDash val="solid"/>
-          </a:ln>
-        </p:spPr>
-        <p:txBody>
-          <a:bodyPr xmlns:a="http://schemas.openxmlformats.org/drawingml/2006/main" lIns="0" tIns="0" rIns="0" bIns="0" anchor="ctr"/>
-          <a:lstStyle xmlns:a="http://schemas.openxmlformats.org/drawingml/2006/main"/>
-          <a:p xmlns:a="http://schemas.openxmlformats.org/drawingml/2006/main">
-            <a:pPr algn="l">
-              <a:defRPr sz="1650" b="1">
-                <a:solidFill>
-                  <a:srgbClr val="17202A"/>
-                </a:solidFill>
-                <a:latin typeface="Arial"/>
-                <a:ea typeface="Arial"/>
-                <a:cs typeface="Arial"/>
-              </a:defRPr>
-            </a:pPr>
-            <a:r>
-              <a:rPr sz="1650" b="1">
-                <a:solidFill>
-                  <a:srgbClr val="17202A"/>
-                </a:solidFill>
-                <a:latin typeface="Arial"/>
-                <a:ea typeface="Arial"/>
-                <a:cs typeface="Arial"/>
-              </a:rPr>
-              <a:t>Testar o funcionamento</a:t>
-            </a:r>
-          </a:p>
-        </p:txBody>
-      </p:sp>
-      <p:sp>
-        <p:nvSpPr>
-          <p:cNvPr id="20" name="">
-            <a:extLst xmlns:a="http://schemas.openxmlformats.org/drawingml/2006/main">
-              <a:ext uri="{FF2B5EF4-FFF2-40B4-BE49-F238E27FC236}">
-                <a16:creationId xmlns:a16="http://schemas.microsoft.com/office/drawing/2014/main" id="{DDB4649D-874B-45FC-B636-843B8F41BE99}"/>
-              </a:ext>
-            </a:extLst>
-          </p:cNvPr>
-          <p:cNvSpPr>
-            <a:spLocks xmlns:a="http://schemas.openxmlformats.org/drawingml/2006/main" noGrp="1"/>
-          </p:cNvSpPr>
-          <p:nvPr/>
-        </p:nvSpPr>
-        <p:spPr>
-          <a:xfrm xmlns:a="http://schemas.openxmlformats.org/drawingml/2006/main">
-            <a:off x="8229600" y="3810000"/>
-            <a:ext cx="2381250" cy="1047750"/>
-          </a:xfrm>
-          <a:prstGeom xmlns:a="http://schemas.openxmlformats.org/drawingml/2006/main" prst="rect">
-            <a:avLst/>
-          </a:prstGeom>
-          <a:solidFill xmlns:a="http://schemas.openxmlformats.org/drawingml/2006/main">
-            <a:srgbClr val="000000">
-              <a:alpha val="0"/>
-            </a:srgbClr>
-          </a:solidFill>
-          <a:ln xmlns:a="http://schemas.openxmlformats.org/drawingml/2006/main" w="0">
-            <a:solidFill>
-              <a:srgbClr val="000000">
-                <a:alpha val="0"/>
-              </a:srgbClr>
-            </a:solidFill>
-            <a:prstDash val="solid"/>
-          </a:ln>
-        </p:spPr>
-        <p:txBody>
-          <a:bodyPr xmlns:a="http://schemas.openxmlformats.org/drawingml/2006/main" lIns="0" tIns="0" rIns="0" bIns="0" anchor="t"/>
-          <a:lstStyle xmlns:a="http://schemas.openxmlformats.org/drawingml/2006/main"/>
-          <a:p xmlns:a="http://schemas.openxmlformats.org/drawingml/2006/main">
-            <a:pPr algn="l">
-              <a:defRPr sz="1500" b="0">
-                <a:solidFill>
-                  <a:srgbClr val="51606F"/>
-                </a:solidFill>
-                <a:latin typeface="Arial"/>
-                <a:ea typeface="Arial"/>
-                <a:cs typeface="Arial"/>
-              </a:defRPr>
-            </a:pPr>
-            <a:r>
-              <a:rPr sz="1500" b="0">
-                <a:solidFill>
-                  <a:srgbClr val="51606F"/>
-                </a:solidFill>
-                <a:latin typeface="Arial"/>
-                <a:ea typeface="Arial"/>
-                <a:cs typeface="Arial"/>
-              </a:rPr>
-              <a:t>Cenários controlados com leitor de proximidade, tag e comunicador.</a:t>
+              <a:t>Diferencial: a leitura RFID não fica restrita à identificação; ela alimenta auditoria patrimonial, registro e resolução de inconsistências e histórico operacional.</a:t>
             </a:r>
           </a:p>
         </p:txBody>
@@ -16421,7 +17657,7 @@
     </p:spTree>
     <p:extLst>
       <p:ext uri="{BB962C8B-B14F-4D97-AF65-F5344CB8AC3E}">
-        <p14:creationId xmlns:p14="http://schemas.microsoft.com/office/powerpoint/2010/main" val="966990929"/>
+        <p14:creationId xmlns:p14="http://schemas.microsoft.com/office/powerpoint/2010/main" val="215812849"/>
       </p:ext>
     </p:extLst>
   </p:cSld>
@@ -16445,7 +17681,7 @@
           <p:cNvPr id="1" name="">
             <a:extLst xmlns:a="http://schemas.openxmlformats.org/drawingml/2006/main">
               <a:ext uri="{FF2B5EF4-FFF2-40B4-BE49-F238E27FC236}">
-                <a16:creationId xmlns:a16="http://schemas.microsoft.com/office/drawing/2014/main" id="{FA3C3B0D-64EB-4EA3-82A6-D6BD91702DA4}"/>
+                <a16:creationId xmlns:a16="http://schemas.microsoft.com/office/drawing/2014/main" id="{C6383CCF-ED7B-40AB-8A3C-0E0F03A561EC}"/>
               </a:ext>
             </a:extLst>
           </p:cNvPr>
@@ -16480,7 +17716,7 @@
           <p:cNvPr id="2" name="">
             <a:extLst xmlns:a="http://schemas.openxmlformats.org/drawingml/2006/main">
               <a:ext uri="{FF2B5EF4-FFF2-40B4-BE49-F238E27FC236}">
-                <a16:creationId xmlns:a16="http://schemas.microsoft.com/office/drawing/2014/main" id="{C70297D7-65EC-48B1-AEA1-4444C15B0504}"/>
+                <a16:creationId xmlns:a16="http://schemas.microsoft.com/office/drawing/2014/main" id="{4B0BAE56-7EDA-4B0B-9237-9B41A60A2C07}"/>
               </a:ext>
             </a:extLst>
           </p:cNvPr>
@@ -16515,7 +17751,7 @@
           <p:cNvPr id="3" name="">
             <a:extLst xmlns:a="http://schemas.openxmlformats.org/drawingml/2006/main">
               <a:ext uri="{FF2B5EF4-FFF2-40B4-BE49-F238E27FC236}">
-                <a16:creationId xmlns:a16="http://schemas.microsoft.com/office/drawing/2014/main" id="{67DF942F-70F9-4DE1-A404-2AB3BF46BE6D}"/>
+                <a16:creationId xmlns:a16="http://schemas.microsoft.com/office/drawing/2014/main" id="{93E15144-905A-4493-BFD4-B5EC5FFF87BC}"/>
               </a:ext>
             </a:extLst>
           </p:cNvPr>
@@ -16579,7 +17815,7 @@
           <p:cNvPr id="4" name="">
             <a:extLst xmlns:a="http://schemas.openxmlformats.org/drawingml/2006/main">
               <a:ext uri="{FF2B5EF4-FFF2-40B4-BE49-F238E27FC236}">
-                <a16:creationId xmlns:a16="http://schemas.microsoft.com/office/drawing/2014/main" id="{416DAF9F-E617-4E92-BB8E-7DD269F94650}"/>
+                <a16:creationId xmlns:a16="http://schemas.microsoft.com/office/drawing/2014/main" id="{DDE5EF5D-0AD4-4833-A68C-6A2E8FEB8134}"/>
               </a:ext>
             </a:extLst>
           </p:cNvPr>
@@ -16633,7 +17869,7 @@
                 <a:ea typeface="Arial"/>
                 <a:cs typeface="Arial"/>
               </a:rPr>
-              <a:t>Tecnologias utilizadas</a:t>
+              <a:t>Percurso metodológico</a:t>
             </a:r>
           </a:p>
         </p:txBody>
@@ -16643,7 +17879,7 @@
           <p:cNvPr id="5" name="">
             <a:extLst xmlns:a="http://schemas.openxmlformats.org/drawingml/2006/main">
               <a:ext uri="{FF2B5EF4-FFF2-40B4-BE49-F238E27FC236}">
-                <a16:creationId xmlns:a16="http://schemas.microsoft.com/office/drawing/2014/main" id="{C81712A3-307D-4647-80D4-3600CF585AA4}"/>
+                <a16:creationId xmlns:a16="http://schemas.microsoft.com/office/drawing/2014/main" id="{42D17101-F38D-451C-9DC1-5AECD6E74E34}"/>
               </a:ext>
             </a:extLst>
           </p:cNvPr>
@@ -16697,7 +17933,7 @@
                 <a:ea typeface="Arial"/>
                 <a:cs typeface="Arial"/>
               </a:rPr>
-              <a:t>O protótipo combina tela web, servidor, banco de dados local e leitor RFID de proximidade.</a:t>
+              <a:t>A pesquisa foi organizada para sair do problema patrimonial, construir o protótipo e verificar o fluxo implementado.</a:t>
             </a:r>
           </a:p>
         </p:txBody>
@@ -16707,54 +17943,85 @@
           <p:cNvPr id="6" name="">
             <a:extLst xmlns:a="http://schemas.openxmlformats.org/drawingml/2006/main">
               <a:ext uri="{FF2B5EF4-FFF2-40B4-BE49-F238E27FC236}">
-                <a16:creationId xmlns:a16="http://schemas.microsoft.com/office/drawing/2014/main" id="{12FAD037-38CC-47CC-80ED-A779C917B8D5}"/>
-              </a:ext>
-            </a:extLst>
-          </p:cNvPr>
-          <p:cNvSpPr>
-            <a:spLocks xmlns:a="http://schemas.openxmlformats.org/drawingml/2006/main" noGrp="1"/>
-          </p:cNvSpPr>
-          <p:nvPr/>
-        </p:nvSpPr>
-        <p:spPr>
-          <a:xfrm xmlns:a="http://schemas.openxmlformats.org/drawingml/2006/main">
-            <a:off x="800100" y="2400300"/>
-            <a:ext cx="133350" cy="133350"/>
+                <a16:creationId xmlns:a16="http://schemas.microsoft.com/office/drawing/2014/main" id="{A4190355-D40E-4538-AA88-507739286034}"/>
+              </a:ext>
+            </a:extLst>
+          </p:cNvPr>
+          <p:cNvSpPr>
+            <a:spLocks xmlns:a="http://schemas.openxmlformats.org/drawingml/2006/main" noGrp="1"/>
+          </p:cNvSpPr>
+          <p:nvPr/>
+        </p:nvSpPr>
+        <p:spPr>
+          <a:xfrm xmlns:a="http://schemas.openxmlformats.org/drawingml/2006/main">
+            <a:off x="876300" y="2609850"/>
+            <a:ext cx="2971800" cy="2743200"/>
+          </a:xfrm>
+          <a:prstGeom xmlns:a="http://schemas.openxmlformats.org/drawingml/2006/main" prst="rect">
+            <a:avLst/>
+          </a:prstGeom>
+          <a:solidFill xmlns:a="http://schemas.openxmlformats.org/drawingml/2006/main">
+            <a:srgbClr val="FFFFFF"/>
+          </a:solidFill>
+          <a:ln xmlns:a="http://schemas.openxmlformats.org/drawingml/2006/main" w="9525">
+            <a:solidFill>
+              <a:srgbClr val="D7DEE6"/>
+            </a:solidFill>
+            <a:prstDash val="solid"/>
+          </a:ln>
+        </p:spPr>
+      </p:sp>
+      <p:sp>
+        <p:nvSpPr>
+          <p:cNvPr id="7" name="">
+            <a:extLst xmlns:a="http://schemas.openxmlformats.org/drawingml/2006/main">
+              <a:ext uri="{FF2B5EF4-FFF2-40B4-BE49-F238E27FC236}">
+                <a16:creationId xmlns:a16="http://schemas.microsoft.com/office/drawing/2014/main" id="{65ED0AD5-9005-4A78-8C01-14576DF3799D}"/>
+              </a:ext>
+            </a:extLst>
+          </p:cNvPr>
+          <p:cNvSpPr>
+            <a:spLocks xmlns:a="http://schemas.openxmlformats.org/drawingml/2006/main" noGrp="1"/>
+          </p:cNvSpPr>
+          <p:nvPr/>
+        </p:nvSpPr>
+        <p:spPr>
+          <a:xfrm xmlns:a="http://schemas.openxmlformats.org/drawingml/2006/main">
+            <a:off x="1104900" y="3028950"/>
+            <a:ext cx="323850" cy="323850"/>
           </a:xfrm>
           <a:prstGeom xmlns:a="http://schemas.openxmlformats.org/drawingml/2006/main" prst="ellipse">
             <a:avLst/>
           </a:prstGeom>
           <a:solidFill xmlns:a="http://schemas.openxmlformats.org/drawingml/2006/main">
-            <a:srgbClr val="0E7A4F"/>
-          </a:solidFill>
-          <a:ln xmlns:a="http://schemas.openxmlformats.org/drawingml/2006/main" w="0">
-            <a:solidFill>
-              <a:srgbClr val="000000">
-                <a:alpha val="0"/>
-              </a:srgbClr>
-            </a:solidFill>
-            <a:prstDash val="solid"/>
-          </a:ln>
-        </p:spPr>
-      </p:sp>
-      <p:sp>
-        <p:nvSpPr>
-          <p:cNvPr id="7" name="">
-            <a:extLst xmlns:a="http://schemas.openxmlformats.org/drawingml/2006/main">
-              <a:ext uri="{FF2B5EF4-FFF2-40B4-BE49-F238E27FC236}">
-                <a16:creationId xmlns:a16="http://schemas.microsoft.com/office/drawing/2014/main" id="{691F5807-766D-4A72-8771-C3BEB52E05DE}"/>
-              </a:ext>
-            </a:extLst>
-          </p:cNvPr>
-          <p:cNvSpPr>
-            <a:spLocks xmlns:a="http://schemas.openxmlformats.org/drawingml/2006/main" noGrp="1"/>
-          </p:cNvSpPr>
-          <p:nvPr/>
-        </p:nvSpPr>
-        <p:spPr>
-          <a:xfrm xmlns:a="http://schemas.openxmlformats.org/drawingml/2006/main">
-            <a:off x="1066800" y="2324100"/>
-            <a:ext cx="4953000" cy="609600"/>
+            <a:srgbClr val="E7F4EE"/>
+          </a:solidFill>
+          <a:ln xmlns:a="http://schemas.openxmlformats.org/drawingml/2006/main" w="9525">
+            <a:solidFill>
+              <a:srgbClr val="0E7A4F"/>
+            </a:solidFill>
+            <a:prstDash val="solid"/>
+          </a:ln>
+        </p:spPr>
+      </p:sp>
+      <p:sp>
+        <p:nvSpPr>
+          <p:cNvPr id="8" name="">
+            <a:extLst xmlns:a="http://schemas.openxmlformats.org/drawingml/2006/main">
+              <a:ext uri="{FF2B5EF4-FFF2-40B4-BE49-F238E27FC236}">
+                <a16:creationId xmlns:a16="http://schemas.microsoft.com/office/drawing/2014/main" id="{42702620-CCAD-418D-BF87-6252804B5B6E}"/>
+              </a:ext>
+            </a:extLst>
+          </p:cNvPr>
+          <p:cNvSpPr>
+            <a:spLocks xmlns:a="http://schemas.openxmlformats.org/drawingml/2006/main" noGrp="1"/>
+          </p:cNvSpPr>
+          <p:nvPr/>
+        </p:nvSpPr>
+        <p:spPr>
+          <a:xfrm xmlns:a="http://schemas.openxmlformats.org/drawingml/2006/main">
+            <a:off x="1104900" y="3086100"/>
+            <a:ext cx="323850" cy="209550"/>
           </a:xfrm>
           <a:prstGeom xmlns:a="http://schemas.openxmlformats.org/drawingml/2006/main" prst="rect">
             <a:avLst/>
@@ -16774,13 +18041,13 @@
           </a:ln>
         </p:spPr>
         <p:txBody>
-          <a:bodyPr xmlns:a="http://schemas.openxmlformats.org/drawingml/2006/main" lIns="0" tIns="0" rIns="0" bIns="0" anchor="t"/>
+          <a:bodyPr xmlns:a="http://schemas.openxmlformats.org/drawingml/2006/main" lIns="0" tIns="0" rIns="0" bIns="0" anchor="ctr"/>
           <a:lstStyle xmlns:a="http://schemas.openxmlformats.org/drawingml/2006/main"/>
           <a:p xmlns:a="http://schemas.openxmlformats.org/drawingml/2006/main">
-            <a:pPr algn="l">
-              <a:defRPr sz="1725" b="0">
-                <a:solidFill>
-                  <a:srgbClr val="17202A"/>
+            <a:pPr algn="ctr">
+              <a:defRPr sz="1275" b="1">
+                <a:solidFill>
+                  <a:srgbClr val="075D3B"/>
                 </a:solidFill>
                 <a:latin typeface="Arial"/>
                 <a:ea typeface="Arial"/>
@@ -16788,72 +18055,37 @@
               </a:defRPr>
             </a:pPr>
             <a:r>
-              <a:rPr sz="1725" b="0">
-                <a:solidFill>
-                  <a:srgbClr val="17202A"/>
+              <a:rPr sz="1275" b="1">
+                <a:solidFill>
+                  <a:srgbClr val="075D3B"/>
                 </a:solidFill>
                 <a:latin typeface="Arial"/>
                 <a:ea typeface="Arial"/>
                 <a:cs typeface="Arial"/>
               </a:rPr>
-              <a:t>Interface web para cadastro, consulta e acompanhamento.</a:t>
+              <a:t>1</a:t>
             </a:r>
           </a:p>
         </p:txBody>
       </p:sp>
       <p:sp>
         <p:nvSpPr>
-          <p:cNvPr id="8" name="">
-            <a:extLst xmlns:a="http://schemas.openxmlformats.org/drawingml/2006/main">
-              <a:ext uri="{FF2B5EF4-FFF2-40B4-BE49-F238E27FC236}">
-                <a16:creationId xmlns:a16="http://schemas.microsoft.com/office/drawing/2014/main" id="{AD965034-E8C1-4C8F-BFD8-1DF0B0FE5C28}"/>
-              </a:ext>
-            </a:extLst>
-          </p:cNvPr>
-          <p:cNvSpPr>
-            <a:spLocks xmlns:a="http://schemas.openxmlformats.org/drawingml/2006/main" noGrp="1"/>
-          </p:cNvSpPr>
-          <p:nvPr/>
-        </p:nvSpPr>
-        <p:spPr>
-          <a:xfrm xmlns:a="http://schemas.openxmlformats.org/drawingml/2006/main">
-            <a:off x="800100" y="3276600"/>
-            <a:ext cx="133350" cy="133350"/>
-          </a:xfrm>
-          <a:prstGeom xmlns:a="http://schemas.openxmlformats.org/drawingml/2006/main" prst="ellipse">
-            <a:avLst/>
-          </a:prstGeom>
-          <a:solidFill xmlns:a="http://schemas.openxmlformats.org/drawingml/2006/main">
-            <a:srgbClr val="0E7A4F"/>
-          </a:solidFill>
-          <a:ln xmlns:a="http://schemas.openxmlformats.org/drawingml/2006/main" w="0">
-            <a:solidFill>
-              <a:srgbClr val="000000">
-                <a:alpha val="0"/>
-              </a:srgbClr>
-            </a:solidFill>
-            <a:prstDash val="solid"/>
-          </a:ln>
-        </p:spPr>
-      </p:sp>
-      <p:sp>
-        <p:nvSpPr>
           <p:cNvPr id="9" name="">
             <a:extLst xmlns:a="http://schemas.openxmlformats.org/drawingml/2006/main">
               <a:ext uri="{FF2B5EF4-FFF2-40B4-BE49-F238E27FC236}">
-                <a16:creationId xmlns:a16="http://schemas.microsoft.com/office/drawing/2014/main" id="{3885B9D5-564E-43A7-A1E9-065DC45734AB}"/>
-              </a:ext>
-            </a:extLst>
-          </p:cNvPr>
-          <p:cNvSpPr>
-            <a:spLocks xmlns:a="http://schemas.openxmlformats.org/drawingml/2006/main" noGrp="1"/>
-          </p:cNvSpPr>
-          <p:nvPr/>
-        </p:nvSpPr>
-        <p:spPr>
-          <a:xfrm xmlns:a="http://schemas.openxmlformats.org/drawingml/2006/main">
-            <a:off x="1066800" y="3200400"/>
-            <a:ext cx="4953000" cy="609600"/>
+                <a16:creationId xmlns:a16="http://schemas.microsoft.com/office/drawing/2014/main" id="{D3AE0321-9845-487C-BD26-A209CCD5C933}"/>
+              </a:ext>
+            </a:extLst>
+          </p:cNvPr>
+          <p:cNvSpPr>
+            <a:spLocks xmlns:a="http://schemas.openxmlformats.org/drawingml/2006/main" noGrp="1"/>
+          </p:cNvSpPr>
+          <p:nvPr/>
+        </p:nvSpPr>
+        <p:spPr>
+          <a:xfrm xmlns:a="http://schemas.openxmlformats.org/drawingml/2006/main">
+            <a:off x="1562100" y="2971800"/>
+            <a:ext cx="1885950" cy="514350"/>
           </a:xfrm>
           <a:prstGeom xmlns:a="http://schemas.openxmlformats.org/drawingml/2006/main" prst="rect">
             <a:avLst/>
@@ -16873,11 +18105,11 @@
           </a:ln>
         </p:spPr>
         <p:txBody>
-          <a:bodyPr xmlns:a="http://schemas.openxmlformats.org/drawingml/2006/main" lIns="0" tIns="0" rIns="0" bIns="0" anchor="t"/>
+          <a:bodyPr xmlns:a="http://schemas.openxmlformats.org/drawingml/2006/main" lIns="0" tIns="0" rIns="0" bIns="0" anchor="ctr"/>
           <a:lstStyle xmlns:a="http://schemas.openxmlformats.org/drawingml/2006/main"/>
           <a:p xmlns:a="http://schemas.openxmlformats.org/drawingml/2006/main">
             <a:pPr algn="l">
-              <a:defRPr sz="1725" b="0">
+              <a:defRPr sz="1650" b="1">
                 <a:solidFill>
                   <a:srgbClr val="17202A"/>
                 </a:solidFill>
@@ -16887,7 +18119,7 @@
               </a:defRPr>
             </a:pPr>
             <a:r>
-              <a:rPr sz="1725" b="0">
+              <a:rPr sz="1650" b="1">
                 <a:solidFill>
                   <a:srgbClr val="17202A"/>
                 </a:solidFill>
@@ -16895,7 +18127,7 @@
                 <a:ea typeface="Arial"/>
                 <a:cs typeface="Arial"/>
               </a:rPr>
-              <a:t>Servidor para receber leituras, aplicar regras e registrar resultados.</a:t>
+              <a:t>Entender o contexto</a:t>
             </a:r>
           </a:p>
         </p:txBody>
@@ -16905,54 +18137,19 @@
           <p:cNvPr id="10" name="">
             <a:extLst xmlns:a="http://schemas.openxmlformats.org/drawingml/2006/main">
               <a:ext uri="{FF2B5EF4-FFF2-40B4-BE49-F238E27FC236}">
-                <a16:creationId xmlns:a16="http://schemas.microsoft.com/office/drawing/2014/main" id="{058F28D6-D2EA-48B9-9E4E-9835C2181C58}"/>
-              </a:ext>
-            </a:extLst>
-          </p:cNvPr>
-          <p:cNvSpPr>
-            <a:spLocks xmlns:a="http://schemas.openxmlformats.org/drawingml/2006/main" noGrp="1"/>
-          </p:cNvSpPr>
-          <p:nvPr/>
-        </p:nvSpPr>
-        <p:spPr>
-          <a:xfrm xmlns:a="http://schemas.openxmlformats.org/drawingml/2006/main">
-            <a:off x="800100" y="4152900"/>
-            <a:ext cx="133350" cy="133350"/>
-          </a:xfrm>
-          <a:prstGeom xmlns:a="http://schemas.openxmlformats.org/drawingml/2006/main" prst="ellipse">
-            <a:avLst/>
-          </a:prstGeom>
-          <a:solidFill xmlns:a="http://schemas.openxmlformats.org/drawingml/2006/main">
-            <a:srgbClr val="0E7A4F"/>
-          </a:solidFill>
-          <a:ln xmlns:a="http://schemas.openxmlformats.org/drawingml/2006/main" w="0">
-            <a:solidFill>
-              <a:srgbClr val="000000">
-                <a:alpha val="0"/>
-              </a:srgbClr>
-            </a:solidFill>
-            <a:prstDash val="solid"/>
-          </a:ln>
-        </p:spPr>
-      </p:sp>
-      <p:sp>
-        <p:nvSpPr>
-          <p:cNvPr id="11" name="">
-            <a:extLst xmlns:a="http://schemas.openxmlformats.org/drawingml/2006/main">
-              <a:ext uri="{FF2B5EF4-FFF2-40B4-BE49-F238E27FC236}">
-                <a16:creationId xmlns:a16="http://schemas.microsoft.com/office/drawing/2014/main" id="{AAAB19B5-0DBB-4A28-B2D4-3DC03EC5033E}"/>
-              </a:ext>
-            </a:extLst>
-          </p:cNvPr>
-          <p:cNvSpPr>
-            <a:spLocks xmlns:a="http://schemas.openxmlformats.org/drawingml/2006/main" noGrp="1"/>
-          </p:cNvSpPr>
-          <p:nvPr/>
-        </p:nvSpPr>
-        <p:spPr>
-          <a:xfrm xmlns:a="http://schemas.openxmlformats.org/drawingml/2006/main">
-            <a:off x="1066800" y="4076700"/>
-            <a:ext cx="4953000" cy="609600"/>
+                <a16:creationId xmlns:a16="http://schemas.microsoft.com/office/drawing/2014/main" id="{D4321945-115F-4092-A849-364DFED229CE}"/>
+              </a:ext>
+            </a:extLst>
+          </p:cNvPr>
+          <p:cNvSpPr>
+            <a:spLocks xmlns:a="http://schemas.openxmlformats.org/drawingml/2006/main" noGrp="1"/>
+          </p:cNvSpPr>
+          <p:nvPr/>
+        </p:nvSpPr>
+        <p:spPr>
+          <a:xfrm xmlns:a="http://schemas.openxmlformats.org/drawingml/2006/main">
+            <a:off x="1104900" y="3810000"/>
+            <a:ext cx="2381250" cy="1047750"/>
           </a:xfrm>
           <a:prstGeom xmlns:a="http://schemas.openxmlformats.org/drawingml/2006/main" prst="rect">
             <a:avLst/>
@@ -16976,9 +18173,9 @@
           <a:lstStyle xmlns:a="http://schemas.openxmlformats.org/drawingml/2006/main"/>
           <a:p xmlns:a="http://schemas.openxmlformats.org/drawingml/2006/main">
             <a:pPr algn="l">
-              <a:defRPr sz="1725" b="0">
-                <a:solidFill>
-                  <a:srgbClr val="17202A"/>
+              <a:defRPr sz="1500" b="0">
+                <a:solidFill>
+                  <a:srgbClr val="51606F"/>
                 </a:solidFill>
                 <a:latin typeface="Arial"/>
                 <a:ea typeface="Arial"/>
@@ -16986,49 +18183,80 @@
               </a:defRPr>
             </a:pPr>
             <a:r>
-              <a:rPr sz="1725" b="0">
-                <a:solidFill>
-                  <a:srgbClr val="17202A"/>
+              <a:rPr sz="1500" b="0">
+                <a:solidFill>
+                  <a:srgbClr val="51606F"/>
                 </a:solidFill>
                 <a:latin typeface="Arial"/>
                 <a:ea typeface="Arial"/>
                 <a:cs typeface="Arial"/>
               </a:rPr>
-              <a:t>Banco local para armazenar bens, locais, leituras, auditorias e inconsistências.</a:t>
+              <a:t>Revisão sobre controle patrimonial, RFID, integração e trabalhos relacionados.</a:t>
             </a:r>
           </a:p>
         </p:txBody>
       </p:sp>
       <p:sp>
         <p:nvSpPr>
+          <p:cNvPr id="11" name="">
+            <a:extLst xmlns:a="http://schemas.openxmlformats.org/drawingml/2006/main">
+              <a:ext uri="{FF2B5EF4-FFF2-40B4-BE49-F238E27FC236}">
+                <a16:creationId xmlns:a16="http://schemas.microsoft.com/office/drawing/2014/main" id="{BEE9AEBF-1DC8-4B90-9D01-4A27BC56FEAD}"/>
+              </a:ext>
+            </a:extLst>
+          </p:cNvPr>
+          <p:cNvSpPr>
+            <a:spLocks xmlns:a="http://schemas.openxmlformats.org/drawingml/2006/main" noGrp="1"/>
+          </p:cNvSpPr>
+          <p:nvPr/>
+        </p:nvSpPr>
+        <p:spPr>
+          <a:xfrm xmlns:a="http://schemas.openxmlformats.org/drawingml/2006/main">
+            <a:off x="4438650" y="2609850"/>
+            <a:ext cx="2971800" cy="2743200"/>
+          </a:xfrm>
+          <a:prstGeom xmlns:a="http://schemas.openxmlformats.org/drawingml/2006/main" prst="rect">
+            <a:avLst/>
+          </a:prstGeom>
+          <a:solidFill xmlns:a="http://schemas.openxmlformats.org/drawingml/2006/main">
+            <a:srgbClr val="FFFFFF"/>
+          </a:solidFill>
+          <a:ln xmlns:a="http://schemas.openxmlformats.org/drawingml/2006/main" w="9525">
+            <a:solidFill>
+              <a:srgbClr val="D7DEE6"/>
+            </a:solidFill>
+            <a:prstDash val="solid"/>
+          </a:ln>
+        </p:spPr>
+      </p:sp>
+      <p:sp>
+        <p:nvSpPr>
           <p:cNvPr id="12" name="">
             <a:extLst xmlns:a="http://schemas.openxmlformats.org/drawingml/2006/main">
               <a:ext uri="{FF2B5EF4-FFF2-40B4-BE49-F238E27FC236}">
-                <a16:creationId xmlns:a16="http://schemas.microsoft.com/office/drawing/2014/main" id="{8E787152-0938-4B8A-84C5-087E85769217}"/>
-              </a:ext>
-            </a:extLst>
-          </p:cNvPr>
-          <p:cNvSpPr>
-            <a:spLocks xmlns:a="http://schemas.openxmlformats.org/drawingml/2006/main" noGrp="1"/>
-          </p:cNvSpPr>
-          <p:nvPr/>
-        </p:nvSpPr>
-        <p:spPr>
-          <a:xfrm xmlns:a="http://schemas.openxmlformats.org/drawingml/2006/main">
-            <a:off x="800100" y="5029200"/>
-            <a:ext cx="133350" cy="133350"/>
+                <a16:creationId xmlns:a16="http://schemas.microsoft.com/office/drawing/2014/main" id="{72258E04-752B-431E-93A0-A4F3C6EBE5EE}"/>
+              </a:ext>
+            </a:extLst>
+          </p:cNvPr>
+          <p:cNvSpPr>
+            <a:spLocks xmlns:a="http://schemas.openxmlformats.org/drawingml/2006/main" noGrp="1"/>
+          </p:cNvSpPr>
+          <p:nvPr/>
+        </p:nvSpPr>
+        <p:spPr>
+          <a:xfrm xmlns:a="http://schemas.openxmlformats.org/drawingml/2006/main">
+            <a:off x="4667250" y="3028950"/>
+            <a:ext cx="323850" cy="323850"/>
           </a:xfrm>
           <a:prstGeom xmlns:a="http://schemas.openxmlformats.org/drawingml/2006/main" prst="ellipse">
             <a:avLst/>
           </a:prstGeom>
           <a:solidFill xmlns:a="http://schemas.openxmlformats.org/drawingml/2006/main">
-            <a:srgbClr val="0E7A4F"/>
-          </a:solidFill>
-          <a:ln xmlns:a="http://schemas.openxmlformats.org/drawingml/2006/main" w="0">
-            <a:solidFill>
-              <a:srgbClr val="000000">
-                <a:alpha val="0"/>
-              </a:srgbClr>
+            <a:srgbClr val="E7F4EE"/>
+          </a:solidFill>
+          <a:ln xmlns:a="http://schemas.openxmlformats.org/drawingml/2006/main" w="9525">
+            <a:solidFill>
+              <a:srgbClr val="0E7A4F"/>
             </a:solidFill>
             <a:prstDash val="solid"/>
           </a:ln>
@@ -17039,19 +18267,19 @@
           <p:cNvPr id="13" name="">
             <a:extLst xmlns:a="http://schemas.openxmlformats.org/drawingml/2006/main">
               <a:ext uri="{FF2B5EF4-FFF2-40B4-BE49-F238E27FC236}">
-                <a16:creationId xmlns:a16="http://schemas.microsoft.com/office/drawing/2014/main" id="{475C3161-74A2-4208-9F96-E0CB4261B93B}"/>
-              </a:ext>
-            </a:extLst>
-          </p:cNvPr>
-          <p:cNvSpPr>
-            <a:spLocks xmlns:a="http://schemas.openxmlformats.org/drawingml/2006/main" noGrp="1"/>
-          </p:cNvSpPr>
-          <p:nvPr/>
-        </p:nvSpPr>
-        <p:spPr>
-          <a:xfrm xmlns:a="http://schemas.openxmlformats.org/drawingml/2006/main">
-            <a:off x="1066800" y="4953000"/>
-            <a:ext cx="4953000" cy="609600"/>
+                <a16:creationId xmlns:a16="http://schemas.microsoft.com/office/drawing/2014/main" id="{D171ABF2-75CD-4B40-B0C8-CD5FCC4F2B9D}"/>
+              </a:ext>
+            </a:extLst>
+          </p:cNvPr>
+          <p:cNvSpPr>
+            <a:spLocks xmlns:a="http://schemas.openxmlformats.org/drawingml/2006/main" noGrp="1"/>
+          </p:cNvSpPr>
+          <p:nvPr/>
+        </p:nvSpPr>
+        <p:spPr>
+          <a:xfrm xmlns:a="http://schemas.openxmlformats.org/drawingml/2006/main">
+            <a:off x="4667250" y="3086100"/>
+            <a:ext cx="323850" cy="209550"/>
           </a:xfrm>
           <a:prstGeom xmlns:a="http://schemas.openxmlformats.org/drawingml/2006/main" prst="rect">
             <a:avLst/>
@@ -17071,13 +18299,13 @@
           </a:ln>
         </p:spPr>
         <p:txBody>
-          <a:bodyPr xmlns:a="http://schemas.openxmlformats.org/drawingml/2006/main" lIns="0" tIns="0" rIns="0" bIns="0" anchor="t"/>
+          <a:bodyPr xmlns:a="http://schemas.openxmlformats.org/drawingml/2006/main" lIns="0" tIns="0" rIns="0" bIns="0" anchor="ctr"/>
           <a:lstStyle xmlns:a="http://schemas.openxmlformats.org/drawingml/2006/main"/>
           <a:p xmlns:a="http://schemas.openxmlformats.org/drawingml/2006/main">
-            <a:pPr algn="l">
-              <a:defRPr sz="1725" b="0">
-                <a:solidFill>
-                  <a:srgbClr val="17202A"/>
+            <a:pPr algn="ctr">
+              <a:defRPr sz="1275" b="1">
+                <a:solidFill>
+                  <a:srgbClr val="075D3B"/>
                 </a:solidFill>
                 <a:latin typeface="Arial"/>
                 <a:ea typeface="Arial"/>
@@ -17085,15 +18313,15 @@
               </a:defRPr>
             </a:pPr>
             <a:r>
-              <a:rPr sz="1725" b="0">
-                <a:solidFill>
-                  <a:srgbClr val="17202A"/>
+              <a:rPr sz="1275" b="1">
+                <a:solidFill>
+                  <a:srgbClr val="075D3B"/>
                 </a:solidFill>
                 <a:latin typeface="Arial"/>
                 <a:ea typeface="Arial"/>
                 <a:cs typeface="Arial"/>
               </a:rPr>
-              <a:t>Leitor RFID, tag física e comunicador para envio da leitura.</a:t>
+              <a:t>2</a:t>
             </a:r>
           </a:p>
         </p:txBody>
@@ -17103,52 +18331,19 @@
           <p:cNvPr id="14" name="">
             <a:extLst xmlns:a="http://schemas.openxmlformats.org/drawingml/2006/main">
               <a:ext uri="{FF2B5EF4-FFF2-40B4-BE49-F238E27FC236}">
-                <a16:creationId xmlns:a16="http://schemas.microsoft.com/office/drawing/2014/main" id="{DC4051ED-8A3B-47A4-B9E4-3680029BF471}"/>
-              </a:ext>
-            </a:extLst>
-          </p:cNvPr>
-          <p:cNvSpPr>
-            <a:spLocks xmlns:a="http://schemas.openxmlformats.org/drawingml/2006/main" noGrp="1"/>
-          </p:cNvSpPr>
-          <p:nvPr/>
-        </p:nvSpPr>
-        <p:spPr>
-          <a:xfrm xmlns:a="http://schemas.openxmlformats.org/drawingml/2006/main">
-            <a:off x="6858000" y="2381250"/>
-            <a:ext cx="3886200" cy="781050"/>
-          </a:xfrm>
-          <a:prstGeom xmlns:a="http://schemas.openxmlformats.org/drawingml/2006/main" prst="rect">
-            <a:avLst/>
-          </a:prstGeom>
-          <a:solidFill xmlns:a="http://schemas.openxmlformats.org/drawingml/2006/main">
-            <a:srgbClr val="FFFFFF"/>
-          </a:solidFill>
-          <a:ln xmlns:a="http://schemas.openxmlformats.org/drawingml/2006/main" w="9525">
-            <a:solidFill>
-              <a:srgbClr val="D7DEE6"/>
-            </a:solidFill>
-            <a:prstDash val="solid"/>
-          </a:ln>
-        </p:spPr>
-      </p:sp>
-      <p:sp>
-        <p:nvSpPr>
-          <p:cNvPr id="15" name="">
-            <a:extLst xmlns:a="http://schemas.openxmlformats.org/drawingml/2006/main">
-              <a:ext uri="{FF2B5EF4-FFF2-40B4-BE49-F238E27FC236}">
-                <a16:creationId xmlns:a16="http://schemas.microsoft.com/office/drawing/2014/main" id="{8D56A4B4-0D44-480E-BCB7-83B6A9F90E3E}"/>
-              </a:ext>
-            </a:extLst>
-          </p:cNvPr>
-          <p:cNvSpPr>
-            <a:spLocks xmlns:a="http://schemas.openxmlformats.org/drawingml/2006/main" noGrp="1"/>
-          </p:cNvSpPr>
-          <p:nvPr/>
-        </p:nvSpPr>
-        <p:spPr>
-          <a:xfrm xmlns:a="http://schemas.openxmlformats.org/drawingml/2006/main">
-            <a:off x="7105650" y="2476500"/>
-            <a:ext cx="1619250" cy="323850"/>
+                <a16:creationId xmlns:a16="http://schemas.microsoft.com/office/drawing/2014/main" id="{16D43894-EEC2-421C-AB08-0D7EF3133388}"/>
+              </a:ext>
+            </a:extLst>
+          </p:cNvPr>
+          <p:cNvSpPr>
+            <a:spLocks xmlns:a="http://schemas.openxmlformats.org/drawingml/2006/main" noGrp="1"/>
+          </p:cNvSpPr>
+          <p:nvPr/>
+        </p:nvSpPr>
+        <p:spPr>
+          <a:xfrm xmlns:a="http://schemas.openxmlformats.org/drawingml/2006/main">
+            <a:off x="5124450" y="2971800"/>
+            <a:ext cx="1885950" cy="514350"/>
           </a:xfrm>
           <a:prstGeom xmlns:a="http://schemas.openxmlformats.org/drawingml/2006/main" prst="rect">
             <a:avLst/>
@@ -17168,13 +18363,13 @@
           </a:ln>
         </p:spPr>
         <p:txBody>
-          <a:bodyPr xmlns:a="http://schemas.openxmlformats.org/drawingml/2006/main" lIns="0" tIns="0" rIns="0" bIns="0" anchor="t"/>
+          <a:bodyPr xmlns:a="http://schemas.openxmlformats.org/drawingml/2006/main" lIns="0" tIns="0" rIns="0" bIns="0" anchor="ctr"/>
           <a:lstStyle xmlns:a="http://schemas.openxmlformats.org/drawingml/2006/main"/>
           <a:p xmlns:a="http://schemas.openxmlformats.org/drawingml/2006/main">
             <a:pPr algn="l">
-              <a:defRPr sz="2250" b="1">
-                <a:solidFill>
-                  <a:srgbClr val="075D3B"/>
+              <a:defRPr sz="1650" b="1">
+                <a:solidFill>
+                  <a:srgbClr val="17202A"/>
                 </a:solidFill>
                 <a:latin typeface="Arial"/>
                 <a:ea typeface="Arial"/>
@@ -17182,37 +18377,37 @@
               </a:defRPr>
             </a:pPr>
             <a:r>
-              <a:rPr sz="2250" b="1">
-                <a:solidFill>
-                  <a:srgbClr val="075D3B"/>
+              <a:rPr sz="1650" b="1">
+                <a:solidFill>
+                  <a:srgbClr val="17202A"/>
                 </a:solidFill>
                 <a:latin typeface="Arial"/>
                 <a:ea typeface="Arial"/>
                 <a:cs typeface="Arial"/>
               </a:rPr>
-              <a:t>Interface</a:t>
+              <a:t>Desenvolver a solução</a:t>
             </a:r>
           </a:p>
         </p:txBody>
       </p:sp>
       <p:sp>
         <p:nvSpPr>
-          <p:cNvPr id="16" name="">
-            <a:extLst xmlns:a="http://schemas.openxmlformats.org/drawingml/2006/main">
-              <a:ext uri="{FF2B5EF4-FFF2-40B4-BE49-F238E27FC236}">
-                <a16:creationId xmlns:a16="http://schemas.microsoft.com/office/drawing/2014/main" id="{19DF3BE4-CFC7-4F60-BB26-D1A7BA60C0EE}"/>
-              </a:ext>
-            </a:extLst>
-          </p:cNvPr>
-          <p:cNvSpPr>
-            <a:spLocks xmlns:a="http://schemas.openxmlformats.org/drawingml/2006/main" noGrp="1"/>
-          </p:cNvSpPr>
-          <p:nvPr/>
-        </p:nvSpPr>
-        <p:spPr>
-          <a:xfrm xmlns:a="http://schemas.openxmlformats.org/drawingml/2006/main">
-            <a:off x="7105650" y="2838450"/>
-            <a:ext cx="3238500" cy="228600"/>
+          <p:cNvPr id="15" name="">
+            <a:extLst xmlns:a="http://schemas.openxmlformats.org/drawingml/2006/main">
+              <a:ext uri="{FF2B5EF4-FFF2-40B4-BE49-F238E27FC236}">
+                <a16:creationId xmlns:a16="http://schemas.microsoft.com/office/drawing/2014/main" id="{26790DE9-4D0D-4F5D-A9A8-FC801AB6A13A}"/>
+              </a:ext>
+            </a:extLst>
+          </p:cNvPr>
+          <p:cNvSpPr>
+            <a:spLocks xmlns:a="http://schemas.openxmlformats.org/drawingml/2006/main" noGrp="1"/>
+          </p:cNvSpPr>
+          <p:nvPr/>
+        </p:nvSpPr>
+        <p:spPr>
+          <a:xfrm xmlns:a="http://schemas.openxmlformats.org/drawingml/2006/main">
+            <a:off x="4667250" y="3810000"/>
+            <a:ext cx="2381250" cy="1047750"/>
           </a:xfrm>
           <a:prstGeom xmlns:a="http://schemas.openxmlformats.org/drawingml/2006/main" prst="rect">
             <a:avLst/>
@@ -17236,7 +18431,7 @@
           <a:lstStyle xmlns:a="http://schemas.openxmlformats.org/drawingml/2006/main"/>
           <a:p xmlns:a="http://schemas.openxmlformats.org/drawingml/2006/main">
             <a:pPr algn="l">
-              <a:defRPr sz="1425" b="0">
+              <a:defRPr sz="1500" b="0">
                 <a:solidFill>
                   <a:srgbClr val="51606F"/>
                 </a:solidFill>
@@ -17246,7 +18441,7 @@
               </a:defRPr>
             </a:pPr>
             <a:r>
-              <a:rPr sz="1425" b="0">
+              <a:rPr sz="1500" b="0">
                 <a:solidFill>
                   <a:srgbClr val="51606F"/>
                 </a:solidFill>
@@ -17254,39 +18449,72 @@
                 <a:ea typeface="Arial"/>
                 <a:cs typeface="Arial"/>
               </a:rPr>
-              <a:t>operação do usuário</a:t>
+              <a:t>Modelagem, arquitetura, telas, API e regras de processamento das leituras.</a:t>
             </a:r>
           </a:p>
         </p:txBody>
       </p:sp>
       <p:sp>
         <p:nvSpPr>
+          <p:cNvPr id="16" name="">
+            <a:extLst xmlns:a="http://schemas.openxmlformats.org/drawingml/2006/main">
+              <a:ext uri="{FF2B5EF4-FFF2-40B4-BE49-F238E27FC236}">
+                <a16:creationId xmlns:a16="http://schemas.microsoft.com/office/drawing/2014/main" id="{213A7C17-3C02-41E0-8379-4889608DF2C7}"/>
+              </a:ext>
+            </a:extLst>
+          </p:cNvPr>
+          <p:cNvSpPr>
+            <a:spLocks xmlns:a="http://schemas.openxmlformats.org/drawingml/2006/main" noGrp="1"/>
+          </p:cNvSpPr>
+          <p:nvPr/>
+        </p:nvSpPr>
+        <p:spPr>
+          <a:xfrm xmlns:a="http://schemas.openxmlformats.org/drawingml/2006/main">
+            <a:off x="8001000" y="2609850"/>
+            <a:ext cx="2971800" cy="2743200"/>
+          </a:xfrm>
+          <a:prstGeom xmlns:a="http://schemas.openxmlformats.org/drawingml/2006/main" prst="rect">
+            <a:avLst/>
+          </a:prstGeom>
+          <a:solidFill xmlns:a="http://schemas.openxmlformats.org/drawingml/2006/main">
+            <a:srgbClr val="FFFFFF"/>
+          </a:solidFill>
+          <a:ln xmlns:a="http://schemas.openxmlformats.org/drawingml/2006/main" w="9525">
+            <a:solidFill>
+              <a:srgbClr val="D7DEE6"/>
+            </a:solidFill>
+            <a:prstDash val="solid"/>
+          </a:ln>
+        </p:spPr>
+      </p:sp>
+      <p:sp>
+        <p:nvSpPr>
           <p:cNvPr id="17" name="">
             <a:extLst xmlns:a="http://schemas.openxmlformats.org/drawingml/2006/main">
               <a:ext uri="{FF2B5EF4-FFF2-40B4-BE49-F238E27FC236}">
-                <a16:creationId xmlns:a16="http://schemas.microsoft.com/office/drawing/2014/main" id="{6A82036A-3B94-46A9-B2DE-0F0646A68EE0}"/>
-              </a:ext>
-            </a:extLst>
-          </p:cNvPr>
-          <p:cNvSpPr>
-            <a:spLocks xmlns:a="http://schemas.openxmlformats.org/drawingml/2006/main" noGrp="1"/>
-          </p:cNvSpPr>
-          <p:nvPr/>
-        </p:nvSpPr>
-        <p:spPr>
-          <a:xfrm xmlns:a="http://schemas.openxmlformats.org/drawingml/2006/main">
-            <a:off x="6858000" y="3448050"/>
-            <a:ext cx="3886200" cy="781050"/>
-          </a:xfrm>
-          <a:prstGeom xmlns:a="http://schemas.openxmlformats.org/drawingml/2006/main" prst="rect">
-            <a:avLst/>
-          </a:prstGeom>
-          <a:solidFill xmlns:a="http://schemas.openxmlformats.org/drawingml/2006/main">
-            <a:srgbClr val="FFF4CF"/>
+                <a16:creationId xmlns:a16="http://schemas.microsoft.com/office/drawing/2014/main" id="{7343C685-024E-44ED-8D15-04EB2FB12F48}"/>
+              </a:ext>
+            </a:extLst>
+          </p:cNvPr>
+          <p:cNvSpPr>
+            <a:spLocks xmlns:a="http://schemas.openxmlformats.org/drawingml/2006/main" noGrp="1"/>
+          </p:cNvSpPr>
+          <p:nvPr/>
+        </p:nvSpPr>
+        <p:spPr>
+          <a:xfrm xmlns:a="http://schemas.openxmlformats.org/drawingml/2006/main">
+            <a:off x="8229600" y="3028950"/>
+            <a:ext cx="323850" cy="323850"/>
+          </a:xfrm>
+          <a:prstGeom xmlns:a="http://schemas.openxmlformats.org/drawingml/2006/main" prst="ellipse">
+            <a:avLst/>
+          </a:prstGeom>
+          <a:solidFill xmlns:a="http://schemas.openxmlformats.org/drawingml/2006/main">
+            <a:srgbClr val="E7F4EE"/>
           </a:solidFill>
           <a:ln xmlns:a="http://schemas.openxmlformats.org/drawingml/2006/main" w="9525">
             <a:solidFill>
-              <a:srgbClr val="D7DEE6"/>
+              <a:srgbClr val="0E7A4F"/>
             </a:solidFill>
             <a:prstDash val="solid"/>
           </a:ln>
@@ -17297,19 +18525,19 @@
           <p:cNvPr id="18" name="">
             <a:extLst xmlns:a="http://schemas.openxmlformats.org/drawingml/2006/main">
               <a:ext uri="{FF2B5EF4-FFF2-40B4-BE49-F238E27FC236}">
-                <a16:creationId xmlns:a16="http://schemas.microsoft.com/office/drawing/2014/main" id="{7C7316F5-4581-442F-9D2B-BACF6AD2B5D6}"/>
-              </a:ext>
-            </a:extLst>
-          </p:cNvPr>
-          <p:cNvSpPr>
-            <a:spLocks xmlns:a="http://schemas.openxmlformats.org/drawingml/2006/main" noGrp="1"/>
-          </p:cNvSpPr>
-          <p:nvPr/>
-        </p:nvSpPr>
-        <p:spPr>
-          <a:xfrm xmlns:a="http://schemas.openxmlformats.org/drawingml/2006/main">
-            <a:off x="7105650" y="3543300"/>
-            <a:ext cx="1619250" cy="323850"/>
+                <a16:creationId xmlns:a16="http://schemas.microsoft.com/office/drawing/2014/main" id="{13622296-2D4C-4A8C-BE3F-AD54D3A7B0B5}"/>
+              </a:ext>
+            </a:extLst>
+          </p:cNvPr>
+          <p:cNvSpPr>
+            <a:spLocks xmlns:a="http://schemas.openxmlformats.org/drawingml/2006/main" noGrp="1"/>
+          </p:cNvSpPr>
+          <p:nvPr/>
+        </p:nvSpPr>
+        <p:spPr>
+          <a:xfrm xmlns:a="http://schemas.openxmlformats.org/drawingml/2006/main">
+            <a:off x="8229600" y="3086100"/>
+            <a:ext cx="323850" cy="209550"/>
           </a:xfrm>
           <a:prstGeom xmlns:a="http://schemas.openxmlformats.org/drawingml/2006/main" prst="rect">
             <a:avLst/>
@@ -17329,11 +18557,11 @@
           </a:ln>
         </p:spPr>
         <p:txBody>
-          <a:bodyPr xmlns:a="http://schemas.openxmlformats.org/drawingml/2006/main" lIns="0" tIns="0" rIns="0" bIns="0" anchor="t"/>
+          <a:bodyPr xmlns:a="http://schemas.openxmlformats.org/drawingml/2006/main" lIns="0" tIns="0" rIns="0" bIns="0" anchor="ctr"/>
           <a:lstStyle xmlns:a="http://schemas.openxmlformats.org/drawingml/2006/main"/>
           <a:p xmlns:a="http://schemas.openxmlformats.org/drawingml/2006/main">
-            <a:pPr algn="l">
-              <a:defRPr sz="2250" b="1">
+            <a:pPr algn="ctr">
+              <a:defRPr sz="1275" b="1">
                 <a:solidFill>
                   <a:srgbClr val="075D3B"/>
                 </a:solidFill>
@@ -17343,7 +18571,7 @@
               </a:defRPr>
             </a:pPr>
             <a:r>
-              <a:rPr sz="2250" b="1">
+              <a:rPr sz="1275" b="1">
                 <a:solidFill>
                   <a:srgbClr val="075D3B"/>
                 </a:solidFill>
@@ -17351,7 +18579,7 @@
                 <a:ea typeface="Arial"/>
                 <a:cs typeface="Arial"/>
               </a:rPr>
-              <a:t>Servidor</a:t>
+              <a:t>3</a:t>
             </a:r>
           </a:p>
         </p:txBody>
@@ -17361,19 +18589,19 @@
           <p:cNvPr id="19" name="">
             <a:extLst xmlns:a="http://schemas.openxmlformats.org/drawingml/2006/main">
               <a:ext uri="{FF2B5EF4-FFF2-40B4-BE49-F238E27FC236}">
-                <a16:creationId xmlns:a16="http://schemas.microsoft.com/office/drawing/2014/main" id="{0FE98B78-0538-46FF-AE36-01249261804E}"/>
-              </a:ext>
-            </a:extLst>
-          </p:cNvPr>
-          <p:cNvSpPr>
-            <a:spLocks xmlns:a="http://schemas.openxmlformats.org/drawingml/2006/main" noGrp="1"/>
-          </p:cNvSpPr>
-          <p:nvPr/>
-        </p:nvSpPr>
-        <p:spPr>
-          <a:xfrm xmlns:a="http://schemas.openxmlformats.org/drawingml/2006/main">
-            <a:off x="7105650" y="3905250"/>
-            <a:ext cx="3238500" cy="228600"/>
+                <a16:creationId xmlns:a16="http://schemas.microsoft.com/office/drawing/2014/main" id="{688BB5A8-B92B-40D3-B88E-B3AC09CF28A5}"/>
+              </a:ext>
+            </a:extLst>
+          </p:cNvPr>
+          <p:cNvSpPr>
+            <a:spLocks xmlns:a="http://schemas.openxmlformats.org/drawingml/2006/main" noGrp="1"/>
+          </p:cNvSpPr>
+          <p:nvPr/>
+        </p:nvSpPr>
+        <p:spPr>
+          <a:xfrm xmlns:a="http://schemas.openxmlformats.org/drawingml/2006/main">
+            <a:off x="8686800" y="2971800"/>
+            <a:ext cx="1885950" cy="514350"/>
           </a:xfrm>
           <a:prstGeom xmlns:a="http://schemas.openxmlformats.org/drawingml/2006/main" prst="rect">
             <a:avLst/>
@@ -17393,13 +18621,13 @@
           </a:ln>
         </p:spPr>
         <p:txBody>
-          <a:bodyPr xmlns:a="http://schemas.openxmlformats.org/drawingml/2006/main" lIns="0" tIns="0" rIns="0" bIns="0" anchor="t"/>
+          <a:bodyPr xmlns:a="http://schemas.openxmlformats.org/drawingml/2006/main" lIns="0" tIns="0" rIns="0" bIns="0" anchor="ctr"/>
           <a:lstStyle xmlns:a="http://schemas.openxmlformats.org/drawingml/2006/main"/>
           <a:p xmlns:a="http://schemas.openxmlformats.org/drawingml/2006/main">
             <a:pPr algn="l">
-              <a:defRPr sz="1425" b="0">
-                <a:solidFill>
-                  <a:srgbClr val="51606F"/>
+              <a:defRPr sz="1650" b="1">
+                <a:solidFill>
+                  <a:srgbClr val="17202A"/>
                 </a:solidFill>
                 <a:latin typeface="Arial"/>
                 <a:ea typeface="Arial"/>
@@ -17407,15 +18635,15 @@
               </a:defRPr>
             </a:pPr>
             <a:r>
-              <a:rPr sz="1425" b="0">
-                <a:solidFill>
-                  <a:srgbClr val="51606F"/>
+              <a:rPr sz="1650" b="1">
+                <a:solidFill>
+                  <a:srgbClr val="17202A"/>
                 </a:solidFill>
                 <a:latin typeface="Arial"/>
                 <a:ea typeface="Arial"/>
                 <a:cs typeface="Arial"/>
               </a:rPr>
-              <a:t>regras do sistema</a:t>
+              <a:t>Validar o fluxo</a:t>
             </a:r>
           </a:p>
         </p:txBody>
@@ -17425,52 +18653,19 @@
           <p:cNvPr id="20" name="">
             <a:extLst xmlns:a="http://schemas.openxmlformats.org/drawingml/2006/main">
               <a:ext uri="{FF2B5EF4-FFF2-40B4-BE49-F238E27FC236}">
-                <a16:creationId xmlns:a16="http://schemas.microsoft.com/office/drawing/2014/main" id="{57BA3F2A-0161-4671-82BE-1D446BF89D8A}"/>
-              </a:ext>
-            </a:extLst>
-          </p:cNvPr>
-          <p:cNvSpPr>
-            <a:spLocks xmlns:a="http://schemas.openxmlformats.org/drawingml/2006/main" noGrp="1"/>
-          </p:cNvSpPr>
-          <p:nvPr/>
-        </p:nvSpPr>
-        <p:spPr>
-          <a:xfrm xmlns:a="http://schemas.openxmlformats.org/drawingml/2006/main">
-            <a:off x="6858000" y="4514850"/>
-            <a:ext cx="3886200" cy="781050"/>
-          </a:xfrm>
-          <a:prstGeom xmlns:a="http://schemas.openxmlformats.org/drawingml/2006/main" prst="rect">
-            <a:avLst/>
-          </a:prstGeom>
-          <a:solidFill xmlns:a="http://schemas.openxmlformats.org/drawingml/2006/main">
-            <a:srgbClr val="FFFFFF"/>
-          </a:solidFill>
-          <a:ln xmlns:a="http://schemas.openxmlformats.org/drawingml/2006/main" w="9525">
-            <a:solidFill>
-              <a:srgbClr val="D7DEE6"/>
-            </a:solidFill>
-            <a:prstDash val="solid"/>
-          </a:ln>
-        </p:spPr>
-      </p:sp>
-      <p:sp>
-        <p:nvSpPr>
-          <p:cNvPr id="21" name="">
-            <a:extLst xmlns:a="http://schemas.openxmlformats.org/drawingml/2006/main">
-              <a:ext uri="{FF2B5EF4-FFF2-40B4-BE49-F238E27FC236}">
-                <a16:creationId xmlns:a16="http://schemas.microsoft.com/office/drawing/2014/main" id="{7B5CE97B-4546-4B47-8A85-2C13B21E895A}"/>
-              </a:ext>
-            </a:extLst>
-          </p:cNvPr>
-          <p:cNvSpPr>
-            <a:spLocks xmlns:a="http://schemas.openxmlformats.org/drawingml/2006/main" noGrp="1"/>
-          </p:cNvSpPr>
-          <p:nvPr/>
-        </p:nvSpPr>
-        <p:spPr>
-          <a:xfrm xmlns:a="http://schemas.openxmlformats.org/drawingml/2006/main">
-            <a:off x="7105650" y="4610100"/>
-            <a:ext cx="1619250" cy="323850"/>
+                <a16:creationId xmlns:a16="http://schemas.microsoft.com/office/drawing/2014/main" id="{18F2C1A5-3FDF-4AC6-8A47-7B7371B73E2D}"/>
+              </a:ext>
+            </a:extLst>
+          </p:cNvPr>
+          <p:cNvSpPr>
+            <a:spLocks xmlns:a="http://schemas.openxmlformats.org/drawingml/2006/main" noGrp="1"/>
+          </p:cNvSpPr>
+          <p:nvPr/>
+        </p:nvSpPr>
+        <p:spPr>
+          <a:xfrm xmlns:a="http://schemas.openxmlformats.org/drawingml/2006/main">
+            <a:off x="8229600" y="3810000"/>
+            <a:ext cx="2381250" cy="1047750"/>
           </a:xfrm>
           <a:prstGeom xmlns:a="http://schemas.openxmlformats.org/drawingml/2006/main" prst="rect">
             <a:avLst/>
@@ -17494,9 +18689,9 @@
           <a:lstStyle xmlns:a="http://schemas.openxmlformats.org/drawingml/2006/main"/>
           <a:p xmlns:a="http://schemas.openxmlformats.org/drawingml/2006/main">
             <a:pPr algn="l">
-              <a:defRPr sz="2250" b="1">
-                <a:solidFill>
-                  <a:srgbClr val="075D3B"/>
+              <a:defRPr sz="1500" b="0">
+                <a:solidFill>
+                  <a:srgbClr val="51606F"/>
                 </a:solidFill>
                 <a:latin typeface="Arial"/>
                 <a:ea typeface="Arial"/>
@@ -17504,79 +18699,15 @@
               </a:defRPr>
             </a:pPr>
             <a:r>
-              <a:rPr sz="2250" b="1">
-                <a:solidFill>
-                  <a:srgbClr val="075D3B"/>
+              <a:rPr sz="1500" b="0">
+                <a:solidFill>
+                  <a:srgbClr val="51606F"/>
                 </a:solidFill>
                 <a:latin typeface="Arial"/>
                 <a:ea typeface="Arial"/>
                 <a:cs typeface="Arial"/>
               </a:rPr>
-              <a:t>Banco local</a:t>
-            </a:r>
-          </a:p>
-        </p:txBody>
-      </p:sp>
-      <p:sp>
-        <p:nvSpPr>
-          <p:cNvPr id="22" name="">
-            <a:extLst xmlns:a="http://schemas.openxmlformats.org/drawingml/2006/main">
-              <a:ext uri="{FF2B5EF4-FFF2-40B4-BE49-F238E27FC236}">
-                <a16:creationId xmlns:a16="http://schemas.microsoft.com/office/drawing/2014/main" id="{09C4EC1B-B970-44B6-82A1-F02D2192D88E}"/>
-              </a:ext>
-            </a:extLst>
-          </p:cNvPr>
-          <p:cNvSpPr>
-            <a:spLocks xmlns:a="http://schemas.openxmlformats.org/drawingml/2006/main" noGrp="1"/>
-          </p:cNvSpPr>
-          <p:nvPr/>
-        </p:nvSpPr>
-        <p:spPr>
-          <a:xfrm xmlns:a="http://schemas.openxmlformats.org/drawingml/2006/main">
-            <a:off x="7105650" y="4972050"/>
-            <a:ext cx="3238500" cy="228600"/>
-          </a:xfrm>
-          <a:prstGeom xmlns:a="http://schemas.openxmlformats.org/drawingml/2006/main" prst="rect">
-            <a:avLst/>
-          </a:prstGeom>
-          <a:solidFill xmlns:a="http://schemas.openxmlformats.org/drawingml/2006/main">
-            <a:srgbClr val="000000">
-              <a:alpha val="0"/>
-            </a:srgbClr>
-          </a:solidFill>
-          <a:ln xmlns:a="http://schemas.openxmlformats.org/drawingml/2006/main" w="0">
-            <a:solidFill>
-              <a:srgbClr val="000000">
-                <a:alpha val="0"/>
-              </a:srgbClr>
-            </a:solidFill>
-            <a:prstDash val="solid"/>
-          </a:ln>
-        </p:spPr>
-        <p:txBody>
-          <a:bodyPr xmlns:a="http://schemas.openxmlformats.org/drawingml/2006/main" lIns="0" tIns="0" rIns="0" bIns="0" anchor="t"/>
-          <a:lstStyle xmlns:a="http://schemas.openxmlformats.org/drawingml/2006/main"/>
-          <a:p xmlns:a="http://schemas.openxmlformats.org/drawingml/2006/main">
-            <a:pPr algn="l">
-              <a:defRPr sz="1425" b="0">
-                <a:solidFill>
-                  <a:srgbClr val="51606F"/>
-                </a:solidFill>
-                <a:latin typeface="Arial"/>
-                <a:ea typeface="Arial"/>
-                <a:cs typeface="Arial"/>
-              </a:defRPr>
-            </a:pPr>
-            <a:r>
-              <a:rPr sz="1425" b="0">
-                <a:solidFill>
-                  <a:srgbClr val="51606F"/>
-                </a:solidFill>
-                <a:latin typeface="Arial"/>
-                <a:ea typeface="Arial"/>
-                <a:cs typeface="Arial"/>
-              </a:rPr>
-              <a:t>registros</a:t>
+              <a:t>Cenários controlados com leitor de proximidade, uma tag, comunicador e API.</a:t>
             </a:r>
           </a:p>
         </p:txBody>
@@ -17584,7 +18715,7 @@
     </p:spTree>
     <p:extLst>
       <p:ext uri="{BB962C8B-B14F-4D97-AF65-F5344CB8AC3E}">
-        <p14:creationId xmlns:p14="http://schemas.microsoft.com/office/powerpoint/2010/main" val="880686248"/>
+        <p14:creationId xmlns:p14="http://schemas.microsoft.com/office/powerpoint/2010/main" val="390889759"/>
       </p:ext>
     </p:extLst>
   </p:cSld>
@@ -17608,7 +18739,7 @@
           <p:cNvPr id="1" name="">
             <a:extLst xmlns:a="http://schemas.openxmlformats.org/drawingml/2006/main">
               <a:ext uri="{FF2B5EF4-FFF2-40B4-BE49-F238E27FC236}">
-                <a16:creationId xmlns:a16="http://schemas.microsoft.com/office/drawing/2014/main" id="{83F33C08-A864-4B30-A3C0-E678CB6CE402}"/>
+                <a16:creationId xmlns:a16="http://schemas.microsoft.com/office/drawing/2014/main" id="{A40FE05F-FA4F-480F-A591-6D778B3C0CD1}"/>
               </a:ext>
             </a:extLst>
           </p:cNvPr>
@@ -17643,7 +18774,7 @@
           <p:cNvPr id="2" name="">
             <a:extLst xmlns:a="http://schemas.openxmlformats.org/drawingml/2006/main">
               <a:ext uri="{FF2B5EF4-FFF2-40B4-BE49-F238E27FC236}">
-                <a16:creationId xmlns:a16="http://schemas.microsoft.com/office/drawing/2014/main" id="{0AB0D7F8-208D-4399-AE94-2D70CE2FA36B}"/>
+                <a16:creationId xmlns:a16="http://schemas.microsoft.com/office/drawing/2014/main" id="{1AABC755-9962-48A8-80D8-A80593F8D786}"/>
               </a:ext>
             </a:extLst>
           </p:cNvPr>
@@ -17678,7 +18809,7 @@
           <p:cNvPr id="3" name="">
             <a:extLst xmlns:a="http://schemas.openxmlformats.org/drawingml/2006/main">
               <a:ext uri="{FF2B5EF4-FFF2-40B4-BE49-F238E27FC236}">
-                <a16:creationId xmlns:a16="http://schemas.microsoft.com/office/drawing/2014/main" id="{21E1485C-A788-42EC-80C4-C80065E74FFF}"/>
+                <a16:creationId xmlns:a16="http://schemas.microsoft.com/office/drawing/2014/main" id="{85C08B69-7553-4F01-B746-D9BB34AD3948}"/>
               </a:ext>
             </a:extLst>
           </p:cNvPr>
@@ -17742,7 +18873,7 @@
           <p:cNvPr id="4" name="">
             <a:extLst xmlns:a="http://schemas.openxmlformats.org/drawingml/2006/main">
               <a:ext uri="{FF2B5EF4-FFF2-40B4-BE49-F238E27FC236}">
-                <a16:creationId xmlns:a16="http://schemas.microsoft.com/office/drawing/2014/main" id="{087B9808-A489-47ED-89BC-6DEFEB2F8591}"/>
+                <a16:creationId xmlns:a16="http://schemas.microsoft.com/office/drawing/2014/main" id="{3CF3C83B-10B4-4D84-9BB5-3B437FCDAF55}"/>
               </a:ext>
             </a:extLst>
           </p:cNvPr>
@@ -17796,7 +18927,7 @@
                 <a:ea typeface="Arial"/>
                 <a:cs typeface="Arial"/>
               </a:rPr>
-              <a:t>Arquitetura do protótipo</a:t>
+              <a:t>Tecnologias e materiais</a:t>
             </a:r>
           </a:p>
         </p:txBody>
@@ -17806,7 +18937,7 @@
           <p:cNvPr id="5" name="">
             <a:extLst xmlns:a="http://schemas.openxmlformats.org/drawingml/2006/main">
               <a:ext uri="{FF2B5EF4-FFF2-40B4-BE49-F238E27FC236}">
-                <a16:creationId xmlns:a16="http://schemas.microsoft.com/office/drawing/2014/main" id="{E1E54C8A-2490-4002-A02A-F57210680A5C}"/>
+                <a16:creationId xmlns:a16="http://schemas.microsoft.com/office/drawing/2014/main" id="{4A0A4D9C-A080-458A-8D19-7CCD53625129}"/>
               </a:ext>
             </a:extLst>
           </p:cNvPr>
@@ -17860,7 +18991,7 @@
                 <a:ea typeface="Arial"/>
                 <a:cs typeface="Arial"/>
               </a:rPr>
-              <a:t>A arquitetura mostra onde a leitura entra, onde as regras são aplicadas e onde os registros ficam armazenados.</a:t>
+              <a:t>O protótipo combina interface web, backend, banco local e entrada RFID controlada.</a:t>
             </a:r>
           </a:p>
         </p:txBody>
@@ -17870,74 +19001,54 @@
           <p:cNvPr id="6" name="">
             <a:extLst xmlns:a="http://schemas.openxmlformats.org/drawingml/2006/main">
               <a:ext uri="{FF2B5EF4-FFF2-40B4-BE49-F238E27FC236}">
-                <a16:creationId xmlns:a16="http://schemas.microsoft.com/office/drawing/2014/main" id="{6F1C1300-F6A2-4B0A-A553-3A4D05EE4C2A}"/>
-              </a:ext>
-            </a:extLst>
-          </p:cNvPr>
-          <p:cNvSpPr>
-            <a:spLocks xmlns:a="http://schemas.openxmlformats.org/drawingml/2006/main" noGrp="1"/>
-          </p:cNvSpPr>
-          <p:nvPr/>
-        </p:nvSpPr>
-        <p:spPr>
-          <a:xfrm xmlns:a="http://schemas.openxmlformats.org/drawingml/2006/main">
-            <a:off x="819150" y="2076450"/>
-            <a:ext cx="10572750" cy="3638550"/>
-          </a:xfrm>
-          <a:prstGeom xmlns:a="http://schemas.openxmlformats.org/drawingml/2006/main" prst="rect">
-            <a:avLst/>
-          </a:prstGeom>
-          <a:solidFill xmlns:a="http://schemas.openxmlformats.org/drawingml/2006/main">
-            <a:srgbClr val="FFFFFF"/>
-          </a:solidFill>
-          <a:ln xmlns:a="http://schemas.openxmlformats.org/drawingml/2006/main" w="9525">
-            <a:solidFill>
-              <a:srgbClr val="D7DEE6"/>
-            </a:solidFill>
-            <a:prstDash val="solid"/>
-          </a:ln>
-        </p:spPr>
-      </p:sp>
-      <p:pic>
-        <p:nvPicPr>
-          <p:cNvPr id="7" name=""/>
-          <p:cNvPicPr>
-            <a:picLocks xmlns:a="http://schemas.openxmlformats.org/drawingml/2006/main" noChangeAspect="1"/>
-          </p:cNvPicPr>
-          <p:nvPr/>
-        </p:nvPicPr>
-        <p:blipFill>
-          <a:blip xmlns:r="http://schemas.openxmlformats.org/officeDocument/2006/relationships" xmlns:a="http://schemas.openxmlformats.org/drawingml/2006/main" r:embed="R2b3d251f8db84c3e"/>
-          <a:stretch xmlns:a="http://schemas.openxmlformats.org/drawingml/2006/main"/>
-        </p:blipFill>
-        <p:spPr>
-          <a:xfrm xmlns:a="http://schemas.openxmlformats.org/drawingml/2006/main">
-            <a:off x="3720757" y="2209800"/>
-            <a:ext cx="4769536" cy="3371850"/>
-          </a:xfrm>
-          <a:prstGeom xmlns:a="http://schemas.openxmlformats.org/drawingml/2006/main" prst="rect">
-            <a:avLst/>
-          </a:prstGeom>
-        </p:spPr>
-      </p:pic>
-      <p:sp>
-        <p:nvSpPr>
-          <p:cNvPr id="8" name="">
-            <a:extLst xmlns:a="http://schemas.openxmlformats.org/drawingml/2006/main">
-              <a:ext uri="{FF2B5EF4-FFF2-40B4-BE49-F238E27FC236}">
-                <a16:creationId xmlns:a16="http://schemas.microsoft.com/office/drawing/2014/main" id="{81685388-A32E-49B1-ABB1-20A2A245B503}"/>
-              </a:ext>
-            </a:extLst>
-          </p:cNvPr>
-          <p:cNvSpPr>
-            <a:spLocks xmlns:a="http://schemas.openxmlformats.org/drawingml/2006/main" noGrp="1"/>
-          </p:cNvSpPr>
-          <p:nvPr/>
-        </p:nvSpPr>
-        <p:spPr>
-          <a:xfrm xmlns:a="http://schemas.openxmlformats.org/drawingml/2006/main">
-            <a:off x="895350" y="5867400"/>
-            <a:ext cx="10287000" cy="304800"/>
+                <a16:creationId xmlns:a16="http://schemas.microsoft.com/office/drawing/2014/main" id="{750D9619-D30B-4FEA-A42B-18218798CC86}"/>
+              </a:ext>
+            </a:extLst>
+          </p:cNvPr>
+          <p:cNvSpPr>
+            <a:spLocks xmlns:a="http://schemas.openxmlformats.org/drawingml/2006/main" noGrp="1"/>
+          </p:cNvSpPr>
+          <p:nvPr/>
+        </p:nvSpPr>
+        <p:spPr>
+          <a:xfrm xmlns:a="http://schemas.openxmlformats.org/drawingml/2006/main">
+            <a:off x="800100" y="2400300"/>
+            <a:ext cx="133350" cy="133350"/>
+          </a:xfrm>
+          <a:prstGeom xmlns:a="http://schemas.openxmlformats.org/drawingml/2006/main" prst="ellipse">
+            <a:avLst/>
+          </a:prstGeom>
+          <a:solidFill xmlns:a="http://schemas.openxmlformats.org/drawingml/2006/main">
+            <a:srgbClr val="0E7A4F"/>
+          </a:solidFill>
+          <a:ln xmlns:a="http://schemas.openxmlformats.org/drawingml/2006/main" w="0">
+            <a:solidFill>
+              <a:srgbClr val="000000">
+                <a:alpha val="0"/>
+              </a:srgbClr>
+            </a:solidFill>
+            <a:prstDash val="solid"/>
+          </a:ln>
+        </p:spPr>
+      </p:sp>
+      <p:sp>
+        <p:nvSpPr>
+          <p:cNvPr id="7" name="">
+            <a:extLst xmlns:a="http://schemas.openxmlformats.org/drawingml/2006/main">
+              <a:ext uri="{FF2B5EF4-FFF2-40B4-BE49-F238E27FC236}">
+                <a16:creationId xmlns:a16="http://schemas.microsoft.com/office/drawing/2014/main" id="{2F1FBEE6-072E-4840-A59E-6D653EB8D991}"/>
+              </a:ext>
+            </a:extLst>
+          </p:cNvPr>
+          <p:cNvSpPr>
+            <a:spLocks xmlns:a="http://schemas.openxmlformats.org/drawingml/2006/main" noGrp="1"/>
+          </p:cNvSpPr>
+          <p:nvPr/>
+        </p:nvSpPr>
+        <p:spPr>
+          <a:xfrm xmlns:a="http://schemas.openxmlformats.org/drawingml/2006/main">
+            <a:off x="1066800" y="2324100"/>
+            <a:ext cx="4953000" cy="609600"/>
           </a:xfrm>
           <a:prstGeom xmlns:a="http://schemas.openxmlformats.org/drawingml/2006/main" prst="rect">
             <a:avLst/>
@@ -17960,10 +19071,10 @@
           <a:bodyPr xmlns:a="http://schemas.openxmlformats.org/drawingml/2006/main" lIns="0" tIns="0" rIns="0" bIns="0" anchor="t"/>
           <a:lstStyle xmlns:a="http://schemas.openxmlformats.org/drawingml/2006/main"/>
           <a:p xmlns:a="http://schemas.openxmlformats.org/drawingml/2006/main">
-            <a:pPr algn="ctr">
-              <a:defRPr sz="1350" b="0">
-                <a:solidFill>
-                  <a:srgbClr val="51606F"/>
+            <a:pPr algn="l">
+              <a:defRPr sz="1725" b="0">
+                <a:solidFill>
+                  <a:srgbClr val="17202A"/>
                 </a:solidFill>
                 <a:latin typeface="Arial"/>
                 <a:ea typeface="Arial"/>
@@ -17971,15 +19082,795 @@
               </a:defRPr>
             </a:pPr>
             <a:r>
-              <a:rPr sz="1350" b="0">
+              <a:rPr sz="1725" b="0">
+                <a:solidFill>
+                  <a:srgbClr val="17202A"/>
+                </a:solidFill>
+                <a:latin typeface="Arial"/>
+                <a:ea typeface="Arial"/>
+                <a:cs typeface="Arial"/>
+              </a:rPr>
+              <a:t>Frontend web para operação, consulta e acompanhamento do inventário.</a:t>
+            </a:r>
+          </a:p>
+        </p:txBody>
+      </p:sp>
+      <p:sp>
+        <p:nvSpPr>
+          <p:cNvPr id="8" name="">
+            <a:extLst xmlns:a="http://schemas.openxmlformats.org/drawingml/2006/main">
+              <a:ext uri="{FF2B5EF4-FFF2-40B4-BE49-F238E27FC236}">
+                <a16:creationId xmlns:a16="http://schemas.microsoft.com/office/drawing/2014/main" id="{714A8C5C-2AB9-4D07-A6F6-3759BA399F46}"/>
+              </a:ext>
+            </a:extLst>
+          </p:cNvPr>
+          <p:cNvSpPr>
+            <a:spLocks xmlns:a="http://schemas.openxmlformats.org/drawingml/2006/main" noGrp="1"/>
+          </p:cNvSpPr>
+          <p:nvPr/>
+        </p:nvSpPr>
+        <p:spPr>
+          <a:xfrm xmlns:a="http://schemas.openxmlformats.org/drawingml/2006/main">
+            <a:off x="800100" y="3276600"/>
+            <a:ext cx="133350" cy="133350"/>
+          </a:xfrm>
+          <a:prstGeom xmlns:a="http://schemas.openxmlformats.org/drawingml/2006/main" prst="ellipse">
+            <a:avLst/>
+          </a:prstGeom>
+          <a:solidFill xmlns:a="http://schemas.openxmlformats.org/drawingml/2006/main">
+            <a:srgbClr val="0E7A4F"/>
+          </a:solidFill>
+          <a:ln xmlns:a="http://schemas.openxmlformats.org/drawingml/2006/main" w="0">
+            <a:solidFill>
+              <a:srgbClr val="000000">
+                <a:alpha val="0"/>
+              </a:srgbClr>
+            </a:solidFill>
+            <a:prstDash val="solid"/>
+          </a:ln>
+        </p:spPr>
+      </p:sp>
+      <p:sp>
+        <p:nvSpPr>
+          <p:cNvPr id="9" name="">
+            <a:extLst xmlns:a="http://schemas.openxmlformats.org/drawingml/2006/main">
+              <a:ext uri="{FF2B5EF4-FFF2-40B4-BE49-F238E27FC236}">
+                <a16:creationId xmlns:a16="http://schemas.microsoft.com/office/drawing/2014/main" id="{E37157E0-882B-4BA2-9C81-895AA83A0194}"/>
+              </a:ext>
+            </a:extLst>
+          </p:cNvPr>
+          <p:cNvSpPr>
+            <a:spLocks xmlns:a="http://schemas.openxmlformats.org/drawingml/2006/main" noGrp="1"/>
+          </p:cNvSpPr>
+          <p:nvPr/>
+        </p:nvSpPr>
+        <p:spPr>
+          <a:xfrm xmlns:a="http://schemas.openxmlformats.org/drawingml/2006/main">
+            <a:off x="1066800" y="3200400"/>
+            <a:ext cx="4953000" cy="609600"/>
+          </a:xfrm>
+          <a:prstGeom xmlns:a="http://schemas.openxmlformats.org/drawingml/2006/main" prst="rect">
+            <a:avLst/>
+          </a:prstGeom>
+          <a:solidFill xmlns:a="http://schemas.openxmlformats.org/drawingml/2006/main">
+            <a:srgbClr val="000000">
+              <a:alpha val="0"/>
+            </a:srgbClr>
+          </a:solidFill>
+          <a:ln xmlns:a="http://schemas.openxmlformats.org/drawingml/2006/main" w="0">
+            <a:solidFill>
+              <a:srgbClr val="000000">
+                <a:alpha val="0"/>
+              </a:srgbClr>
+            </a:solidFill>
+            <a:prstDash val="solid"/>
+          </a:ln>
+        </p:spPr>
+        <p:txBody>
+          <a:bodyPr xmlns:a="http://schemas.openxmlformats.org/drawingml/2006/main" lIns="0" tIns="0" rIns="0" bIns="0" anchor="t"/>
+          <a:lstStyle xmlns:a="http://schemas.openxmlformats.org/drawingml/2006/main"/>
+          <a:p xmlns:a="http://schemas.openxmlformats.org/drawingml/2006/main">
+            <a:pPr algn="l">
+              <a:defRPr sz="1725" b="0">
+                <a:solidFill>
+                  <a:srgbClr val="17202A"/>
+                </a:solidFill>
+                <a:latin typeface="Arial"/>
+                <a:ea typeface="Arial"/>
+                <a:cs typeface="Arial"/>
+              </a:defRPr>
+            </a:pPr>
+            <a:r>
+              <a:rPr sz="1725" b="0">
+                <a:solidFill>
+                  <a:srgbClr val="17202A"/>
+                </a:solidFill>
+                <a:latin typeface="Arial"/>
+                <a:ea typeface="Arial"/>
+                <a:cs typeface="Arial"/>
+              </a:rPr>
+              <a:t>Backend com API REST para autenticação, cadastros, eventos, auditoria e inconsistências.</a:t>
+            </a:r>
+          </a:p>
+        </p:txBody>
+      </p:sp>
+      <p:sp>
+        <p:nvSpPr>
+          <p:cNvPr id="10" name="">
+            <a:extLst xmlns:a="http://schemas.openxmlformats.org/drawingml/2006/main">
+              <a:ext uri="{FF2B5EF4-FFF2-40B4-BE49-F238E27FC236}">
+                <a16:creationId xmlns:a16="http://schemas.microsoft.com/office/drawing/2014/main" id="{C0C8B434-AC9A-456F-A441-DF6820D3DAE3}"/>
+              </a:ext>
+            </a:extLst>
+          </p:cNvPr>
+          <p:cNvSpPr>
+            <a:spLocks xmlns:a="http://schemas.openxmlformats.org/drawingml/2006/main" noGrp="1"/>
+          </p:cNvSpPr>
+          <p:nvPr/>
+        </p:nvSpPr>
+        <p:spPr>
+          <a:xfrm xmlns:a="http://schemas.openxmlformats.org/drawingml/2006/main">
+            <a:off x="800100" y="4152900"/>
+            <a:ext cx="133350" cy="133350"/>
+          </a:xfrm>
+          <a:prstGeom xmlns:a="http://schemas.openxmlformats.org/drawingml/2006/main" prst="ellipse">
+            <a:avLst/>
+          </a:prstGeom>
+          <a:solidFill xmlns:a="http://schemas.openxmlformats.org/drawingml/2006/main">
+            <a:srgbClr val="0E7A4F"/>
+          </a:solidFill>
+          <a:ln xmlns:a="http://schemas.openxmlformats.org/drawingml/2006/main" w="0">
+            <a:solidFill>
+              <a:srgbClr val="000000">
+                <a:alpha val="0"/>
+              </a:srgbClr>
+            </a:solidFill>
+            <a:prstDash val="solid"/>
+          </a:ln>
+        </p:spPr>
+      </p:sp>
+      <p:sp>
+        <p:nvSpPr>
+          <p:cNvPr id="11" name="">
+            <a:extLst xmlns:a="http://schemas.openxmlformats.org/drawingml/2006/main">
+              <a:ext uri="{FF2B5EF4-FFF2-40B4-BE49-F238E27FC236}">
+                <a16:creationId xmlns:a16="http://schemas.microsoft.com/office/drawing/2014/main" id="{1048E503-3551-4B1F-937D-0B302CB5839C}"/>
+              </a:ext>
+            </a:extLst>
+          </p:cNvPr>
+          <p:cNvSpPr>
+            <a:spLocks xmlns:a="http://schemas.openxmlformats.org/drawingml/2006/main" noGrp="1"/>
+          </p:cNvSpPr>
+          <p:nvPr/>
+        </p:nvSpPr>
+        <p:spPr>
+          <a:xfrm xmlns:a="http://schemas.openxmlformats.org/drawingml/2006/main">
+            <a:off x="1066800" y="4076700"/>
+            <a:ext cx="4953000" cy="609600"/>
+          </a:xfrm>
+          <a:prstGeom xmlns:a="http://schemas.openxmlformats.org/drawingml/2006/main" prst="rect">
+            <a:avLst/>
+          </a:prstGeom>
+          <a:solidFill xmlns:a="http://schemas.openxmlformats.org/drawingml/2006/main">
+            <a:srgbClr val="000000">
+              <a:alpha val="0"/>
+            </a:srgbClr>
+          </a:solidFill>
+          <a:ln xmlns:a="http://schemas.openxmlformats.org/drawingml/2006/main" w="0">
+            <a:solidFill>
+              <a:srgbClr val="000000">
+                <a:alpha val="0"/>
+              </a:srgbClr>
+            </a:solidFill>
+            <a:prstDash val="solid"/>
+          </a:ln>
+        </p:spPr>
+        <p:txBody>
+          <a:bodyPr xmlns:a="http://schemas.openxmlformats.org/drawingml/2006/main" lIns="0" tIns="0" rIns="0" bIns="0" anchor="t"/>
+          <a:lstStyle xmlns:a="http://schemas.openxmlformats.org/drawingml/2006/main"/>
+          <a:p xmlns:a="http://schemas.openxmlformats.org/drawingml/2006/main">
+            <a:pPr algn="l">
+              <a:defRPr sz="1725" b="0">
+                <a:solidFill>
+                  <a:srgbClr val="17202A"/>
+                </a:solidFill>
+                <a:latin typeface="Arial"/>
+                <a:ea typeface="Arial"/>
+                <a:cs typeface="Arial"/>
+              </a:defRPr>
+            </a:pPr>
+            <a:r>
+              <a:rPr sz="1725" b="0">
+                <a:solidFill>
+                  <a:srgbClr val="17202A"/>
+                </a:solidFill>
+                <a:latin typeface="Arial"/>
+                <a:ea typeface="Arial"/>
+                <a:cs typeface="Arial"/>
+              </a:rPr>
+              <a:t>SQLite local para prototipação e leitor RFID de proximidade com uma tag física.</a:t>
+            </a:r>
+          </a:p>
+        </p:txBody>
+      </p:sp>
+      <p:sp>
+        <p:nvSpPr>
+          <p:cNvPr id="12" name="">
+            <a:extLst xmlns:a="http://schemas.openxmlformats.org/drawingml/2006/main">
+              <a:ext uri="{FF2B5EF4-FFF2-40B4-BE49-F238E27FC236}">
+                <a16:creationId xmlns:a16="http://schemas.microsoft.com/office/drawing/2014/main" id="{EC1B0F60-5B5E-4983-A931-646BC0A50E37}"/>
+              </a:ext>
+            </a:extLst>
+          </p:cNvPr>
+          <p:cNvSpPr>
+            <a:spLocks xmlns:a="http://schemas.openxmlformats.org/drawingml/2006/main" noGrp="1"/>
+          </p:cNvSpPr>
+          <p:nvPr/>
+        </p:nvSpPr>
+        <p:spPr>
+          <a:xfrm xmlns:a="http://schemas.openxmlformats.org/drawingml/2006/main">
+            <a:off x="800100" y="5029200"/>
+            <a:ext cx="133350" cy="133350"/>
+          </a:xfrm>
+          <a:prstGeom xmlns:a="http://schemas.openxmlformats.org/drawingml/2006/main" prst="ellipse">
+            <a:avLst/>
+          </a:prstGeom>
+          <a:solidFill xmlns:a="http://schemas.openxmlformats.org/drawingml/2006/main">
+            <a:srgbClr val="0E7A4F"/>
+          </a:solidFill>
+          <a:ln xmlns:a="http://schemas.openxmlformats.org/drawingml/2006/main" w="0">
+            <a:solidFill>
+              <a:srgbClr val="000000">
+                <a:alpha val="0"/>
+              </a:srgbClr>
+            </a:solidFill>
+            <a:prstDash val="solid"/>
+          </a:ln>
+        </p:spPr>
+      </p:sp>
+      <p:sp>
+        <p:nvSpPr>
+          <p:cNvPr id="13" name="">
+            <a:extLst xmlns:a="http://schemas.openxmlformats.org/drawingml/2006/main">
+              <a:ext uri="{FF2B5EF4-FFF2-40B4-BE49-F238E27FC236}">
+                <a16:creationId xmlns:a16="http://schemas.microsoft.com/office/drawing/2014/main" id="{03579D5A-3FEF-4AA0-A4A3-146716A7F436}"/>
+              </a:ext>
+            </a:extLst>
+          </p:cNvPr>
+          <p:cNvSpPr>
+            <a:spLocks xmlns:a="http://schemas.openxmlformats.org/drawingml/2006/main" noGrp="1"/>
+          </p:cNvSpPr>
+          <p:nvPr/>
+        </p:nvSpPr>
+        <p:spPr>
+          <a:xfrm xmlns:a="http://schemas.openxmlformats.org/drawingml/2006/main">
+            <a:off x="1066800" y="4953000"/>
+            <a:ext cx="4953000" cy="609600"/>
+          </a:xfrm>
+          <a:prstGeom xmlns:a="http://schemas.openxmlformats.org/drawingml/2006/main" prst="rect">
+            <a:avLst/>
+          </a:prstGeom>
+          <a:solidFill xmlns:a="http://schemas.openxmlformats.org/drawingml/2006/main">
+            <a:srgbClr val="000000">
+              <a:alpha val="0"/>
+            </a:srgbClr>
+          </a:solidFill>
+          <a:ln xmlns:a="http://schemas.openxmlformats.org/drawingml/2006/main" w="0">
+            <a:solidFill>
+              <a:srgbClr val="000000">
+                <a:alpha val="0"/>
+              </a:srgbClr>
+            </a:solidFill>
+            <a:prstDash val="solid"/>
+          </a:ln>
+        </p:spPr>
+        <p:txBody>
+          <a:bodyPr xmlns:a="http://schemas.openxmlformats.org/drawingml/2006/main" lIns="0" tIns="0" rIns="0" bIns="0" anchor="t"/>
+          <a:lstStyle xmlns:a="http://schemas.openxmlformats.org/drawingml/2006/main"/>
+          <a:p xmlns:a="http://schemas.openxmlformats.org/drawingml/2006/main">
+            <a:pPr algn="l">
+              <a:defRPr sz="1725" b="0">
+                <a:solidFill>
+                  <a:srgbClr val="17202A"/>
+                </a:solidFill>
+                <a:latin typeface="Arial"/>
+                <a:ea typeface="Arial"/>
+                <a:cs typeface="Arial"/>
+              </a:defRPr>
+            </a:pPr>
+            <a:r>
+              <a:rPr sz="1725" b="0">
+                <a:solidFill>
+                  <a:srgbClr val="17202A"/>
+                </a:solidFill>
+                <a:latin typeface="Arial"/>
+                <a:ea typeface="Arial"/>
+                <a:cs typeface="Arial"/>
+              </a:rPr>
+              <a:t>Comunicador intermediário para enviar a leitura ao backend no formato esperado.</a:t>
+            </a:r>
+          </a:p>
+        </p:txBody>
+      </p:sp>
+      <p:sp>
+        <p:nvSpPr>
+          <p:cNvPr id="14" name="">
+            <a:extLst xmlns:a="http://schemas.openxmlformats.org/drawingml/2006/main">
+              <a:ext uri="{FF2B5EF4-FFF2-40B4-BE49-F238E27FC236}">
+                <a16:creationId xmlns:a16="http://schemas.microsoft.com/office/drawing/2014/main" id="{94C37577-1DBB-4B64-A489-55C879E700F0}"/>
+              </a:ext>
+            </a:extLst>
+          </p:cNvPr>
+          <p:cNvSpPr>
+            <a:spLocks xmlns:a="http://schemas.openxmlformats.org/drawingml/2006/main" noGrp="1"/>
+          </p:cNvSpPr>
+          <p:nvPr/>
+        </p:nvSpPr>
+        <p:spPr>
+          <a:xfrm xmlns:a="http://schemas.openxmlformats.org/drawingml/2006/main">
+            <a:off x="6858000" y="2381250"/>
+            <a:ext cx="3886200" cy="781050"/>
+          </a:xfrm>
+          <a:prstGeom xmlns:a="http://schemas.openxmlformats.org/drawingml/2006/main" prst="rect">
+            <a:avLst/>
+          </a:prstGeom>
+          <a:solidFill xmlns:a="http://schemas.openxmlformats.org/drawingml/2006/main">
+            <a:srgbClr val="FFFFFF"/>
+          </a:solidFill>
+          <a:ln xmlns:a="http://schemas.openxmlformats.org/drawingml/2006/main" w="9525">
+            <a:solidFill>
+              <a:srgbClr val="D7DEE6"/>
+            </a:solidFill>
+            <a:prstDash val="solid"/>
+          </a:ln>
+        </p:spPr>
+      </p:sp>
+      <p:sp>
+        <p:nvSpPr>
+          <p:cNvPr id="15" name="">
+            <a:extLst xmlns:a="http://schemas.openxmlformats.org/drawingml/2006/main">
+              <a:ext uri="{FF2B5EF4-FFF2-40B4-BE49-F238E27FC236}">
+                <a16:creationId xmlns:a16="http://schemas.microsoft.com/office/drawing/2014/main" id="{A25485CC-FB40-4336-A389-767F354B4267}"/>
+              </a:ext>
+            </a:extLst>
+          </p:cNvPr>
+          <p:cNvSpPr>
+            <a:spLocks xmlns:a="http://schemas.openxmlformats.org/drawingml/2006/main" noGrp="1"/>
+          </p:cNvSpPr>
+          <p:nvPr/>
+        </p:nvSpPr>
+        <p:spPr>
+          <a:xfrm xmlns:a="http://schemas.openxmlformats.org/drawingml/2006/main">
+            <a:off x="7105650" y="2476500"/>
+            <a:ext cx="3143250" cy="323850"/>
+          </a:xfrm>
+          <a:prstGeom xmlns:a="http://schemas.openxmlformats.org/drawingml/2006/main" prst="rect">
+            <a:avLst/>
+          </a:prstGeom>
+          <a:solidFill xmlns:a="http://schemas.openxmlformats.org/drawingml/2006/main">
+            <a:srgbClr val="000000">
+              <a:alpha val="0"/>
+            </a:srgbClr>
+          </a:solidFill>
+          <a:ln xmlns:a="http://schemas.openxmlformats.org/drawingml/2006/main" w="0">
+            <a:solidFill>
+              <a:srgbClr val="000000">
+                <a:alpha val="0"/>
+              </a:srgbClr>
+            </a:solidFill>
+            <a:prstDash val="solid"/>
+          </a:ln>
+        </p:spPr>
+        <p:txBody>
+          <a:bodyPr xmlns:a="http://schemas.openxmlformats.org/drawingml/2006/main" lIns="0" tIns="0" rIns="0" bIns="0" anchor="t"/>
+          <a:lstStyle xmlns:a="http://schemas.openxmlformats.org/drawingml/2006/main"/>
+          <a:p xmlns:a="http://schemas.openxmlformats.org/drawingml/2006/main">
+            <a:pPr algn="l">
+              <a:defRPr sz="2250" b="1">
+                <a:solidFill>
+                  <a:srgbClr val="075D3B"/>
+                </a:solidFill>
+                <a:latin typeface="Arial"/>
+                <a:ea typeface="Arial"/>
+                <a:cs typeface="Arial"/>
+              </a:defRPr>
+            </a:pPr>
+            <a:r>
+              <a:rPr sz="2250" b="1">
+                <a:solidFill>
+                  <a:srgbClr val="075D3B"/>
+                </a:solidFill>
+                <a:latin typeface="Arial"/>
+                <a:ea typeface="Arial"/>
+                <a:cs typeface="Arial"/>
+              </a:rPr>
+              <a:t>Interface</a:t>
+            </a:r>
+          </a:p>
+        </p:txBody>
+      </p:sp>
+      <p:sp>
+        <p:nvSpPr>
+          <p:cNvPr id="16" name="">
+            <a:extLst xmlns:a="http://schemas.openxmlformats.org/drawingml/2006/main">
+              <a:ext uri="{FF2B5EF4-FFF2-40B4-BE49-F238E27FC236}">
+                <a16:creationId xmlns:a16="http://schemas.microsoft.com/office/drawing/2014/main" id="{3B4456E1-3640-468B-AFFB-FE843B0B00D1}"/>
+              </a:ext>
+            </a:extLst>
+          </p:cNvPr>
+          <p:cNvSpPr>
+            <a:spLocks xmlns:a="http://schemas.openxmlformats.org/drawingml/2006/main" noGrp="1"/>
+          </p:cNvSpPr>
+          <p:nvPr/>
+        </p:nvSpPr>
+        <p:spPr>
+          <a:xfrm xmlns:a="http://schemas.openxmlformats.org/drawingml/2006/main">
+            <a:off x="7105650" y="2838450"/>
+            <a:ext cx="3238500" cy="228600"/>
+          </a:xfrm>
+          <a:prstGeom xmlns:a="http://schemas.openxmlformats.org/drawingml/2006/main" prst="rect">
+            <a:avLst/>
+          </a:prstGeom>
+          <a:solidFill xmlns:a="http://schemas.openxmlformats.org/drawingml/2006/main">
+            <a:srgbClr val="000000">
+              <a:alpha val="0"/>
+            </a:srgbClr>
+          </a:solidFill>
+          <a:ln xmlns:a="http://schemas.openxmlformats.org/drawingml/2006/main" w="0">
+            <a:solidFill>
+              <a:srgbClr val="000000">
+                <a:alpha val="0"/>
+              </a:srgbClr>
+            </a:solidFill>
+            <a:prstDash val="solid"/>
+          </a:ln>
+        </p:spPr>
+        <p:txBody>
+          <a:bodyPr xmlns:a="http://schemas.openxmlformats.org/drawingml/2006/main" lIns="0" tIns="0" rIns="0" bIns="0" anchor="t"/>
+          <a:lstStyle xmlns:a="http://schemas.openxmlformats.org/drawingml/2006/main"/>
+          <a:p xmlns:a="http://schemas.openxmlformats.org/drawingml/2006/main">
+            <a:pPr algn="l">
+              <a:defRPr sz="1425" b="0">
                 <a:solidFill>
                   <a:srgbClr val="51606F"/>
                 </a:solidFill>
                 <a:latin typeface="Arial"/>
                 <a:ea typeface="Arial"/>
                 <a:cs typeface="Arial"/>
+              </a:defRPr>
+            </a:pPr>
+            <a:r>
+              <a:rPr sz="1425" b="0">
+                <a:solidFill>
+                  <a:srgbClr val="51606F"/>
+                </a:solidFill>
+                <a:latin typeface="Arial"/>
+                <a:ea typeface="Arial"/>
+                <a:cs typeface="Arial"/>
               </a:rPr>
-              <a:t>Separação entre interface, servidor, banco local e entrada de leituras RFID.</a:t>
+              <a:t>uso e acompanhamento</a:t>
+            </a:r>
+          </a:p>
+        </p:txBody>
+      </p:sp>
+      <p:sp>
+        <p:nvSpPr>
+          <p:cNvPr id="17" name="">
+            <a:extLst xmlns:a="http://schemas.openxmlformats.org/drawingml/2006/main">
+              <a:ext uri="{FF2B5EF4-FFF2-40B4-BE49-F238E27FC236}">
+                <a16:creationId xmlns:a16="http://schemas.microsoft.com/office/drawing/2014/main" id="{3DC20671-5D20-4B5F-84B2-A221197679EE}"/>
+              </a:ext>
+            </a:extLst>
+          </p:cNvPr>
+          <p:cNvSpPr>
+            <a:spLocks xmlns:a="http://schemas.openxmlformats.org/drawingml/2006/main" noGrp="1"/>
+          </p:cNvSpPr>
+          <p:nvPr/>
+        </p:nvSpPr>
+        <p:spPr>
+          <a:xfrm xmlns:a="http://schemas.openxmlformats.org/drawingml/2006/main">
+            <a:off x="6858000" y="3448050"/>
+            <a:ext cx="3886200" cy="781050"/>
+          </a:xfrm>
+          <a:prstGeom xmlns:a="http://schemas.openxmlformats.org/drawingml/2006/main" prst="rect">
+            <a:avLst/>
+          </a:prstGeom>
+          <a:solidFill xmlns:a="http://schemas.openxmlformats.org/drawingml/2006/main">
+            <a:srgbClr val="FFF4CF"/>
+          </a:solidFill>
+          <a:ln xmlns:a="http://schemas.openxmlformats.org/drawingml/2006/main" w="9525">
+            <a:solidFill>
+              <a:srgbClr val="D7DEE6"/>
+            </a:solidFill>
+            <a:prstDash val="solid"/>
+          </a:ln>
+        </p:spPr>
+      </p:sp>
+      <p:sp>
+        <p:nvSpPr>
+          <p:cNvPr id="18" name="">
+            <a:extLst xmlns:a="http://schemas.openxmlformats.org/drawingml/2006/main">
+              <a:ext uri="{FF2B5EF4-FFF2-40B4-BE49-F238E27FC236}">
+                <a16:creationId xmlns:a16="http://schemas.microsoft.com/office/drawing/2014/main" id="{1BA47E09-9285-477B-866D-C9825C43E869}"/>
+              </a:ext>
+            </a:extLst>
+          </p:cNvPr>
+          <p:cNvSpPr>
+            <a:spLocks xmlns:a="http://schemas.openxmlformats.org/drawingml/2006/main" noGrp="1"/>
+          </p:cNvSpPr>
+          <p:nvPr/>
+        </p:nvSpPr>
+        <p:spPr>
+          <a:xfrm xmlns:a="http://schemas.openxmlformats.org/drawingml/2006/main">
+            <a:off x="7105650" y="3543300"/>
+            <a:ext cx="3143250" cy="323850"/>
+          </a:xfrm>
+          <a:prstGeom xmlns:a="http://schemas.openxmlformats.org/drawingml/2006/main" prst="rect">
+            <a:avLst/>
+          </a:prstGeom>
+          <a:solidFill xmlns:a="http://schemas.openxmlformats.org/drawingml/2006/main">
+            <a:srgbClr val="000000">
+              <a:alpha val="0"/>
+            </a:srgbClr>
+          </a:solidFill>
+          <a:ln xmlns:a="http://schemas.openxmlformats.org/drawingml/2006/main" w="0">
+            <a:solidFill>
+              <a:srgbClr val="000000">
+                <a:alpha val="0"/>
+              </a:srgbClr>
+            </a:solidFill>
+            <a:prstDash val="solid"/>
+          </a:ln>
+        </p:spPr>
+        <p:txBody>
+          <a:bodyPr xmlns:a="http://schemas.openxmlformats.org/drawingml/2006/main" lIns="0" tIns="0" rIns="0" bIns="0" anchor="t"/>
+          <a:lstStyle xmlns:a="http://schemas.openxmlformats.org/drawingml/2006/main"/>
+          <a:p xmlns:a="http://schemas.openxmlformats.org/drawingml/2006/main">
+            <a:pPr algn="l">
+              <a:defRPr sz="2250" b="1">
+                <a:solidFill>
+                  <a:srgbClr val="075D3B"/>
+                </a:solidFill>
+                <a:latin typeface="Arial"/>
+                <a:ea typeface="Arial"/>
+                <a:cs typeface="Arial"/>
+              </a:defRPr>
+            </a:pPr>
+            <a:r>
+              <a:rPr sz="2250" b="1">
+                <a:solidFill>
+                  <a:srgbClr val="075D3B"/>
+                </a:solidFill>
+                <a:latin typeface="Arial"/>
+                <a:ea typeface="Arial"/>
+                <a:cs typeface="Arial"/>
+              </a:rPr>
+              <a:t>API</a:t>
+            </a:r>
+          </a:p>
+        </p:txBody>
+      </p:sp>
+      <p:sp>
+        <p:nvSpPr>
+          <p:cNvPr id="19" name="">
+            <a:extLst xmlns:a="http://schemas.openxmlformats.org/drawingml/2006/main">
+              <a:ext uri="{FF2B5EF4-FFF2-40B4-BE49-F238E27FC236}">
+                <a16:creationId xmlns:a16="http://schemas.microsoft.com/office/drawing/2014/main" id="{AE402AE0-A54E-4258-A797-49EDB4DFDDDE}"/>
+              </a:ext>
+            </a:extLst>
+          </p:cNvPr>
+          <p:cNvSpPr>
+            <a:spLocks xmlns:a="http://schemas.openxmlformats.org/drawingml/2006/main" noGrp="1"/>
+          </p:cNvSpPr>
+          <p:nvPr/>
+        </p:nvSpPr>
+        <p:spPr>
+          <a:xfrm xmlns:a="http://schemas.openxmlformats.org/drawingml/2006/main">
+            <a:off x="7105650" y="3905250"/>
+            <a:ext cx="3238500" cy="228600"/>
+          </a:xfrm>
+          <a:prstGeom xmlns:a="http://schemas.openxmlformats.org/drawingml/2006/main" prst="rect">
+            <a:avLst/>
+          </a:prstGeom>
+          <a:solidFill xmlns:a="http://schemas.openxmlformats.org/drawingml/2006/main">
+            <a:srgbClr val="000000">
+              <a:alpha val="0"/>
+            </a:srgbClr>
+          </a:solidFill>
+          <a:ln xmlns:a="http://schemas.openxmlformats.org/drawingml/2006/main" w="0">
+            <a:solidFill>
+              <a:srgbClr val="000000">
+                <a:alpha val="0"/>
+              </a:srgbClr>
+            </a:solidFill>
+            <a:prstDash val="solid"/>
+          </a:ln>
+        </p:spPr>
+        <p:txBody>
+          <a:bodyPr xmlns:a="http://schemas.openxmlformats.org/drawingml/2006/main" lIns="0" tIns="0" rIns="0" bIns="0" anchor="t"/>
+          <a:lstStyle xmlns:a="http://schemas.openxmlformats.org/drawingml/2006/main"/>
+          <a:p xmlns:a="http://schemas.openxmlformats.org/drawingml/2006/main">
+            <a:pPr algn="l">
+              <a:defRPr sz="1425" b="0">
+                <a:solidFill>
+                  <a:srgbClr val="51606F"/>
+                </a:solidFill>
+                <a:latin typeface="Arial"/>
+                <a:ea typeface="Arial"/>
+                <a:cs typeface="Arial"/>
+              </a:defRPr>
+            </a:pPr>
+            <a:r>
+              <a:rPr sz="1425" b="0">
+                <a:solidFill>
+                  <a:srgbClr val="51606F"/>
+                </a:solidFill>
+                <a:latin typeface="Arial"/>
+                <a:ea typeface="Arial"/>
+                <a:cs typeface="Arial"/>
+              </a:rPr>
+              <a:t>processamento central</a:t>
+            </a:r>
+          </a:p>
+        </p:txBody>
+      </p:sp>
+      <p:sp>
+        <p:nvSpPr>
+          <p:cNvPr id="20" name="">
+            <a:extLst xmlns:a="http://schemas.openxmlformats.org/drawingml/2006/main">
+              <a:ext uri="{FF2B5EF4-FFF2-40B4-BE49-F238E27FC236}">
+                <a16:creationId xmlns:a16="http://schemas.microsoft.com/office/drawing/2014/main" id="{0DD43BB2-DF0B-4C8A-93A6-1DDCA1B6FFEC}"/>
+              </a:ext>
+            </a:extLst>
+          </p:cNvPr>
+          <p:cNvSpPr>
+            <a:spLocks xmlns:a="http://schemas.openxmlformats.org/drawingml/2006/main" noGrp="1"/>
+          </p:cNvSpPr>
+          <p:nvPr/>
+        </p:nvSpPr>
+        <p:spPr>
+          <a:xfrm xmlns:a="http://schemas.openxmlformats.org/drawingml/2006/main">
+            <a:off x="6858000" y="4514850"/>
+            <a:ext cx="3886200" cy="781050"/>
+          </a:xfrm>
+          <a:prstGeom xmlns:a="http://schemas.openxmlformats.org/drawingml/2006/main" prst="rect">
+            <a:avLst/>
+          </a:prstGeom>
+          <a:solidFill xmlns:a="http://schemas.openxmlformats.org/drawingml/2006/main">
+            <a:srgbClr val="FFFFFF"/>
+          </a:solidFill>
+          <a:ln xmlns:a="http://schemas.openxmlformats.org/drawingml/2006/main" w="9525">
+            <a:solidFill>
+              <a:srgbClr val="D7DEE6"/>
+            </a:solidFill>
+            <a:prstDash val="solid"/>
+          </a:ln>
+        </p:spPr>
+      </p:sp>
+      <p:sp>
+        <p:nvSpPr>
+          <p:cNvPr id="21" name="">
+            <a:extLst xmlns:a="http://schemas.openxmlformats.org/drawingml/2006/main">
+              <a:ext uri="{FF2B5EF4-FFF2-40B4-BE49-F238E27FC236}">
+                <a16:creationId xmlns:a16="http://schemas.microsoft.com/office/drawing/2014/main" id="{DFE641E2-9677-4BE2-921B-75AABF2ACB57}"/>
+              </a:ext>
+            </a:extLst>
+          </p:cNvPr>
+          <p:cNvSpPr>
+            <a:spLocks xmlns:a="http://schemas.openxmlformats.org/drawingml/2006/main" noGrp="1"/>
+          </p:cNvSpPr>
+          <p:nvPr/>
+        </p:nvSpPr>
+        <p:spPr>
+          <a:xfrm xmlns:a="http://schemas.openxmlformats.org/drawingml/2006/main">
+            <a:off x="7105650" y="4610100"/>
+            <a:ext cx="3143250" cy="323850"/>
+          </a:xfrm>
+          <a:prstGeom xmlns:a="http://schemas.openxmlformats.org/drawingml/2006/main" prst="rect">
+            <a:avLst/>
+          </a:prstGeom>
+          <a:solidFill xmlns:a="http://schemas.openxmlformats.org/drawingml/2006/main">
+            <a:srgbClr val="000000">
+              <a:alpha val="0"/>
+            </a:srgbClr>
+          </a:solidFill>
+          <a:ln xmlns:a="http://schemas.openxmlformats.org/drawingml/2006/main" w="0">
+            <a:solidFill>
+              <a:srgbClr val="000000">
+                <a:alpha val="0"/>
+              </a:srgbClr>
+            </a:solidFill>
+            <a:prstDash val="solid"/>
+          </a:ln>
+        </p:spPr>
+        <p:txBody>
+          <a:bodyPr xmlns:a="http://schemas.openxmlformats.org/drawingml/2006/main" lIns="0" tIns="0" rIns="0" bIns="0" anchor="t"/>
+          <a:lstStyle xmlns:a="http://schemas.openxmlformats.org/drawingml/2006/main"/>
+          <a:p xmlns:a="http://schemas.openxmlformats.org/drawingml/2006/main">
+            <a:pPr algn="l">
+              <a:defRPr sz="2250" b="1">
+                <a:solidFill>
+                  <a:srgbClr val="075D3B"/>
+                </a:solidFill>
+                <a:latin typeface="Arial"/>
+                <a:ea typeface="Arial"/>
+                <a:cs typeface="Arial"/>
+              </a:defRPr>
+            </a:pPr>
+            <a:r>
+              <a:rPr sz="2250" b="1">
+                <a:solidFill>
+                  <a:srgbClr val="075D3B"/>
+                </a:solidFill>
+                <a:latin typeface="Arial"/>
+                <a:ea typeface="Arial"/>
+                <a:cs typeface="Arial"/>
+              </a:rPr>
+              <a:t>RFID</a:t>
+            </a:r>
+          </a:p>
+        </p:txBody>
+      </p:sp>
+      <p:sp>
+        <p:nvSpPr>
+          <p:cNvPr id="22" name="">
+            <a:extLst xmlns:a="http://schemas.openxmlformats.org/drawingml/2006/main">
+              <a:ext uri="{FF2B5EF4-FFF2-40B4-BE49-F238E27FC236}">
+                <a16:creationId xmlns:a16="http://schemas.microsoft.com/office/drawing/2014/main" id="{6DE0FABF-75B1-4EFD-A0D1-8D68FDFC9B95}"/>
+              </a:ext>
+            </a:extLst>
+          </p:cNvPr>
+          <p:cNvSpPr>
+            <a:spLocks xmlns:a="http://schemas.openxmlformats.org/drawingml/2006/main" noGrp="1"/>
+          </p:cNvSpPr>
+          <p:nvPr/>
+        </p:nvSpPr>
+        <p:spPr>
+          <a:xfrm xmlns:a="http://schemas.openxmlformats.org/drawingml/2006/main">
+            <a:off x="7105650" y="4972050"/>
+            <a:ext cx="3238500" cy="228600"/>
+          </a:xfrm>
+          <a:prstGeom xmlns:a="http://schemas.openxmlformats.org/drawingml/2006/main" prst="rect">
+            <a:avLst/>
+          </a:prstGeom>
+          <a:solidFill xmlns:a="http://schemas.openxmlformats.org/drawingml/2006/main">
+            <a:srgbClr val="000000">
+              <a:alpha val="0"/>
+            </a:srgbClr>
+          </a:solidFill>
+          <a:ln xmlns:a="http://schemas.openxmlformats.org/drawingml/2006/main" w="0">
+            <a:solidFill>
+              <a:srgbClr val="000000">
+                <a:alpha val="0"/>
+              </a:srgbClr>
+            </a:solidFill>
+            <a:prstDash val="solid"/>
+          </a:ln>
+        </p:spPr>
+        <p:txBody>
+          <a:bodyPr xmlns:a="http://schemas.openxmlformats.org/drawingml/2006/main" lIns="0" tIns="0" rIns="0" bIns="0" anchor="t"/>
+          <a:lstStyle xmlns:a="http://schemas.openxmlformats.org/drawingml/2006/main"/>
+          <a:p xmlns:a="http://schemas.openxmlformats.org/drawingml/2006/main">
+            <a:pPr algn="l">
+              <a:defRPr sz="1425" b="0">
+                <a:solidFill>
+                  <a:srgbClr val="51606F"/>
+                </a:solidFill>
+                <a:latin typeface="Arial"/>
+                <a:ea typeface="Arial"/>
+                <a:cs typeface="Arial"/>
+              </a:defRPr>
+            </a:pPr>
+            <a:r>
+              <a:rPr sz="1425" b="0">
+                <a:solidFill>
+                  <a:srgbClr val="51606F"/>
+                </a:solidFill>
+                <a:latin typeface="Arial"/>
+                <a:ea typeface="Arial"/>
+                <a:cs typeface="Arial"/>
+              </a:rPr>
+              <a:t>captura controlada</a:t>
             </a:r>
           </a:p>
         </p:txBody>
@@ -17987,7 +19878,7 @@
     </p:spTree>
     <p:extLst>
       <p:ext uri="{BB962C8B-B14F-4D97-AF65-F5344CB8AC3E}">
-        <p14:creationId xmlns:p14="http://schemas.microsoft.com/office/powerpoint/2010/main" val="1034594912"/>
+        <p14:creationId xmlns:p14="http://schemas.microsoft.com/office/powerpoint/2010/main" val="81229374"/>
       </p:ext>
     </p:extLst>
   </p:cSld>
@@ -18011,7 +19902,7 @@
           <p:cNvPr id="1" name="">
             <a:extLst xmlns:a="http://schemas.openxmlformats.org/drawingml/2006/main">
               <a:ext uri="{FF2B5EF4-FFF2-40B4-BE49-F238E27FC236}">
-                <a16:creationId xmlns:a16="http://schemas.microsoft.com/office/drawing/2014/main" id="{CB05D422-B61B-44C9-BBEF-348EFC160B09}"/>
+                <a16:creationId xmlns:a16="http://schemas.microsoft.com/office/drawing/2014/main" id="{FDD6A6FE-D956-4508-9711-4CF3C2DC518E}"/>
               </a:ext>
             </a:extLst>
           </p:cNvPr>
@@ -18046,7 +19937,7 @@
           <p:cNvPr id="2" name="">
             <a:extLst xmlns:a="http://schemas.openxmlformats.org/drawingml/2006/main">
               <a:ext uri="{FF2B5EF4-FFF2-40B4-BE49-F238E27FC236}">
-                <a16:creationId xmlns:a16="http://schemas.microsoft.com/office/drawing/2014/main" id="{7C4BAA6D-36BC-4835-BCD0-02EEAE367DF0}"/>
+                <a16:creationId xmlns:a16="http://schemas.microsoft.com/office/drawing/2014/main" id="{8534ABA8-BA5B-4A08-B04A-5F2DD2C5DD31}"/>
               </a:ext>
             </a:extLst>
           </p:cNvPr>
@@ -18081,7 +19972,7 @@
           <p:cNvPr id="3" name="">
             <a:extLst xmlns:a="http://schemas.openxmlformats.org/drawingml/2006/main">
               <a:ext uri="{FF2B5EF4-FFF2-40B4-BE49-F238E27FC236}">
-                <a16:creationId xmlns:a16="http://schemas.microsoft.com/office/drawing/2014/main" id="{0554D2AD-27A2-4ECB-B822-2722F6107E9E}"/>
+                <a16:creationId xmlns:a16="http://schemas.microsoft.com/office/drawing/2014/main" id="{4B130ABD-8187-4196-9C6E-EF72F53ACBAB}"/>
               </a:ext>
             </a:extLst>
           </p:cNvPr>
@@ -18145,7 +20036,7 @@
           <p:cNvPr id="4" name="">
             <a:extLst xmlns:a="http://schemas.openxmlformats.org/drawingml/2006/main">
               <a:ext uri="{FF2B5EF4-FFF2-40B4-BE49-F238E27FC236}">
-                <a16:creationId xmlns:a16="http://schemas.microsoft.com/office/drawing/2014/main" id="{2FF304C8-227F-4750-91E7-ACF0FE75BD83}"/>
+                <a16:creationId xmlns:a16="http://schemas.microsoft.com/office/drawing/2014/main" id="{659C7F12-052E-4AC4-92AD-85408EC6A37A}"/>
               </a:ext>
             </a:extLst>
           </p:cNvPr>
@@ -18199,7 +20090,7 @@
                 <a:ea typeface="Arial"/>
                 <a:cs typeface="Arial"/>
               </a:rPr>
-              <a:t>Modelagem funcional</a:t>
+              <a:t>Arquitetura do protótipo</a:t>
             </a:r>
           </a:p>
         </p:txBody>
@@ -18209,7 +20100,7 @@
           <p:cNvPr id="5" name="">
             <a:extLst xmlns:a="http://schemas.openxmlformats.org/drawingml/2006/main">
               <a:ext uri="{FF2B5EF4-FFF2-40B4-BE49-F238E27FC236}">
-                <a16:creationId xmlns:a16="http://schemas.microsoft.com/office/drawing/2014/main" id="{D56AC74C-6173-44A8-9E4D-5AC0FDCAEE4C}"/>
+                <a16:creationId xmlns:a16="http://schemas.microsoft.com/office/drawing/2014/main" id="{73872A85-80D9-4FED-BBDA-A6BD38B34B20}"/>
               </a:ext>
             </a:extLst>
           </p:cNvPr>
@@ -18263,7 +20154,7 @@
                 <a:ea typeface="Arial"/>
                 <a:cs typeface="Arial"/>
               </a:rPr>
-              <a:t>A modelagem liga os requisitos do trabalho às ações que o protótipo precisa executar.</a:t>
+              <a:t>A arquitetura separa interface, API, regras de negócio, persistência e fontes de eventos RFID.</a:t>
             </a:r>
           </a:p>
         </p:txBody>
@@ -18273,7 +20164,7 @@
           <p:cNvPr id="6" name="">
             <a:extLst xmlns:a="http://schemas.openxmlformats.org/drawingml/2006/main">
               <a:ext uri="{FF2B5EF4-FFF2-40B4-BE49-F238E27FC236}">
-                <a16:creationId xmlns:a16="http://schemas.microsoft.com/office/drawing/2014/main" id="{8F7E630C-35BC-493E-A2B2-04D69474A5F6}"/>
+                <a16:creationId xmlns:a16="http://schemas.microsoft.com/office/drawing/2014/main" id="{5D165A3D-55FB-43FA-8F33-D098BA29516F}"/>
               </a:ext>
             </a:extLst>
           </p:cNvPr>
@@ -18310,13 +20201,13 @@
           <p:nvPr/>
         </p:nvPicPr>
         <p:blipFill>
-          <a:blip xmlns:r="http://schemas.openxmlformats.org/officeDocument/2006/relationships" xmlns:a="http://schemas.openxmlformats.org/drawingml/2006/main" r:embed="R346292aca12848d2"/>
+          <a:blip xmlns:r="http://schemas.openxmlformats.org/officeDocument/2006/relationships" xmlns:a="http://schemas.openxmlformats.org/drawingml/2006/main" r:embed="Rff19d7f6e0264e40"/>
           <a:stretch xmlns:a="http://schemas.openxmlformats.org/drawingml/2006/main"/>
         </p:blipFill>
         <p:spPr>
           <a:xfrm xmlns:a="http://schemas.openxmlformats.org/drawingml/2006/main">
-            <a:off x="3588091" y="2209800"/>
-            <a:ext cx="5034868" cy="3371850"/>
+            <a:off x="3720757" y="2209800"/>
+            <a:ext cx="4769536" cy="3371850"/>
           </a:xfrm>
           <a:prstGeom xmlns:a="http://schemas.openxmlformats.org/drawingml/2006/main" prst="rect">
             <a:avLst/>
@@ -18328,7 +20219,7 @@
           <p:cNvPr id="8" name="">
             <a:extLst xmlns:a="http://schemas.openxmlformats.org/drawingml/2006/main">
               <a:ext uri="{FF2B5EF4-FFF2-40B4-BE49-F238E27FC236}">
-                <a16:creationId xmlns:a16="http://schemas.microsoft.com/office/drawing/2014/main" id="{2A5D4F38-572B-497A-B662-9229E2958DD6}"/>
+                <a16:creationId xmlns:a16="http://schemas.microsoft.com/office/drawing/2014/main" id="{B72FA491-6D8D-4A98-B198-2C17AF750188}"/>
               </a:ext>
             </a:extLst>
           </p:cNvPr>
@@ -18382,7 +20273,7 @@
                 <a:ea typeface="Arial"/>
                 <a:cs typeface="Arial"/>
               </a:rPr>
-              <a:t>Principais ações do usuário e dos componentes envolvidos em cadastros, auditoria e leituras RFID.</a:t>
+              <a:t>Visão geral da integração entre interface web, backend, banco local e entrada de eventos RFID.</a:t>
             </a:r>
           </a:p>
         </p:txBody>
@@ -18390,7 +20281,7 @@
     </p:spTree>
     <p:extLst>
       <p:ext uri="{BB962C8B-B14F-4D97-AF65-F5344CB8AC3E}">
-        <p14:creationId xmlns:p14="http://schemas.microsoft.com/office/powerpoint/2010/main" val="1823852745"/>
+        <p14:creationId xmlns:p14="http://schemas.microsoft.com/office/powerpoint/2010/main" val="1652323043"/>
       </p:ext>
     </p:extLst>
   </p:cSld>
